--- a/01-lecture-git-basic/slides/01-c-compphys.pptx
+++ b/01-lecture-git-basic/slides/01-c-compphys.pptx
@@ -5,14 +5,26 @@
     <p:sldMasterId id="2147483663" r:id="rId1"/>
   </p:sldMasterIdLst>
   <p:notesMasterIdLst>
-    <p:notesMasterId r:id="rId7"/>
+    <p:notesMasterId r:id="rId19"/>
   </p:notesMasterIdLst>
   <p:sldIdLst>
     <p:sldId id="256" r:id="rId2"/>
     <p:sldId id="302" r:id="rId3"/>
     <p:sldId id="304" r:id="rId4"/>
-    <p:sldId id="303" r:id="rId5"/>
-    <p:sldId id="294" r:id="rId6"/>
+    <p:sldId id="305" r:id="rId5"/>
+    <p:sldId id="306" r:id="rId6"/>
+    <p:sldId id="308" r:id="rId7"/>
+    <p:sldId id="307" r:id="rId8"/>
+    <p:sldId id="309" r:id="rId9"/>
+    <p:sldId id="310" r:id="rId10"/>
+    <p:sldId id="311" r:id="rId11"/>
+    <p:sldId id="303" r:id="rId12"/>
+    <p:sldId id="312" r:id="rId13"/>
+    <p:sldId id="313" r:id="rId14"/>
+    <p:sldId id="314" r:id="rId15"/>
+    <p:sldId id="315" r:id="rId16"/>
+    <p:sldId id="316" r:id="rId17"/>
+    <p:sldId id="294" r:id="rId18"/>
   </p:sldIdLst>
   <p:sldSz cx="9144000" cy="6858000" type="screen4x3"/>
   <p:notesSz cx="6858000" cy="9144000"/>
@@ -211,7 +223,7 @@
           </a:lstStyle>
           <a:p>
             <a:fld id="{6B8D1B20-A248-FB47-8240-73C0C5F47C9D}" type="datetimeFigureOut">
-              <a:t>2026/3/1</a:t>
+              <a:t>2026/3/2</a:t>
             </a:fld>
             <a:endParaRPr kumimoji="1" lang="ja-JP" altLang="en-US"/>
           </a:p>
@@ -734,10 +746,9 @@
           <a:p>
             <a:pPr algn="ctr"/>
             <a:r>
-              <a:rPr kumimoji="1" lang="en-US" altLang="ja-JP" sz="1400"/>
-              <a:t>26</a:t>
-            </a:r>
-            <a:endParaRPr kumimoji="1" lang="en-US" altLang="ja-JP" sz="1400" dirty="0"/>
+              <a:rPr kumimoji="1" lang="en-US" altLang="ja-JP" sz="1400" dirty="0"/>
+              <a:t>17</a:t>
+            </a:r>
           </a:p>
         </p:txBody>
       </p:sp>
@@ -1173,7 +1184,7 @@
               <a:t>計算物理における</a:t>
             </a:r>
             <a:r>
-              <a:rPr lang="en-US" altLang="ja-JP" sz="4000">
+              <a:rPr lang="en-US" altLang="ja-JP" sz="4000" dirty="0">
                 <a:solidFill>
                   <a:srgbClr val="011893"/>
                 </a:solidFill>
@@ -1351,6 +1362,5022 @@
     <p:extLst>
       <p:ext uri="{BB962C8B-B14F-4D97-AF65-F5344CB8AC3E}">
         <p14:creationId xmlns:p14="http://schemas.microsoft.com/office/powerpoint/2010/main" val="4079533921"/>
+      </p:ext>
+    </p:extLst>
+  </p:cSld>
+  <p:clrMapOvr>
+    <a:masterClrMapping/>
+  </p:clrMapOvr>
+</p:sld>
+</file>
+
+<file path=ppt/slides/slide10.xml><?xml version="1.0" encoding="utf-8"?>
+<p:sld xmlns:a="http://schemas.openxmlformats.org/drawingml/2006/main" xmlns:r="http://schemas.openxmlformats.org/officeDocument/2006/relationships" xmlns:p="http://schemas.openxmlformats.org/presentationml/2006/main">
+  <p:cSld>
+    <p:spTree>
+      <p:nvGrpSpPr>
+        <p:cNvPr id="1" name=""/>
+        <p:cNvGrpSpPr/>
+        <p:nvPr/>
+      </p:nvGrpSpPr>
+      <p:grpSpPr>
+        <a:xfrm>
+          <a:off x="0" y="0"/>
+          <a:ext cx="0" cy="0"/>
+          <a:chOff x="0" y="0"/>
+          <a:chExt cx="0" cy="0"/>
+        </a:xfrm>
+      </p:grpSpPr>
+      <p:sp>
+        <p:nvSpPr>
+          <p:cNvPr id="2" name="テキスト プレースホルダー 1">
+            <a:extLst>
+              <a:ext uri="{FF2B5EF4-FFF2-40B4-BE49-F238E27FC236}">
+                <a16:creationId xmlns:a16="http://schemas.microsoft.com/office/drawing/2014/main" id="{BEEE8066-CE15-A286-5ABC-1C06CFC7F41A}"/>
+              </a:ext>
+            </a:extLst>
+          </p:cNvPr>
+          <p:cNvSpPr>
+            <a:spLocks noGrp="1"/>
+          </p:cNvSpPr>
+          <p:nvPr>
+            <p:ph type="body" sz="quarter" idx="10"/>
+          </p:nvPr>
+        </p:nvSpPr>
+        <p:spPr/>
+        <p:txBody>
+          <a:bodyPr/>
+          <a:lstStyle/>
+          <a:p>
+            <a:r>
+              <a:rPr kumimoji="1" lang="ja-JP" altLang="en-US"/>
+              <a:t>論文執筆</a:t>
+            </a:r>
+          </a:p>
+        </p:txBody>
+      </p:sp>
+      <p:pic>
+        <p:nvPicPr>
+          <p:cNvPr id="3" name="図 2">
+            <a:extLst>
+              <a:ext uri="{FF2B5EF4-FFF2-40B4-BE49-F238E27FC236}">
+                <a16:creationId xmlns:a16="http://schemas.microsoft.com/office/drawing/2014/main" id="{0F4BF15F-2D27-22A9-C543-FF5FADE00534}"/>
+              </a:ext>
+            </a:extLst>
+          </p:cNvPr>
+          <p:cNvPicPr>
+            <a:picLocks noChangeAspect="1"/>
+          </p:cNvPicPr>
+          <p:nvPr/>
+        </p:nvPicPr>
+        <p:blipFill>
+          <a:blip r:embed="rId2">
+            <a:extLst>
+              <a:ext uri="{28A0092B-C50C-407E-A947-70E740481C1C}">
+                <a14:useLocalDpi xmlns:a14="http://schemas.microsoft.com/office/drawing/2010/main" val="0"/>
+              </a:ext>
+            </a:extLst>
+          </a:blip>
+          <a:stretch>
+            <a:fillRect/>
+          </a:stretch>
+        </p:blipFill>
+        <p:spPr>
+          <a:xfrm>
+            <a:off x="3977968" y="2130924"/>
+            <a:ext cx="738048" cy="738048"/>
+          </a:xfrm>
+          <a:prstGeom prst="rect">
+            <a:avLst/>
+          </a:prstGeom>
+        </p:spPr>
+      </p:pic>
+      <p:pic>
+        <p:nvPicPr>
+          <p:cNvPr id="4" name="図 3">
+            <a:extLst>
+              <a:ext uri="{FF2B5EF4-FFF2-40B4-BE49-F238E27FC236}">
+                <a16:creationId xmlns:a16="http://schemas.microsoft.com/office/drawing/2014/main" id="{C917A378-BA96-0CC9-EA65-84856BB8F782}"/>
+              </a:ext>
+            </a:extLst>
+          </p:cNvPr>
+          <p:cNvPicPr>
+            <a:picLocks noChangeAspect="1"/>
+          </p:cNvPicPr>
+          <p:nvPr/>
+        </p:nvPicPr>
+        <p:blipFill>
+          <a:blip r:embed="rId3" cstate="print">
+            <a:extLst>
+              <a:ext uri="{28A0092B-C50C-407E-A947-70E740481C1C}">
+                <a14:useLocalDpi xmlns:a14="http://schemas.microsoft.com/office/drawing/2010/main" val="0"/>
+              </a:ext>
+            </a:extLst>
+          </a:blip>
+          <a:stretch>
+            <a:fillRect/>
+          </a:stretch>
+        </p:blipFill>
+        <p:spPr>
+          <a:xfrm>
+            <a:off x="3617928" y="1554860"/>
+            <a:ext cx="1368152" cy="560942"/>
+          </a:xfrm>
+          <a:prstGeom prst="rect">
+            <a:avLst/>
+          </a:prstGeom>
+        </p:spPr>
+      </p:pic>
+      <p:pic>
+        <p:nvPicPr>
+          <p:cNvPr id="5" name="Picture 2" descr="紙に何かを書く人のイラスト（男性）">
+            <a:extLst>
+              <a:ext uri="{FF2B5EF4-FFF2-40B4-BE49-F238E27FC236}">
+                <a16:creationId xmlns:a16="http://schemas.microsoft.com/office/drawing/2014/main" id="{8D5D1818-1C1A-F3E8-314A-E7C498AB8532}"/>
+              </a:ext>
+            </a:extLst>
+          </p:cNvPr>
+          <p:cNvPicPr>
+            <a:picLocks noChangeAspect="1" noChangeArrowheads="1"/>
+          </p:cNvPicPr>
+          <p:nvPr/>
+        </p:nvPicPr>
+        <p:blipFill>
+          <a:blip r:embed="rId4">
+            <a:extLst>
+              <a:ext uri="{28A0092B-C50C-407E-A947-70E740481C1C}">
+                <a14:useLocalDpi xmlns:a14="http://schemas.microsoft.com/office/drawing/2010/main" val="0"/>
+              </a:ext>
+            </a:extLst>
+          </a:blip>
+          <a:srcRect/>
+          <a:stretch>
+            <a:fillRect/>
+          </a:stretch>
+        </p:blipFill>
+        <p:spPr bwMode="auto">
+          <a:xfrm>
+            <a:off x="1819728" y="3789040"/>
+            <a:ext cx="787617" cy="1040904"/>
+          </a:xfrm>
+          <a:prstGeom prst="rect">
+            <a:avLst/>
+          </a:prstGeom>
+          <a:noFill/>
+          <a:extLst>
+            <a:ext uri="{909E8E84-426E-40DD-AFC4-6F175D3DCCD1}">
+              <a14:hiddenFill xmlns:a14="http://schemas.microsoft.com/office/drawing/2010/main">
+                <a:solidFill>
+                  <a:srgbClr val="FFFFFF"/>
+                </a:solidFill>
+              </a14:hiddenFill>
+            </a:ext>
+          </a:extLst>
+        </p:spPr>
+      </p:pic>
+      <p:pic>
+        <p:nvPicPr>
+          <p:cNvPr id="4098" name="Picture 2" descr="教壇でタブレットを使う先生のイラスト（男性）">
+            <a:extLst>
+              <a:ext uri="{FF2B5EF4-FFF2-40B4-BE49-F238E27FC236}">
+                <a16:creationId xmlns:a16="http://schemas.microsoft.com/office/drawing/2014/main" id="{8FAAAB3C-4862-1A66-DF04-228346D37070}"/>
+              </a:ext>
+            </a:extLst>
+          </p:cNvPr>
+          <p:cNvPicPr>
+            <a:picLocks noChangeAspect="1" noChangeArrowheads="1"/>
+          </p:cNvPicPr>
+          <p:nvPr/>
+        </p:nvPicPr>
+        <p:blipFill>
+          <a:blip r:embed="rId5">
+            <a:extLst>
+              <a:ext uri="{28A0092B-C50C-407E-A947-70E740481C1C}">
+                <a14:useLocalDpi xmlns:a14="http://schemas.microsoft.com/office/drawing/2010/main" val="0"/>
+              </a:ext>
+            </a:extLst>
+          </a:blip>
+          <a:srcRect/>
+          <a:stretch>
+            <a:fillRect/>
+          </a:stretch>
+        </p:blipFill>
+        <p:spPr bwMode="auto">
+          <a:xfrm>
+            <a:off x="6154060" y="3320988"/>
+            <a:ext cx="1089480" cy="1561356"/>
+          </a:xfrm>
+          <a:prstGeom prst="rect">
+            <a:avLst/>
+          </a:prstGeom>
+          <a:noFill/>
+          <a:extLst>
+            <a:ext uri="{909E8E84-426E-40DD-AFC4-6F175D3DCCD1}">
+              <a14:hiddenFill xmlns:a14="http://schemas.microsoft.com/office/drawing/2010/main">
+                <a:solidFill>
+                  <a:srgbClr val="FFFFFF"/>
+                </a:solidFill>
+              </a14:hiddenFill>
+            </a:ext>
+          </a:extLst>
+        </p:spPr>
+      </p:pic>
+      <p:cxnSp>
+        <p:nvCxnSpPr>
+          <p:cNvPr id="7" name="直線矢印コネクタ 6">
+            <a:extLst>
+              <a:ext uri="{FF2B5EF4-FFF2-40B4-BE49-F238E27FC236}">
+                <a16:creationId xmlns:a16="http://schemas.microsoft.com/office/drawing/2014/main" id="{D5109316-0C1E-F37B-9850-9B9E85ED0B7B}"/>
+              </a:ext>
+            </a:extLst>
+          </p:cNvPr>
+          <p:cNvCxnSpPr/>
+          <p:nvPr/>
+        </p:nvCxnSpPr>
+        <p:spPr>
+          <a:xfrm flipV="1">
+            <a:off x="2555776" y="2708920"/>
+            <a:ext cx="1422192" cy="1224136"/>
+          </a:xfrm>
+          <a:prstGeom prst="straightConnector1">
+            <a:avLst/>
+          </a:prstGeom>
+          <a:ln>
+            <a:solidFill>
+              <a:schemeClr val="tx1"/>
+            </a:solidFill>
+            <a:headEnd type="none" w="med" len="med"/>
+            <a:tailEnd type="triangle"/>
+          </a:ln>
+        </p:spPr>
+        <p:style>
+          <a:lnRef idx="1">
+            <a:schemeClr val="accent1"/>
+          </a:lnRef>
+          <a:fillRef idx="0">
+            <a:schemeClr val="accent1"/>
+          </a:fillRef>
+          <a:effectRef idx="0">
+            <a:schemeClr val="accent1"/>
+          </a:effectRef>
+          <a:fontRef idx="minor">
+            <a:schemeClr val="tx1"/>
+          </a:fontRef>
+        </p:style>
+      </p:cxnSp>
+      <p:cxnSp>
+        <p:nvCxnSpPr>
+          <p:cNvPr id="9" name="直線矢印コネクタ 8">
+            <a:extLst>
+              <a:ext uri="{FF2B5EF4-FFF2-40B4-BE49-F238E27FC236}">
+                <a16:creationId xmlns:a16="http://schemas.microsoft.com/office/drawing/2014/main" id="{071F55B2-146C-32BA-64FA-D59D93A77D38}"/>
+              </a:ext>
+            </a:extLst>
+          </p:cNvPr>
+          <p:cNvCxnSpPr/>
+          <p:nvPr/>
+        </p:nvCxnSpPr>
+        <p:spPr>
+          <a:xfrm>
+            <a:off x="4986080" y="2708920"/>
+            <a:ext cx="1242104" cy="1080120"/>
+          </a:xfrm>
+          <a:prstGeom prst="straightConnector1">
+            <a:avLst/>
+          </a:prstGeom>
+          <a:ln>
+            <a:solidFill>
+              <a:schemeClr val="tx1"/>
+            </a:solidFill>
+            <a:headEnd type="none" w="med" len="med"/>
+            <a:tailEnd type="triangle"/>
+          </a:ln>
+        </p:spPr>
+        <p:style>
+          <a:lnRef idx="1">
+            <a:schemeClr val="accent1"/>
+          </a:lnRef>
+          <a:fillRef idx="0">
+            <a:schemeClr val="accent1"/>
+          </a:fillRef>
+          <a:effectRef idx="0">
+            <a:schemeClr val="accent1"/>
+          </a:effectRef>
+          <a:fontRef idx="minor">
+            <a:schemeClr val="tx1"/>
+          </a:fontRef>
+        </p:style>
+      </p:cxnSp>
+      <p:sp>
+        <p:nvSpPr>
+          <p:cNvPr id="10" name="テキスト ボックス 9">
+            <a:extLst>
+              <a:ext uri="{FF2B5EF4-FFF2-40B4-BE49-F238E27FC236}">
+                <a16:creationId xmlns:a16="http://schemas.microsoft.com/office/drawing/2014/main" id="{CA408A78-D8EF-6F17-8CCB-97465D4E4AA2}"/>
+              </a:ext>
+            </a:extLst>
+          </p:cNvPr>
+          <p:cNvSpPr txBox="1"/>
+          <p:nvPr/>
+        </p:nvSpPr>
+        <p:spPr>
+          <a:xfrm>
+            <a:off x="307072" y="1105263"/>
+            <a:ext cx="3057247" cy="584775"/>
+          </a:xfrm>
+          <a:prstGeom prst="rect">
+            <a:avLst/>
+          </a:prstGeom>
+          <a:noFill/>
+        </p:spPr>
+        <p:txBody>
+          <a:bodyPr wrap="none" rtlCol="0">
+            <a:spAutoFit/>
+          </a:bodyPr>
+          <a:lstStyle/>
+          <a:p>
+            <a:r>
+              <a:rPr lang="ja-JP" altLang="en-US" sz="3200">
+                <a:solidFill>
+                  <a:srgbClr val="011893"/>
+                </a:solidFill>
+              </a:rPr>
+              <a:t>共著者との共有</a:t>
+            </a:r>
+            <a:endParaRPr lang="en-US" sz="3200" dirty="0">
+              <a:solidFill>
+                <a:srgbClr val="011893"/>
+              </a:solidFill>
+            </a:endParaRPr>
+          </a:p>
+        </p:txBody>
+      </p:sp>
+      <p:sp>
+        <p:nvSpPr>
+          <p:cNvPr id="11" name="テキスト ボックス 10">
+            <a:extLst>
+              <a:ext uri="{FF2B5EF4-FFF2-40B4-BE49-F238E27FC236}">
+                <a16:creationId xmlns:a16="http://schemas.microsoft.com/office/drawing/2014/main" id="{997841C6-8CD8-001D-5B90-64FB5AF5D3B8}"/>
+              </a:ext>
+            </a:extLst>
+          </p:cNvPr>
+          <p:cNvSpPr txBox="1"/>
+          <p:nvPr/>
+        </p:nvSpPr>
+        <p:spPr>
+          <a:xfrm>
+            <a:off x="595566" y="5517038"/>
+            <a:ext cx="6647974" cy="1200329"/>
+          </a:xfrm>
+          <a:prstGeom prst="rect">
+            <a:avLst/>
+          </a:prstGeom>
+          <a:noFill/>
+        </p:spPr>
+        <p:txBody>
+          <a:bodyPr wrap="none" rtlCol="0">
+            <a:spAutoFit/>
+          </a:bodyPr>
+          <a:lstStyle/>
+          <a:p>
+            <a:r>
+              <a:rPr kumimoji="1" lang="ja-JP" altLang="en-US" sz="2400"/>
+              <a:t>「常に最新版がリモートにある」状態をキープ</a:t>
+            </a:r>
+            <a:endParaRPr kumimoji="1" lang="en-US" altLang="ja-JP" sz="2400" dirty="0"/>
+          </a:p>
+          <a:p>
+            <a:r>
+              <a:rPr kumimoji="1" lang="ja-JP" altLang="en-US" sz="2400"/>
+              <a:t>必要に応じてリモートを通じて共著者と共有</a:t>
+            </a:r>
+            <a:endParaRPr kumimoji="1" lang="en-US" altLang="ja-JP" sz="2400" dirty="0"/>
+          </a:p>
+          <a:p>
+            <a:r>
+              <a:rPr lang="en-US" altLang="ja-JP" sz="2400" dirty="0">
+                <a:solidFill>
+                  <a:srgbClr val="FF0000"/>
+                </a:solidFill>
+              </a:rPr>
+              <a:t>USB</a:t>
+            </a:r>
+            <a:r>
+              <a:rPr lang="ja-JP" altLang="en-US" sz="2400">
+                <a:solidFill>
+                  <a:srgbClr val="FF0000"/>
+                </a:solidFill>
+              </a:rPr>
+              <a:t>受け渡しやメール添付は混乱の元</a:t>
+            </a:r>
+            <a:endParaRPr kumimoji="1" lang="ja-JP" altLang="en-US" sz="2400">
+              <a:solidFill>
+                <a:srgbClr val="FF0000"/>
+              </a:solidFill>
+            </a:endParaRPr>
+          </a:p>
+        </p:txBody>
+      </p:sp>
+      <p:sp>
+        <p:nvSpPr>
+          <p:cNvPr id="12" name="テキスト ボックス 11">
+            <a:extLst>
+              <a:ext uri="{FF2B5EF4-FFF2-40B4-BE49-F238E27FC236}">
+                <a16:creationId xmlns:a16="http://schemas.microsoft.com/office/drawing/2014/main" id="{1D2C0D79-1779-8709-E91E-7A402DFF743D}"/>
+              </a:ext>
+            </a:extLst>
+          </p:cNvPr>
+          <p:cNvSpPr txBox="1"/>
+          <p:nvPr/>
+        </p:nvSpPr>
+        <p:spPr>
+          <a:xfrm>
+            <a:off x="1659538" y="4829944"/>
+            <a:ext cx="1107996" cy="369332"/>
+          </a:xfrm>
+          <a:prstGeom prst="rect">
+            <a:avLst/>
+          </a:prstGeom>
+          <a:noFill/>
+        </p:spPr>
+        <p:txBody>
+          <a:bodyPr wrap="none" rtlCol="0">
+            <a:spAutoFit/>
+          </a:bodyPr>
+          <a:lstStyle/>
+          <a:p>
+            <a:r>
+              <a:rPr kumimoji="1" lang="ja-JP" altLang="en-US"/>
+              <a:t>筆頭著者</a:t>
+            </a:r>
+          </a:p>
+        </p:txBody>
+      </p:sp>
+      <p:sp>
+        <p:nvSpPr>
+          <p:cNvPr id="13" name="テキスト ボックス 12">
+            <a:extLst>
+              <a:ext uri="{FF2B5EF4-FFF2-40B4-BE49-F238E27FC236}">
+                <a16:creationId xmlns:a16="http://schemas.microsoft.com/office/drawing/2014/main" id="{39503D86-1EA3-D622-F21D-578375D0B7DD}"/>
+              </a:ext>
+            </a:extLst>
+          </p:cNvPr>
+          <p:cNvSpPr txBox="1"/>
+          <p:nvPr/>
+        </p:nvSpPr>
+        <p:spPr>
+          <a:xfrm>
+            <a:off x="6228184" y="4850391"/>
+            <a:ext cx="877163" cy="369332"/>
+          </a:xfrm>
+          <a:prstGeom prst="rect">
+            <a:avLst/>
+          </a:prstGeom>
+          <a:noFill/>
+        </p:spPr>
+        <p:txBody>
+          <a:bodyPr wrap="none" rtlCol="0">
+            <a:spAutoFit/>
+          </a:bodyPr>
+          <a:lstStyle/>
+          <a:p>
+            <a:r>
+              <a:rPr kumimoji="1" lang="ja-JP" altLang="en-US"/>
+              <a:t>共著者</a:t>
+            </a:r>
+          </a:p>
+        </p:txBody>
+      </p:sp>
+    </p:spTree>
+    <p:extLst>
+      <p:ext uri="{BB962C8B-B14F-4D97-AF65-F5344CB8AC3E}">
+        <p14:creationId xmlns:p14="http://schemas.microsoft.com/office/powerpoint/2010/main" val="1570105255"/>
+      </p:ext>
+    </p:extLst>
+  </p:cSld>
+  <p:clrMapOvr>
+    <a:masterClrMapping/>
+  </p:clrMapOvr>
+</p:sld>
+</file>
+
+<file path=ppt/slides/slide11.xml><?xml version="1.0" encoding="utf-8"?>
+<p:sld xmlns:a="http://schemas.openxmlformats.org/drawingml/2006/main" xmlns:r="http://schemas.openxmlformats.org/officeDocument/2006/relationships" xmlns:p="http://schemas.openxmlformats.org/presentationml/2006/main">
+  <p:cSld>
+    <p:spTree>
+      <p:nvGrpSpPr>
+        <p:cNvPr id="1" name=""/>
+        <p:cNvGrpSpPr/>
+        <p:nvPr/>
+      </p:nvGrpSpPr>
+      <p:grpSpPr>
+        <a:xfrm>
+          <a:off x="0" y="0"/>
+          <a:ext cx="0" cy="0"/>
+          <a:chOff x="0" y="0"/>
+          <a:chExt cx="0" cy="0"/>
+        </a:xfrm>
+      </p:grpSpPr>
+      <p:sp>
+        <p:nvSpPr>
+          <p:cNvPr id="2" name="テキスト プレースホルダー 1">
+            <a:extLst>
+              <a:ext uri="{FF2B5EF4-FFF2-40B4-BE49-F238E27FC236}">
+                <a16:creationId xmlns:a16="http://schemas.microsoft.com/office/drawing/2014/main" id="{6A141EFB-397F-1633-869B-5D1D59569078}"/>
+              </a:ext>
+            </a:extLst>
+          </p:cNvPr>
+          <p:cNvSpPr>
+            <a:spLocks noGrp="1"/>
+          </p:cNvSpPr>
+          <p:nvPr>
+            <p:ph type="body" sz="quarter" idx="10"/>
+          </p:nvPr>
+        </p:nvSpPr>
+        <p:spPr/>
+        <p:txBody>
+          <a:bodyPr/>
+          <a:lstStyle/>
+          <a:p>
+            <a:r>
+              <a:rPr lang="ja-JP" altLang="en-US"/>
+              <a:t>論文執筆</a:t>
+            </a:r>
+          </a:p>
+        </p:txBody>
+      </p:sp>
+      <p:sp>
+        <p:nvSpPr>
+          <p:cNvPr id="3" name="角丸四角形 5">
+            <a:extLst>
+              <a:ext uri="{FF2B5EF4-FFF2-40B4-BE49-F238E27FC236}">
+                <a16:creationId xmlns:a16="http://schemas.microsoft.com/office/drawing/2014/main" id="{48070490-36A2-BBEE-E2FD-0CAC03CBBECA}"/>
+              </a:ext>
+            </a:extLst>
+          </p:cNvPr>
+          <p:cNvSpPr/>
+          <p:nvPr/>
+        </p:nvSpPr>
+        <p:spPr>
+          <a:xfrm>
+            <a:off x="323528" y="1850341"/>
+            <a:ext cx="3600400" cy="2154724"/>
+          </a:xfrm>
+          <a:prstGeom prst="roundRect">
+            <a:avLst/>
+          </a:prstGeom>
+          <a:noFill/>
+          <a:ln w="28575">
+            <a:solidFill>
+              <a:schemeClr val="tx1"/>
+            </a:solidFill>
+            <a:prstDash val="dash"/>
+          </a:ln>
+        </p:spPr>
+        <p:style>
+          <a:lnRef idx="2">
+            <a:schemeClr val="accent1">
+              <a:shade val="50000"/>
+            </a:schemeClr>
+          </a:lnRef>
+          <a:fillRef idx="1">
+            <a:schemeClr val="accent1"/>
+          </a:fillRef>
+          <a:effectRef idx="0">
+            <a:schemeClr val="accent1"/>
+          </a:effectRef>
+          <a:fontRef idx="minor">
+            <a:schemeClr val="lt1"/>
+          </a:fontRef>
+        </p:style>
+        <p:txBody>
+          <a:bodyPr rtlCol="0" anchor="ctr"/>
+          <a:lstStyle/>
+          <a:p>
+            <a:pPr algn="ctr"/>
+            <a:endParaRPr kumimoji="1" lang="ja-JP" altLang="en-US"/>
+          </a:p>
+        </p:txBody>
+      </p:sp>
+      <p:sp>
+        <p:nvSpPr>
+          <p:cNvPr id="4" name="テキスト ボックス 3">
+            <a:extLst>
+              <a:ext uri="{FF2B5EF4-FFF2-40B4-BE49-F238E27FC236}">
+                <a16:creationId xmlns:a16="http://schemas.microsoft.com/office/drawing/2014/main" id="{C2381C38-79CE-C2C5-98DB-07F80EB89BD2}"/>
+              </a:ext>
+            </a:extLst>
+          </p:cNvPr>
+          <p:cNvSpPr txBox="1"/>
+          <p:nvPr/>
+        </p:nvSpPr>
+        <p:spPr>
+          <a:xfrm>
+            <a:off x="539552" y="1919444"/>
+            <a:ext cx="3262432" cy="1938992"/>
+          </a:xfrm>
+          <a:prstGeom prst="rect">
+            <a:avLst/>
+          </a:prstGeom>
+          <a:noFill/>
+        </p:spPr>
+        <p:txBody>
+          <a:bodyPr wrap="none" rtlCol="0">
+            <a:spAutoFit/>
+          </a:bodyPr>
+          <a:lstStyle/>
+          <a:p>
+            <a:r>
+              <a:rPr kumimoji="1" lang="en-US" altLang="ja-JP" sz="2400" dirty="0"/>
+              <a:t>TeX</a:t>
+            </a:r>
+            <a:r>
+              <a:rPr kumimoji="1" lang="ja-JP" altLang="en-US" sz="2400"/>
+              <a:t>ファイル</a:t>
+            </a:r>
+            <a:endParaRPr kumimoji="1" lang="en-US" altLang="ja-JP" sz="2400" dirty="0"/>
+          </a:p>
+          <a:p>
+            <a:r>
+              <a:rPr kumimoji="1" lang="en-US" altLang="ja-JP" sz="2400" dirty="0"/>
+              <a:t>bib</a:t>
+            </a:r>
+            <a:r>
+              <a:rPr kumimoji="1" lang="ja-JP" altLang="en-US" sz="2400"/>
+              <a:t>ファイル</a:t>
+            </a:r>
+            <a:endParaRPr kumimoji="1" lang="en-US" altLang="ja-JP" sz="2400" dirty="0"/>
+          </a:p>
+          <a:p>
+            <a:r>
+              <a:rPr kumimoji="1" lang="ja-JP" altLang="en-US" sz="2400"/>
+              <a:t>図のファイル</a:t>
+            </a:r>
+            <a:endParaRPr kumimoji="1" lang="en-US" altLang="ja-JP" sz="2400" dirty="0"/>
+          </a:p>
+          <a:p>
+            <a:r>
+              <a:rPr lang="ja-JP" altLang="en-US" sz="2400">
+                <a:solidFill>
+                  <a:srgbClr val="FF0000"/>
+                </a:solidFill>
+              </a:rPr>
+              <a:t>図を作るためのデータ</a:t>
+            </a:r>
+            <a:endParaRPr lang="en-US" altLang="ja-JP" sz="2400" dirty="0">
+              <a:solidFill>
+                <a:srgbClr val="FF0000"/>
+              </a:solidFill>
+            </a:endParaRPr>
+          </a:p>
+          <a:p>
+            <a:r>
+              <a:rPr lang="ja-JP" altLang="en-US" sz="2400"/>
+              <a:t>図を作るスクリプト等</a:t>
+            </a:r>
+            <a:endParaRPr kumimoji="1" lang="ja-JP" altLang="en-US" sz="2400"/>
+          </a:p>
+        </p:txBody>
+      </p:sp>
+      <p:sp>
+        <p:nvSpPr>
+          <p:cNvPr id="5" name="テキスト ボックス 4">
+            <a:extLst>
+              <a:ext uri="{FF2B5EF4-FFF2-40B4-BE49-F238E27FC236}">
+                <a16:creationId xmlns:a16="http://schemas.microsoft.com/office/drawing/2014/main" id="{D2C55377-EF16-2FBD-5389-C6D1E3AF1A58}"/>
+              </a:ext>
+            </a:extLst>
+          </p:cNvPr>
+          <p:cNvSpPr txBox="1"/>
+          <p:nvPr/>
+        </p:nvSpPr>
+        <p:spPr>
+          <a:xfrm>
+            <a:off x="611560" y="1052736"/>
+            <a:ext cx="3262432" cy="461665"/>
+          </a:xfrm>
+          <a:prstGeom prst="rect">
+            <a:avLst/>
+          </a:prstGeom>
+          <a:noFill/>
+        </p:spPr>
+        <p:txBody>
+          <a:bodyPr wrap="none" rtlCol="0">
+            <a:spAutoFit/>
+          </a:bodyPr>
+          <a:lstStyle/>
+          <a:p>
+            <a:r>
+              <a:rPr lang="ja-JP" altLang="en-US" sz="2400"/>
+              <a:t>論文</a:t>
+            </a:r>
+            <a:r>
+              <a:rPr kumimoji="1" lang="ja-JP" altLang="en-US" sz="2400"/>
+              <a:t>執筆用リポジトリ</a:t>
+            </a:r>
+          </a:p>
+        </p:txBody>
+      </p:sp>
+      <p:sp>
+        <p:nvSpPr>
+          <p:cNvPr id="6" name="テキスト ボックス 5">
+            <a:extLst>
+              <a:ext uri="{FF2B5EF4-FFF2-40B4-BE49-F238E27FC236}">
+                <a16:creationId xmlns:a16="http://schemas.microsoft.com/office/drawing/2014/main" id="{BD0B2558-8C83-5ED9-03EF-1FBE47137846}"/>
+              </a:ext>
+            </a:extLst>
+          </p:cNvPr>
+          <p:cNvSpPr txBox="1"/>
+          <p:nvPr/>
+        </p:nvSpPr>
+        <p:spPr>
+          <a:xfrm>
+            <a:off x="4788024" y="1052736"/>
+            <a:ext cx="4185761" cy="461665"/>
+          </a:xfrm>
+          <a:prstGeom prst="rect">
+            <a:avLst/>
+          </a:prstGeom>
+          <a:noFill/>
+        </p:spPr>
+        <p:txBody>
+          <a:bodyPr wrap="none" rtlCol="0">
+            <a:spAutoFit/>
+          </a:bodyPr>
+          <a:lstStyle/>
+          <a:p>
+            <a:r>
+              <a:rPr kumimoji="1" lang="ja-JP" altLang="en-US" sz="2400"/>
+              <a:t>プログラム開発用リポジトリ</a:t>
+            </a:r>
+          </a:p>
+        </p:txBody>
+      </p:sp>
+      <p:sp>
+        <p:nvSpPr>
+          <p:cNvPr id="7" name="角丸四角形 16">
+            <a:extLst>
+              <a:ext uri="{FF2B5EF4-FFF2-40B4-BE49-F238E27FC236}">
+                <a16:creationId xmlns:a16="http://schemas.microsoft.com/office/drawing/2014/main" id="{9E577FC5-1E18-5BF3-75A6-B82F174DE35B}"/>
+              </a:ext>
+            </a:extLst>
+          </p:cNvPr>
+          <p:cNvSpPr/>
+          <p:nvPr/>
+        </p:nvSpPr>
+        <p:spPr>
+          <a:xfrm>
+            <a:off x="5004048" y="1628800"/>
+            <a:ext cx="3600400" cy="1368152"/>
+          </a:xfrm>
+          <a:prstGeom prst="roundRect">
+            <a:avLst/>
+          </a:prstGeom>
+          <a:noFill/>
+          <a:ln w="28575">
+            <a:solidFill>
+              <a:schemeClr val="tx1"/>
+            </a:solidFill>
+            <a:prstDash val="dash"/>
+          </a:ln>
+        </p:spPr>
+        <p:style>
+          <a:lnRef idx="2">
+            <a:schemeClr val="accent1">
+              <a:shade val="50000"/>
+            </a:schemeClr>
+          </a:lnRef>
+          <a:fillRef idx="1">
+            <a:schemeClr val="accent1"/>
+          </a:fillRef>
+          <a:effectRef idx="0">
+            <a:schemeClr val="accent1"/>
+          </a:effectRef>
+          <a:fontRef idx="minor">
+            <a:schemeClr val="lt1"/>
+          </a:fontRef>
+        </p:style>
+        <p:txBody>
+          <a:bodyPr rtlCol="0" anchor="ctr"/>
+          <a:lstStyle/>
+          <a:p>
+            <a:pPr algn="ctr"/>
+            <a:endParaRPr kumimoji="1" lang="ja-JP" altLang="en-US"/>
+          </a:p>
+        </p:txBody>
+      </p:sp>
+      <p:sp>
+        <p:nvSpPr>
+          <p:cNvPr id="8" name="テキスト ボックス 7">
+            <a:extLst>
+              <a:ext uri="{FF2B5EF4-FFF2-40B4-BE49-F238E27FC236}">
+                <a16:creationId xmlns:a16="http://schemas.microsoft.com/office/drawing/2014/main" id="{DD2B51E6-2608-BC88-8608-85AFBC4CCE9E}"/>
+              </a:ext>
+            </a:extLst>
+          </p:cNvPr>
+          <p:cNvSpPr txBox="1"/>
+          <p:nvPr/>
+        </p:nvSpPr>
+        <p:spPr>
+          <a:xfrm>
+            <a:off x="5076056" y="1700808"/>
+            <a:ext cx="2954655" cy="1200329"/>
+          </a:xfrm>
+          <a:prstGeom prst="rect">
+            <a:avLst/>
+          </a:prstGeom>
+          <a:noFill/>
+        </p:spPr>
+        <p:txBody>
+          <a:bodyPr wrap="none" rtlCol="0">
+            <a:spAutoFit/>
+          </a:bodyPr>
+          <a:lstStyle/>
+          <a:p>
+            <a:r>
+              <a:rPr kumimoji="1" lang="ja-JP" altLang="en-US" sz="2400"/>
+              <a:t>プログラムソース</a:t>
+            </a:r>
+            <a:endParaRPr kumimoji="1" lang="en-US" altLang="ja-JP" sz="2400"/>
+          </a:p>
+          <a:p>
+            <a:r>
+              <a:rPr lang="ja-JP" altLang="en-US" sz="2400"/>
+              <a:t>インプットファイル</a:t>
+            </a:r>
+            <a:endParaRPr lang="en-US" altLang="ja-JP" sz="2400"/>
+          </a:p>
+          <a:p>
+            <a:r>
+              <a:rPr lang="ja-JP" altLang="en-US" sz="2400"/>
+              <a:t>ジョブスクリプト等</a:t>
+            </a:r>
+            <a:endParaRPr lang="en-US" altLang="ja-JP" sz="2400"/>
+          </a:p>
+        </p:txBody>
+      </p:sp>
+      <p:sp>
+        <p:nvSpPr>
+          <p:cNvPr id="9" name="テキスト ボックス 8">
+            <a:extLst>
+              <a:ext uri="{FF2B5EF4-FFF2-40B4-BE49-F238E27FC236}">
+                <a16:creationId xmlns:a16="http://schemas.microsoft.com/office/drawing/2014/main" id="{91F1B830-D9E9-2092-1101-ABC95D4FCCF0}"/>
+              </a:ext>
+            </a:extLst>
+          </p:cNvPr>
+          <p:cNvSpPr txBox="1"/>
+          <p:nvPr/>
+        </p:nvSpPr>
+        <p:spPr>
+          <a:xfrm>
+            <a:off x="971600" y="4485019"/>
+            <a:ext cx="6301725" cy="1200329"/>
+          </a:xfrm>
+          <a:prstGeom prst="rect">
+            <a:avLst/>
+          </a:prstGeom>
+          <a:noFill/>
+        </p:spPr>
+        <p:txBody>
+          <a:bodyPr wrap="none" rtlCol="0">
+            <a:spAutoFit/>
+          </a:bodyPr>
+          <a:lstStyle/>
+          <a:p>
+            <a:pPr marL="342900" indent="-342900">
+              <a:buFont typeface="Arial" panose="020B0604020202020204" pitchFamily="34" charset="0"/>
+              <a:buChar char="•"/>
+            </a:pPr>
+            <a:r>
+              <a:rPr lang="ja-JP" altLang="en-US"/>
+              <a:t>論文</a:t>
+            </a:r>
+            <a:r>
+              <a:rPr kumimoji="1" lang="ja-JP" altLang="en-US"/>
+              <a:t>執筆用</a:t>
+            </a:r>
+            <a:r>
+              <a:rPr kumimoji="1" lang="ja-JP" altLang="en-US" dirty="0"/>
+              <a:t>とプログラム開発のリポジトリ</a:t>
+            </a:r>
+            <a:r>
+              <a:rPr lang="ja-JP" altLang="en-US" dirty="0"/>
+              <a:t>を</a:t>
+            </a:r>
+            <a:r>
+              <a:rPr kumimoji="1" lang="ja-JP" altLang="en-US" dirty="0"/>
+              <a:t>分ける</a:t>
+            </a:r>
+            <a:endParaRPr kumimoji="1" lang="en-US" altLang="ja-JP" dirty="0"/>
+          </a:p>
+          <a:p>
+            <a:pPr marL="342900" indent="-342900">
+              <a:buFont typeface="Arial" panose="020B0604020202020204" pitchFamily="34" charset="0"/>
+              <a:buChar char="•"/>
+            </a:pPr>
+            <a:r>
+              <a:rPr lang="ja-JP" altLang="en-US" dirty="0"/>
+              <a:t>出力データはプログラム開発リポジトリにいれない</a:t>
+            </a:r>
+            <a:endParaRPr lang="en-US" altLang="ja-JP" dirty="0"/>
+          </a:p>
+          <a:p>
+            <a:pPr marL="342900" indent="-342900">
+              <a:buFont typeface="Arial" panose="020B0604020202020204" pitchFamily="34" charset="0"/>
+              <a:buChar char="•"/>
+            </a:pPr>
+            <a:r>
+              <a:rPr kumimoji="1" lang="ja-JP" altLang="en-US" dirty="0"/>
+              <a:t>図を作るための</a:t>
+            </a:r>
+            <a:r>
+              <a:rPr kumimoji="1" lang="ja-JP" altLang="en-US"/>
+              <a:t>データは論文執筆用</a:t>
+            </a:r>
+            <a:r>
+              <a:rPr kumimoji="1" lang="ja-JP" altLang="en-US" dirty="0"/>
+              <a:t>リポジトリに入れる</a:t>
+            </a:r>
+            <a:endParaRPr lang="en-US" altLang="ja-JP" dirty="0"/>
+          </a:p>
+          <a:p>
+            <a:pPr marL="342900" indent="-342900">
+              <a:buFont typeface="Arial" panose="020B0604020202020204" pitchFamily="34" charset="0"/>
+              <a:buChar char="•"/>
+            </a:pPr>
+            <a:r>
+              <a:rPr lang="ja-JP" altLang="en-US" dirty="0"/>
+              <a:t>大きなデータ</a:t>
+            </a:r>
+            <a:r>
+              <a:rPr lang="en-US" altLang="ja-JP" dirty="0"/>
+              <a:t>(</a:t>
+            </a:r>
+            <a:r>
+              <a:rPr lang="ja-JP" altLang="en-US" dirty="0"/>
+              <a:t>ダンプなど</a:t>
+            </a:r>
+            <a:r>
+              <a:rPr lang="en-US" altLang="ja-JP" dirty="0"/>
+              <a:t>)</a:t>
+            </a:r>
+            <a:r>
+              <a:rPr lang="ja-JP" altLang="en-US" dirty="0"/>
+              <a:t>はリポジトリに入れない</a:t>
+            </a:r>
+            <a:endParaRPr kumimoji="1" lang="ja-JP" altLang="en-US" dirty="0"/>
+          </a:p>
+        </p:txBody>
+      </p:sp>
+      <p:sp>
+        <p:nvSpPr>
+          <p:cNvPr id="10" name="テキスト ボックス 9">
+            <a:extLst>
+              <a:ext uri="{FF2B5EF4-FFF2-40B4-BE49-F238E27FC236}">
+                <a16:creationId xmlns:a16="http://schemas.microsoft.com/office/drawing/2014/main" id="{626EC76E-665D-B934-1073-A42F0AD06453}"/>
+              </a:ext>
+            </a:extLst>
+          </p:cNvPr>
+          <p:cNvSpPr txBox="1"/>
+          <p:nvPr/>
+        </p:nvSpPr>
+        <p:spPr>
+          <a:xfrm>
+            <a:off x="539552" y="6021288"/>
+            <a:ext cx="7571303" cy="369332"/>
+          </a:xfrm>
+          <a:prstGeom prst="rect">
+            <a:avLst/>
+          </a:prstGeom>
+          <a:noFill/>
+        </p:spPr>
+        <p:txBody>
+          <a:bodyPr wrap="none" rtlCol="0">
+            <a:spAutoFit/>
+          </a:bodyPr>
+          <a:lstStyle/>
+          <a:p>
+            <a:r>
+              <a:rPr kumimoji="1" lang="ja-JP" altLang="en-US"/>
+              <a:t>リポジトリにより管理すべきファイル、除外すべきファイルが異なる</a:t>
+            </a:r>
+          </a:p>
+        </p:txBody>
+      </p:sp>
+      <p:sp>
+        <p:nvSpPr>
+          <p:cNvPr id="12" name="テキスト ボックス 11">
+            <a:extLst>
+              <a:ext uri="{FF2B5EF4-FFF2-40B4-BE49-F238E27FC236}">
+                <a16:creationId xmlns:a16="http://schemas.microsoft.com/office/drawing/2014/main" id="{4663DD45-3DBB-C6CB-1FF5-98C7CFE082AE}"/>
+              </a:ext>
+            </a:extLst>
+          </p:cNvPr>
+          <p:cNvSpPr txBox="1"/>
+          <p:nvPr/>
+        </p:nvSpPr>
+        <p:spPr>
+          <a:xfrm>
+            <a:off x="5067694" y="3006243"/>
+            <a:ext cx="3473107" cy="461665"/>
+          </a:xfrm>
+          <a:prstGeom prst="rect">
+            <a:avLst/>
+          </a:prstGeom>
+          <a:noFill/>
+        </p:spPr>
+        <p:txBody>
+          <a:bodyPr wrap="square">
+            <a:spAutoFit/>
+          </a:bodyPr>
+          <a:lstStyle/>
+          <a:p>
+            <a:r>
+              <a:rPr lang="ja-JP" altLang="en-US" sz="2400">
+                <a:solidFill>
+                  <a:srgbClr val="FF0000"/>
+                </a:solidFill>
+              </a:rPr>
+              <a:t>図を作るためのデータ</a:t>
+            </a:r>
+            <a:endParaRPr lang="en-US" altLang="ja-JP" sz="2400" dirty="0">
+              <a:solidFill>
+                <a:srgbClr val="FF0000"/>
+              </a:solidFill>
+            </a:endParaRPr>
+          </a:p>
+        </p:txBody>
+      </p:sp>
+      <p:cxnSp>
+        <p:nvCxnSpPr>
+          <p:cNvPr id="14" name="直線矢印コネクタ 13">
+            <a:extLst>
+              <a:ext uri="{FF2B5EF4-FFF2-40B4-BE49-F238E27FC236}">
+                <a16:creationId xmlns:a16="http://schemas.microsoft.com/office/drawing/2014/main" id="{CE93A19F-B78B-547D-23DF-B56243B84894}"/>
+              </a:ext>
+            </a:extLst>
+          </p:cNvPr>
+          <p:cNvCxnSpPr>
+            <a:stCxn id="12" idx="1"/>
+          </p:cNvCxnSpPr>
+          <p:nvPr/>
+        </p:nvCxnSpPr>
+        <p:spPr>
+          <a:xfrm flipH="1" flipV="1">
+            <a:off x="3707904" y="3237075"/>
+            <a:ext cx="1359790" cy="1"/>
+          </a:xfrm>
+          <a:prstGeom prst="straightConnector1">
+            <a:avLst/>
+          </a:prstGeom>
+          <a:ln>
+            <a:solidFill>
+              <a:schemeClr val="tx1"/>
+            </a:solidFill>
+            <a:headEnd type="none" w="med" len="med"/>
+            <a:tailEnd type="triangle"/>
+          </a:ln>
+        </p:spPr>
+        <p:style>
+          <a:lnRef idx="1">
+            <a:schemeClr val="accent1"/>
+          </a:lnRef>
+          <a:fillRef idx="0">
+            <a:schemeClr val="accent1"/>
+          </a:fillRef>
+          <a:effectRef idx="0">
+            <a:schemeClr val="accent1"/>
+          </a:effectRef>
+          <a:fontRef idx="minor">
+            <a:schemeClr val="tx1"/>
+          </a:fontRef>
+        </p:style>
+      </p:cxnSp>
+    </p:spTree>
+    <p:extLst>
+      <p:ext uri="{BB962C8B-B14F-4D97-AF65-F5344CB8AC3E}">
+        <p14:creationId xmlns:p14="http://schemas.microsoft.com/office/powerpoint/2010/main" val="1641247865"/>
+      </p:ext>
+    </p:extLst>
+  </p:cSld>
+  <p:clrMapOvr>
+    <a:masterClrMapping/>
+  </p:clrMapOvr>
+</p:sld>
+</file>
+
+<file path=ppt/slides/slide12.xml><?xml version="1.0" encoding="utf-8"?>
+<p:sld xmlns:a="http://schemas.openxmlformats.org/drawingml/2006/main" xmlns:r="http://schemas.openxmlformats.org/officeDocument/2006/relationships" xmlns:p="http://schemas.openxmlformats.org/presentationml/2006/main">
+  <p:cSld>
+    <p:spTree>
+      <p:nvGrpSpPr>
+        <p:cNvPr id="1" name=""/>
+        <p:cNvGrpSpPr/>
+        <p:nvPr/>
+      </p:nvGrpSpPr>
+      <p:grpSpPr>
+        <a:xfrm>
+          <a:off x="0" y="0"/>
+          <a:ext cx="0" cy="0"/>
+          <a:chOff x="0" y="0"/>
+          <a:chExt cx="0" cy="0"/>
+        </a:xfrm>
+      </p:grpSpPr>
+      <p:sp>
+        <p:nvSpPr>
+          <p:cNvPr id="2" name="テキスト プレースホルダー 1">
+            <a:extLst>
+              <a:ext uri="{FF2B5EF4-FFF2-40B4-BE49-F238E27FC236}">
+                <a16:creationId xmlns:a16="http://schemas.microsoft.com/office/drawing/2014/main" id="{4C7D4563-2EA6-B487-0D50-5402649FC24F}"/>
+              </a:ext>
+            </a:extLst>
+          </p:cNvPr>
+          <p:cNvSpPr>
+            <a:spLocks noGrp="1"/>
+          </p:cNvSpPr>
+          <p:nvPr>
+            <p:ph type="body" sz="quarter" idx="10"/>
+          </p:nvPr>
+        </p:nvSpPr>
+        <p:spPr/>
+        <p:txBody>
+          <a:bodyPr/>
+          <a:lstStyle/>
+          <a:p>
+            <a:r>
+              <a:rPr kumimoji="1" lang="ja-JP" altLang="en-US"/>
+              <a:t>論文執筆</a:t>
+            </a:r>
+          </a:p>
+        </p:txBody>
+      </p:sp>
+      <p:sp>
+        <p:nvSpPr>
+          <p:cNvPr id="3" name="テキスト ボックス 2">
+            <a:extLst>
+              <a:ext uri="{FF2B5EF4-FFF2-40B4-BE49-F238E27FC236}">
+                <a16:creationId xmlns:a16="http://schemas.microsoft.com/office/drawing/2014/main" id="{05548037-C842-D4D2-F37B-F1B2953CA41B}"/>
+              </a:ext>
+            </a:extLst>
+          </p:cNvPr>
+          <p:cNvSpPr txBox="1"/>
+          <p:nvPr/>
+        </p:nvSpPr>
+        <p:spPr>
+          <a:xfrm>
+            <a:off x="1187624" y="980728"/>
+            <a:ext cx="6340197" cy="584775"/>
+          </a:xfrm>
+          <a:prstGeom prst="rect">
+            <a:avLst/>
+          </a:prstGeom>
+          <a:noFill/>
+        </p:spPr>
+        <p:txBody>
+          <a:bodyPr wrap="none" rtlCol="0">
+            <a:spAutoFit/>
+          </a:bodyPr>
+          <a:lstStyle/>
+          <a:p>
+            <a:r>
+              <a:rPr lang="ja-JP" altLang="en-US" sz="3200"/>
+              <a:t>計算と図の作成を一度にやらない</a:t>
+            </a:r>
+            <a:endParaRPr kumimoji="1" lang="ja-JP" altLang="en-US" sz="3200"/>
+          </a:p>
+        </p:txBody>
+      </p:sp>
+      <p:pic>
+        <p:nvPicPr>
+          <p:cNvPr id="4" name="Picture 2" descr="ファイルアイコン（テキスト）">
+            <a:extLst>
+              <a:ext uri="{FF2B5EF4-FFF2-40B4-BE49-F238E27FC236}">
+                <a16:creationId xmlns:a16="http://schemas.microsoft.com/office/drawing/2014/main" id="{80A46C93-C891-7989-F0DF-EAF9EB63B633}"/>
+              </a:ext>
+            </a:extLst>
+          </p:cNvPr>
+          <p:cNvPicPr>
+            <a:picLocks noChangeAspect="1" noChangeArrowheads="1"/>
+          </p:cNvPicPr>
+          <p:nvPr/>
+        </p:nvPicPr>
+        <p:blipFill>
+          <a:blip r:embed="rId2">
+            <a:extLst>
+              <a:ext uri="{28A0092B-C50C-407E-A947-70E740481C1C}">
+                <a14:useLocalDpi xmlns:a14="http://schemas.microsoft.com/office/drawing/2010/main" val="0"/>
+              </a:ext>
+            </a:extLst>
+          </a:blip>
+          <a:srcRect/>
+          <a:stretch>
+            <a:fillRect/>
+          </a:stretch>
+        </p:blipFill>
+        <p:spPr bwMode="auto">
+          <a:xfrm>
+            <a:off x="1547664" y="2204864"/>
+            <a:ext cx="792088" cy="919844"/>
+          </a:xfrm>
+          <a:prstGeom prst="rect">
+            <a:avLst/>
+          </a:prstGeom>
+          <a:noFill/>
+          <a:extLst>
+            <a:ext uri="{909E8E84-426E-40DD-AFC4-6F175D3DCCD1}">
+              <a14:hiddenFill xmlns:a14="http://schemas.microsoft.com/office/drawing/2010/main">
+                <a:solidFill>
+                  <a:srgbClr val="FFFFFF"/>
+                </a:solidFill>
+              </a14:hiddenFill>
+            </a:ext>
+          </a:extLst>
+        </p:spPr>
+      </p:pic>
+      <p:sp>
+        <p:nvSpPr>
+          <p:cNvPr id="5" name="テキスト ボックス 4">
+            <a:extLst>
+              <a:ext uri="{FF2B5EF4-FFF2-40B4-BE49-F238E27FC236}">
+                <a16:creationId xmlns:a16="http://schemas.microsoft.com/office/drawing/2014/main" id="{44C9BC17-23F1-F00B-EC2D-E43C04264FF3}"/>
+              </a:ext>
+            </a:extLst>
+          </p:cNvPr>
+          <p:cNvSpPr txBox="1"/>
+          <p:nvPr/>
+        </p:nvSpPr>
+        <p:spPr>
+          <a:xfrm>
+            <a:off x="1259632" y="1700808"/>
+            <a:ext cx="1338828" cy="369332"/>
+          </a:xfrm>
+          <a:prstGeom prst="rect">
+            <a:avLst/>
+          </a:prstGeom>
+          <a:noFill/>
+        </p:spPr>
+        <p:txBody>
+          <a:bodyPr wrap="none" rtlCol="0">
+            <a:spAutoFit/>
+          </a:bodyPr>
+          <a:lstStyle/>
+          <a:p>
+            <a:r>
+              <a:rPr lang="ja-JP" altLang="en-US"/>
+              <a:t>インプット</a:t>
+            </a:r>
+            <a:endParaRPr kumimoji="1" lang="ja-JP" altLang="en-US"/>
+          </a:p>
+        </p:txBody>
+      </p:sp>
+      <p:sp>
+        <p:nvSpPr>
+          <p:cNvPr id="6" name="右矢印 5">
+            <a:extLst>
+              <a:ext uri="{FF2B5EF4-FFF2-40B4-BE49-F238E27FC236}">
+                <a16:creationId xmlns:a16="http://schemas.microsoft.com/office/drawing/2014/main" id="{290ECB04-2B3D-0C0D-E4E0-87753DB58E9E}"/>
+              </a:ext>
+            </a:extLst>
+          </p:cNvPr>
+          <p:cNvSpPr/>
+          <p:nvPr/>
+        </p:nvSpPr>
+        <p:spPr>
+          <a:xfrm>
+            <a:off x="2411760" y="2420888"/>
+            <a:ext cx="576064" cy="504056"/>
+          </a:xfrm>
+          <a:prstGeom prst="rightArrow">
+            <a:avLst/>
+          </a:prstGeom>
+          <a:solidFill>
+            <a:srgbClr val="FF0000"/>
+          </a:solidFill>
+          <a:ln>
+            <a:solidFill>
+              <a:schemeClr val="tx1"/>
+            </a:solidFill>
+          </a:ln>
+        </p:spPr>
+        <p:style>
+          <a:lnRef idx="2">
+            <a:schemeClr val="accent1">
+              <a:shade val="50000"/>
+            </a:schemeClr>
+          </a:lnRef>
+          <a:fillRef idx="1">
+            <a:schemeClr val="accent1"/>
+          </a:fillRef>
+          <a:effectRef idx="0">
+            <a:schemeClr val="accent1"/>
+          </a:effectRef>
+          <a:fontRef idx="minor">
+            <a:schemeClr val="lt1"/>
+          </a:fontRef>
+        </p:style>
+        <p:txBody>
+          <a:bodyPr rtlCol="0" anchor="ctr"/>
+          <a:lstStyle/>
+          <a:p>
+            <a:pPr algn="ctr"/>
+            <a:endParaRPr kumimoji="1" lang="ja-JP" altLang="en-US"/>
+          </a:p>
+        </p:txBody>
+      </p:sp>
+      <p:sp>
+        <p:nvSpPr>
+          <p:cNvPr id="7" name="テキスト ボックス 6">
+            <a:extLst>
+              <a:ext uri="{FF2B5EF4-FFF2-40B4-BE49-F238E27FC236}">
+                <a16:creationId xmlns:a16="http://schemas.microsoft.com/office/drawing/2014/main" id="{E31264E4-A510-424F-63C3-430A7E602B73}"/>
+              </a:ext>
+            </a:extLst>
+          </p:cNvPr>
+          <p:cNvSpPr txBox="1"/>
+          <p:nvPr/>
+        </p:nvSpPr>
+        <p:spPr>
+          <a:xfrm>
+            <a:off x="2915816" y="1558533"/>
+            <a:ext cx="1338828" cy="646331"/>
+          </a:xfrm>
+          <a:prstGeom prst="rect">
+            <a:avLst/>
+          </a:prstGeom>
+          <a:noFill/>
+        </p:spPr>
+        <p:txBody>
+          <a:bodyPr wrap="none" rtlCol="0">
+            <a:spAutoFit/>
+          </a:bodyPr>
+          <a:lstStyle/>
+          <a:p>
+            <a:r>
+              <a:rPr lang="ja-JP" altLang="en-US"/>
+              <a:t>全部やる</a:t>
+            </a:r>
+            <a:endParaRPr lang="en-US" altLang="ja-JP"/>
+          </a:p>
+          <a:p>
+            <a:r>
+              <a:rPr lang="ja-JP" altLang="en-US"/>
+              <a:t>プログラム</a:t>
+            </a:r>
+            <a:endParaRPr kumimoji="1" lang="ja-JP" altLang="en-US"/>
+          </a:p>
+        </p:txBody>
+      </p:sp>
+      <p:sp>
+        <p:nvSpPr>
+          <p:cNvPr id="8" name="右矢印 7">
+            <a:extLst>
+              <a:ext uri="{FF2B5EF4-FFF2-40B4-BE49-F238E27FC236}">
+                <a16:creationId xmlns:a16="http://schemas.microsoft.com/office/drawing/2014/main" id="{32CCB02D-2152-AA88-F226-8539693C8D1E}"/>
+              </a:ext>
+            </a:extLst>
+          </p:cNvPr>
+          <p:cNvSpPr/>
+          <p:nvPr/>
+        </p:nvSpPr>
+        <p:spPr>
+          <a:xfrm>
+            <a:off x="3923928" y="2348880"/>
+            <a:ext cx="3816424" cy="576064"/>
+          </a:xfrm>
+          <a:prstGeom prst="rightArrow">
+            <a:avLst/>
+          </a:prstGeom>
+          <a:solidFill>
+            <a:srgbClr val="FF0000"/>
+          </a:solidFill>
+          <a:ln>
+            <a:solidFill>
+              <a:schemeClr val="tx1"/>
+            </a:solidFill>
+          </a:ln>
+        </p:spPr>
+        <p:style>
+          <a:lnRef idx="2">
+            <a:schemeClr val="accent1">
+              <a:shade val="50000"/>
+            </a:schemeClr>
+          </a:lnRef>
+          <a:fillRef idx="1">
+            <a:schemeClr val="accent1"/>
+          </a:fillRef>
+          <a:effectRef idx="0">
+            <a:schemeClr val="accent1"/>
+          </a:effectRef>
+          <a:fontRef idx="minor">
+            <a:schemeClr val="lt1"/>
+          </a:fontRef>
+        </p:style>
+        <p:txBody>
+          <a:bodyPr rtlCol="0" anchor="ctr"/>
+          <a:lstStyle/>
+          <a:p>
+            <a:pPr algn="ctr"/>
+            <a:endParaRPr kumimoji="1" lang="ja-JP" altLang="en-US"/>
+          </a:p>
+        </p:txBody>
+      </p:sp>
+      <p:pic>
+        <p:nvPicPr>
+          <p:cNvPr id="9" name="Picture 4" descr="ファイルアイコン（画像）">
+            <a:extLst>
+              <a:ext uri="{FF2B5EF4-FFF2-40B4-BE49-F238E27FC236}">
+                <a16:creationId xmlns:a16="http://schemas.microsoft.com/office/drawing/2014/main" id="{7C6C63D9-9696-CD96-CFE8-30E8D3ACC433}"/>
+              </a:ext>
+            </a:extLst>
+          </p:cNvPr>
+          <p:cNvPicPr>
+            <a:picLocks noChangeAspect="1" noChangeArrowheads="1"/>
+          </p:cNvPicPr>
+          <p:nvPr/>
+        </p:nvPicPr>
+        <p:blipFill>
+          <a:blip r:embed="rId3">
+            <a:extLst>
+              <a:ext uri="{28A0092B-C50C-407E-A947-70E740481C1C}">
+                <a14:useLocalDpi xmlns:a14="http://schemas.microsoft.com/office/drawing/2010/main" val="0"/>
+              </a:ext>
+            </a:extLst>
+          </a:blip>
+          <a:srcRect/>
+          <a:stretch>
+            <a:fillRect/>
+          </a:stretch>
+        </p:blipFill>
+        <p:spPr bwMode="auto">
+          <a:xfrm>
+            <a:off x="7870366" y="2204864"/>
+            <a:ext cx="806090" cy="936104"/>
+          </a:xfrm>
+          <a:prstGeom prst="rect">
+            <a:avLst/>
+          </a:prstGeom>
+          <a:noFill/>
+          <a:extLst>
+            <a:ext uri="{909E8E84-426E-40DD-AFC4-6F175D3DCCD1}">
+              <a14:hiddenFill xmlns:a14="http://schemas.microsoft.com/office/drawing/2010/main">
+                <a:solidFill>
+                  <a:srgbClr val="FFFFFF"/>
+                </a:solidFill>
+              </a14:hiddenFill>
+            </a:ext>
+          </a:extLst>
+        </p:spPr>
+      </p:pic>
+      <p:sp>
+        <p:nvSpPr>
+          <p:cNvPr id="10" name="テキスト ボックス 9">
+            <a:extLst>
+              <a:ext uri="{FF2B5EF4-FFF2-40B4-BE49-F238E27FC236}">
+                <a16:creationId xmlns:a16="http://schemas.microsoft.com/office/drawing/2014/main" id="{EF193F9F-D5A9-C567-BC15-1D1AE477B87F}"/>
+              </a:ext>
+            </a:extLst>
+          </p:cNvPr>
+          <p:cNvSpPr txBox="1"/>
+          <p:nvPr/>
+        </p:nvSpPr>
+        <p:spPr>
+          <a:xfrm>
+            <a:off x="8028384" y="1763524"/>
+            <a:ext cx="415498" cy="369332"/>
+          </a:xfrm>
+          <a:prstGeom prst="rect">
+            <a:avLst/>
+          </a:prstGeom>
+          <a:noFill/>
+        </p:spPr>
+        <p:txBody>
+          <a:bodyPr wrap="none" rtlCol="0">
+            <a:spAutoFit/>
+          </a:bodyPr>
+          <a:lstStyle/>
+          <a:p>
+            <a:r>
+              <a:rPr lang="ja-JP" altLang="en-US"/>
+              <a:t>図</a:t>
+            </a:r>
+            <a:endParaRPr kumimoji="1" lang="ja-JP" altLang="en-US"/>
+          </a:p>
+        </p:txBody>
+      </p:sp>
+      <p:pic>
+        <p:nvPicPr>
+          <p:cNvPr id="11" name="Picture 8" descr="バツのマークのイラスト「×」">
+            <a:extLst>
+              <a:ext uri="{FF2B5EF4-FFF2-40B4-BE49-F238E27FC236}">
+                <a16:creationId xmlns:a16="http://schemas.microsoft.com/office/drawing/2014/main" id="{E9AAF4EE-7CAB-646B-12EF-0B3D525491DF}"/>
+              </a:ext>
+            </a:extLst>
+          </p:cNvPr>
+          <p:cNvPicPr>
+            <a:picLocks noChangeAspect="1" noChangeArrowheads="1"/>
+          </p:cNvPicPr>
+          <p:nvPr/>
+        </p:nvPicPr>
+        <p:blipFill>
+          <a:blip r:embed="rId4">
+            <a:extLst>
+              <a:ext uri="{28A0092B-C50C-407E-A947-70E740481C1C}">
+                <a14:useLocalDpi xmlns:a14="http://schemas.microsoft.com/office/drawing/2010/main" val="0"/>
+              </a:ext>
+            </a:extLst>
+          </a:blip>
+          <a:srcRect/>
+          <a:stretch>
+            <a:fillRect/>
+          </a:stretch>
+        </p:blipFill>
+        <p:spPr bwMode="auto">
+          <a:xfrm>
+            <a:off x="251520" y="2132856"/>
+            <a:ext cx="1008112" cy="1008112"/>
+          </a:xfrm>
+          <a:prstGeom prst="rect">
+            <a:avLst/>
+          </a:prstGeom>
+          <a:noFill/>
+          <a:extLst>
+            <a:ext uri="{909E8E84-426E-40DD-AFC4-6F175D3DCCD1}">
+              <a14:hiddenFill xmlns:a14="http://schemas.microsoft.com/office/drawing/2010/main">
+                <a:solidFill>
+                  <a:srgbClr val="FFFFFF"/>
+                </a:solidFill>
+              </a14:hiddenFill>
+            </a:ext>
+          </a:extLst>
+        </p:spPr>
+      </p:pic>
+      <p:pic>
+        <p:nvPicPr>
+          <p:cNvPr id="12" name="Picture 10" descr="丸のマークのイラスト「○」">
+            <a:extLst>
+              <a:ext uri="{FF2B5EF4-FFF2-40B4-BE49-F238E27FC236}">
+                <a16:creationId xmlns:a16="http://schemas.microsoft.com/office/drawing/2014/main" id="{E8E739A8-A176-A6F2-CFE7-CF5B09ABAAB1}"/>
+              </a:ext>
+            </a:extLst>
+          </p:cNvPr>
+          <p:cNvPicPr>
+            <a:picLocks noChangeAspect="1" noChangeArrowheads="1"/>
+          </p:cNvPicPr>
+          <p:nvPr/>
+        </p:nvPicPr>
+        <p:blipFill>
+          <a:blip r:embed="rId5">
+            <a:extLst>
+              <a:ext uri="{28A0092B-C50C-407E-A947-70E740481C1C}">
+                <a14:useLocalDpi xmlns:a14="http://schemas.microsoft.com/office/drawing/2010/main" val="0"/>
+              </a:ext>
+            </a:extLst>
+          </a:blip>
+          <a:srcRect/>
+          <a:stretch>
+            <a:fillRect/>
+          </a:stretch>
+        </p:blipFill>
+        <p:spPr bwMode="auto">
+          <a:xfrm>
+            <a:off x="323528" y="4293096"/>
+            <a:ext cx="864096" cy="864096"/>
+          </a:xfrm>
+          <a:prstGeom prst="rect">
+            <a:avLst/>
+          </a:prstGeom>
+          <a:noFill/>
+          <a:extLst>
+            <a:ext uri="{909E8E84-426E-40DD-AFC4-6F175D3DCCD1}">
+              <a14:hiddenFill xmlns:a14="http://schemas.microsoft.com/office/drawing/2010/main">
+                <a:solidFill>
+                  <a:srgbClr val="FFFFFF"/>
+                </a:solidFill>
+              </a14:hiddenFill>
+            </a:ext>
+          </a:extLst>
+        </p:spPr>
+      </p:pic>
+      <p:pic>
+        <p:nvPicPr>
+          <p:cNvPr id="13" name="Picture 2" descr="ファイルアイコン（テキスト）">
+            <a:extLst>
+              <a:ext uri="{FF2B5EF4-FFF2-40B4-BE49-F238E27FC236}">
+                <a16:creationId xmlns:a16="http://schemas.microsoft.com/office/drawing/2014/main" id="{0F95E36D-A945-0E14-1844-7415BE913576}"/>
+              </a:ext>
+            </a:extLst>
+          </p:cNvPr>
+          <p:cNvPicPr>
+            <a:picLocks noChangeAspect="1" noChangeArrowheads="1"/>
+          </p:cNvPicPr>
+          <p:nvPr/>
+        </p:nvPicPr>
+        <p:blipFill>
+          <a:blip r:embed="rId2">
+            <a:extLst>
+              <a:ext uri="{28A0092B-C50C-407E-A947-70E740481C1C}">
+                <a14:useLocalDpi xmlns:a14="http://schemas.microsoft.com/office/drawing/2010/main" val="0"/>
+              </a:ext>
+            </a:extLst>
+          </a:blip>
+          <a:srcRect/>
+          <a:stretch>
+            <a:fillRect/>
+          </a:stretch>
+        </p:blipFill>
+        <p:spPr bwMode="auto">
+          <a:xfrm>
+            <a:off x="1547664" y="4293096"/>
+            <a:ext cx="792088" cy="919844"/>
+          </a:xfrm>
+          <a:prstGeom prst="rect">
+            <a:avLst/>
+          </a:prstGeom>
+          <a:noFill/>
+          <a:extLst>
+            <a:ext uri="{909E8E84-426E-40DD-AFC4-6F175D3DCCD1}">
+              <a14:hiddenFill xmlns:a14="http://schemas.microsoft.com/office/drawing/2010/main">
+                <a:solidFill>
+                  <a:srgbClr val="FFFFFF"/>
+                </a:solidFill>
+              </a14:hiddenFill>
+            </a:ext>
+          </a:extLst>
+        </p:spPr>
+      </p:pic>
+      <p:sp>
+        <p:nvSpPr>
+          <p:cNvPr id="14" name="テキスト ボックス 13">
+            <a:extLst>
+              <a:ext uri="{FF2B5EF4-FFF2-40B4-BE49-F238E27FC236}">
+                <a16:creationId xmlns:a16="http://schemas.microsoft.com/office/drawing/2014/main" id="{92514A8F-C213-1C6F-35A9-302A98CF3C79}"/>
+              </a:ext>
+            </a:extLst>
+          </p:cNvPr>
+          <p:cNvSpPr txBox="1"/>
+          <p:nvPr/>
+        </p:nvSpPr>
+        <p:spPr>
+          <a:xfrm>
+            <a:off x="1259632" y="3851756"/>
+            <a:ext cx="1338828" cy="369332"/>
+          </a:xfrm>
+          <a:prstGeom prst="rect">
+            <a:avLst/>
+          </a:prstGeom>
+          <a:noFill/>
+        </p:spPr>
+        <p:txBody>
+          <a:bodyPr wrap="none" rtlCol="0">
+            <a:spAutoFit/>
+          </a:bodyPr>
+          <a:lstStyle/>
+          <a:p>
+            <a:r>
+              <a:rPr lang="ja-JP" altLang="en-US"/>
+              <a:t>インプット</a:t>
+            </a:r>
+            <a:endParaRPr kumimoji="1" lang="ja-JP" altLang="en-US"/>
+          </a:p>
+        </p:txBody>
+      </p:sp>
+      <p:sp>
+        <p:nvSpPr>
+          <p:cNvPr id="15" name="右矢印 14">
+            <a:extLst>
+              <a:ext uri="{FF2B5EF4-FFF2-40B4-BE49-F238E27FC236}">
+                <a16:creationId xmlns:a16="http://schemas.microsoft.com/office/drawing/2014/main" id="{ACFFD26C-6326-9F81-EABB-39F6F4601132}"/>
+              </a:ext>
+            </a:extLst>
+          </p:cNvPr>
+          <p:cNvSpPr/>
+          <p:nvPr/>
+        </p:nvSpPr>
+        <p:spPr>
+          <a:xfrm>
+            <a:off x="2411760" y="4545124"/>
+            <a:ext cx="576064" cy="504056"/>
+          </a:xfrm>
+          <a:prstGeom prst="rightArrow">
+            <a:avLst/>
+          </a:prstGeom>
+          <a:solidFill>
+            <a:srgbClr val="FF0000"/>
+          </a:solidFill>
+          <a:ln>
+            <a:solidFill>
+              <a:schemeClr val="tx1"/>
+            </a:solidFill>
+          </a:ln>
+        </p:spPr>
+        <p:style>
+          <a:lnRef idx="2">
+            <a:schemeClr val="accent1">
+              <a:shade val="50000"/>
+            </a:schemeClr>
+          </a:lnRef>
+          <a:fillRef idx="1">
+            <a:schemeClr val="accent1"/>
+          </a:fillRef>
+          <a:effectRef idx="0">
+            <a:schemeClr val="accent1"/>
+          </a:effectRef>
+          <a:fontRef idx="minor">
+            <a:schemeClr val="lt1"/>
+          </a:fontRef>
+        </p:style>
+        <p:txBody>
+          <a:bodyPr rtlCol="0" anchor="ctr"/>
+          <a:lstStyle/>
+          <a:p>
+            <a:pPr algn="ctr"/>
+            <a:endParaRPr kumimoji="1" lang="ja-JP" altLang="en-US"/>
+          </a:p>
+        </p:txBody>
+      </p:sp>
+      <p:sp>
+        <p:nvSpPr>
+          <p:cNvPr id="16" name="テキスト ボックス 15">
+            <a:extLst>
+              <a:ext uri="{FF2B5EF4-FFF2-40B4-BE49-F238E27FC236}">
+                <a16:creationId xmlns:a16="http://schemas.microsoft.com/office/drawing/2014/main" id="{F2B05CA1-C98B-1EA7-5E42-A91FD688698E}"/>
+              </a:ext>
+            </a:extLst>
+          </p:cNvPr>
+          <p:cNvSpPr txBox="1"/>
+          <p:nvPr/>
+        </p:nvSpPr>
+        <p:spPr>
+          <a:xfrm>
+            <a:off x="2915816" y="3645024"/>
+            <a:ext cx="1338828" cy="646331"/>
+          </a:xfrm>
+          <a:prstGeom prst="rect">
+            <a:avLst/>
+          </a:prstGeom>
+          <a:noFill/>
+        </p:spPr>
+        <p:txBody>
+          <a:bodyPr wrap="none" rtlCol="0">
+            <a:spAutoFit/>
+          </a:bodyPr>
+          <a:lstStyle/>
+          <a:p>
+            <a:r>
+              <a:rPr lang="ja-JP" altLang="en-US"/>
+              <a:t>計算</a:t>
+            </a:r>
+            <a:endParaRPr lang="en-US" altLang="ja-JP"/>
+          </a:p>
+          <a:p>
+            <a:r>
+              <a:rPr lang="ja-JP" altLang="en-US"/>
+              <a:t>プログラム</a:t>
+            </a:r>
+            <a:endParaRPr kumimoji="1" lang="ja-JP" altLang="en-US"/>
+          </a:p>
+        </p:txBody>
+      </p:sp>
+      <p:pic>
+        <p:nvPicPr>
+          <p:cNvPr id="17" name="Picture 12" descr="ファイルアイコン（ブランク）">
+            <a:extLst>
+              <a:ext uri="{FF2B5EF4-FFF2-40B4-BE49-F238E27FC236}">
+                <a16:creationId xmlns:a16="http://schemas.microsoft.com/office/drawing/2014/main" id="{B13582B4-7F0F-7AF8-A602-9A239CD05B50}"/>
+              </a:ext>
+            </a:extLst>
+          </p:cNvPr>
+          <p:cNvPicPr>
+            <a:picLocks noChangeAspect="1" noChangeArrowheads="1"/>
+          </p:cNvPicPr>
+          <p:nvPr/>
+        </p:nvPicPr>
+        <p:blipFill>
+          <a:blip r:embed="rId6">
+            <a:extLst>
+              <a:ext uri="{28A0092B-C50C-407E-A947-70E740481C1C}">
+                <a14:useLocalDpi xmlns:a14="http://schemas.microsoft.com/office/drawing/2010/main" val="0"/>
+              </a:ext>
+            </a:extLst>
+          </a:blip>
+          <a:srcRect/>
+          <a:stretch>
+            <a:fillRect/>
+          </a:stretch>
+        </p:blipFill>
+        <p:spPr bwMode="auto">
+          <a:xfrm>
+            <a:off x="4716016" y="4293096"/>
+            <a:ext cx="806090" cy="936104"/>
+          </a:xfrm>
+          <a:prstGeom prst="rect">
+            <a:avLst/>
+          </a:prstGeom>
+          <a:noFill/>
+          <a:extLst>
+            <a:ext uri="{909E8E84-426E-40DD-AFC4-6F175D3DCCD1}">
+              <a14:hiddenFill xmlns:a14="http://schemas.microsoft.com/office/drawing/2010/main">
+                <a:solidFill>
+                  <a:srgbClr val="FFFFFF"/>
+                </a:solidFill>
+              </a14:hiddenFill>
+            </a:ext>
+          </a:extLst>
+        </p:spPr>
+      </p:pic>
+      <p:sp>
+        <p:nvSpPr>
+          <p:cNvPr id="18" name="テキスト ボックス 17">
+            <a:extLst>
+              <a:ext uri="{FF2B5EF4-FFF2-40B4-BE49-F238E27FC236}">
+                <a16:creationId xmlns:a16="http://schemas.microsoft.com/office/drawing/2014/main" id="{ADA927F9-BB13-183C-B9FE-01645425A03B}"/>
+              </a:ext>
+            </a:extLst>
+          </p:cNvPr>
+          <p:cNvSpPr txBox="1"/>
+          <p:nvPr/>
+        </p:nvSpPr>
+        <p:spPr>
+          <a:xfrm>
+            <a:off x="4789765" y="3851756"/>
+            <a:ext cx="646331" cy="369332"/>
+          </a:xfrm>
+          <a:prstGeom prst="rect">
+            <a:avLst/>
+          </a:prstGeom>
+          <a:noFill/>
+        </p:spPr>
+        <p:txBody>
+          <a:bodyPr wrap="none" rtlCol="0">
+            <a:spAutoFit/>
+          </a:bodyPr>
+          <a:lstStyle/>
+          <a:p>
+            <a:r>
+              <a:rPr lang="ja-JP" altLang="en-US"/>
+              <a:t>結果</a:t>
+            </a:r>
+            <a:endParaRPr kumimoji="1" lang="ja-JP" altLang="en-US"/>
+          </a:p>
+        </p:txBody>
+      </p:sp>
+      <p:sp>
+        <p:nvSpPr>
+          <p:cNvPr id="19" name="テキスト ボックス 18">
+            <a:extLst>
+              <a:ext uri="{FF2B5EF4-FFF2-40B4-BE49-F238E27FC236}">
+                <a16:creationId xmlns:a16="http://schemas.microsoft.com/office/drawing/2014/main" id="{C82A1EED-E800-CFE3-32BE-504A09D798E3}"/>
+              </a:ext>
+            </a:extLst>
+          </p:cNvPr>
+          <p:cNvSpPr txBox="1"/>
+          <p:nvPr/>
+        </p:nvSpPr>
+        <p:spPr>
+          <a:xfrm>
+            <a:off x="4858821" y="4653136"/>
+            <a:ext cx="505267" cy="369332"/>
+          </a:xfrm>
+          <a:prstGeom prst="rect">
+            <a:avLst/>
+          </a:prstGeom>
+          <a:noFill/>
+        </p:spPr>
+        <p:txBody>
+          <a:bodyPr wrap="none" rtlCol="0">
+            <a:spAutoFit/>
+          </a:bodyPr>
+          <a:lstStyle/>
+          <a:p>
+            <a:r>
+              <a:rPr kumimoji="1" lang="en-US" altLang="ja-JP"/>
+              <a:t>dat</a:t>
+            </a:r>
+            <a:endParaRPr kumimoji="1" lang="ja-JP" altLang="en-US"/>
+          </a:p>
+        </p:txBody>
+      </p:sp>
+      <p:grpSp>
+        <p:nvGrpSpPr>
+          <p:cNvPr id="20" name="グループ化 19">
+            <a:extLst>
+              <a:ext uri="{FF2B5EF4-FFF2-40B4-BE49-F238E27FC236}">
+                <a16:creationId xmlns:a16="http://schemas.microsoft.com/office/drawing/2014/main" id="{06B54EF8-C58D-6D6E-FA8F-E05142DA51B9}"/>
+              </a:ext>
+            </a:extLst>
+          </p:cNvPr>
+          <p:cNvGrpSpPr/>
+          <p:nvPr/>
+        </p:nvGrpSpPr>
+        <p:grpSpPr>
+          <a:xfrm>
+            <a:off x="3131840" y="4293096"/>
+            <a:ext cx="806090" cy="936104"/>
+            <a:chOff x="3131840" y="4221088"/>
+            <a:chExt cx="806090" cy="936104"/>
+          </a:xfrm>
+        </p:grpSpPr>
+        <p:pic>
+          <p:nvPicPr>
+            <p:cNvPr id="21" name="Picture 12" descr="ファイルアイコン（ブランク）">
+              <a:extLst>
+                <a:ext uri="{FF2B5EF4-FFF2-40B4-BE49-F238E27FC236}">
+                  <a16:creationId xmlns:a16="http://schemas.microsoft.com/office/drawing/2014/main" id="{CB7CED36-BA65-7FE8-4F5C-9EB26EFB9116}"/>
+                </a:ext>
+              </a:extLst>
+            </p:cNvPr>
+            <p:cNvPicPr>
+              <a:picLocks noChangeAspect="1" noChangeArrowheads="1"/>
+            </p:cNvPicPr>
+            <p:nvPr/>
+          </p:nvPicPr>
+          <p:blipFill>
+            <a:blip r:embed="rId6">
+              <a:extLst>
+                <a:ext uri="{28A0092B-C50C-407E-A947-70E740481C1C}">
+                  <a14:useLocalDpi xmlns:a14="http://schemas.microsoft.com/office/drawing/2010/main" val="0"/>
+                </a:ext>
+              </a:extLst>
+            </a:blip>
+            <a:srcRect/>
+            <a:stretch>
+              <a:fillRect/>
+            </a:stretch>
+          </p:blipFill>
+          <p:spPr bwMode="auto">
+            <a:xfrm>
+              <a:off x="3131840" y="4221088"/>
+              <a:ext cx="806090" cy="936104"/>
+            </a:xfrm>
+            <a:prstGeom prst="rect">
+              <a:avLst/>
+            </a:prstGeom>
+            <a:noFill/>
+            <a:extLst>
+              <a:ext uri="{909E8E84-426E-40DD-AFC4-6F175D3DCCD1}">
+                <a14:hiddenFill xmlns:a14="http://schemas.microsoft.com/office/drawing/2010/main">
+                  <a:solidFill>
+                    <a:srgbClr val="FFFFFF"/>
+                  </a:solidFill>
+                </a14:hiddenFill>
+              </a:ext>
+            </a:extLst>
+          </p:spPr>
+        </p:pic>
+        <p:pic>
+          <p:nvPicPr>
+            <p:cNvPr id="22" name="図 21">
+              <a:extLst>
+                <a:ext uri="{FF2B5EF4-FFF2-40B4-BE49-F238E27FC236}">
+                  <a16:creationId xmlns:a16="http://schemas.microsoft.com/office/drawing/2014/main" id="{15E2A05E-60D8-0F5C-200C-8B98FEF5AD21}"/>
+                </a:ext>
+              </a:extLst>
+            </p:cNvPr>
+            <p:cNvPicPr>
+              <a:picLocks noChangeAspect="1"/>
+            </p:cNvPicPr>
+            <p:nvPr/>
+          </p:nvPicPr>
+          <p:blipFill>
+            <a:blip r:embed="rId7"/>
+            <a:stretch>
+              <a:fillRect/>
+            </a:stretch>
+          </p:blipFill>
+          <p:spPr>
+            <a:xfrm>
+              <a:off x="3275856" y="4509120"/>
+              <a:ext cx="485814" cy="449739"/>
+            </a:xfrm>
+            <a:prstGeom prst="rect">
+              <a:avLst/>
+            </a:prstGeom>
+          </p:spPr>
+        </p:pic>
+      </p:grpSp>
+      <p:grpSp>
+        <p:nvGrpSpPr>
+          <p:cNvPr id="23" name="グループ化 22">
+            <a:extLst>
+              <a:ext uri="{FF2B5EF4-FFF2-40B4-BE49-F238E27FC236}">
+                <a16:creationId xmlns:a16="http://schemas.microsoft.com/office/drawing/2014/main" id="{6067BB06-52DB-550C-AD2E-56EBAFED77A2}"/>
+              </a:ext>
+            </a:extLst>
+          </p:cNvPr>
+          <p:cNvGrpSpPr/>
+          <p:nvPr/>
+        </p:nvGrpSpPr>
+        <p:grpSpPr>
+          <a:xfrm>
+            <a:off x="3059832" y="2204864"/>
+            <a:ext cx="806090" cy="936104"/>
+            <a:chOff x="3059832" y="2276872"/>
+            <a:chExt cx="806090" cy="936104"/>
+          </a:xfrm>
+        </p:grpSpPr>
+        <p:pic>
+          <p:nvPicPr>
+            <p:cNvPr id="24" name="Picture 12" descr="ファイルアイコン（ブランク）">
+              <a:extLst>
+                <a:ext uri="{FF2B5EF4-FFF2-40B4-BE49-F238E27FC236}">
+                  <a16:creationId xmlns:a16="http://schemas.microsoft.com/office/drawing/2014/main" id="{F3AAF19B-6753-5168-2D76-7D21AAA65C27}"/>
+                </a:ext>
+              </a:extLst>
+            </p:cNvPr>
+            <p:cNvPicPr>
+              <a:picLocks noChangeAspect="1" noChangeArrowheads="1"/>
+            </p:cNvPicPr>
+            <p:nvPr/>
+          </p:nvPicPr>
+          <p:blipFill>
+            <a:blip r:embed="rId6">
+              <a:extLst>
+                <a:ext uri="{28A0092B-C50C-407E-A947-70E740481C1C}">
+                  <a14:useLocalDpi xmlns:a14="http://schemas.microsoft.com/office/drawing/2010/main" val="0"/>
+                </a:ext>
+              </a:extLst>
+            </a:blip>
+            <a:srcRect/>
+            <a:stretch>
+              <a:fillRect/>
+            </a:stretch>
+          </p:blipFill>
+          <p:spPr bwMode="auto">
+            <a:xfrm>
+              <a:off x="3059832" y="2276872"/>
+              <a:ext cx="806090" cy="936104"/>
+            </a:xfrm>
+            <a:prstGeom prst="rect">
+              <a:avLst/>
+            </a:prstGeom>
+            <a:noFill/>
+            <a:extLst>
+              <a:ext uri="{909E8E84-426E-40DD-AFC4-6F175D3DCCD1}">
+                <a14:hiddenFill xmlns:a14="http://schemas.microsoft.com/office/drawing/2010/main">
+                  <a:solidFill>
+                    <a:srgbClr val="FFFFFF"/>
+                  </a:solidFill>
+                </a14:hiddenFill>
+              </a:ext>
+            </a:extLst>
+          </p:spPr>
+        </p:pic>
+        <p:pic>
+          <p:nvPicPr>
+            <p:cNvPr id="25" name="図 24">
+              <a:extLst>
+                <a:ext uri="{FF2B5EF4-FFF2-40B4-BE49-F238E27FC236}">
+                  <a16:creationId xmlns:a16="http://schemas.microsoft.com/office/drawing/2014/main" id="{B075C425-2A45-890F-72B5-61DDEB4F7E76}"/>
+                </a:ext>
+              </a:extLst>
+            </p:cNvPr>
+            <p:cNvPicPr>
+              <a:picLocks noChangeAspect="1"/>
+            </p:cNvPicPr>
+            <p:nvPr/>
+          </p:nvPicPr>
+          <p:blipFill>
+            <a:blip r:embed="rId7"/>
+            <a:stretch>
+              <a:fillRect/>
+            </a:stretch>
+          </p:blipFill>
+          <p:spPr>
+            <a:xfrm>
+              <a:off x="3203848" y="2564904"/>
+              <a:ext cx="485814" cy="449739"/>
+            </a:xfrm>
+            <a:prstGeom prst="rect">
+              <a:avLst/>
+            </a:prstGeom>
+          </p:spPr>
+        </p:pic>
+      </p:grpSp>
+      <p:sp>
+        <p:nvSpPr>
+          <p:cNvPr id="26" name="右矢印 25">
+            <a:extLst>
+              <a:ext uri="{FF2B5EF4-FFF2-40B4-BE49-F238E27FC236}">
+                <a16:creationId xmlns:a16="http://schemas.microsoft.com/office/drawing/2014/main" id="{14CC528D-EBE9-A5FF-3001-914D897186D2}"/>
+              </a:ext>
+            </a:extLst>
+          </p:cNvPr>
+          <p:cNvSpPr/>
+          <p:nvPr/>
+        </p:nvSpPr>
+        <p:spPr>
+          <a:xfrm>
+            <a:off x="5724128" y="4509120"/>
+            <a:ext cx="504056" cy="576064"/>
+          </a:xfrm>
+          <a:prstGeom prst="rightArrow">
+            <a:avLst/>
+          </a:prstGeom>
+          <a:solidFill>
+            <a:srgbClr val="FF0000"/>
+          </a:solidFill>
+          <a:ln>
+            <a:solidFill>
+              <a:schemeClr val="tx1"/>
+            </a:solidFill>
+          </a:ln>
+        </p:spPr>
+        <p:style>
+          <a:lnRef idx="2">
+            <a:schemeClr val="accent1">
+              <a:shade val="50000"/>
+            </a:schemeClr>
+          </a:lnRef>
+          <a:fillRef idx="1">
+            <a:schemeClr val="accent1"/>
+          </a:fillRef>
+          <a:effectRef idx="0">
+            <a:schemeClr val="accent1"/>
+          </a:effectRef>
+          <a:fontRef idx="minor">
+            <a:schemeClr val="lt1"/>
+          </a:fontRef>
+        </p:style>
+        <p:txBody>
+          <a:bodyPr rtlCol="0" anchor="ctr"/>
+          <a:lstStyle/>
+          <a:p>
+            <a:pPr algn="ctr"/>
+            <a:endParaRPr kumimoji="1" lang="ja-JP" altLang="en-US"/>
+          </a:p>
+        </p:txBody>
+      </p:sp>
+      <p:pic>
+        <p:nvPicPr>
+          <p:cNvPr id="27" name="Picture 4" descr="ファイルアイコン（画像）">
+            <a:extLst>
+              <a:ext uri="{FF2B5EF4-FFF2-40B4-BE49-F238E27FC236}">
+                <a16:creationId xmlns:a16="http://schemas.microsoft.com/office/drawing/2014/main" id="{7F7E410C-C99F-169C-A8A4-05AC5B250BBF}"/>
+              </a:ext>
+            </a:extLst>
+          </p:cNvPr>
+          <p:cNvPicPr>
+            <a:picLocks noChangeAspect="1" noChangeArrowheads="1"/>
+          </p:cNvPicPr>
+          <p:nvPr/>
+        </p:nvPicPr>
+        <p:blipFill>
+          <a:blip r:embed="rId3">
+            <a:extLst>
+              <a:ext uri="{28A0092B-C50C-407E-A947-70E740481C1C}">
+                <a14:useLocalDpi xmlns:a14="http://schemas.microsoft.com/office/drawing/2010/main" val="0"/>
+              </a:ext>
+            </a:extLst>
+          </a:blip>
+          <a:srcRect/>
+          <a:stretch>
+            <a:fillRect/>
+          </a:stretch>
+        </p:blipFill>
+        <p:spPr bwMode="auto">
+          <a:xfrm>
+            <a:off x="7884368" y="4293096"/>
+            <a:ext cx="806090" cy="936104"/>
+          </a:xfrm>
+          <a:prstGeom prst="rect">
+            <a:avLst/>
+          </a:prstGeom>
+          <a:noFill/>
+          <a:extLst>
+            <a:ext uri="{909E8E84-426E-40DD-AFC4-6F175D3DCCD1}">
+              <a14:hiddenFill xmlns:a14="http://schemas.microsoft.com/office/drawing/2010/main">
+                <a:solidFill>
+                  <a:srgbClr val="FFFFFF"/>
+                </a:solidFill>
+              </a14:hiddenFill>
+            </a:ext>
+          </a:extLst>
+        </p:spPr>
+      </p:pic>
+      <p:sp>
+        <p:nvSpPr>
+          <p:cNvPr id="28" name="右矢印 27">
+            <a:extLst>
+              <a:ext uri="{FF2B5EF4-FFF2-40B4-BE49-F238E27FC236}">
+                <a16:creationId xmlns:a16="http://schemas.microsoft.com/office/drawing/2014/main" id="{2990623A-69CF-3CBC-02DD-73677B168ABF}"/>
+              </a:ext>
+            </a:extLst>
+          </p:cNvPr>
+          <p:cNvSpPr/>
+          <p:nvPr/>
+        </p:nvSpPr>
+        <p:spPr>
+          <a:xfrm>
+            <a:off x="4067944" y="4509120"/>
+            <a:ext cx="504056" cy="576064"/>
+          </a:xfrm>
+          <a:prstGeom prst="rightArrow">
+            <a:avLst/>
+          </a:prstGeom>
+          <a:solidFill>
+            <a:srgbClr val="FF0000"/>
+          </a:solidFill>
+          <a:ln>
+            <a:solidFill>
+              <a:schemeClr val="tx1"/>
+            </a:solidFill>
+          </a:ln>
+        </p:spPr>
+        <p:style>
+          <a:lnRef idx="2">
+            <a:schemeClr val="accent1">
+              <a:shade val="50000"/>
+            </a:schemeClr>
+          </a:lnRef>
+          <a:fillRef idx="1">
+            <a:schemeClr val="accent1"/>
+          </a:fillRef>
+          <a:effectRef idx="0">
+            <a:schemeClr val="accent1"/>
+          </a:effectRef>
+          <a:fontRef idx="minor">
+            <a:schemeClr val="lt1"/>
+          </a:fontRef>
+        </p:style>
+        <p:txBody>
+          <a:bodyPr rtlCol="0" anchor="ctr"/>
+          <a:lstStyle/>
+          <a:p>
+            <a:pPr algn="ctr"/>
+            <a:endParaRPr kumimoji="1" lang="ja-JP" altLang="en-US"/>
+          </a:p>
+        </p:txBody>
+      </p:sp>
+      <p:sp>
+        <p:nvSpPr>
+          <p:cNvPr id="29" name="テキスト ボックス 28">
+            <a:extLst>
+              <a:ext uri="{FF2B5EF4-FFF2-40B4-BE49-F238E27FC236}">
+                <a16:creationId xmlns:a16="http://schemas.microsoft.com/office/drawing/2014/main" id="{14E07093-2695-D569-3113-295C347B4C13}"/>
+              </a:ext>
+            </a:extLst>
+          </p:cNvPr>
+          <p:cNvSpPr txBox="1"/>
+          <p:nvPr/>
+        </p:nvSpPr>
+        <p:spPr>
+          <a:xfrm>
+            <a:off x="6156176" y="3645024"/>
+            <a:ext cx="1338828" cy="646331"/>
+          </a:xfrm>
+          <a:prstGeom prst="rect">
+            <a:avLst/>
+          </a:prstGeom>
+          <a:noFill/>
+        </p:spPr>
+        <p:txBody>
+          <a:bodyPr wrap="none" rtlCol="0">
+            <a:spAutoFit/>
+          </a:bodyPr>
+          <a:lstStyle/>
+          <a:p>
+            <a:r>
+              <a:rPr lang="ja-JP" altLang="en-US"/>
+              <a:t>図の作成</a:t>
+            </a:r>
+            <a:endParaRPr lang="en-US" altLang="ja-JP"/>
+          </a:p>
+          <a:p>
+            <a:r>
+              <a:rPr lang="ja-JP" altLang="en-US"/>
+              <a:t>プログラム</a:t>
+            </a:r>
+            <a:endParaRPr kumimoji="1" lang="ja-JP" altLang="en-US"/>
+          </a:p>
+        </p:txBody>
+      </p:sp>
+      <p:grpSp>
+        <p:nvGrpSpPr>
+          <p:cNvPr id="30" name="グループ化 29">
+            <a:extLst>
+              <a:ext uri="{FF2B5EF4-FFF2-40B4-BE49-F238E27FC236}">
+                <a16:creationId xmlns:a16="http://schemas.microsoft.com/office/drawing/2014/main" id="{7282B00B-DEF1-0405-7C36-4C748402F702}"/>
+              </a:ext>
+            </a:extLst>
+          </p:cNvPr>
+          <p:cNvGrpSpPr/>
+          <p:nvPr/>
+        </p:nvGrpSpPr>
+        <p:grpSpPr>
+          <a:xfrm>
+            <a:off x="6300192" y="4293096"/>
+            <a:ext cx="806090" cy="936104"/>
+            <a:chOff x="6300192" y="4221088"/>
+            <a:chExt cx="806090" cy="936104"/>
+          </a:xfrm>
+        </p:grpSpPr>
+        <p:pic>
+          <p:nvPicPr>
+            <p:cNvPr id="31" name="Picture 12" descr="ファイルアイコン（ブランク）">
+              <a:extLst>
+                <a:ext uri="{FF2B5EF4-FFF2-40B4-BE49-F238E27FC236}">
+                  <a16:creationId xmlns:a16="http://schemas.microsoft.com/office/drawing/2014/main" id="{D3B9BF70-D1D8-6FEB-0329-A37AC4A0E6AB}"/>
+                </a:ext>
+              </a:extLst>
+            </p:cNvPr>
+            <p:cNvPicPr>
+              <a:picLocks noChangeAspect="1" noChangeArrowheads="1"/>
+            </p:cNvPicPr>
+            <p:nvPr/>
+          </p:nvPicPr>
+          <p:blipFill>
+            <a:blip r:embed="rId6">
+              <a:extLst>
+                <a:ext uri="{28A0092B-C50C-407E-A947-70E740481C1C}">
+                  <a14:useLocalDpi xmlns:a14="http://schemas.microsoft.com/office/drawing/2010/main" val="0"/>
+                </a:ext>
+              </a:extLst>
+            </a:blip>
+            <a:srcRect/>
+            <a:stretch>
+              <a:fillRect/>
+            </a:stretch>
+          </p:blipFill>
+          <p:spPr bwMode="auto">
+            <a:xfrm>
+              <a:off x="6300192" y="4221088"/>
+              <a:ext cx="806090" cy="936104"/>
+            </a:xfrm>
+            <a:prstGeom prst="rect">
+              <a:avLst/>
+            </a:prstGeom>
+            <a:noFill/>
+            <a:extLst>
+              <a:ext uri="{909E8E84-426E-40DD-AFC4-6F175D3DCCD1}">
+                <a14:hiddenFill xmlns:a14="http://schemas.microsoft.com/office/drawing/2010/main">
+                  <a:solidFill>
+                    <a:srgbClr val="FFFFFF"/>
+                  </a:solidFill>
+                </a14:hiddenFill>
+              </a:ext>
+            </a:extLst>
+          </p:spPr>
+        </p:pic>
+        <p:pic>
+          <p:nvPicPr>
+            <p:cNvPr id="32" name="図 31">
+              <a:extLst>
+                <a:ext uri="{FF2B5EF4-FFF2-40B4-BE49-F238E27FC236}">
+                  <a16:creationId xmlns:a16="http://schemas.microsoft.com/office/drawing/2014/main" id="{EA1E063B-D53C-4138-09B6-FA1F12FD65E5}"/>
+                </a:ext>
+              </a:extLst>
+            </p:cNvPr>
+            <p:cNvPicPr>
+              <a:picLocks noChangeAspect="1"/>
+            </p:cNvPicPr>
+            <p:nvPr/>
+          </p:nvPicPr>
+          <p:blipFill>
+            <a:blip r:embed="rId7"/>
+            <a:stretch>
+              <a:fillRect/>
+            </a:stretch>
+          </p:blipFill>
+          <p:spPr>
+            <a:xfrm>
+              <a:off x="6444208" y="4509120"/>
+              <a:ext cx="485814" cy="449739"/>
+            </a:xfrm>
+            <a:prstGeom prst="rect">
+              <a:avLst/>
+            </a:prstGeom>
+          </p:spPr>
+        </p:pic>
+      </p:grpSp>
+      <p:sp>
+        <p:nvSpPr>
+          <p:cNvPr id="33" name="右矢印 32">
+            <a:extLst>
+              <a:ext uri="{FF2B5EF4-FFF2-40B4-BE49-F238E27FC236}">
+                <a16:creationId xmlns:a16="http://schemas.microsoft.com/office/drawing/2014/main" id="{A3D8DE46-6C94-1EE8-C7D2-48E8A07226D5}"/>
+              </a:ext>
+            </a:extLst>
+          </p:cNvPr>
+          <p:cNvSpPr/>
+          <p:nvPr/>
+        </p:nvSpPr>
+        <p:spPr>
+          <a:xfrm>
+            <a:off x="7308304" y="4509120"/>
+            <a:ext cx="504056" cy="576064"/>
+          </a:xfrm>
+          <a:prstGeom prst="rightArrow">
+            <a:avLst/>
+          </a:prstGeom>
+          <a:solidFill>
+            <a:srgbClr val="FF0000"/>
+          </a:solidFill>
+          <a:ln>
+            <a:solidFill>
+              <a:schemeClr val="tx1"/>
+            </a:solidFill>
+          </a:ln>
+        </p:spPr>
+        <p:style>
+          <a:lnRef idx="2">
+            <a:schemeClr val="accent1">
+              <a:shade val="50000"/>
+            </a:schemeClr>
+          </a:lnRef>
+          <a:fillRef idx="1">
+            <a:schemeClr val="accent1"/>
+          </a:fillRef>
+          <a:effectRef idx="0">
+            <a:schemeClr val="accent1"/>
+          </a:effectRef>
+          <a:fontRef idx="minor">
+            <a:schemeClr val="lt1"/>
+          </a:fontRef>
+        </p:style>
+        <p:txBody>
+          <a:bodyPr rtlCol="0" anchor="ctr"/>
+          <a:lstStyle/>
+          <a:p>
+            <a:pPr algn="ctr"/>
+            <a:endParaRPr kumimoji="1" lang="ja-JP" altLang="en-US"/>
+          </a:p>
+        </p:txBody>
+      </p:sp>
+      <p:sp>
+        <p:nvSpPr>
+          <p:cNvPr id="34" name="テキスト ボックス 33">
+            <a:extLst>
+              <a:ext uri="{FF2B5EF4-FFF2-40B4-BE49-F238E27FC236}">
+                <a16:creationId xmlns:a16="http://schemas.microsoft.com/office/drawing/2014/main" id="{0BD46189-4EB6-E356-5282-83D7FD16D71B}"/>
+              </a:ext>
+            </a:extLst>
+          </p:cNvPr>
+          <p:cNvSpPr txBox="1"/>
+          <p:nvPr/>
+        </p:nvSpPr>
+        <p:spPr>
+          <a:xfrm>
+            <a:off x="8028384" y="3933056"/>
+            <a:ext cx="415498" cy="369332"/>
+          </a:xfrm>
+          <a:prstGeom prst="rect">
+            <a:avLst/>
+          </a:prstGeom>
+          <a:noFill/>
+        </p:spPr>
+        <p:txBody>
+          <a:bodyPr wrap="none" rtlCol="0">
+            <a:spAutoFit/>
+          </a:bodyPr>
+          <a:lstStyle/>
+          <a:p>
+            <a:r>
+              <a:rPr lang="ja-JP" altLang="en-US"/>
+              <a:t>図</a:t>
+            </a:r>
+            <a:endParaRPr kumimoji="1" lang="ja-JP" altLang="en-US"/>
+          </a:p>
+        </p:txBody>
+      </p:sp>
+      <p:sp>
+        <p:nvSpPr>
+          <p:cNvPr id="35" name="テキスト ボックス 34">
+            <a:extLst>
+              <a:ext uri="{FF2B5EF4-FFF2-40B4-BE49-F238E27FC236}">
+                <a16:creationId xmlns:a16="http://schemas.microsoft.com/office/drawing/2014/main" id="{AD785971-63B8-E7F9-8105-E6033E84C13C}"/>
+              </a:ext>
+            </a:extLst>
+          </p:cNvPr>
+          <p:cNvSpPr txBox="1"/>
+          <p:nvPr/>
+        </p:nvSpPr>
+        <p:spPr>
+          <a:xfrm>
+            <a:off x="1043608" y="5589240"/>
+            <a:ext cx="184731" cy="369332"/>
+          </a:xfrm>
+          <a:prstGeom prst="rect">
+            <a:avLst/>
+          </a:prstGeom>
+          <a:noFill/>
+        </p:spPr>
+        <p:txBody>
+          <a:bodyPr wrap="none" rtlCol="0">
+            <a:spAutoFit/>
+          </a:bodyPr>
+          <a:lstStyle/>
+          <a:p>
+            <a:endParaRPr kumimoji="1" lang="ja-JP" altLang="en-US"/>
+          </a:p>
+        </p:txBody>
+      </p:sp>
+      <p:sp>
+        <p:nvSpPr>
+          <p:cNvPr id="36" name="テキスト ボックス 35">
+            <a:extLst>
+              <a:ext uri="{FF2B5EF4-FFF2-40B4-BE49-F238E27FC236}">
+                <a16:creationId xmlns:a16="http://schemas.microsoft.com/office/drawing/2014/main" id="{68EB9717-1798-445A-ECBE-2E02DD7A43B6}"/>
+              </a:ext>
+            </a:extLst>
+          </p:cNvPr>
+          <p:cNvSpPr txBox="1"/>
+          <p:nvPr/>
+        </p:nvSpPr>
+        <p:spPr>
+          <a:xfrm>
+            <a:off x="251520" y="5430705"/>
+            <a:ext cx="7968848" cy="707886"/>
+          </a:xfrm>
+          <a:prstGeom prst="rect">
+            <a:avLst/>
+          </a:prstGeom>
+          <a:noFill/>
+        </p:spPr>
+        <p:txBody>
+          <a:bodyPr wrap="none" rtlCol="0">
+            <a:spAutoFit/>
+          </a:bodyPr>
+          <a:lstStyle/>
+          <a:p>
+            <a:pPr marL="342900" indent="-342900">
+              <a:buFont typeface="Arial" panose="020B0604020202020204" pitchFamily="34" charset="0"/>
+              <a:buChar char="•"/>
+            </a:pPr>
+            <a:r>
+              <a:rPr lang="ja-JP" altLang="en-US" sz="2000" dirty="0"/>
+              <a:t>線の太さや軸のフォントなど、図はなんども作り直すから</a:t>
+            </a:r>
+            <a:endParaRPr lang="en-US" altLang="ja-JP" sz="2000" dirty="0"/>
+          </a:p>
+          <a:p>
+            <a:pPr marL="342900" indent="-342900">
+              <a:buFont typeface="Arial" panose="020B0604020202020204" pitchFamily="34" charset="0"/>
+              <a:buChar char="•"/>
+            </a:pPr>
+            <a:r>
+              <a:rPr kumimoji="1" lang="ja-JP" altLang="en-US" sz="2000" dirty="0"/>
+              <a:t>結果ファイルと図の作成プログラムを論文リポジトリに入れたい</a:t>
+            </a:r>
+            <a:endParaRPr kumimoji="1" lang="en-US" altLang="ja-JP" sz="2000" dirty="0"/>
+          </a:p>
+        </p:txBody>
+      </p:sp>
+    </p:spTree>
+    <p:extLst>
+      <p:ext uri="{BB962C8B-B14F-4D97-AF65-F5344CB8AC3E}">
+        <p14:creationId xmlns:p14="http://schemas.microsoft.com/office/powerpoint/2010/main" val="2835885306"/>
+      </p:ext>
+    </p:extLst>
+  </p:cSld>
+  <p:clrMapOvr>
+    <a:masterClrMapping/>
+  </p:clrMapOvr>
+</p:sld>
+</file>
+
+<file path=ppt/slides/slide13.xml><?xml version="1.0" encoding="utf-8"?>
+<p:sld xmlns:a="http://schemas.openxmlformats.org/drawingml/2006/main" xmlns:r="http://schemas.openxmlformats.org/officeDocument/2006/relationships" xmlns:p="http://schemas.openxmlformats.org/presentationml/2006/main">
+  <p:cSld>
+    <p:spTree>
+      <p:nvGrpSpPr>
+        <p:cNvPr id="1" name=""/>
+        <p:cNvGrpSpPr/>
+        <p:nvPr/>
+      </p:nvGrpSpPr>
+      <p:grpSpPr>
+        <a:xfrm>
+          <a:off x="0" y="0"/>
+          <a:ext cx="0" cy="0"/>
+          <a:chOff x="0" y="0"/>
+          <a:chExt cx="0" cy="0"/>
+        </a:xfrm>
+      </p:grpSpPr>
+      <p:sp>
+        <p:nvSpPr>
+          <p:cNvPr id="2" name="テキスト プレースホルダー 1">
+            <a:extLst>
+              <a:ext uri="{FF2B5EF4-FFF2-40B4-BE49-F238E27FC236}">
+                <a16:creationId xmlns:a16="http://schemas.microsoft.com/office/drawing/2014/main" id="{2612360C-921B-0CB5-33EE-F30F80B01F80}"/>
+              </a:ext>
+            </a:extLst>
+          </p:cNvPr>
+          <p:cNvSpPr>
+            <a:spLocks noGrp="1"/>
+          </p:cNvSpPr>
+          <p:nvPr>
+            <p:ph type="body" sz="quarter" idx="10"/>
+          </p:nvPr>
+        </p:nvSpPr>
+        <p:spPr/>
+        <p:txBody>
+          <a:bodyPr/>
+          <a:lstStyle/>
+          <a:p>
+            <a:r>
+              <a:rPr lang="ja-JP" altLang="en-US"/>
+              <a:t>論文執筆</a:t>
+            </a:r>
+          </a:p>
+        </p:txBody>
+      </p:sp>
+      <p:sp>
+        <p:nvSpPr>
+          <p:cNvPr id="3" name="テキスト ボックス 2">
+            <a:extLst>
+              <a:ext uri="{FF2B5EF4-FFF2-40B4-BE49-F238E27FC236}">
+                <a16:creationId xmlns:a16="http://schemas.microsoft.com/office/drawing/2014/main" id="{13D90F22-75E4-9866-8C8B-EC379AD1ADD6}"/>
+              </a:ext>
+            </a:extLst>
+          </p:cNvPr>
+          <p:cNvSpPr txBox="1"/>
+          <p:nvPr/>
+        </p:nvSpPr>
+        <p:spPr>
+          <a:xfrm>
+            <a:off x="755576" y="980728"/>
+            <a:ext cx="7160935" cy="584775"/>
+          </a:xfrm>
+          <a:prstGeom prst="rect">
+            <a:avLst/>
+          </a:prstGeom>
+          <a:noFill/>
+        </p:spPr>
+        <p:txBody>
+          <a:bodyPr wrap="none" rtlCol="0">
+            <a:spAutoFit/>
+          </a:bodyPr>
+          <a:lstStyle/>
+          <a:p>
+            <a:r>
+              <a:rPr lang="ja-JP" altLang="en-US" sz="3200"/>
+              <a:t>図とスクリプトのファイル名は揃える</a:t>
+            </a:r>
+            <a:endParaRPr kumimoji="1" lang="ja-JP" altLang="en-US" sz="3200"/>
+          </a:p>
+        </p:txBody>
+      </p:sp>
+      <p:sp>
+        <p:nvSpPr>
+          <p:cNvPr id="4" name="正方形/長方形 3">
+            <a:extLst>
+              <a:ext uri="{FF2B5EF4-FFF2-40B4-BE49-F238E27FC236}">
+                <a16:creationId xmlns:a16="http://schemas.microsoft.com/office/drawing/2014/main" id="{6B96E526-AE08-F379-7DEF-D68A79777279}"/>
+              </a:ext>
+            </a:extLst>
+          </p:cNvPr>
+          <p:cNvSpPr/>
+          <p:nvPr/>
+        </p:nvSpPr>
+        <p:spPr>
+          <a:xfrm>
+            <a:off x="5796136" y="2132856"/>
+            <a:ext cx="2358008" cy="2308324"/>
+          </a:xfrm>
+          <a:prstGeom prst="rect">
+            <a:avLst/>
+          </a:prstGeom>
+          <a:solidFill>
+            <a:schemeClr val="bg1"/>
+          </a:solidFill>
+          <a:ln>
+            <a:solidFill>
+              <a:schemeClr val="tx1"/>
+            </a:solidFill>
+          </a:ln>
+        </p:spPr>
+        <p:txBody>
+          <a:bodyPr wrap="square">
+            <a:spAutoFit/>
+          </a:bodyPr>
+          <a:lstStyle/>
+          <a:p>
+            <a:r>
+              <a:rPr lang="ja-JP" altLang="en-US"/>
+              <a:t>0.000000 0.041263</a:t>
+            </a:r>
+          </a:p>
+          <a:p>
+            <a:r>
+              <a:rPr lang="ja-JP" altLang="en-US"/>
+              <a:t>0.100000 0.143985</a:t>
+            </a:r>
+          </a:p>
+          <a:p>
+            <a:r>
+              <a:rPr lang="ja-JP" altLang="en-US"/>
+              <a:t>0.200000 0.188462</a:t>
+            </a:r>
+          </a:p>
+          <a:p>
+            <a:r>
+              <a:rPr lang="ja-JP" altLang="en-US"/>
+              <a:t>0.300000 0.241296</a:t>
+            </a:r>
+          </a:p>
+          <a:p>
+            <a:r>
+              <a:rPr lang="ja-JP" altLang="en-US"/>
+              <a:t>0.400000 0.264365</a:t>
+            </a:r>
+          </a:p>
+          <a:p>
+            <a:r>
+              <a:rPr lang="ja-JP" altLang="en-US"/>
+              <a:t>0.500000 0.309186</a:t>
+            </a:r>
+          </a:p>
+          <a:p>
+            <a:r>
+              <a:rPr lang="ja-JP" altLang="en-US"/>
+              <a:t>0.600000 0.444013</a:t>
+            </a:r>
+            <a:endParaRPr lang="en-US" altLang="ja-JP"/>
+          </a:p>
+          <a:p>
+            <a:r>
+              <a:rPr lang="en-US" altLang="ja-JP"/>
+              <a:t>....</a:t>
+            </a:r>
+            <a:endParaRPr lang="ja-JP" altLang="en-US"/>
+          </a:p>
+        </p:txBody>
+      </p:sp>
+      <p:sp>
+        <p:nvSpPr>
+          <p:cNvPr id="5" name="テキスト ボックス 4">
+            <a:extLst>
+              <a:ext uri="{FF2B5EF4-FFF2-40B4-BE49-F238E27FC236}">
+                <a16:creationId xmlns:a16="http://schemas.microsoft.com/office/drawing/2014/main" id="{56F7F615-D770-84E6-BA37-AF0982AE3744}"/>
+              </a:ext>
+            </a:extLst>
+          </p:cNvPr>
+          <p:cNvSpPr txBox="1"/>
+          <p:nvPr/>
+        </p:nvSpPr>
+        <p:spPr>
+          <a:xfrm>
+            <a:off x="6084168" y="1700808"/>
+            <a:ext cx="1704313" cy="369332"/>
+          </a:xfrm>
+          <a:prstGeom prst="rect">
+            <a:avLst/>
+          </a:prstGeom>
+          <a:noFill/>
+        </p:spPr>
+        <p:txBody>
+          <a:bodyPr wrap="none" rtlCol="0">
+            <a:spAutoFit/>
+          </a:bodyPr>
+          <a:lstStyle/>
+          <a:p>
+            <a:r>
+              <a:rPr kumimoji="1" lang="en-US" altLang="ja-JP">
+                <a:latin typeface="Consolas" panose="020B0609020204030204" pitchFamily="49" charset="0"/>
+              </a:rPr>
+              <a:t>pressure.dat</a:t>
+            </a:r>
+            <a:endParaRPr kumimoji="1" lang="ja-JP" altLang="en-US">
+              <a:latin typeface="Consolas" panose="020B0609020204030204" pitchFamily="49" charset="0"/>
+            </a:endParaRPr>
+          </a:p>
+        </p:txBody>
+      </p:sp>
+      <p:sp>
+        <p:nvSpPr>
+          <p:cNvPr id="6" name="右矢印 5">
+            <a:extLst>
+              <a:ext uri="{FF2B5EF4-FFF2-40B4-BE49-F238E27FC236}">
+                <a16:creationId xmlns:a16="http://schemas.microsoft.com/office/drawing/2014/main" id="{E1E3AA9A-2ABB-02C8-1E0E-0B7E11FB35FC}"/>
+              </a:ext>
+            </a:extLst>
+          </p:cNvPr>
+          <p:cNvSpPr/>
+          <p:nvPr/>
+        </p:nvSpPr>
+        <p:spPr>
+          <a:xfrm rot="10800000">
+            <a:off x="5076056" y="2708920"/>
+            <a:ext cx="576064" cy="504056"/>
+          </a:xfrm>
+          <a:prstGeom prst="rightArrow">
+            <a:avLst/>
+          </a:prstGeom>
+          <a:solidFill>
+            <a:srgbClr val="FF0000"/>
+          </a:solidFill>
+          <a:ln>
+            <a:solidFill>
+              <a:schemeClr val="tx1"/>
+            </a:solidFill>
+          </a:ln>
+        </p:spPr>
+        <p:style>
+          <a:lnRef idx="2">
+            <a:schemeClr val="accent1">
+              <a:shade val="50000"/>
+            </a:schemeClr>
+          </a:lnRef>
+          <a:fillRef idx="1">
+            <a:schemeClr val="accent1"/>
+          </a:fillRef>
+          <a:effectRef idx="0">
+            <a:schemeClr val="accent1"/>
+          </a:effectRef>
+          <a:fontRef idx="minor">
+            <a:schemeClr val="lt1"/>
+          </a:fontRef>
+        </p:style>
+        <p:txBody>
+          <a:bodyPr rtlCol="0" anchor="ctr"/>
+          <a:lstStyle/>
+          <a:p>
+            <a:pPr algn="ctr"/>
+            <a:endParaRPr kumimoji="1" lang="ja-JP" altLang="en-US"/>
+          </a:p>
+        </p:txBody>
+      </p:sp>
+      <p:sp>
+        <p:nvSpPr>
+          <p:cNvPr id="7" name="正方形/長方形 6">
+            <a:extLst>
+              <a:ext uri="{FF2B5EF4-FFF2-40B4-BE49-F238E27FC236}">
+                <a16:creationId xmlns:a16="http://schemas.microsoft.com/office/drawing/2014/main" id="{F9ADDDE2-CAAA-A38C-12DA-DCC0878C0680}"/>
+              </a:ext>
+            </a:extLst>
+          </p:cNvPr>
+          <p:cNvSpPr/>
+          <p:nvPr/>
+        </p:nvSpPr>
+        <p:spPr>
+          <a:xfrm>
+            <a:off x="323528" y="2204864"/>
+            <a:ext cx="4572000" cy="1477328"/>
+          </a:xfrm>
+          <a:prstGeom prst="rect">
+            <a:avLst/>
+          </a:prstGeom>
+          <a:solidFill>
+            <a:schemeClr val="bg1"/>
+          </a:solidFill>
+          <a:ln>
+            <a:solidFill>
+              <a:schemeClr val="tx1"/>
+            </a:solidFill>
+          </a:ln>
+        </p:spPr>
+        <p:txBody>
+          <a:bodyPr>
+            <a:spAutoFit/>
+          </a:bodyPr>
+          <a:lstStyle/>
+          <a:p>
+            <a:r>
+              <a:rPr lang="ja-JP" altLang="en-US">
+                <a:latin typeface="Consolas" panose="020B0609020204030204" pitchFamily="49" charset="0"/>
+              </a:rPr>
+              <a:t>set term pdf</a:t>
+            </a:r>
+          </a:p>
+          <a:p>
+            <a:r>
+              <a:rPr lang="ja-JP" altLang="en-US">
+                <a:latin typeface="Consolas" panose="020B0609020204030204" pitchFamily="49" charset="0"/>
+              </a:rPr>
+              <a:t>set out "</a:t>
+            </a:r>
+            <a:r>
+              <a:rPr lang="ja-JP" altLang="en-US">
+                <a:solidFill>
+                  <a:srgbClr val="FF0000"/>
+                </a:solidFill>
+                <a:latin typeface="Consolas" panose="020B0609020204030204" pitchFamily="49" charset="0"/>
+              </a:rPr>
+              <a:t>pressure</a:t>
+            </a:r>
+            <a:r>
+              <a:rPr lang="ja-JP" altLang="en-US">
+                <a:latin typeface="Consolas" panose="020B0609020204030204" pitchFamily="49" charset="0"/>
+              </a:rPr>
+              <a:t>.pdf"</a:t>
+            </a:r>
+          </a:p>
+          <a:p>
+            <a:r>
+              <a:rPr lang="ja-JP" altLang="en-US">
+                <a:latin typeface="Consolas" panose="020B0609020204030204" pitchFamily="49" charset="0"/>
+              </a:rPr>
+              <a:t>set xlabel "t"</a:t>
+            </a:r>
+          </a:p>
+          <a:p>
+            <a:r>
+              <a:rPr lang="ja-JP" altLang="en-US">
+                <a:latin typeface="Consolas" panose="020B0609020204030204" pitchFamily="49" charset="0"/>
+              </a:rPr>
+              <a:t>set ylabel "P"</a:t>
+            </a:r>
+          </a:p>
+          <a:p>
+            <a:r>
+              <a:rPr lang="ja-JP" altLang="en-US">
+                <a:latin typeface="Consolas" panose="020B0609020204030204" pitchFamily="49" charset="0"/>
+              </a:rPr>
+              <a:t>p "pressure.dat" pt 6 t "Data"</a:t>
+            </a:r>
+          </a:p>
+        </p:txBody>
+      </p:sp>
+      <p:sp>
+        <p:nvSpPr>
+          <p:cNvPr id="8" name="テキスト ボックス 7">
+            <a:extLst>
+              <a:ext uri="{FF2B5EF4-FFF2-40B4-BE49-F238E27FC236}">
+                <a16:creationId xmlns:a16="http://schemas.microsoft.com/office/drawing/2014/main" id="{F50B591A-C18D-7C26-8CC9-0FC3D2AA69FA}"/>
+              </a:ext>
+            </a:extLst>
+          </p:cNvPr>
+          <p:cNvSpPr txBox="1"/>
+          <p:nvPr/>
+        </p:nvSpPr>
+        <p:spPr>
+          <a:xfrm>
+            <a:off x="1043608" y="1772816"/>
+            <a:ext cx="1704313" cy="369332"/>
+          </a:xfrm>
+          <a:prstGeom prst="rect">
+            <a:avLst/>
+          </a:prstGeom>
+          <a:noFill/>
+        </p:spPr>
+        <p:txBody>
+          <a:bodyPr wrap="none" rtlCol="0">
+            <a:spAutoFit/>
+          </a:bodyPr>
+          <a:lstStyle/>
+          <a:p>
+            <a:r>
+              <a:rPr kumimoji="1" lang="en-US" altLang="ja-JP">
+                <a:latin typeface="Consolas" panose="020B0609020204030204" pitchFamily="49" charset="0"/>
+              </a:rPr>
+              <a:t>pressure.plt</a:t>
+            </a:r>
+            <a:endParaRPr kumimoji="1" lang="ja-JP" altLang="en-US">
+              <a:latin typeface="Consolas" panose="020B0609020204030204" pitchFamily="49" charset="0"/>
+            </a:endParaRPr>
+          </a:p>
+        </p:txBody>
+      </p:sp>
+      <p:sp>
+        <p:nvSpPr>
+          <p:cNvPr id="9" name="右矢印 8">
+            <a:extLst>
+              <a:ext uri="{FF2B5EF4-FFF2-40B4-BE49-F238E27FC236}">
+                <a16:creationId xmlns:a16="http://schemas.microsoft.com/office/drawing/2014/main" id="{2547A54D-A5AC-D3F7-CE65-A834DED1E809}"/>
+              </a:ext>
+            </a:extLst>
+          </p:cNvPr>
+          <p:cNvSpPr/>
+          <p:nvPr/>
+        </p:nvSpPr>
+        <p:spPr>
+          <a:xfrm rot="5400000">
+            <a:off x="1871700" y="3825044"/>
+            <a:ext cx="576064" cy="504056"/>
+          </a:xfrm>
+          <a:prstGeom prst="rightArrow">
+            <a:avLst/>
+          </a:prstGeom>
+          <a:solidFill>
+            <a:srgbClr val="FF0000"/>
+          </a:solidFill>
+          <a:ln>
+            <a:solidFill>
+              <a:schemeClr val="tx1"/>
+            </a:solidFill>
+          </a:ln>
+        </p:spPr>
+        <p:style>
+          <a:lnRef idx="2">
+            <a:schemeClr val="accent1">
+              <a:shade val="50000"/>
+            </a:schemeClr>
+          </a:lnRef>
+          <a:fillRef idx="1">
+            <a:schemeClr val="accent1"/>
+          </a:fillRef>
+          <a:effectRef idx="0">
+            <a:schemeClr val="accent1"/>
+          </a:effectRef>
+          <a:fontRef idx="minor">
+            <a:schemeClr val="lt1"/>
+          </a:fontRef>
+        </p:style>
+        <p:txBody>
+          <a:bodyPr rtlCol="0" anchor="ctr"/>
+          <a:lstStyle/>
+          <a:p>
+            <a:pPr algn="ctr"/>
+            <a:endParaRPr kumimoji="1" lang="ja-JP" altLang="en-US"/>
+          </a:p>
+        </p:txBody>
+      </p:sp>
+      <p:sp>
+        <p:nvSpPr>
+          <p:cNvPr id="10" name="テキスト ボックス 9">
+            <a:extLst>
+              <a:ext uri="{FF2B5EF4-FFF2-40B4-BE49-F238E27FC236}">
+                <a16:creationId xmlns:a16="http://schemas.microsoft.com/office/drawing/2014/main" id="{794A5C46-4C18-E9C7-C10A-8AEADFE8437E}"/>
+              </a:ext>
+            </a:extLst>
+          </p:cNvPr>
+          <p:cNvSpPr txBox="1"/>
+          <p:nvPr/>
+        </p:nvSpPr>
+        <p:spPr>
+          <a:xfrm>
+            <a:off x="2483768" y="3861048"/>
+            <a:ext cx="2970685" cy="369332"/>
+          </a:xfrm>
+          <a:prstGeom prst="rect">
+            <a:avLst/>
+          </a:prstGeom>
+          <a:noFill/>
+        </p:spPr>
+        <p:txBody>
+          <a:bodyPr wrap="none" rtlCol="0">
+            <a:spAutoFit/>
+          </a:bodyPr>
+          <a:lstStyle/>
+          <a:p>
+            <a:r>
+              <a:rPr kumimoji="1" lang="en-US" altLang="ja-JP">
+                <a:latin typeface="Consolas" panose="020B0609020204030204" pitchFamily="49" charset="0"/>
+              </a:rPr>
+              <a:t>$ gnuplot </a:t>
+            </a:r>
+            <a:r>
+              <a:rPr kumimoji="1" lang="en-US" altLang="ja-JP">
+                <a:solidFill>
+                  <a:srgbClr val="FF0000"/>
+                </a:solidFill>
+                <a:latin typeface="Consolas" panose="020B0609020204030204" pitchFamily="49" charset="0"/>
+              </a:rPr>
+              <a:t>pressure</a:t>
+            </a:r>
+            <a:r>
+              <a:rPr kumimoji="1" lang="en-US" altLang="ja-JP">
+                <a:latin typeface="Consolas" panose="020B0609020204030204" pitchFamily="49" charset="0"/>
+              </a:rPr>
+              <a:t>.plt</a:t>
+            </a:r>
+            <a:endParaRPr kumimoji="1" lang="ja-JP" altLang="en-US">
+              <a:latin typeface="Consolas" panose="020B0609020204030204" pitchFamily="49" charset="0"/>
+            </a:endParaRPr>
+          </a:p>
+        </p:txBody>
+      </p:sp>
+      <p:pic>
+        <p:nvPicPr>
+          <p:cNvPr id="11" name="図 10">
+            <a:extLst>
+              <a:ext uri="{FF2B5EF4-FFF2-40B4-BE49-F238E27FC236}">
+                <a16:creationId xmlns:a16="http://schemas.microsoft.com/office/drawing/2014/main" id="{F9724CCF-C697-996A-2A88-929DD850807A}"/>
+              </a:ext>
+            </a:extLst>
+          </p:cNvPr>
+          <p:cNvPicPr>
+            <a:picLocks noChangeAspect="1"/>
+          </p:cNvPicPr>
+          <p:nvPr/>
+        </p:nvPicPr>
+        <p:blipFill>
+          <a:blip r:embed="rId2"/>
+          <a:stretch>
+            <a:fillRect/>
+          </a:stretch>
+        </p:blipFill>
+        <p:spPr>
+          <a:xfrm>
+            <a:off x="395536" y="4725144"/>
+            <a:ext cx="3294460" cy="1978298"/>
+          </a:xfrm>
+          <a:prstGeom prst="rect">
+            <a:avLst/>
+          </a:prstGeom>
+        </p:spPr>
+      </p:pic>
+      <p:sp>
+        <p:nvSpPr>
+          <p:cNvPr id="12" name="テキスト ボックス 11">
+            <a:extLst>
+              <a:ext uri="{FF2B5EF4-FFF2-40B4-BE49-F238E27FC236}">
+                <a16:creationId xmlns:a16="http://schemas.microsoft.com/office/drawing/2014/main" id="{D52ABA35-C760-8213-DAE9-970E41F50A23}"/>
+              </a:ext>
+            </a:extLst>
+          </p:cNvPr>
+          <p:cNvSpPr txBox="1"/>
+          <p:nvPr/>
+        </p:nvSpPr>
+        <p:spPr>
+          <a:xfrm>
+            <a:off x="1403648" y="4365104"/>
+            <a:ext cx="1704313" cy="369332"/>
+          </a:xfrm>
+          <a:prstGeom prst="rect">
+            <a:avLst/>
+          </a:prstGeom>
+          <a:noFill/>
+        </p:spPr>
+        <p:txBody>
+          <a:bodyPr wrap="none" rtlCol="0">
+            <a:spAutoFit/>
+          </a:bodyPr>
+          <a:lstStyle/>
+          <a:p>
+            <a:r>
+              <a:rPr kumimoji="1" lang="en-US" altLang="ja-JP">
+                <a:solidFill>
+                  <a:srgbClr val="FF0000"/>
+                </a:solidFill>
+                <a:latin typeface="Consolas" panose="020B0609020204030204" pitchFamily="49" charset="0"/>
+              </a:rPr>
+              <a:t>pressure</a:t>
+            </a:r>
+            <a:r>
+              <a:rPr kumimoji="1" lang="en-US" altLang="ja-JP">
+                <a:latin typeface="Consolas" panose="020B0609020204030204" pitchFamily="49" charset="0"/>
+              </a:rPr>
+              <a:t>.pdf</a:t>
+            </a:r>
+            <a:endParaRPr kumimoji="1" lang="ja-JP" altLang="en-US">
+              <a:latin typeface="Consolas" panose="020B0609020204030204" pitchFamily="49" charset="0"/>
+            </a:endParaRPr>
+          </a:p>
+        </p:txBody>
+      </p:sp>
+      <p:sp>
+        <p:nvSpPr>
+          <p:cNvPr id="13" name="テキスト ボックス 12">
+            <a:extLst>
+              <a:ext uri="{FF2B5EF4-FFF2-40B4-BE49-F238E27FC236}">
+                <a16:creationId xmlns:a16="http://schemas.microsoft.com/office/drawing/2014/main" id="{137094A2-FF1A-D8FA-E98C-C2F731490AFE}"/>
+              </a:ext>
+            </a:extLst>
+          </p:cNvPr>
+          <p:cNvSpPr txBox="1"/>
+          <p:nvPr/>
+        </p:nvSpPr>
+        <p:spPr>
+          <a:xfrm>
+            <a:off x="3984795" y="5157192"/>
+            <a:ext cx="4057521" cy="646331"/>
+          </a:xfrm>
+          <a:prstGeom prst="rect">
+            <a:avLst/>
+          </a:prstGeom>
+          <a:noFill/>
+        </p:spPr>
+        <p:txBody>
+          <a:bodyPr wrap="none" rtlCol="0">
+            <a:spAutoFit/>
+          </a:bodyPr>
+          <a:lstStyle/>
+          <a:p>
+            <a:r>
+              <a:rPr lang="en-US" altLang="ja-JP" dirty="0">
+                <a:latin typeface="Consolas" panose="020B0609020204030204" pitchFamily="49" charset="0"/>
+              </a:rPr>
+              <a:t>hoge.pdf</a:t>
+            </a:r>
+            <a:r>
+              <a:rPr lang="ja-JP" altLang="en-US" dirty="0"/>
+              <a:t>を作りたければ</a:t>
+            </a:r>
+            <a:r>
+              <a:rPr lang="en-US" altLang="ja-JP" dirty="0" err="1">
+                <a:latin typeface="Consolas" panose="020B0609020204030204" pitchFamily="49" charset="0"/>
+              </a:rPr>
+              <a:t>hoge.plt</a:t>
+            </a:r>
+            <a:r>
+              <a:rPr lang="ja-JP" altLang="en-US" dirty="0">
+                <a:latin typeface="Consolas" panose="020B0609020204030204" pitchFamily="49" charset="0"/>
+              </a:rPr>
+              <a:t>や</a:t>
+            </a:r>
+            <a:endParaRPr lang="en-US" altLang="ja-JP" dirty="0"/>
+          </a:p>
+          <a:p>
+            <a:r>
+              <a:rPr lang="en-US" altLang="ja-JP" dirty="0">
+                <a:latin typeface="Consolas" panose="020B0609020204030204" pitchFamily="49" charset="0"/>
+              </a:rPr>
+              <a:t>hoge.py</a:t>
+            </a:r>
+            <a:r>
+              <a:rPr lang="ja-JP" altLang="en-US" dirty="0"/>
+              <a:t>を</a:t>
+            </a:r>
+            <a:r>
+              <a:rPr kumimoji="1" lang="ja-JP" altLang="en-US" dirty="0"/>
+              <a:t>探せばよい</a:t>
+            </a:r>
+          </a:p>
+        </p:txBody>
+      </p:sp>
+    </p:spTree>
+    <p:extLst>
+      <p:ext uri="{BB962C8B-B14F-4D97-AF65-F5344CB8AC3E}">
+        <p14:creationId xmlns:p14="http://schemas.microsoft.com/office/powerpoint/2010/main" val="4160180169"/>
+      </p:ext>
+    </p:extLst>
+  </p:cSld>
+  <p:clrMapOvr>
+    <a:masterClrMapping/>
+  </p:clrMapOvr>
+</p:sld>
+</file>
+
+<file path=ppt/slides/slide14.xml><?xml version="1.0" encoding="utf-8"?>
+<p:sld xmlns:a="http://schemas.openxmlformats.org/drawingml/2006/main" xmlns:r="http://schemas.openxmlformats.org/officeDocument/2006/relationships" xmlns:p="http://schemas.openxmlformats.org/presentationml/2006/main">
+  <p:cSld>
+    <p:spTree>
+      <p:nvGrpSpPr>
+        <p:cNvPr id="1" name=""/>
+        <p:cNvGrpSpPr/>
+        <p:nvPr/>
+      </p:nvGrpSpPr>
+      <p:grpSpPr>
+        <a:xfrm>
+          <a:off x="0" y="0"/>
+          <a:ext cx="0" cy="0"/>
+          <a:chOff x="0" y="0"/>
+          <a:chExt cx="0" cy="0"/>
+        </a:xfrm>
+      </p:grpSpPr>
+      <p:sp>
+        <p:nvSpPr>
+          <p:cNvPr id="2" name="テキスト プレースホルダー 1">
+            <a:extLst>
+              <a:ext uri="{FF2B5EF4-FFF2-40B4-BE49-F238E27FC236}">
+                <a16:creationId xmlns:a16="http://schemas.microsoft.com/office/drawing/2014/main" id="{2461E8D0-1FA5-E9CE-FB7A-45503DAEFF9C}"/>
+              </a:ext>
+            </a:extLst>
+          </p:cNvPr>
+          <p:cNvSpPr>
+            <a:spLocks noGrp="1"/>
+          </p:cNvSpPr>
+          <p:nvPr>
+            <p:ph type="body" sz="quarter" idx="10"/>
+          </p:nvPr>
+        </p:nvSpPr>
+        <p:spPr/>
+        <p:txBody>
+          <a:bodyPr/>
+          <a:lstStyle/>
+          <a:p>
+            <a:r>
+              <a:rPr kumimoji="1" lang="ja-JP" altLang="en-US"/>
+              <a:t>論文執筆</a:t>
+            </a:r>
+            <a:endParaRPr kumimoji="1" lang="en-US" altLang="ja-JP" dirty="0"/>
+          </a:p>
+        </p:txBody>
+      </p:sp>
+      <p:sp>
+        <p:nvSpPr>
+          <p:cNvPr id="3" name="テキスト ボックス 2">
+            <a:extLst>
+              <a:ext uri="{FF2B5EF4-FFF2-40B4-BE49-F238E27FC236}">
+                <a16:creationId xmlns:a16="http://schemas.microsoft.com/office/drawing/2014/main" id="{24A4120B-F3A1-99DA-AB86-E65F9FD60D9E}"/>
+              </a:ext>
+            </a:extLst>
+          </p:cNvPr>
+          <p:cNvSpPr txBox="1"/>
+          <p:nvPr/>
+        </p:nvSpPr>
+        <p:spPr>
+          <a:xfrm>
+            <a:off x="395536" y="1116033"/>
+            <a:ext cx="8392041" cy="584775"/>
+          </a:xfrm>
+          <a:prstGeom prst="rect">
+            <a:avLst/>
+          </a:prstGeom>
+          <a:noFill/>
+        </p:spPr>
+        <p:txBody>
+          <a:bodyPr wrap="none" rtlCol="0">
+            <a:spAutoFit/>
+          </a:bodyPr>
+          <a:lstStyle/>
+          <a:p>
+            <a:r>
+              <a:rPr lang="ja-JP" altLang="en-US" sz="3200"/>
+              <a:t>コマンド</a:t>
+            </a:r>
+            <a:r>
+              <a:rPr kumimoji="1" lang="ja-JP" altLang="en-US" sz="3200"/>
+              <a:t>一発で図が全てできるのが望ましい</a:t>
+            </a:r>
+          </a:p>
+        </p:txBody>
+      </p:sp>
+      <p:sp>
+        <p:nvSpPr>
+          <p:cNvPr id="4" name="正方形/長方形 3">
+            <a:extLst>
+              <a:ext uri="{FF2B5EF4-FFF2-40B4-BE49-F238E27FC236}">
+                <a16:creationId xmlns:a16="http://schemas.microsoft.com/office/drawing/2014/main" id="{04A72FB8-1AF3-5715-511E-A76845260ED3}"/>
+              </a:ext>
+            </a:extLst>
+          </p:cNvPr>
+          <p:cNvSpPr/>
+          <p:nvPr/>
+        </p:nvSpPr>
+        <p:spPr>
+          <a:xfrm>
+            <a:off x="1475656" y="3346113"/>
+            <a:ext cx="5904656" cy="1569660"/>
+          </a:xfrm>
+          <a:prstGeom prst="rect">
+            <a:avLst/>
+          </a:prstGeom>
+          <a:solidFill>
+            <a:schemeClr val="bg1"/>
+          </a:solidFill>
+          <a:ln>
+            <a:solidFill>
+              <a:schemeClr val="tx1"/>
+            </a:solidFill>
+          </a:ln>
+        </p:spPr>
+        <p:txBody>
+          <a:bodyPr wrap="square">
+            <a:spAutoFit/>
+          </a:bodyPr>
+          <a:lstStyle/>
+          <a:p>
+            <a:r>
+              <a:rPr lang="ja-JP" altLang="en-US" sz="2400">
+                <a:latin typeface="Consolas" panose="020B0609020204030204" pitchFamily="49" charset="0"/>
+              </a:rPr>
+              <a:t>all: pressure.pdf temperature.pdf</a:t>
+            </a:r>
+          </a:p>
+          <a:p>
+            <a:endParaRPr lang="ja-JP" altLang="en-US" sz="2400">
+              <a:latin typeface="Consolas" panose="020B0609020204030204" pitchFamily="49" charset="0"/>
+            </a:endParaRPr>
+          </a:p>
+          <a:p>
+            <a:r>
+              <a:rPr lang="ja-JP" altLang="en-US" sz="2400">
+                <a:latin typeface="Consolas" panose="020B0609020204030204" pitchFamily="49" charset="0"/>
+              </a:rPr>
+              <a:t>%.pdf: %.plt %.dat</a:t>
+            </a:r>
+          </a:p>
+          <a:p>
+            <a:r>
+              <a:rPr lang="ja-JP" altLang="en-US" sz="2400">
+                <a:latin typeface="Consolas" panose="020B0609020204030204" pitchFamily="49" charset="0"/>
+              </a:rPr>
+              <a:t>	gnuplot $&lt;</a:t>
+            </a:r>
+          </a:p>
+        </p:txBody>
+      </p:sp>
+      <p:sp>
+        <p:nvSpPr>
+          <p:cNvPr id="5" name="テキスト ボックス 4">
+            <a:extLst>
+              <a:ext uri="{FF2B5EF4-FFF2-40B4-BE49-F238E27FC236}">
+                <a16:creationId xmlns:a16="http://schemas.microsoft.com/office/drawing/2014/main" id="{D52BB26E-C472-03E3-21DA-2F1351AB2E21}"/>
+              </a:ext>
+            </a:extLst>
+          </p:cNvPr>
+          <p:cNvSpPr txBox="1"/>
+          <p:nvPr/>
+        </p:nvSpPr>
+        <p:spPr>
+          <a:xfrm>
+            <a:off x="6732240" y="2204864"/>
+            <a:ext cx="2210862" cy="646331"/>
+          </a:xfrm>
+          <a:prstGeom prst="rect">
+            <a:avLst/>
+          </a:prstGeom>
+          <a:noFill/>
+        </p:spPr>
+        <p:txBody>
+          <a:bodyPr wrap="none" rtlCol="0">
+            <a:spAutoFit/>
+          </a:bodyPr>
+          <a:lstStyle/>
+          <a:p>
+            <a:r>
+              <a:rPr lang="en-US" altLang="ja-JP" sz="3600">
+                <a:latin typeface="Consolas" panose="020B0609020204030204" pitchFamily="49" charset="0"/>
+              </a:rPr>
+              <a:t>Makefile</a:t>
+            </a:r>
+            <a:endParaRPr kumimoji="1" lang="ja-JP" altLang="en-US" sz="3600">
+              <a:latin typeface="Consolas" panose="020B0609020204030204" pitchFamily="49" charset="0"/>
+            </a:endParaRPr>
+          </a:p>
+        </p:txBody>
+      </p:sp>
+      <p:sp>
+        <p:nvSpPr>
+          <p:cNvPr id="6" name="テキスト ボックス 5">
+            <a:extLst>
+              <a:ext uri="{FF2B5EF4-FFF2-40B4-BE49-F238E27FC236}">
+                <a16:creationId xmlns:a16="http://schemas.microsoft.com/office/drawing/2014/main" id="{6650170B-D910-10C9-B449-39126160A741}"/>
+              </a:ext>
+            </a:extLst>
+          </p:cNvPr>
+          <p:cNvSpPr txBox="1"/>
+          <p:nvPr/>
+        </p:nvSpPr>
+        <p:spPr>
+          <a:xfrm>
+            <a:off x="179512" y="1916832"/>
+            <a:ext cx="6311343" cy="1200329"/>
+          </a:xfrm>
+          <a:prstGeom prst="rect">
+            <a:avLst/>
+          </a:prstGeom>
+          <a:noFill/>
+        </p:spPr>
+        <p:txBody>
+          <a:bodyPr wrap="none" rtlCol="0">
+            <a:spAutoFit/>
+          </a:bodyPr>
+          <a:lstStyle/>
+          <a:p>
+            <a:r>
+              <a:rPr kumimoji="1" lang="en-US" altLang="ja-JP" sz="2400">
+                <a:latin typeface="Consolas" panose="020B0609020204030204" pitchFamily="49" charset="0"/>
+              </a:rPr>
+              <a:t>pressure.dat</a:t>
+            </a:r>
+            <a:r>
+              <a:rPr kumimoji="1" lang="ja-JP" altLang="en-US" sz="2400"/>
+              <a:t>と</a:t>
+            </a:r>
+            <a:r>
+              <a:rPr kumimoji="1" lang="en-US" altLang="ja-JP" sz="2400">
+                <a:latin typeface="Consolas" panose="020B0609020204030204" pitchFamily="49" charset="0"/>
+              </a:rPr>
+              <a:t>temperature.dat</a:t>
+            </a:r>
+            <a:r>
+              <a:rPr kumimoji="1" lang="ja-JP" altLang="en-US" sz="2400"/>
+              <a:t>から</a:t>
+            </a:r>
+            <a:endParaRPr kumimoji="1" lang="en-US" altLang="ja-JP" sz="2400"/>
+          </a:p>
+          <a:p>
+            <a:r>
+              <a:rPr lang="en-US" altLang="ja-JP" sz="2400">
+                <a:latin typeface="Consolas" panose="020B0609020204030204" pitchFamily="49" charset="0"/>
+              </a:rPr>
+              <a:t>pressure.plt</a:t>
+            </a:r>
+            <a:r>
+              <a:rPr lang="ja-JP" altLang="en-US" sz="2400"/>
+              <a:t>と</a:t>
+            </a:r>
+            <a:r>
+              <a:rPr lang="en-US" altLang="ja-JP" sz="2400">
+                <a:latin typeface="Consolas" panose="020B0609020204030204" pitchFamily="49" charset="0"/>
+              </a:rPr>
+              <a:t>temperature.plt</a:t>
+            </a:r>
+            <a:r>
+              <a:rPr lang="ja-JP" altLang="en-US" sz="2400"/>
+              <a:t>を使って</a:t>
+            </a:r>
+            <a:endParaRPr lang="en-US" altLang="ja-JP" sz="2400"/>
+          </a:p>
+          <a:p>
+            <a:r>
+              <a:rPr kumimoji="1" lang="en-US" altLang="ja-JP" sz="2400">
+                <a:latin typeface="Consolas" panose="020B0609020204030204" pitchFamily="49" charset="0"/>
+              </a:rPr>
+              <a:t>pressure.pdf</a:t>
+            </a:r>
+            <a:r>
+              <a:rPr kumimoji="1" lang="ja-JP" altLang="en-US" sz="2400"/>
+              <a:t>と</a:t>
+            </a:r>
+            <a:r>
+              <a:rPr lang="en-US" altLang="ja-JP" sz="2400">
+                <a:latin typeface="Consolas" panose="020B0609020204030204" pitchFamily="49" charset="0"/>
+              </a:rPr>
+              <a:t>temperature.pdf</a:t>
+            </a:r>
+            <a:r>
+              <a:rPr lang="ja-JP" altLang="en-US" sz="2400"/>
+              <a:t>を作る</a:t>
+            </a:r>
+            <a:endParaRPr lang="en-US" altLang="ja-JP" sz="2400"/>
+          </a:p>
+        </p:txBody>
+      </p:sp>
+      <p:sp>
+        <p:nvSpPr>
+          <p:cNvPr id="7" name="テキスト ボックス 6">
+            <a:extLst>
+              <a:ext uri="{FF2B5EF4-FFF2-40B4-BE49-F238E27FC236}">
+                <a16:creationId xmlns:a16="http://schemas.microsoft.com/office/drawing/2014/main" id="{0CC7D749-2DF6-E6EC-5A1C-B5F2BF1812A2}"/>
+              </a:ext>
+            </a:extLst>
+          </p:cNvPr>
+          <p:cNvSpPr txBox="1"/>
+          <p:nvPr/>
+        </p:nvSpPr>
+        <p:spPr>
+          <a:xfrm>
+            <a:off x="251520" y="5046275"/>
+            <a:ext cx="8640960" cy="830997"/>
+          </a:xfrm>
+          <a:prstGeom prst="rect">
+            <a:avLst/>
+          </a:prstGeom>
+          <a:noFill/>
+        </p:spPr>
+        <p:txBody>
+          <a:bodyPr wrap="square" rtlCol="0">
+            <a:spAutoFit/>
+          </a:bodyPr>
+          <a:lstStyle/>
+          <a:p>
+            <a:r>
+              <a:rPr lang="ja-JP" altLang="en-US" sz="2400"/>
+              <a:t>「そのディレクトリに入って</a:t>
+            </a:r>
+            <a:r>
+              <a:rPr lang="en-US" altLang="ja-JP" sz="2400"/>
+              <a:t>make</a:t>
+            </a:r>
+            <a:r>
+              <a:rPr lang="ja-JP" altLang="en-US" sz="2400"/>
+              <a:t>したら必要なものが揃う」という状況を作る</a:t>
+            </a:r>
+            <a:endParaRPr kumimoji="1" lang="en-US" altLang="ja-JP" sz="2400"/>
+          </a:p>
+        </p:txBody>
+      </p:sp>
+      <p:sp>
+        <p:nvSpPr>
+          <p:cNvPr id="8" name="テキスト ボックス 7">
+            <a:extLst>
+              <a:ext uri="{FF2B5EF4-FFF2-40B4-BE49-F238E27FC236}">
+                <a16:creationId xmlns:a16="http://schemas.microsoft.com/office/drawing/2014/main" id="{E4382F46-FDF7-15C4-F8ED-928F236DBBAF}"/>
+              </a:ext>
+            </a:extLst>
+          </p:cNvPr>
+          <p:cNvSpPr txBox="1"/>
+          <p:nvPr/>
+        </p:nvSpPr>
+        <p:spPr>
+          <a:xfrm>
+            <a:off x="1187624" y="6309320"/>
+            <a:ext cx="7430239" cy="369332"/>
+          </a:xfrm>
+          <a:prstGeom prst="rect">
+            <a:avLst/>
+          </a:prstGeom>
+          <a:noFill/>
+        </p:spPr>
+        <p:txBody>
+          <a:bodyPr wrap="none" rtlCol="0">
+            <a:spAutoFit/>
+          </a:bodyPr>
+          <a:lstStyle/>
+          <a:p>
+            <a:r>
+              <a:rPr lang="en-US" altLang="ja-JP"/>
+              <a:t>※ Python</a:t>
+            </a:r>
+            <a:r>
+              <a:rPr lang="ja-JP" altLang="en-US"/>
+              <a:t>やシェルスクリプト等でも良い。とにかくコマンド一発で。</a:t>
+            </a:r>
+            <a:endParaRPr kumimoji="1" lang="ja-JP" altLang="en-US"/>
+          </a:p>
+        </p:txBody>
+      </p:sp>
+      <p:sp>
+        <p:nvSpPr>
+          <p:cNvPr id="9" name="右中かっこ 8">
+            <a:extLst>
+              <a:ext uri="{FF2B5EF4-FFF2-40B4-BE49-F238E27FC236}">
+                <a16:creationId xmlns:a16="http://schemas.microsoft.com/office/drawing/2014/main" id="{2468B0BE-21FF-8573-5029-A6ED4B70419C}"/>
+              </a:ext>
+            </a:extLst>
+          </p:cNvPr>
+          <p:cNvSpPr/>
+          <p:nvPr/>
+        </p:nvSpPr>
+        <p:spPr>
+          <a:xfrm>
+            <a:off x="6372200" y="1916832"/>
+            <a:ext cx="288032" cy="1274440"/>
+          </a:xfrm>
+          <a:prstGeom prst="rightBrace">
+            <a:avLst/>
+          </a:prstGeom>
+          <a:ln>
+            <a:solidFill>
+              <a:schemeClr val="tx1"/>
+            </a:solidFill>
+            <a:headEnd type="none" w="med" len="med"/>
+            <a:tailEnd type="none" w="med" len="med"/>
+          </a:ln>
+        </p:spPr>
+        <p:style>
+          <a:lnRef idx="1">
+            <a:schemeClr val="accent1"/>
+          </a:lnRef>
+          <a:fillRef idx="0">
+            <a:schemeClr val="accent1"/>
+          </a:fillRef>
+          <a:effectRef idx="0">
+            <a:schemeClr val="accent1"/>
+          </a:effectRef>
+          <a:fontRef idx="minor">
+            <a:schemeClr val="tx1"/>
+          </a:fontRef>
+        </p:style>
+        <p:txBody>
+          <a:bodyPr rtlCol="0" anchor="ctr"/>
+          <a:lstStyle/>
+          <a:p>
+            <a:pPr algn="ctr"/>
+            <a:endParaRPr kumimoji="1" lang="ja-JP" altLang="en-US"/>
+          </a:p>
+        </p:txBody>
+      </p:sp>
+      <p:cxnSp>
+        <p:nvCxnSpPr>
+          <p:cNvPr id="10" name="コネクタ: カギ線 10">
+            <a:extLst>
+              <a:ext uri="{FF2B5EF4-FFF2-40B4-BE49-F238E27FC236}">
+                <a16:creationId xmlns:a16="http://schemas.microsoft.com/office/drawing/2014/main" id="{1C0CB108-5B21-F43F-1913-E80793A94A86}"/>
+              </a:ext>
+            </a:extLst>
+          </p:cNvPr>
+          <p:cNvCxnSpPr>
+            <a:stCxn id="5" idx="2"/>
+            <a:endCxn id="4" idx="3"/>
+          </p:cNvCxnSpPr>
+          <p:nvPr/>
+        </p:nvCxnSpPr>
+        <p:spPr>
+          <a:xfrm rot="5400000">
+            <a:off x="6969118" y="3262390"/>
+            <a:ext cx="1279748" cy="457359"/>
+          </a:xfrm>
+          <a:prstGeom prst="bentConnector2">
+            <a:avLst/>
+          </a:prstGeom>
+          <a:ln>
+            <a:solidFill>
+              <a:schemeClr val="tx1"/>
+            </a:solidFill>
+            <a:headEnd type="none" w="med" len="med"/>
+            <a:tailEnd type="triangle"/>
+          </a:ln>
+        </p:spPr>
+        <p:style>
+          <a:lnRef idx="1">
+            <a:schemeClr val="accent1"/>
+          </a:lnRef>
+          <a:fillRef idx="0">
+            <a:schemeClr val="accent1"/>
+          </a:fillRef>
+          <a:effectRef idx="0">
+            <a:schemeClr val="accent1"/>
+          </a:effectRef>
+          <a:fontRef idx="minor">
+            <a:schemeClr val="tx1"/>
+          </a:fontRef>
+        </p:style>
+      </p:cxnSp>
+    </p:spTree>
+    <p:extLst>
+      <p:ext uri="{BB962C8B-B14F-4D97-AF65-F5344CB8AC3E}">
+        <p14:creationId xmlns:p14="http://schemas.microsoft.com/office/powerpoint/2010/main" val="3819306050"/>
+      </p:ext>
+    </p:extLst>
+  </p:cSld>
+  <p:clrMapOvr>
+    <a:masterClrMapping/>
+  </p:clrMapOvr>
+</p:sld>
+</file>
+
+<file path=ppt/slides/slide15.xml><?xml version="1.0" encoding="utf-8"?>
+<p:sld xmlns:a="http://schemas.openxmlformats.org/drawingml/2006/main" xmlns:r="http://schemas.openxmlformats.org/officeDocument/2006/relationships" xmlns:p="http://schemas.openxmlformats.org/presentationml/2006/main">
+  <p:cSld>
+    <p:spTree>
+      <p:nvGrpSpPr>
+        <p:cNvPr id="1" name=""/>
+        <p:cNvGrpSpPr/>
+        <p:nvPr/>
+      </p:nvGrpSpPr>
+      <p:grpSpPr>
+        <a:xfrm>
+          <a:off x="0" y="0"/>
+          <a:ext cx="0" cy="0"/>
+          <a:chOff x="0" y="0"/>
+          <a:chExt cx="0" cy="0"/>
+        </a:xfrm>
+      </p:grpSpPr>
+      <p:sp>
+        <p:nvSpPr>
+          <p:cNvPr id="6" name="角丸四角形吹き出し 5">
+            <a:extLst>
+              <a:ext uri="{FF2B5EF4-FFF2-40B4-BE49-F238E27FC236}">
+                <a16:creationId xmlns:a16="http://schemas.microsoft.com/office/drawing/2014/main" id="{0FCEB3DF-8A87-D818-FB02-5F09ABDFBD4C}"/>
+              </a:ext>
+            </a:extLst>
+          </p:cNvPr>
+          <p:cNvSpPr/>
+          <p:nvPr/>
+        </p:nvSpPr>
+        <p:spPr>
+          <a:xfrm>
+            <a:off x="3923928" y="1413281"/>
+            <a:ext cx="3240360" cy="1531888"/>
+          </a:xfrm>
+          <a:prstGeom prst="wedgeRoundRectCallout">
+            <a:avLst>
+              <a:gd name="adj1" fmla="val -73167"/>
+              <a:gd name="adj2" fmla="val 15290"/>
+              <a:gd name="adj3" fmla="val 16667"/>
+            </a:avLst>
+          </a:prstGeom>
+          <a:solidFill>
+            <a:schemeClr val="bg1"/>
+          </a:solidFill>
+          <a:ln>
+            <a:solidFill>
+              <a:schemeClr val="tx1"/>
+            </a:solidFill>
+          </a:ln>
+        </p:spPr>
+        <p:style>
+          <a:lnRef idx="2">
+            <a:schemeClr val="accent1">
+              <a:shade val="50000"/>
+            </a:schemeClr>
+          </a:lnRef>
+          <a:fillRef idx="1">
+            <a:schemeClr val="accent1"/>
+          </a:fillRef>
+          <a:effectRef idx="0">
+            <a:schemeClr val="accent1"/>
+          </a:effectRef>
+          <a:fontRef idx="minor">
+            <a:schemeClr val="lt1"/>
+          </a:fontRef>
+        </p:style>
+        <p:txBody>
+          <a:bodyPr rtlCol="0" anchor="ctr"/>
+          <a:lstStyle/>
+          <a:p>
+            <a:pPr algn="ctr"/>
+            <a:endParaRPr kumimoji="1" lang="ja-JP" altLang="en-US"/>
+          </a:p>
+        </p:txBody>
+      </p:sp>
+      <p:sp>
+        <p:nvSpPr>
+          <p:cNvPr id="2" name="テキスト プレースホルダー 1">
+            <a:extLst>
+              <a:ext uri="{FF2B5EF4-FFF2-40B4-BE49-F238E27FC236}">
+                <a16:creationId xmlns:a16="http://schemas.microsoft.com/office/drawing/2014/main" id="{186BE164-62D0-350F-E2D1-086607D82ABB}"/>
+              </a:ext>
+            </a:extLst>
+          </p:cNvPr>
+          <p:cNvSpPr>
+            <a:spLocks noGrp="1"/>
+          </p:cNvSpPr>
+          <p:nvPr>
+            <p:ph type="body" sz="quarter" idx="10"/>
+          </p:nvPr>
+        </p:nvSpPr>
+        <p:spPr/>
+        <p:txBody>
+          <a:bodyPr/>
+          <a:lstStyle/>
+          <a:p>
+            <a:r>
+              <a:rPr kumimoji="1" lang="ja-JP" altLang="en-US"/>
+              <a:t>データ共有</a:t>
+            </a:r>
+          </a:p>
+        </p:txBody>
+      </p:sp>
+      <p:sp>
+        <p:nvSpPr>
+          <p:cNvPr id="3" name="テキスト ボックス 2">
+            <a:extLst>
+              <a:ext uri="{FF2B5EF4-FFF2-40B4-BE49-F238E27FC236}">
+                <a16:creationId xmlns:a16="http://schemas.microsoft.com/office/drawing/2014/main" id="{BF9DE8EB-CF9C-7F1E-A289-BEB8FE5D6112}"/>
+              </a:ext>
+            </a:extLst>
+          </p:cNvPr>
+          <p:cNvSpPr txBox="1"/>
+          <p:nvPr/>
+        </p:nvSpPr>
+        <p:spPr>
+          <a:xfrm>
+            <a:off x="323528" y="954927"/>
+            <a:ext cx="6596678" cy="400110"/>
+          </a:xfrm>
+          <a:prstGeom prst="rect">
+            <a:avLst/>
+          </a:prstGeom>
+          <a:noFill/>
+        </p:spPr>
+        <p:txBody>
+          <a:bodyPr wrap="none" rtlCol="0">
+            <a:spAutoFit/>
+          </a:bodyPr>
+          <a:lstStyle/>
+          <a:p>
+            <a:r>
+              <a:rPr kumimoji="1" lang="ja-JP" altLang="en-US" sz="2000"/>
+              <a:t>近年、論文執筆に使ったデータを公開する動きが活発に</a:t>
+            </a:r>
+          </a:p>
+        </p:txBody>
+      </p:sp>
+      <p:sp>
+        <p:nvSpPr>
+          <p:cNvPr id="5" name="テキスト ボックス 4">
+            <a:extLst>
+              <a:ext uri="{FF2B5EF4-FFF2-40B4-BE49-F238E27FC236}">
+                <a16:creationId xmlns:a16="http://schemas.microsoft.com/office/drawing/2014/main" id="{63D75F13-3E3A-3F3F-7E27-81E7DC2AC4DD}"/>
+              </a:ext>
+            </a:extLst>
+          </p:cNvPr>
+          <p:cNvSpPr txBox="1"/>
+          <p:nvPr/>
+        </p:nvSpPr>
+        <p:spPr>
+          <a:xfrm>
+            <a:off x="4067944" y="1505009"/>
+            <a:ext cx="3384376" cy="1323439"/>
+          </a:xfrm>
+          <a:prstGeom prst="rect">
+            <a:avLst/>
+          </a:prstGeom>
+          <a:noFill/>
+        </p:spPr>
+        <p:txBody>
+          <a:bodyPr wrap="square">
+            <a:spAutoFit/>
+          </a:bodyPr>
+          <a:lstStyle/>
+          <a:p>
+            <a:r>
+              <a:rPr lang="en-US" altLang="ja-JP" sz="2000" b="0" i="0" dirty="0">
+                <a:solidFill>
+                  <a:srgbClr val="404040"/>
+                </a:solidFill>
+                <a:effectLst/>
+                <a:latin typeface="Lato" panose="020F0502020204030203" pitchFamily="34" charset="0"/>
+              </a:rPr>
+              <a:t>The data that support the findings of this study are available upon reasonable request.</a:t>
+            </a:r>
+            <a:endParaRPr lang="ja-JP" altLang="en-US" sz="2000"/>
+          </a:p>
+        </p:txBody>
+      </p:sp>
+      <p:pic>
+        <p:nvPicPr>
+          <p:cNvPr id="5122" name="Picture 2" descr="メガネが光る人のイラスト（男性）">
+            <a:extLst>
+              <a:ext uri="{FF2B5EF4-FFF2-40B4-BE49-F238E27FC236}">
+                <a16:creationId xmlns:a16="http://schemas.microsoft.com/office/drawing/2014/main" id="{A46A1E6F-7B9A-6E6E-009E-94D367D3BB86}"/>
+              </a:ext>
+            </a:extLst>
+          </p:cNvPr>
+          <p:cNvPicPr>
+            <a:picLocks noChangeAspect="1" noChangeArrowheads="1"/>
+          </p:cNvPicPr>
+          <p:nvPr/>
+        </p:nvPicPr>
+        <p:blipFill>
+          <a:blip r:embed="rId2">
+            <a:extLst>
+              <a:ext uri="{28A0092B-C50C-407E-A947-70E740481C1C}">
+                <a14:useLocalDpi xmlns:a14="http://schemas.microsoft.com/office/drawing/2010/main" val="0"/>
+              </a:ext>
+            </a:extLst>
+          </a:blip>
+          <a:srcRect/>
+          <a:stretch>
+            <a:fillRect/>
+          </a:stretch>
+        </p:blipFill>
+        <p:spPr bwMode="auto">
+          <a:xfrm>
+            <a:off x="1763688" y="1413281"/>
+            <a:ext cx="1339253" cy="1603896"/>
+          </a:xfrm>
+          <a:prstGeom prst="rect">
+            <a:avLst/>
+          </a:prstGeom>
+          <a:noFill/>
+          <a:extLst>
+            <a:ext uri="{909E8E84-426E-40DD-AFC4-6F175D3DCCD1}">
+              <a14:hiddenFill xmlns:a14="http://schemas.microsoft.com/office/drawing/2010/main">
+                <a:solidFill>
+                  <a:srgbClr val="FFFFFF"/>
+                </a:solidFill>
+              </a14:hiddenFill>
+            </a:ext>
+          </a:extLst>
+        </p:spPr>
+      </p:pic>
+      <p:sp>
+        <p:nvSpPr>
+          <p:cNvPr id="7" name="テキスト ボックス 6">
+            <a:extLst>
+              <a:ext uri="{FF2B5EF4-FFF2-40B4-BE49-F238E27FC236}">
+                <a16:creationId xmlns:a16="http://schemas.microsoft.com/office/drawing/2014/main" id="{C057DFC2-BD7E-8E62-B350-367366A51378}"/>
+              </a:ext>
+            </a:extLst>
+          </p:cNvPr>
+          <p:cNvSpPr txBox="1"/>
+          <p:nvPr/>
+        </p:nvSpPr>
+        <p:spPr>
+          <a:xfrm>
+            <a:off x="4606752" y="3029934"/>
+            <a:ext cx="3595856" cy="307777"/>
+          </a:xfrm>
+          <a:prstGeom prst="rect">
+            <a:avLst/>
+          </a:prstGeom>
+          <a:noFill/>
+        </p:spPr>
+        <p:txBody>
+          <a:bodyPr wrap="none" rtlCol="0">
+            <a:spAutoFit/>
+          </a:bodyPr>
+          <a:lstStyle/>
+          <a:p>
+            <a:r>
+              <a:rPr kumimoji="1" lang="ja-JP" altLang="en-US" sz="1400"/>
+              <a:t>こんなこと言ってたらもう引用されない？</a:t>
+            </a:r>
+          </a:p>
+        </p:txBody>
+      </p:sp>
+      <p:pic>
+        <p:nvPicPr>
+          <p:cNvPr id="8" name="図 7">
+            <a:extLst>
+              <a:ext uri="{FF2B5EF4-FFF2-40B4-BE49-F238E27FC236}">
+                <a16:creationId xmlns:a16="http://schemas.microsoft.com/office/drawing/2014/main" id="{6683D64E-29B0-2E7E-229D-39F54481367A}"/>
+              </a:ext>
+            </a:extLst>
+          </p:cNvPr>
+          <p:cNvPicPr>
+            <a:picLocks noChangeAspect="1"/>
+          </p:cNvPicPr>
+          <p:nvPr/>
+        </p:nvPicPr>
+        <p:blipFill>
+          <a:blip r:embed="rId3"/>
+          <a:stretch>
+            <a:fillRect/>
+          </a:stretch>
+        </p:blipFill>
+        <p:spPr>
+          <a:xfrm>
+            <a:off x="458082" y="3981906"/>
+            <a:ext cx="3047159" cy="1918689"/>
+          </a:xfrm>
+          <a:prstGeom prst="rect">
+            <a:avLst/>
+          </a:prstGeom>
+        </p:spPr>
+      </p:pic>
+      <p:sp>
+        <p:nvSpPr>
+          <p:cNvPr id="10" name="テキスト ボックス 9">
+            <a:extLst>
+              <a:ext uri="{FF2B5EF4-FFF2-40B4-BE49-F238E27FC236}">
+                <a16:creationId xmlns:a16="http://schemas.microsoft.com/office/drawing/2014/main" id="{FA36E42C-2557-133B-8138-D1183D5D3C74}"/>
+              </a:ext>
+            </a:extLst>
+          </p:cNvPr>
+          <p:cNvSpPr txBox="1"/>
+          <p:nvPr/>
+        </p:nvSpPr>
+        <p:spPr>
+          <a:xfrm>
+            <a:off x="290705" y="6130263"/>
+            <a:ext cx="3946514" cy="338554"/>
+          </a:xfrm>
+          <a:prstGeom prst="rect">
+            <a:avLst/>
+          </a:prstGeom>
+          <a:noFill/>
+        </p:spPr>
+        <p:txBody>
+          <a:bodyPr wrap="square">
+            <a:spAutoFit/>
+          </a:bodyPr>
+          <a:lstStyle/>
+          <a:p>
+            <a:r>
+              <a:rPr lang="en-US" altLang="ja-JP" sz="1600" dirty="0">
+                <a:hlinkClick r:id="rId4"/>
+              </a:rPr>
+              <a:t>https://</a:t>
+            </a:r>
+            <a:r>
+              <a:rPr lang="en-US" altLang="ja-JP" sz="1600" dirty="0" err="1">
+                <a:hlinkClick r:id="rId4"/>
+              </a:rPr>
+              <a:t>datarepo.mdcl.issp.u-tokyo.ac.jp</a:t>
+            </a:r>
+            <a:r>
+              <a:rPr lang="en-US" altLang="ja-JP" sz="1600" dirty="0">
+                <a:hlinkClick r:id="rId4"/>
+              </a:rPr>
+              <a:t>/</a:t>
+            </a:r>
+            <a:endParaRPr lang="ja-JP" altLang="en-US" sz="1600"/>
+          </a:p>
+        </p:txBody>
+      </p:sp>
+      <p:sp>
+        <p:nvSpPr>
+          <p:cNvPr id="14" name="テキスト ボックス 13">
+            <a:extLst>
+              <a:ext uri="{FF2B5EF4-FFF2-40B4-BE49-F238E27FC236}">
+                <a16:creationId xmlns:a16="http://schemas.microsoft.com/office/drawing/2014/main" id="{B85935F7-B64B-7D65-CCAC-2E296DE58853}"/>
+              </a:ext>
+            </a:extLst>
+          </p:cNvPr>
+          <p:cNvSpPr txBox="1"/>
+          <p:nvPr/>
+        </p:nvSpPr>
+        <p:spPr>
+          <a:xfrm>
+            <a:off x="193438" y="3571064"/>
+            <a:ext cx="3185487" cy="369332"/>
+          </a:xfrm>
+          <a:prstGeom prst="rect">
+            <a:avLst/>
+          </a:prstGeom>
+          <a:noFill/>
+        </p:spPr>
+        <p:txBody>
+          <a:bodyPr wrap="none" rtlCol="0">
+            <a:spAutoFit/>
+          </a:bodyPr>
+          <a:lstStyle/>
+          <a:p>
+            <a:r>
+              <a:rPr kumimoji="1" lang="ja-JP" altLang="en-US">
+                <a:solidFill>
+                  <a:srgbClr val="011893"/>
+                </a:solidFill>
+              </a:rPr>
+              <a:t>物性研究所データリポジトリ</a:t>
+            </a:r>
+          </a:p>
+        </p:txBody>
+      </p:sp>
+      <p:sp>
+        <p:nvSpPr>
+          <p:cNvPr id="16" name="テキスト ボックス 15">
+            <a:extLst>
+              <a:ext uri="{FF2B5EF4-FFF2-40B4-BE49-F238E27FC236}">
+                <a16:creationId xmlns:a16="http://schemas.microsoft.com/office/drawing/2014/main" id="{B21129D4-CBEA-DE74-5A30-82F9100EB421}"/>
+              </a:ext>
+            </a:extLst>
+          </p:cNvPr>
+          <p:cNvSpPr txBox="1"/>
+          <p:nvPr/>
+        </p:nvSpPr>
+        <p:spPr>
+          <a:xfrm>
+            <a:off x="4208405" y="6211122"/>
+            <a:ext cx="4436431" cy="269178"/>
+          </a:xfrm>
+          <a:prstGeom prst="rect">
+            <a:avLst/>
+          </a:prstGeom>
+          <a:noFill/>
+        </p:spPr>
+        <p:txBody>
+          <a:bodyPr wrap="square">
+            <a:spAutoFit/>
+          </a:bodyPr>
+          <a:lstStyle/>
+          <a:p>
+            <a:r>
+              <a:rPr lang="ja-JP" altLang="en-US" sz="1100">
+                <a:hlinkClick r:id="rId5"/>
+              </a:rPr>
+              <a:t>https://isspns-gitlab.issp.u-tokyo.ac.jp/kaityo256/aging_network_data</a:t>
+            </a:r>
+            <a:endParaRPr lang="ja-JP" altLang="en-US" sz="1100"/>
+          </a:p>
+        </p:txBody>
+      </p:sp>
+      <p:sp>
+        <p:nvSpPr>
+          <p:cNvPr id="17" name="テキスト ボックス 16">
+            <a:extLst>
+              <a:ext uri="{FF2B5EF4-FFF2-40B4-BE49-F238E27FC236}">
+                <a16:creationId xmlns:a16="http://schemas.microsoft.com/office/drawing/2014/main" id="{5C57451B-5190-7FCC-EC3C-7C820B6D9D44}"/>
+              </a:ext>
+            </a:extLst>
+          </p:cNvPr>
+          <p:cNvSpPr txBox="1"/>
+          <p:nvPr/>
+        </p:nvSpPr>
+        <p:spPr>
+          <a:xfrm>
+            <a:off x="4365184" y="3621457"/>
+            <a:ext cx="1569660" cy="369332"/>
+          </a:xfrm>
+          <a:prstGeom prst="rect">
+            <a:avLst/>
+          </a:prstGeom>
+          <a:noFill/>
+        </p:spPr>
+        <p:txBody>
+          <a:bodyPr wrap="none" rtlCol="0">
+            <a:spAutoFit/>
+          </a:bodyPr>
+          <a:lstStyle/>
+          <a:p>
+            <a:r>
+              <a:rPr kumimoji="1" lang="ja-JP" altLang="en-US"/>
+              <a:t>データ公開例</a:t>
+            </a:r>
+          </a:p>
+        </p:txBody>
+      </p:sp>
+      <p:pic>
+        <p:nvPicPr>
+          <p:cNvPr id="18" name="図 17">
+            <a:extLst>
+              <a:ext uri="{FF2B5EF4-FFF2-40B4-BE49-F238E27FC236}">
+                <a16:creationId xmlns:a16="http://schemas.microsoft.com/office/drawing/2014/main" id="{30286169-C49C-0F27-2F2E-F22647C7230C}"/>
+              </a:ext>
+            </a:extLst>
+          </p:cNvPr>
+          <p:cNvPicPr>
+            <a:picLocks noChangeAspect="1"/>
+          </p:cNvPicPr>
+          <p:nvPr/>
+        </p:nvPicPr>
+        <p:blipFill>
+          <a:blip r:embed="rId6"/>
+          <a:stretch>
+            <a:fillRect/>
+          </a:stretch>
+        </p:blipFill>
+        <p:spPr>
+          <a:xfrm>
+            <a:off x="4344362" y="4034139"/>
+            <a:ext cx="3392868" cy="1947315"/>
+          </a:xfrm>
+          <a:prstGeom prst="rect">
+            <a:avLst/>
+          </a:prstGeom>
+        </p:spPr>
+      </p:pic>
+    </p:spTree>
+    <p:extLst>
+      <p:ext uri="{BB962C8B-B14F-4D97-AF65-F5344CB8AC3E}">
+        <p14:creationId xmlns:p14="http://schemas.microsoft.com/office/powerpoint/2010/main" val="4118569604"/>
+      </p:ext>
+    </p:extLst>
+  </p:cSld>
+  <p:clrMapOvr>
+    <a:masterClrMapping/>
+  </p:clrMapOvr>
+</p:sld>
+</file>
+
+<file path=ppt/slides/slide16.xml><?xml version="1.0" encoding="utf-8"?>
+<p:sld xmlns:a="http://schemas.openxmlformats.org/drawingml/2006/main" xmlns:r="http://schemas.openxmlformats.org/officeDocument/2006/relationships" xmlns:p="http://schemas.openxmlformats.org/presentationml/2006/main">
+  <p:cSld>
+    <p:spTree>
+      <p:nvGrpSpPr>
+        <p:cNvPr id="1" name=""/>
+        <p:cNvGrpSpPr/>
+        <p:nvPr/>
+      </p:nvGrpSpPr>
+      <p:grpSpPr>
+        <a:xfrm>
+          <a:off x="0" y="0"/>
+          <a:ext cx="0" cy="0"/>
+          <a:chOff x="0" y="0"/>
+          <a:chExt cx="0" cy="0"/>
+        </a:xfrm>
+      </p:grpSpPr>
+      <p:sp>
+        <p:nvSpPr>
+          <p:cNvPr id="2" name="テキスト プレースホルダー 1">
+            <a:extLst>
+              <a:ext uri="{FF2B5EF4-FFF2-40B4-BE49-F238E27FC236}">
+                <a16:creationId xmlns:a16="http://schemas.microsoft.com/office/drawing/2014/main" id="{FBA37551-B108-F443-8C3B-3A1140EBBE35}"/>
+              </a:ext>
+            </a:extLst>
+          </p:cNvPr>
+          <p:cNvSpPr>
+            <a:spLocks noGrp="1"/>
+          </p:cNvSpPr>
+          <p:nvPr>
+            <p:ph type="body" sz="quarter" idx="10"/>
+          </p:nvPr>
+        </p:nvSpPr>
+        <p:spPr/>
+        <p:txBody>
+          <a:bodyPr/>
+          <a:lstStyle/>
+          <a:p>
+            <a:r>
+              <a:rPr kumimoji="1" lang="ja-JP" altLang="en-US"/>
+              <a:t>講義ノート公開</a:t>
+            </a:r>
+          </a:p>
+        </p:txBody>
+      </p:sp>
+      <p:sp>
+        <p:nvSpPr>
+          <p:cNvPr id="3" name="テキスト ボックス 2">
+            <a:extLst>
+              <a:ext uri="{FF2B5EF4-FFF2-40B4-BE49-F238E27FC236}">
+                <a16:creationId xmlns:a16="http://schemas.microsoft.com/office/drawing/2014/main" id="{569E94EF-F62C-B04C-5397-C13CD05F18E6}"/>
+              </a:ext>
+            </a:extLst>
+          </p:cNvPr>
+          <p:cNvSpPr txBox="1"/>
+          <p:nvPr/>
+        </p:nvSpPr>
+        <p:spPr>
+          <a:xfrm>
+            <a:off x="395536" y="1052736"/>
+            <a:ext cx="5724644" cy="830997"/>
+          </a:xfrm>
+          <a:prstGeom prst="rect">
+            <a:avLst/>
+          </a:prstGeom>
+          <a:noFill/>
+        </p:spPr>
+        <p:txBody>
+          <a:bodyPr wrap="none" rtlCol="0">
+            <a:spAutoFit/>
+          </a:bodyPr>
+          <a:lstStyle/>
+          <a:p>
+            <a:r>
+              <a:rPr kumimoji="1" lang="ja-JP" altLang="en-US" sz="2400"/>
+              <a:t>大学のサーバに置くと、退職後に消える</a:t>
+            </a:r>
+            <a:endParaRPr kumimoji="1" lang="en-US" altLang="ja-JP" sz="2400" dirty="0"/>
+          </a:p>
+          <a:p>
+            <a:r>
+              <a:rPr lang="en-US" altLang="ja-JP" sz="2400" dirty="0"/>
+              <a:t>PDF</a:t>
+            </a:r>
+            <a:r>
+              <a:rPr lang="ja-JP" altLang="en-US" sz="2400"/>
+              <a:t>で置くと、スマホで見られない</a:t>
+            </a:r>
+            <a:endParaRPr kumimoji="1" lang="ja-JP" altLang="en-US" sz="2400"/>
+          </a:p>
+        </p:txBody>
+      </p:sp>
+      <p:sp>
+        <p:nvSpPr>
+          <p:cNvPr id="4" name="テキスト ボックス 3">
+            <a:extLst>
+              <a:ext uri="{FF2B5EF4-FFF2-40B4-BE49-F238E27FC236}">
+                <a16:creationId xmlns:a16="http://schemas.microsoft.com/office/drawing/2014/main" id="{B884D4F3-FE3A-D285-3DDE-057203845B36}"/>
+              </a:ext>
+            </a:extLst>
+          </p:cNvPr>
+          <p:cNvSpPr txBox="1"/>
+          <p:nvPr/>
+        </p:nvSpPr>
+        <p:spPr>
+          <a:xfrm>
+            <a:off x="107504" y="2018990"/>
+            <a:ext cx="3913251" cy="461665"/>
+          </a:xfrm>
+          <a:prstGeom prst="rect">
+            <a:avLst/>
+          </a:prstGeom>
+          <a:noFill/>
+        </p:spPr>
+        <p:txBody>
+          <a:bodyPr wrap="none" rtlCol="0">
+            <a:spAutoFit/>
+          </a:bodyPr>
+          <a:lstStyle/>
+          <a:p>
+            <a:r>
+              <a:rPr kumimoji="1" lang="en-US" altLang="ja-JP" sz="2400" dirty="0">
+                <a:solidFill>
+                  <a:srgbClr val="011893"/>
+                </a:solidFill>
+              </a:rPr>
+              <a:t>GitHub</a:t>
+            </a:r>
+            <a:r>
+              <a:rPr kumimoji="1" lang="ja-JP" altLang="en-US" sz="2400">
+                <a:solidFill>
+                  <a:srgbClr val="011893"/>
+                </a:solidFill>
+              </a:rPr>
+              <a:t>への講義ノート公開</a:t>
+            </a:r>
+          </a:p>
+        </p:txBody>
+      </p:sp>
+      <p:sp>
+        <p:nvSpPr>
+          <p:cNvPr id="6" name="テキスト ボックス 5">
+            <a:extLst>
+              <a:ext uri="{FF2B5EF4-FFF2-40B4-BE49-F238E27FC236}">
+                <a16:creationId xmlns:a16="http://schemas.microsoft.com/office/drawing/2014/main" id="{83E00448-0A1C-F831-DAEC-E645D6F6AD64}"/>
+              </a:ext>
+            </a:extLst>
+          </p:cNvPr>
+          <p:cNvSpPr txBox="1"/>
+          <p:nvPr/>
+        </p:nvSpPr>
+        <p:spPr>
+          <a:xfrm>
+            <a:off x="564866" y="5318068"/>
+            <a:ext cx="3913251" cy="338554"/>
+          </a:xfrm>
+          <a:prstGeom prst="rect">
+            <a:avLst/>
+          </a:prstGeom>
+          <a:noFill/>
+        </p:spPr>
+        <p:txBody>
+          <a:bodyPr wrap="square">
+            <a:spAutoFit/>
+          </a:bodyPr>
+          <a:lstStyle/>
+          <a:p>
+            <a:r>
+              <a:rPr lang="ja-JP" altLang="en-US" sz="1600">
+                <a:hlinkClick r:id="rId2"/>
+              </a:rPr>
+              <a:t>https://kaityo256.github.io/python_zero/</a:t>
+            </a:r>
+            <a:endParaRPr lang="ja-JP" altLang="en-US" sz="1600"/>
+          </a:p>
+        </p:txBody>
+      </p:sp>
+      <p:pic>
+        <p:nvPicPr>
+          <p:cNvPr id="7" name="図 6">
+            <a:extLst>
+              <a:ext uri="{FF2B5EF4-FFF2-40B4-BE49-F238E27FC236}">
+                <a16:creationId xmlns:a16="http://schemas.microsoft.com/office/drawing/2014/main" id="{4EB83BF4-E2D7-1221-9681-E92AAE2360CB}"/>
+              </a:ext>
+            </a:extLst>
+          </p:cNvPr>
+          <p:cNvPicPr>
+            <a:picLocks noChangeAspect="1"/>
+          </p:cNvPicPr>
+          <p:nvPr/>
+        </p:nvPicPr>
+        <p:blipFill>
+          <a:blip r:embed="rId3"/>
+          <a:stretch>
+            <a:fillRect/>
+          </a:stretch>
+        </p:blipFill>
+        <p:spPr>
+          <a:xfrm>
+            <a:off x="533887" y="2480655"/>
+            <a:ext cx="3598168" cy="2850070"/>
+          </a:xfrm>
+          <a:prstGeom prst="rect">
+            <a:avLst/>
+          </a:prstGeom>
+        </p:spPr>
+      </p:pic>
+      <p:grpSp>
+        <p:nvGrpSpPr>
+          <p:cNvPr id="12" name="グループ化 11">
+            <a:extLst>
+              <a:ext uri="{FF2B5EF4-FFF2-40B4-BE49-F238E27FC236}">
+                <a16:creationId xmlns:a16="http://schemas.microsoft.com/office/drawing/2014/main" id="{D50598C5-F27F-AF3B-655A-1911051C0E90}"/>
+              </a:ext>
+            </a:extLst>
+          </p:cNvPr>
+          <p:cNvGrpSpPr/>
+          <p:nvPr/>
+        </p:nvGrpSpPr>
+        <p:grpSpPr>
+          <a:xfrm>
+            <a:off x="6120180" y="1883733"/>
+            <a:ext cx="2376264" cy="4248472"/>
+            <a:chOff x="5414400" y="2414032"/>
+            <a:chExt cx="2376264" cy="4248472"/>
+          </a:xfrm>
+        </p:grpSpPr>
+        <p:sp>
+          <p:nvSpPr>
+            <p:cNvPr id="9" name="角丸四角形 8">
+              <a:extLst>
+                <a:ext uri="{FF2B5EF4-FFF2-40B4-BE49-F238E27FC236}">
+                  <a16:creationId xmlns:a16="http://schemas.microsoft.com/office/drawing/2014/main" id="{D52A6743-4D12-C20D-8E91-ECD467CD1776}"/>
+                </a:ext>
+              </a:extLst>
+            </p:cNvPr>
+            <p:cNvSpPr/>
+            <p:nvPr/>
+          </p:nvSpPr>
+          <p:spPr>
+            <a:xfrm>
+              <a:off x="5414400" y="2414032"/>
+              <a:ext cx="2376264" cy="4248472"/>
+            </a:xfrm>
+            <a:prstGeom prst="roundRect">
+              <a:avLst>
+                <a:gd name="adj" fmla="val 6872"/>
+              </a:avLst>
+            </a:prstGeom>
+            <a:solidFill>
+              <a:schemeClr val="tx1"/>
+            </a:solidFill>
+            <a:ln>
+              <a:solidFill>
+                <a:schemeClr val="tx1"/>
+              </a:solidFill>
+            </a:ln>
+          </p:spPr>
+          <p:style>
+            <a:lnRef idx="2">
+              <a:schemeClr val="accent1">
+                <a:shade val="50000"/>
+              </a:schemeClr>
+            </a:lnRef>
+            <a:fillRef idx="1">
+              <a:schemeClr val="accent1"/>
+            </a:fillRef>
+            <a:effectRef idx="0">
+              <a:schemeClr val="accent1"/>
+            </a:effectRef>
+            <a:fontRef idx="minor">
+              <a:schemeClr val="lt1"/>
+            </a:fontRef>
+          </p:style>
+          <p:txBody>
+            <a:bodyPr rtlCol="0" anchor="ctr"/>
+            <a:lstStyle/>
+            <a:p>
+              <a:pPr algn="ctr"/>
+              <a:endParaRPr kumimoji="1" lang="ja-JP" altLang="en-US"/>
+            </a:p>
+          </p:txBody>
+        </p:sp>
+        <p:pic>
+          <p:nvPicPr>
+            <p:cNvPr id="8" name="図 7">
+              <a:extLst>
+                <a:ext uri="{FF2B5EF4-FFF2-40B4-BE49-F238E27FC236}">
+                  <a16:creationId xmlns:a16="http://schemas.microsoft.com/office/drawing/2014/main" id="{B224BF67-B3D0-291F-F037-928091EB0A49}"/>
+                </a:ext>
+              </a:extLst>
+            </p:cNvPr>
+            <p:cNvPicPr>
+              <a:picLocks noChangeAspect="1"/>
+            </p:cNvPicPr>
+            <p:nvPr/>
+          </p:nvPicPr>
+          <p:blipFill>
+            <a:blip r:embed="rId4"/>
+            <a:stretch>
+              <a:fillRect/>
+            </a:stretch>
+          </p:blipFill>
+          <p:spPr>
+            <a:xfrm>
+              <a:off x="5508104" y="2636912"/>
+              <a:ext cx="2188857" cy="3380732"/>
+            </a:xfrm>
+            <a:prstGeom prst="rect">
+              <a:avLst/>
+            </a:prstGeom>
+          </p:spPr>
+        </p:pic>
+        <p:sp>
+          <p:nvSpPr>
+            <p:cNvPr id="10" name="円/楕円 9">
+              <a:extLst>
+                <a:ext uri="{FF2B5EF4-FFF2-40B4-BE49-F238E27FC236}">
+                  <a16:creationId xmlns:a16="http://schemas.microsoft.com/office/drawing/2014/main" id="{14788084-E50D-9A1C-2873-836BB2922A90}"/>
+                </a:ext>
+              </a:extLst>
+            </p:cNvPr>
+            <p:cNvSpPr/>
+            <p:nvPr/>
+          </p:nvSpPr>
+          <p:spPr>
+            <a:xfrm>
+              <a:off x="6530524" y="2440343"/>
+              <a:ext cx="144016" cy="144016"/>
+            </a:xfrm>
+            <a:prstGeom prst="ellipse">
+              <a:avLst/>
+            </a:prstGeom>
+            <a:solidFill>
+              <a:schemeClr val="tx1">
+                <a:lumMod val="50000"/>
+                <a:lumOff val="50000"/>
+              </a:schemeClr>
+            </a:solidFill>
+            <a:ln>
+              <a:solidFill>
+                <a:schemeClr val="tx1"/>
+              </a:solidFill>
+            </a:ln>
+          </p:spPr>
+          <p:style>
+            <a:lnRef idx="2">
+              <a:schemeClr val="accent1">
+                <a:shade val="50000"/>
+              </a:schemeClr>
+            </a:lnRef>
+            <a:fillRef idx="1">
+              <a:schemeClr val="accent1"/>
+            </a:fillRef>
+            <a:effectRef idx="0">
+              <a:schemeClr val="accent1"/>
+            </a:effectRef>
+            <a:fontRef idx="minor">
+              <a:schemeClr val="lt1"/>
+            </a:fontRef>
+          </p:style>
+          <p:txBody>
+            <a:bodyPr rtlCol="0" anchor="ctr"/>
+            <a:lstStyle/>
+            <a:p>
+              <a:pPr algn="ctr"/>
+              <a:endParaRPr kumimoji="1" lang="ja-JP" altLang="en-US"/>
+            </a:p>
+          </p:txBody>
+        </p:sp>
+        <p:sp>
+          <p:nvSpPr>
+            <p:cNvPr id="11" name="円/楕円 10">
+              <a:extLst>
+                <a:ext uri="{FF2B5EF4-FFF2-40B4-BE49-F238E27FC236}">
+                  <a16:creationId xmlns:a16="http://schemas.microsoft.com/office/drawing/2014/main" id="{9EAEB524-81D4-86E0-B55D-CF92AAE20833}"/>
+                </a:ext>
+              </a:extLst>
+            </p:cNvPr>
+            <p:cNvSpPr/>
+            <p:nvPr/>
+          </p:nvSpPr>
+          <p:spPr>
+            <a:xfrm>
+              <a:off x="6404510" y="6156045"/>
+              <a:ext cx="396043" cy="396043"/>
+            </a:xfrm>
+            <a:prstGeom prst="ellipse">
+              <a:avLst/>
+            </a:prstGeom>
+            <a:solidFill>
+              <a:schemeClr val="tx1">
+                <a:lumMod val="50000"/>
+                <a:lumOff val="50000"/>
+              </a:schemeClr>
+            </a:solidFill>
+            <a:ln>
+              <a:solidFill>
+                <a:schemeClr val="tx1"/>
+              </a:solidFill>
+            </a:ln>
+          </p:spPr>
+          <p:style>
+            <a:lnRef idx="2">
+              <a:schemeClr val="accent1">
+                <a:shade val="50000"/>
+              </a:schemeClr>
+            </a:lnRef>
+            <a:fillRef idx="1">
+              <a:schemeClr val="accent1"/>
+            </a:fillRef>
+            <a:effectRef idx="0">
+              <a:schemeClr val="accent1"/>
+            </a:effectRef>
+            <a:fontRef idx="minor">
+              <a:schemeClr val="lt1"/>
+            </a:fontRef>
+          </p:style>
+          <p:txBody>
+            <a:bodyPr rtlCol="0" anchor="ctr"/>
+            <a:lstStyle/>
+            <a:p>
+              <a:pPr algn="ctr"/>
+              <a:endParaRPr kumimoji="1" lang="ja-JP" altLang="en-US"/>
+            </a:p>
+          </p:txBody>
+        </p:sp>
+      </p:grpSp>
+      <p:sp>
+        <p:nvSpPr>
+          <p:cNvPr id="13" name="右矢印 12">
+            <a:extLst>
+              <a:ext uri="{FF2B5EF4-FFF2-40B4-BE49-F238E27FC236}">
+                <a16:creationId xmlns:a16="http://schemas.microsoft.com/office/drawing/2014/main" id="{6C4E6DBD-445C-FE96-A521-0E63D9A2AE94}"/>
+              </a:ext>
+            </a:extLst>
+          </p:cNvPr>
+          <p:cNvSpPr/>
+          <p:nvPr/>
+        </p:nvSpPr>
+        <p:spPr>
+          <a:xfrm>
+            <a:off x="4572000" y="3645024"/>
+            <a:ext cx="1008112" cy="377100"/>
+          </a:xfrm>
+          <a:prstGeom prst="rightArrow">
+            <a:avLst/>
+          </a:prstGeom>
+          <a:solidFill>
+            <a:srgbClr val="FF0000"/>
+          </a:solidFill>
+          <a:ln>
+            <a:solidFill>
+              <a:schemeClr val="tx1"/>
+            </a:solidFill>
+          </a:ln>
+        </p:spPr>
+        <p:style>
+          <a:lnRef idx="2">
+            <a:schemeClr val="accent1">
+              <a:shade val="50000"/>
+            </a:schemeClr>
+          </a:lnRef>
+          <a:fillRef idx="1">
+            <a:schemeClr val="accent1"/>
+          </a:fillRef>
+          <a:effectRef idx="0">
+            <a:schemeClr val="accent1"/>
+          </a:effectRef>
+          <a:fontRef idx="minor">
+            <a:schemeClr val="lt1"/>
+          </a:fontRef>
+        </p:style>
+        <p:txBody>
+          <a:bodyPr rtlCol="0" anchor="ctr"/>
+          <a:lstStyle/>
+          <a:p>
+            <a:pPr algn="ctr"/>
+            <a:endParaRPr kumimoji="1" lang="ja-JP" altLang="en-US"/>
+          </a:p>
+        </p:txBody>
+      </p:sp>
+      <p:sp>
+        <p:nvSpPr>
+          <p:cNvPr id="14" name="テキスト ボックス 13">
+            <a:extLst>
+              <a:ext uri="{FF2B5EF4-FFF2-40B4-BE49-F238E27FC236}">
+                <a16:creationId xmlns:a16="http://schemas.microsoft.com/office/drawing/2014/main" id="{55195015-2B84-9986-6DD6-235BE4C85EF0}"/>
+              </a:ext>
+            </a:extLst>
+          </p:cNvPr>
+          <p:cNvSpPr txBox="1"/>
+          <p:nvPr/>
+        </p:nvSpPr>
+        <p:spPr>
+          <a:xfrm>
+            <a:off x="4381005" y="3242071"/>
+            <a:ext cx="1261884" cy="307777"/>
+          </a:xfrm>
+          <a:prstGeom prst="rect">
+            <a:avLst/>
+          </a:prstGeom>
+          <a:noFill/>
+        </p:spPr>
+        <p:txBody>
+          <a:bodyPr wrap="none" rtlCol="0">
+            <a:spAutoFit/>
+          </a:bodyPr>
+          <a:lstStyle/>
+          <a:p>
+            <a:r>
+              <a:rPr kumimoji="1" lang="ja-JP" altLang="en-US" sz="1400"/>
+              <a:t>レスポンシブ</a:t>
+            </a:r>
+          </a:p>
+        </p:txBody>
+      </p:sp>
+      <p:sp>
+        <p:nvSpPr>
+          <p:cNvPr id="15" name="テキスト ボックス 14">
+            <a:extLst>
+              <a:ext uri="{FF2B5EF4-FFF2-40B4-BE49-F238E27FC236}">
+                <a16:creationId xmlns:a16="http://schemas.microsoft.com/office/drawing/2014/main" id="{C34FCDA2-9A36-65DC-3DF5-3F769DD29DB3}"/>
+              </a:ext>
+            </a:extLst>
+          </p:cNvPr>
+          <p:cNvSpPr txBox="1"/>
+          <p:nvPr/>
+        </p:nvSpPr>
+        <p:spPr>
+          <a:xfrm>
+            <a:off x="178112" y="5900587"/>
+            <a:ext cx="5936240" cy="646331"/>
+          </a:xfrm>
+          <a:prstGeom prst="rect">
+            <a:avLst/>
+          </a:prstGeom>
+          <a:noFill/>
+        </p:spPr>
+        <p:txBody>
+          <a:bodyPr wrap="none" rtlCol="0">
+            <a:spAutoFit/>
+          </a:bodyPr>
+          <a:lstStyle/>
+          <a:p>
+            <a:pPr marL="285750" indent="-285750">
+              <a:buFont typeface="Arial" panose="020B0604020202020204" pitchFamily="34" charset="0"/>
+              <a:buChar char="•"/>
+            </a:pPr>
+            <a:r>
+              <a:rPr kumimoji="1" lang="ja-JP" altLang="en-US"/>
+              <a:t>退職後も</a:t>
+            </a:r>
+            <a:r>
+              <a:rPr kumimoji="1" lang="en-US" altLang="ja-JP" dirty="0"/>
+              <a:t>(</a:t>
+            </a:r>
+            <a:r>
+              <a:rPr kumimoji="1" lang="ja-JP" altLang="en-US"/>
+              <a:t>多分</a:t>
+            </a:r>
+            <a:r>
+              <a:rPr kumimoji="1" lang="en-US" altLang="ja-JP" dirty="0"/>
+              <a:t>)</a:t>
+            </a:r>
+            <a:r>
+              <a:rPr kumimoji="1" lang="ja-JP" altLang="en-US"/>
+              <a:t>消えない。消える前にフォーク可能。</a:t>
+            </a:r>
+            <a:endParaRPr kumimoji="1" lang="en-US" altLang="ja-JP" dirty="0"/>
+          </a:p>
+          <a:p>
+            <a:pPr marL="285750" indent="-285750">
+              <a:buFont typeface="Arial" panose="020B0604020202020204" pitchFamily="34" charset="0"/>
+              <a:buChar char="•"/>
+            </a:pPr>
+            <a:r>
+              <a:rPr kumimoji="1" lang="ja-JP" altLang="en-US">
+                <a:solidFill>
+                  <a:srgbClr val="FF0000"/>
+                </a:solidFill>
+              </a:rPr>
+              <a:t>レスポンシブにすればスマホでも閲覧可能</a:t>
+            </a:r>
+          </a:p>
+        </p:txBody>
+      </p:sp>
+    </p:spTree>
+    <p:extLst>
+      <p:ext uri="{BB962C8B-B14F-4D97-AF65-F5344CB8AC3E}">
+        <p14:creationId xmlns:p14="http://schemas.microsoft.com/office/powerpoint/2010/main" val="2554865814"/>
+      </p:ext>
+    </p:extLst>
+  </p:cSld>
+  <p:clrMapOvr>
+    <a:masterClrMapping/>
+  </p:clrMapOvr>
+</p:sld>
+</file>
+
+<file path=ppt/slides/slide17.xml><?xml version="1.0" encoding="utf-8"?>
+<p:sld xmlns:a="http://schemas.openxmlformats.org/drawingml/2006/main" xmlns:r="http://schemas.openxmlformats.org/officeDocument/2006/relationships" xmlns:p="http://schemas.openxmlformats.org/presentationml/2006/main">
+  <p:cSld>
+    <p:spTree>
+      <p:nvGrpSpPr>
+        <p:cNvPr id="1" name=""/>
+        <p:cNvGrpSpPr/>
+        <p:nvPr/>
+      </p:nvGrpSpPr>
+      <p:grpSpPr>
+        <a:xfrm>
+          <a:off x="0" y="0"/>
+          <a:ext cx="0" cy="0"/>
+          <a:chOff x="0" y="0"/>
+          <a:chExt cx="0" cy="0"/>
+        </a:xfrm>
+      </p:grpSpPr>
+      <p:sp>
+        <p:nvSpPr>
+          <p:cNvPr id="2" name="テキスト プレースホルダー 1">
+            <a:extLst>
+              <a:ext uri="{FF2B5EF4-FFF2-40B4-BE49-F238E27FC236}">
+                <a16:creationId xmlns:a16="http://schemas.microsoft.com/office/drawing/2014/main" id="{5210F7DB-11A3-429C-B866-7F0C5CC0B7B7}"/>
+              </a:ext>
+            </a:extLst>
+          </p:cNvPr>
+          <p:cNvSpPr>
+            <a:spLocks noGrp="1"/>
+          </p:cNvSpPr>
+          <p:nvPr>
+            <p:ph type="body" sz="quarter" idx="10"/>
+          </p:nvPr>
+        </p:nvSpPr>
+        <p:spPr/>
+        <p:txBody>
+          <a:bodyPr/>
+          <a:lstStyle/>
+          <a:p>
+            <a:r>
+              <a:rPr lang="ja-JP" altLang="en-US"/>
+              <a:t>まとめ</a:t>
+            </a:r>
+            <a:endParaRPr lang="en-US"/>
+          </a:p>
+        </p:txBody>
+      </p:sp>
+      <p:sp>
+        <p:nvSpPr>
+          <p:cNvPr id="3" name="テキスト ボックス 2">
+            <a:extLst>
+              <a:ext uri="{FF2B5EF4-FFF2-40B4-BE49-F238E27FC236}">
+                <a16:creationId xmlns:a16="http://schemas.microsoft.com/office/drawing/2014/main" id="{371BC6D4-76BF-4671-8D7A-34B66018A0F9}"/>
+              </a:ext>
+            </a:extLst>
+          </p:cNvPr>
+          <p:cNvSpPr txBox="1"/>
+          <p:nvPr/>
+        </p:nvSpPr>
+        <p:spPr>
+          <a:xfrm>
+            <a:off x="17828" y="1124744"/>
+            <a:ext cx="8856984" cy="4401205"/>
+          </a:xfrm>
+          <a:prstGeom prst="rect">
+            <a:avLst/>
+          </a:prstGeom>
+          <a:noFill/>
+        </p:spPr>
+        <p:txBody>
+          <a:bodyPr wrap="square" rtlCol="0">
+            <a:spAutoFit/>
+          </a:bodyPr>
+          <a:lstStyle/>
+          <a:p>
+            <a:pPr marL="342900" indent="-342900">
+              <a:buFont typeface="Arial" panose="020B0604020202020204" pitchFamily="34" charset="0"/>
+              <a:buChar char="•"/>
+            </a:pPr>
+            <a:r>
+              <a:rPr lang="ja-JP" altLang="en-US" sz="2800"/>
+              <a:t>計算物理における</a:t>
+            </a:r>
+            <a:r>
+              <a:rPr lang="en-US" altLang="ja-JP" sz="2800" dirty="0"/>
+              <a:t>Git/GitHub</a:t>
+            </a:r>
+            <a:r>
+              <a:rPr lang="ja-JP" altLang="en-US" sz="2800"/>
+              <a:t>の用途は主にコード開発と論文執筆</a:t>
+            </a:r>
+            <a:endParaRPr lang="en-US" altLang="ja-JP" sz="2800" dirty="0"/>
+          </a:p>
+          <a:p>
+            <a:pPr marL="342900" indent="-342900">
+              <a:buFont typeface="Arial" panose="020B0604020202020204" pitchFamily="34" charset="0"/>
+              <a:buChar char="•"/>
+            </a:pPr>
+            <a:r>
+              <a:rPr lang="ja-JP" altLang="en-US" sz="2800"/>
+              <a:t>リモートリポジトリを使うことで自動的にバックアップ</a:t>
+            </a:r>
+            <a:endParaRPr lang="en-US" altLang="ja-JP" sz="2800" dirty="0"/>
+          </a:p>
+          <a:p>
+            <a:pPr marL="342900" indent="-342900">
+              <a:buFont typeface="Arial" panose="020B0604020202020204" pitchFamily="34" charset="0"/>
+              <a:buChar char="•"/>
+            </a:pPr>
+            <a:r>
+              <a:rPr lang="en-US" altLang="ja-JP" sz="2800" dirty="0"/>
+              <a:t>GitHub</a:t>
+            </a:r>
+            <a:r>
+              <a:rPr lang="ja-JP" altLang="en-US" sz="2800"/>
+              <a:t>をコードや論文の「ハブ」として使う</a:t>
+            </a:r>
+            <a:endParaRPr lang="en-US" altLang="ja-JP" sz="2800" dirty="0"/>
+          </a:p>
+          <a:p>
+            <a:pPr marL="800100" lvl="1" indent="-342900">
+              <a:buFont typeface="Arial" panose="020B0604020202020204" pitchFamily="34" charset="0"/>
+              <a:buChar char="•"/>
+            </a:pPr>
+            <a:r>
+              <a:rPr lang="en-US" altLang="ja-JP" sz="2800" dirty="0"/>
+              <a:t>GitHub</a:t>
+            </a:r>
+            <a:r>
+              <a:rPr lang="ja-JP" altLang="en-US" sz="2800"/>
+              <a:t>経由でコードをクラスタやスパコンへ</a:t>
+            </a:r>
+            <a:endParaRPr lang="en-US" altLang="ja-JP" sz="2800" dirty="0"/>
+          </a:p>
+          <a:p>
+            <a:pPr marL="800100" lvl="1" indent="-342900">
+              <a:buFont typeface="Arial" panose="020B0604020202020204" pitchFamily="34" charset="0"/>
+              <a:buChar char="•"/>
+            </a:pPr>
+            <a:r>
+              <a:rPr lang="en-US" altLang="ja-JP" sz="2800" dirty="0"/>
+              <a:t>GitHub</a:t>
+            </a:r>
+            <a:r>
+              <a:rPr lang="ja-JP" altLang="en-US" sz="2800"/>
+              <a:t>経由で論文を共著者へ共有</a:t>
+            </a:r>
+            <a:endParaRPr lang="en-US" altLang="ja-JP" sz="2800" dirty="0"/>
+          </a:p>
+          <a:p>
+            <a:pPr marL="342900" indent="-342900">
+              <a:buFont typeface="Arial" panose="020B0604020202020204" pitchFamily="34" charset="0"/>
+              <a:buChar char="•"/>
+            </a:pPr>
+            <a:r>
+              <a:rPr lang="ja-JP" altLang="en-US" sz="2800"/>
+              <a:t>公開手段としての</a:t>
+            </a:r>
+            <a:r>
+              <a:rPr lang="en-US" altLang="ja-JP" sz="2800" dirty="0"/>
+              <a:t>GitHub</a:t>
+            </a:r>
+          </a:p>
+          <a:p>
+            <a:pPr marL="800100" lvl="1" indent="-342900">
+              <a:buFont typeface="Arial" panose="020B0604020202020204" pitchFamily="34" charset="0"/>
+              <a:buChar char="•"/>
+            </a:pPr>
+            <a:r>
+              <a:rPr lang="ja-JP" altLang="en-US" sz="2800"/>
+              <a:t>データを公開</a:t>
+            </a:r>
+            <a:r>
+              <a:rPr lang="en-US" altLang="ja-JP" sz="2800" dirty="0"/>
+              <a:t> (</a:t>
+            </a:r>
+            <a:r>
+              <a:rPr lang="ja-JP" altLang="en-US" sz="2800"/>
+              <a:t>物性研データリポジトリの利用</a:t>
+            </a:r>
+            <a:r>
+              <a:rPr lang="en-US" altLang="ja-JP" sz="2800" dirty="0"/>
+              <a:t>)</a:t>
+            </a:r>
+          </a:p>
+          <a:p>
+            <a:pPr marL="800100" lvl="1" indent="-342900">
+              <a:buFont typeface="Arial" panose="020B0604020202020204" pitchFamily="34" charset="0"/>
+              <a:buChar char="•"/>
+            </a:pPr>
+            <a:r>
+              <a:rPr lang="ja-JP" altLang="en-US" sz="2800"/>
+              <a:t>講義ノートの公開</a:t>
+            </a:r>
+            <a:endParaRPr lang="en-US" altLang="ja-JP" sz="2800" dirty="0"/>
+          </a:p>
+        </p:txBody>
+      </p:sp>
+    </p:spTree>
+    <p:extLst>
+      <p:ext uri="{BB962C8B-B14F-4D97-AF65-F5344CB8AC3E}">
+        <p14:creationId xmlns:p14="http://schemas.microsoft.com/office/powerpoint/2010/main" val="708715004"/>
       </p:ext>
     </p:extLst>
   </p:cSld>
@@ -1462,7 +6489,7 @@
               </a:rPr>
               <a:t>コード開発</a:t>
             </a:r>
-            <a:endParaRPr lang="en-US" sz="3200">
+            <a:endParaRPr lang="en-US" sz="3200" dirty="0">
               <a:solidFill>
                 <a:srgbClr val="011893"/>
               </a:solidFill>
@@ -2055,7 +7082,7 @@
           <p:cNvPr id="2" name="テキスト プレースホルダー 1">
             <a:extLst>
               <a:ext uri="{FF2B5EF4-FFF2-40B4-BE49-F238E27FC236}">
-                <a16:creationId xmlns:a16="http://schemas.microsoft.com/office/drawing/2014/main" id="{6A141EFB-397F-1633-869B-5D1D59569078}"/>
+                <a16:creationId xmlns:a16="http://schemas.microsoft.com/office/drawing/2014/main" id="{09D60D48-1340-B932-44CF-6A0165405FBA}"/>
               </a:ext>
             </a:extLst>
           </p:cNvPr>
@@ -2072,22 +7099,216 @@
           <a:lstStyle/>
           <a:p>
             <a:r>
-              <a:rPr lang="en-US" altLang="ja-JP"/>
-              <a:t>Git/GitHub</a:t>
-            </a:r>
-            <a:r>
-              <a:rPr lang="ja-JP" altLang="en-US"/>
-              <a:t>による論文執筆管理</a:t>
-            </a:r>
-          </a:p>
-        </p:txBody>
-      </p:sp>
-      <p:sp>
-        <p:nvSpPr>
-          <p:cNvPr id="3" name="角丸四角形 5">
-            <a:extLst>
-              <a:ext uri="{FF2B5EF4-FFF2-40B4-BE49-F238E27FC236}">
-                <a16:creationId xmlns:a16="http://schemas.microsoft.com/office/drawing/2014/main" id="{48070490-36A2-BBEE-E2FD-0CAC03CBBECA}"/>
+              <a:rPr kumimoji="1" lang="ja-JP" altLang="en-US"/>
+              <a:t>コード開発</a:t>
+            </a:r>
+          </a:p>
+        </p:txBody>
+      </p:sp>
+      <p:sp>
+        <p:nvSpPr>
+          <p:cNvPr id="3" name="テキスト ボックス 2">
+            <a:extLst>
+              <a:ext uri="{FF2B5EF4-FFF2-40B4-BE49-F238E27FC236}">
+                <a16:creationId xmlns:a16="http://schemas.microsoft.com/office/drawing/2014/main" id="{15FC0917-EB01-706F-A391-BC464EE3AE08}"/>
+              </a:ext>
+            </a:extLst>
+          </p:cNvPr>
+          <p:cNvSpPr txBox="1"/>
+          <p:nvPr/>
+        </p:nvSpPr>
+        <p:spPr>
+          <a:xfrm>
+            <a:off x="1043608" y="1703081"/>
+            <a:ext cx="5570756" cy="523220"/>
+          </a:xfrm>
+          <a:prstGeom prst="rect">
+            <a:avLst/>
+          </a:prstGeom>
+          <a:noFill/>
+        </p:spPr>
+        <p:txBody>
+          <a:bodyPr wrap="none" rtlCol="0">
+            <a:spAutoFit/>
+          </a:bodyPr>
+          <a:lstStyle/>
+          <a:p>
+            <a:r>
+              <a:rPr kumimoji="1" lang="ja-JP" altLang="en-US" sz="2800"/>
+              <a:t>ローカルで開発、リモートに保存</a:t>
+            </a:r>
+          </a:p>
+        </p:txBody>
+      </p:sp>
+      <p:sp>
+        <p:nvSpPr>
+          <p:cNvPr id="4" name="テキスト ボックス 3">
+            <a:extLst>
+              <a:ext uri="{FF2B5EF4-FFF2-40B4-BE49-F238E27FC236}">
+                <a16:creationId xmlns:a16="http://schemas.microsoft.com/office/drawing/2014/main" id="{2C8DC911-D90A-2610-A381-C81E917A1216}"/>
+              </a:ext>
+            </a:extLst>
+          </p:cNvPr>
+          <p:cNvSpPr txBox="1"/>
+          <p:nvPr/>
+        </p:nvSpPr>
+        <p:spPr>
+          <a:xfrm>
+            <a:off x="179512" y="1118306"/>
+            <a:ext cx="2646878" cy="584775"/>
+          </a:xfrm>
+          <a:prstGeom prst="rect">
+            <a:avLst/>
+          </a:prstGeom>
+          <a:noFill/>
+        </p:spPr>
+        <p:txBody>
+          <a:bodyPr wrap="none" rtlCol="0">
+            <a:spAutoFit/>
+          </a:bodyPr>
+          <a:lstStyle/>
+          <a:p>
+            <a:r>
+              <a:rPr lang="ja-JP" altLang="en-US" sz="3200">
+                <a:solidFill>
+                  <a:srgbClr val="011893"/>
+                </a:solidFill>
+              </a:rPr>
+              <a:t>バックアップ</a:t>
+            </a:r>
+            <a:endParaRPr lang="en-US" sz="3200" dirty="0">
+              <a:solidFill>
+                <a:srgbClr val="011893"/>
+              </a:solidFill>
+            </a:endParaRPr>
+          </a:p>
+        </p:txBody>
+      </p:sp>
+      <p:pic>
+        <p:nvPicPr>
+          <p:cNvPr id="5" name="Picture 10" descr="パソコンを使う会社員のイラスト（男性・笑顔）">
+            <a:extLst>
+              <a:ext uri="{FF2B5EF4-FFF2-40B4-BE49-F238E27FC236}">
+                <a16:creationId xmlns:a16="http://schemas.microsoft.com/office/drawing/2014/main" id="{1F3BCFC6-CFD1-21E5-5AE9-BDD2AE415373}"/>
+              </a:ext>
+            </a:extLst>
+          </p:cNvPr>
+          <p:cNvPicPr>
+            <a:picLocks noChangeAspect="1" noChangeArrowheads="1"/>
+          </p:cNvPicPr>
+          <p:nvPr/>
+        </p:nvPicPr>
+        <p:blipFill>
+          <a:blip r:embed="rId2" cstate="print">
+            <a:extLst>
+              <a:ext uri="{28A0092B-C50C-407E-A947-70E740481C1C}">
+                <a14:useLocalDpi xmlns:a14="http://schemas.microsoft.com/office/drawing/2010/main" val="0"/>
+              </a:ext>
+            </a:extLst>
+          </a:blip>
+          <a:srcRect/>
+          <a:stretch>
+            <a:fillRect/>
+          </a:stretch>
+        </p:blipFill>
+        <p:spPr bwMode="auto">
+          <a:xfrm>
+            <a:off x="2603543" y="2811076"/>
+            <a:ext cx="850171" cy="1234688"/>
+          </a:xfrm>
+          <a:prstGeom prst="rect">
+            <a:avLst/>
+          </a:prstGeom>
+          <a:noFill/>
+          <a:extLst>
+            <a:ext uri="{909E8E84-426E-40DD-AFC4-6F175D3DCCD1}">
+              <a14:hiddenFill xmlns:a14="http://schemas.microsoft.com/office/drawing/2010/main">
+                <a:solidFill>
+                  <a:srgbClr val="FFFFFF"/>
+                </a:solidFill>
+              </a14:hiddenFill>
+            </a:ext>
+          </a:extLst>
+        </p:spPr>
+      </p:pic>
+      <p:pic>
+        <p:nvPicPr>
+          <p:cNvPr id="6" name="図 5">
+            <a:extLst>
+              <a:ext uri="{FF2B5EF4-FFF2-40B4-BE49-F238E27FC236}">
+                <a16:creationId xmlns:a16="http://schemas.microsoft.com/office/drawing/2014/main" id="{982CDAE1-C4FA-301C-9124-3D7BB3FEACBE}"/>
+              </a:ext>
+            </a:extLst>
+          </p:cNvPr>
+          <p:cNvPicPr>
+            <a:picLocks noChangeAspect="1"/>
+          </p:cNvPicPr>
+          <p:nvPr/>
+        </p:nvPicPr>
+        <p:blipFill>
+          <a:blip r:embed="rId3">
+            <a:extLst>
+              <a:ext uri="{28A0092B-C50C-407E-A947-70E740481C1C}">
+                <a14:useLocalDpi xmlns:a14="http://schemas.microsoft.com/office/drawing/2010/main" val="0"/>
+              </a:ext>
+            </a:extLst>
+          </a:blip>
+          <a:stretch>
+            <a:fillRect/>
+          </a:stretch>
+        </p:blipFill>
+        <p:spPr>
+          <a:xfrm>
+            <a:off x="6614364" y="3303346"/>
+            <a:ext cx="738048" cy="738048"/>
+          </a:xfrm>
+          <a:prstGeom prst="rect">
+            <a:avLst/>
+          </a:prstGeom>
+        </p:spPr>
+      </p:pic>
+      <p:pic>
+        <p:nvPicPr>
+          <p:cNvPr id="7" name="図 6">
+            <a:extLst>
+              <a:ext uri="{FF2B5EF4-FFF2-40B4-BE49-F238E27FC236}">
+                <a16:creationId xmlns:a16="http://schemas.microsoft.com/office/drawing/2014/main" id="{85D0F384-B428-E95F-EFF6-155BF3D88DF7}"/>
+              </a:ext>
+            </a:extLst>
+          </p:cNvPr>
+          <p:cNvPicPr>
+            <a:picLocks noChangeAspect="1"/>
+          </p:cNvPicPr>
+          <p:nvPr/>
+        </p:nvPicPr>
+        <p:blipFill>
+          <a:blip r:embed="rId4" cstate="print">
+            <a:extLst>
+              <a:ext uri="{28A0092B-C50C-407E-A947-70E740481C1C}">
+                <a14:useLocalDpi xmlns:a14="http://schemas.microsoft.com/office/drawing/2010/main" val="0"/>
+              </a:ext>
+            </a:extLst>
+          </a:blip>
+          <a:stretch>
+            <a:fillRect/>
+          </a:stretch>
+        </p:blipFill>
+        <p:spPr>
+          <a:xfrm>
+            <a:off x="6254324" y="2799290"/>
+            <a:ext cx="1368152" cy="560942"/>
+          </a:xfrm>
+          <a:prstGeom prst="rect">
+            <a:avLst/>
+          </a:prstGeom>
+        </p:spPr>
+      </p:pic>
+      <p:sp>
+        <p:nvSpPr>
+          <p:cNvPr id="9" name="円柱 8">
+            <a:extLst>
+              <a:ext uri="{FF2B5EF4-FFF2-40B4-BE49-F238E27FC236}">
+                <a16:creationId xmlns:a16="http://schemas.microsoft.com/office/drawing/2014/main" id="{D8BF2671-E03C-C3D5-0528-863BA96195A9}"/>
               </a:ext>
             </a:extLst>
           </p:cNvPr>
@@ -2096,18 +7317,17 @@
         </p:nvSpPr>
         <p:spPr>
           <a:xfrm>
-            <a:off x="323528" y="1628800"/>
-            <a:ext cx="3600400" cy="2520280"/>
-          </a:xfrm>
-          <a:prstGeom prst="roundRect">
-            <a:avLst/>
-          </a:prstGeom>
-          <a:noFill/>
-          <a:ln w="28575">
+            <a:off x="2704592" y="4566997"/>
+            <a:ext cx="648072" cy="754178"/>
+          </a:xfrm>
+          <a:prstGeom prst="can">
+            <a:avLst/>
+          </a:prstGeom>
+          <a:noFill/>
+          <a:ln>
             <a:solidFill>
               <a:schemeClr val="tx1"/>
             </a:solidFill>
-            <a:prstDash val="dash"/>
           </a:ln>
         </p:spPr>
         <p:style>
@@ -2135,219 +7355,59 @@
           </a:p>
         </p:txBody>
       </p:sp>
-      <p:sp>
-        <p:nvSpPr>
-          <p:cNvPr id="4" name="テキスト ボックス 3">
-            <a:extLst>
-              <a:ext uri="{FF2B5EF4-FFF2-40B4-BE49-F238E27FC236}">
-                <a16:creationId xmlns:a16="http://schemas.microsoft.com/office/drawing/2014/main" id="{C2381C38-79CE-C2C5-98DB-07F80EB89BD2}"/>
-              </a:ext>
-            </a:extLst>
-          </p:cNvPr>
-          <p:cNvSpPr txBox="1"/>
-          <p:nvPr/>
-        </p:nvSpPr>
-        <p:spPr>
-          <a:xfrm>
-            <a:off x="539552" y="1844824"/>
-            <a:ext cx="3262432" cy="1938992"/>
-          </a:xfrm>
-          <a:prstGeom prst="rect">
-            <a:avLst/>
-          </a:prstGeom>
-          <a:noFill/>
-        </p:spPr>
-        <p:txBody>
-          <a:bodyPr wrap="none" rtlCol="0">
-            <a:spAutoFit/>
-          </a:bodyPr>
-          <a:lstStyle/>
-          <a:p>
-            <a:r>
-              <a:rPr kumimoji="1" lang="en-US" altLang="ja-JP" sz="2400"/>
-              <a:t>TeX</a:t>
-            </a:r>
-            <a:r>
-              <a:rPr kumimoji="1" lang="ja-JP" altLang="en-US" sz="2400"/>
-              <a:t>ファイル</a:t>
-            </a:r>
-            <a:endParaRPr kumimoji="1" lang="en-US" altLang="ja-JP" sz="2400"/>
-          </a:p>
-          <a:p>
-            <a:r>
-              <a:rPr kumimoji="1" lang="en-US" altLang="ja-JP" sz="2400"/>
-              <a:t>bib</a:t>
-            </a:r>
-            <a:r>
-              <a:rPr kumimoji="1" lang="ja-JP" altLang="en-US" sz="2400"/>
-              <a:t>ファイル</a:t>
-            </a:r>
-            <a:endParaRPr kumimoji="1" lang="en-US" altLang="ja-JP" sz="2400"/>
-          </a:p>
-          <a:p>
-            <a:r>
-              <a:rPr kumimoji="1" lang="ja-JP" altLang="en-US" sz="2400"/>
-              <a:t>図のファイル</a:t>
-            </a:r>
-            <a:endParaRPr kumimoji="1" lang="en-US" altLang="ja-JP" sz="2400"/>
-          </a:p>
-          <a:p>
-            <a:r>
-              <a:rPr lang="ja-JP" altLang="en-US" sz="2400">
-                <a:solidFill>
-                  <a:srgbClr val="FF0000"/>
-                </a:solidFill>
-              </a:rPr>
-              <a:t>図を作るためのデータ</a:t>
-            </a:r>
-            <a:endParaRPr lang="en-US" altLang="ja-JP" sz="2400">
-              <a:solidFill>
-                <a:srgbClr val="FF0000"/>
-              </a:solidFill>
-            </a:endParaRPr>
-          </a:p>
-          <a:p>
-            <a:r>
-              <a:rPr lang="ja-JP" altLang="en-US" sz="2400"/>
-              <a:t>図を作るスクリプト等</a:t>
-            </a:r>
-            <a:endParaRPr kumimoji="1" lang="ja-JP" altLang="en-US" sz="2400"/>
-          </a:p>
-        </p:txBody>
-      </p:sp>
-      <p:sp>
-        <p:nvSpPr>
-          <p:cNvPr id="5" name="テキスト ボックス 4">
-            <a:extLst>
-              <a:ext uri="{FF2B5EF4-FFF2-40B4-BE49-F238E27FC236}">
-                <a16:creationId xmlns:a16="http://schemas.microsoft.com/office/drawing/2014/main" id="{D2C55377-EF16-2FBD-5389-C6D1E3AF1A58}"/>
-              </a:ext>
-            </a:extLst>
-          </p:cNvPr>
-          <p:cNvSpPr txBox="1"/>
-          <p:nvPr/>
-        </p:nvSpPr>
-        <p:spPr>
-          <a:xfrm>
-            <a:off x="611560" y="1052736"/>
-            <a:ext cx="3262432" cy="461665"/>
-          </a:xfrm>
-          <a:prstGeom prst="rect">
-            <a:avLst/>
-          </a:prstGeom>
-          <a:noFill/>
-        </p:spPr>
-        <p:txBody>
-          <a:bodyPr wrap="none" rtlCol="0">
-            <a:spAutoFit/>
-          </a:bodyPr>
-          <a:lstStyle/>
-          <a:p>
-            <a:r>
-              <a:rPr lang="ja-JP" altLang="en-US" sz="2400"/>
-              <a:t>論文</a:t>
-            </a:r>
-            <a:r>
-              <a:rPr kumimoji="1" lang="ja-JP" altLang="en-US" sz="2400"/>
-              <a:t>執筆用リポジトリ</a:t>
-            </a:r>
-          </a:p>
-        </p:txBody>
-      </p:sp>
-      <p:sp>
-        <p:nvSpPr>
-          <p:cNvPr id="6" name="テキスト ボックス 5">
-            <a:extLst>
-              <a:ext uri="{FF2B5EF4-FFF2-40B4-BE49-F238E27FC236}">
-                <a16:creationId xmlns:a16="http://schemas.microsoft.com/office/drawing/2014/main" id="{BD0B2558-8C83-5ED9-03EF-1FBE47137846}"/>
-              </a:ext>
-            </a:extLst>
-          </p:cNvPr>
-          <p:cNvSpPr txBox="1"/>
-          <p:nvPr/>
-        </p:nvSpPr>
-        <p:spPr>
-          <a:xfrm>
-            <a:off x="4788024" y="1052736"/>
-            <a:ext cx="4185761" cy="461665"/>
-          </a:xfrm>
-          <a:prstGeom prst="rect">
-            <a:avLst/>
-          </a:prstGeom>
-          <a:noFill/>
-        </p:spPr>
-        <p:txBody>
-          <a:bodyPr wrap="none" rtlCol="0">
-            <a:spAutoFit/>
-          </a:bodyPr>
-          <a:lstStyle/>
-          <a:p>
-            <a:r>
-              <a:rPr kumimoji="1" lang="ja-JP" altLang="en-US" sz="2400"/>
-              <a:t>プログラム開発用リポジトリ</a:t>
-            </a:r>
-          </a:p>
-        </p:txBody>
-      </p:sp>
-      <p:sp>
-        <p:nvSpPr>
-          <p:cNvPr id="7" name="角丸四角形 16">
-            <a:extLst>
-              <a:ext uri="{FF2B5EF4-FFF2-40B4-BE49-F238E27FC236}">
-                <a16:creationId xmlns:a16="http://schemas.microsoft.com/office/drawing/2014/main" id="{9E577FC5-1E18-5BF3-75A6-B82F174DE35B}"/>
-              </a:ext>
-            </a:extLst>
-          </p:cNvPr>
-          <p:cNvSpPr/>
-          <p:nvPr/>
-        </p:nvSpPr>
-        <p:spPr>
-          <a:xfrm>
-            <a:off x="5004048" y="1628800"/>
-            <a:ext cx="3600400" cy="1728192"/>
-          </a:xfrm>
-          <a:prstGeom prst="roundRect">
-            <a:avLst/>
-          </a:prstGeom>
-          <a:noFill/>
-          <a:ln w="28575">
+      <p:cxnSp>
+        <p:nvCxnSpPr>
+          <p:cNvPr id="11" name="直線矢印コネクタ 10">
+            <a:extLst>
+              <a:ext uri="{FF2B5EF4-FFF2-40B4-BE49-F238E27FC236}">
+                <a16:creationId xmlns:a16="http://schemas.microsoft.com/office/drawing/2014/main" id="{CDCEF958-C7DC-BA3A-D819-7CC301F343FB}"/>
+              </a:ext>
+            </a:extLst>
+          </p:cNvPr>
+          <p:cNvCxnSpPr>
+            <a:cxnSpLocks/>
+            <a:stCxn id="5" idx="2"/>
+            <a:endCxn id="9" idx="1"/>
+          </p:cNvCxnSpPr>
+          <p:nvPr/>
+        </p:nvCxnSpPr>
+        <p:spPr>
+          <a:xfrm flipH="1">
+            <a:off x="3028628" y="4045764"/>
+            <a:ext cx="1" cy="521233"/>
+          </a:xfrm>
+          <a:prstGeom prst="straightConnector1">
+            <a:avLst/>
+          </a:prstGeom>
+          <a:ln>
             <a:solidFill>
               <a:schemeClr val="tx1"/>
             </a:solidFill>
-            <a:prstDash val="dash"/>
+            <a:headEnd type="none" w="med" len="med"/>
+            <a:tailEnd type="triangle"/>
           </a:ln>
         </p:spPr>
         <p:style>
-          <a:lnRef idx="2">
-            <a:schemeClr val="accent1">
-              <a:shade val="50000"/>
-            </a:schemeClr>
+          <a:lnRef idx="1">
+            <a:schemeClr val="accent1"/>
           </a:lnRef>
-          <a:fillRef idx="1">
+          <a:fillRef idx="0">
             <a:schemeClr val="accent1"/>
           </a:fillRef>
           <a:effectRef idx="0">
             <a:schemeClr val="accent1"/>
           </a:effectRef>
           <a:fontRef idx="minor">
-            <a:schemeClr val="lt1"/>
+            <a:schemeClr val="tx1"/>
           </a:fontRef>
         </p:style>
-        <p:txBody>
-          <a:bodyPr rtlCol="0" anchor="ctr"/>
-          <a:lstStyle/>
-          <a:p>
-            <a:pPr algn="ctr"/>
-            <a:endParaRPr kumimoji="1" lang="ja-JP" altLang="en-US"/>
-          </a:p>
-        </p:txBody>
-      </p:sp>
-      <p:sp>
-        <p:nvSpPr>
-          <p:cNvPr id="8" name="テキスト ボックス 7">
-            <a:extLst>
-              <a:ext uri="{FF2B5EF4-FFF2-40B4-BE49-F238E27FC236}">
-                <a16:creationId xmlns:a16="http://schemas.microsoft.com/office/drawing/2014/main" id="{DD2B51E6-2608-BC88-8608-85AFBC4CCE9E}"/>
+      </p:cxnSp>
+      <p:sp>
+        <p:nvSpPr>
+          <p:cNvPr id="12" name="テキスト ボックス 11">
+            <a:extLst>
+              <a:ext uri="{FF2B5EF4-FFF2-40B4-BE49-F238E27FC236}">
+                <a16:creationId xmlns:a16="http://schemas.microsoft.com/office/drawing/2014/main" id="{7AFAE25F-055A-57CE-3EB1-313165F8EEC1}"/>
               </a:ext>
             </a:extLst>
           </p:cNvPr>
@@ -2356,8 +7416,8 @@
         </p:nvSpPr>
         <p:spPr>
           <a:xfrm>
-            <a:off x="5076056" y="1700808"/>
-            <a:ext cx="2954655" cy="1200329"/>
+            <a:off x="3067010" y="4100841"/>
+            <a:ext cx="1107996" cy="369332"/>
           </a:xfrm>
           <a:prstGeom prst="rect">
             <a:avLst/>
@@ -2371,33 +7431,63 @@
           <a:lstStyle/>
           <a:p>
             <a:r>
-              <a:rPr kumimoji="1" lang="ja-JP" altLang="en-US" sz="2400"/>
-              <a:t>プログラムソース</a:t>
-            </a:r>
-            <a:endParaRPr kumimoji="1" lang="en-US" altLang="ja-JP" sz="2400"/>
-          </a:p>
-          <a:p>
-            <a:r>
-              <a:rPr lang="ja-JP" altLang="en-US" sz="2400"/>
-              <a:t>インプットファイル</a:t>
-            </a:r>
-            <a:endParaRPr lang="en-US" altLang="ja-JP" sz="2400"/>
-          </a:p>
-          <a:p>
-            <a:r>
-              <a:rPr lang="ja-JP" altLang="en-US" sz="2400"/>
-              <a:t>ジョブスクリプト等</a:t>
-            </a:r>
-            <a:endParaRPr lang="en-US" altLang="ja-JP" sz="2400"/>
-          </a:p>
-        </p:txBody>
-      </p:sp>
-      <p:sp>
-        <p:nvSpPr>
-          <p:cNvPr id="9" name="テキスト ボックス 8">
-            <a:extLst>
-              <a:ext uri="{FF2B5EF4-FFF2-40B4-BE49-F238E27FC236}">
-                <a16:creationId xmlns:a16="http://schemas.microsoft.com/office/drawing/2014/main" id="{91F1B830-D9E9-2092-1101-ABC95D4FCCF0}"/>
+              <a:rPr kumimoji="1" lang="ja-JP" altLang="en-US"/>
+              <a:t>コミット</a:t>
+            </a:r>
+          </a:p>
+        </p:txBody>
+      </p:sp>
+      <p:cxnSp>
+        <p:nvCxnSpPr>
+          <p:cNvPr id="14" name="直線矢印コネクタ 13">
+            <a:extLst>
+              <a:ext uri="{FF2B5EF4-FFF2-40B4-BE49-F238E27FC236}">
+                <a16:creationId xmlns:a16="http://schemas.microsoft.com/office/drawing/2014/main" id="{CFB474B8-4EFC-2947-30D7-FAFDF5EDCB4F}"/>
+              </a:ext>
+            </a:extLst>
+          </p:cNvPr>
+          <p:cNvCxnSpPr>
+            <a:stCxn id="5" idx="3"/>
+          </p:cNvCxnSpPr>
+          <p:nvPr/>
+        </p:nvCxnSpPr>
+        <p:spPr>
+          <a:xfrm>
+            <a:off x="3453714" y="3428420"/>
+            <a:ext cx="2800610" cy="580"/>
+          </a:xfrm>
+          <a:prstGeom prst="straightConnector1">
+            <a:avLst/>
+          </a:prstGeom>
+          <a:ln>
+            <a:solidFill>
+              <a:schemeClr val="tx1"/>
+            </a:solidFill>
+            <a:headEnd type="none" w="med" len="med"/>
+            <a:tailEnd type="triangle"/>
+          </a:ln>
+        </p:spPr>
+        <p:style>
+          <a:lnRef idx="1">
+            <a:schemeClr val="accent1"/>
+          </a:lnRef>
+          <a:fillRef idx="0">
+            <a:schemeClr val="accent1"/>
+          </a:fillRef>
+          <a:effectRef idx="0">
+            <a:schemeClr val="accent1"/>
+          </a:effectRef>
+          <a:fontRef idx="minor">
+            <a:schemeClr val="tx1"/>
+          </a:fontRef>
+        </p:style>
+      </p:cxnSp>
+      <p:sp>
+        <p:nvSpPr>
+          <p:cNvPr id="15" name="テキスト ボックス 14">
+            <a:extLst>
+              <a:ext uri="{FF2B5EF4-FFF2-40B4-BE49-F238E27FC236}">
+                <a16:creationId xmlns:a16="http://schemas.microsoft.com/office/drawing/2014/main" id="{86E0DA69-5062-0247-5F9B-24E2D39ECEBF}"/>
               </a:ext>
             </a:extLst>
           </p:cNvPr>
@@ -2406,8 +7496,8 @@
         </p:nvSpPr>
         <p:spPr>
           <a:xfrm>
-            <a:off x="179512" y="4581128"/>
-            <a:ext cx="8225329" cy="1569660"/>
+            <a:off x="4291388" y="2895095"/>
+            <a:ext cx="1107996" cy="369332"/>
           </a:xfrm>
           <a:prstGeom prst="rect">
             <a:avLst/>
@@ -2420,87 +7510,60 @@
           </a:bodyPr>
           <a:lstStyle/>
           <a:p>
-            <a:pPr marL="342900" indent="-342900">
-              <a:buFont typeface="Arial" panose="020B0604020202020204" pitchFamily="34" charset="0"/>
-              <a:buChar char="•"/>
-            </a:pPr>
+            <a:r>
+              <a:rPr kumimoji="1" lang="ja-JP" altLang="en-US"/>
+              <a:t>プッシュ</a:t>
+            </a:r>
+          </a:p>
+        </p:txBody>
+      </p:sp>
+      <p:sp>
+        <p:nvSpPr>
+          <p:cNvPr id="18" name="テキスト ボックス 17">
+            <a:extLst>
+              <a:ext uri="{FF2B5EF4-FFF2-40B4-BE49-F238E27FC236}">
+                <a16:creationId xmlns:a16="http://schemas.microsoft.com/office/drawing/2014/main" id="{A042180B-1A04-58B2-3EC7-B2F4639569A9}"/>
+              </a:ext>
+            </a:extLst>
+          </p:cNvPr>
+          <p:cNvSpPr txBox="1"/>
+          <p:nvPr/>
+        </p:nvSpPr>
+        <p:spPr>
+          <a:xfrm>
+            <a:off x="505736" y="5661248"/>
+            <a:ext cx="7571303" cy="830997"/>
+          </a:xfrm>
+          <a:prstGeom prst="rect">
+            <a:avLst/>
+          </a:prstGeom>
+          <a:noFill/>
+        </p:spPr>
+        <p:txBody>
+          <a:bodyPr wrap="none" rtlCol="0">
+            <a:spAutoFit/>
+          </a:bodyPr>
+          <a:lstStyle/>
+          <a:p>
+            <a:r>
+              <a:rPr kumimoji="1" lang="ja-JP" altLang="en-US" sz="2400"/>
+              <a:t>コミットの頻度：デバッグの単位</a:t>
+            </a:r>
+            <a:endParaRPr kumimoji="1" lang="en-US" altLang="ja-JP" sz="2400" dirty="0"/>
+          </a:p>
+          <a:p>
             <a:r>
               <a:rPr lang="ja-JP" altLang="en-US" sz="2400"/>
-              <a:t>論文</a:t>
-            </a:r>
-            <a:r>
-              <a:rPr kumimoji="1" lang="ja-JP" altLang="en-US" sz="2400"/>
-              <a:t>執筆用</a:t>
-            </a:r>
-            <a:r>
-              <a:rPr kumimoji="1" lang="ja-JP" altLang="en-US" sz="2400" dirty="0"/>
-              <a:t>とプログラム開発のリポジトリ</a:t>
-            </a:r>
-            <a:r>
-              <a:rPr lang="ja-JP" altLang="en-US" sz="2400" dirty="0"/>
-              <a:t>を</a:t>
-            </a:r>
-            <a:r>
-              <a:rPr kumimoji="1" lang="ja-JP" altLang="en-US" sz="2400" dirty="0"/>
-              <a:t>分ける</a:t>
-            </a:r>
-            <a:endParaRPr kumimoji="1" lang="en-US" altLang="ja-JP" sz="2400" dirty="0"/>
-          </a:p>
-          <a:p>
-            <a:pPr marL="342900" indent="-342900">
-              <a:buFont typeface="Arial" panose="020B0604020202020204" pitchFamily="34" charset="0"/>
-              <a:buChar char="•"/>
-            </a:pPr>
-            <a:r>
-              <a:rPr lang="ja-JP" altLang="en-US" sz="2400" dirty="0"/>
-              <a:t>出力データはプログラム開発リポジトリにいれない</a:t>
-            </a:r>
-            <a:endParaRPr lang="en-US" altLang="ja-JP" sz="2400" dirty="0"/>
-          </a:p>
-          <a:p>
-            <a:pPr marL="342900" indent="-342900">
-              <a:buFont typeface="Arial" panose="020B0604020202020204" pitchFamily="34" charset="0"/>
-              <a:buChar char="•"/>
-            </a:pPr>
-            <a:r>
-              <a:rPr kumimoji="1" lang="ja-JP" altLang="en-US" sz="2400" dirty="0"/>
-              <a:t>図を作るためのデータは卒論執筆用リポジトリに入れる</a:t>
-            </a:r>
-            <a:endParaRPr lang="en-US" altLang="ja-JP" sz="2400" dirty="0"/>
-          </a:p>
-          <a:p>
-            <a:pPr marL="342900" indent="-342900">
-              <a:buFont typeface="Arial" panose="020B0604020202020204" pitchFamily="34" charset="0"/>
-              <a:buChar char="•"/>
-            </a:pPr>
-            <a:r>
-              <a:rPr lang="ja-JP" altLang="en-US" sz="2400" dirty="0"/>
-              <a:t>大きなデータ</a:t>
-            </a:r>
-            <a:r>
-              <a:rPr lang="en-US" altLang="ja-JP" sz="2400" dirty="0"/>
-              <a:t>(</a:t>
-            </a:r>
-            <a:r>
-              <a:rPr lang="ja-JP" altLang="en-US" sz="2400" dirty="0"/>
-              <a:t>ダンプなど</a:t>
-            </a:r>
-            <a:r>
-              <a:rPr lang="en-US" altLang="ja-JP" sz="2400" dirty="0"/>
-              <a:t>)</a:t>
-            </a:r>
-            <a:r>
-              <a:rPr lang="ja-JP" altLang="en-US" sz="2400" dirty="0"/>
-              <a:t>はリポジトリに入れない</a:t>
-            </a:r>
-            <a:endParaRPr kumimoji="1" lang="ja-JP" altLang="en-US" sz="2400" dirty="0"/>
+              <a:t>プッシュの頻度：データが失われた時の手戻りの時間</a:t>
+            </a:r>
+            <a:endParaRPr kumimoji="1" lang="ja-JP" altLang="en-US" sz="2400"/>
           </a:p>
         </p:txBody>
       </p:sp>
     </p:spTree>
     <p:extLst>
       <p:ext uri="{BB962C8B-B14F-4D97-AF65-F5344CB8AC3E}">
-        <p14:creationId xmlns:p14="http://schemas.microsoft.com/office/powerpoint/2010/main" val="1641247865"/>
+        <p14:creationId xmlns:p14="http://schemas.microsoft.com/office/powerpoint/2010/main" val="3738209877"/>
       </p:ext>
     </p:extLst>
   </p:cSld>
@@ -2532,7 +7595,7 @@
           <p:cNvPr id="2" name="テキスト プレースホルダー 1">
             <a:extLst>
               <a:ext uri="{FF2B5EF4-FFF2-40B4-BE49-F238E27FC236}">
-                <a16:creationId xmlns:a16="http://schemas.microsoft.com/office/drawing/2014/main" id="{5210F7DB-11A3-429C-B866-7F0C5CC0B7B7}"/>
+                <a16:creationId xmlns:a16="http://schemas.microsoft.com/office/drawing/2014/main" id="{322D9F46-541A-FB2E-3692-C7F204F26E15}"/>
               </a:ext>
             </a:extLst>
           </p:cNvPr>
@@ -2549,10 +7612,889 @@
           <a:lstStyle/>
           <a:p>
             <a:r>
+              <a:rPr kumimoji="1" lang="ja-JP" altLang="en-US"/>
+              <a:t>コード開発</a:t>
+            </a:r>
+          </a:p>
+        </p:txBody>
+      </p:sp>
+      <p:sp>
+        <p:nvSpPr>
+          <p:cNvPr id="3" name="テキスト ボックス 2">
+            <a:extLst>
+              <a:ext uri="{FF2B5EF4-FFF2-40B4-BE49-F238E27FC236}">
+                <a16:creationId xmlns:a16="http://schemas.microsoft.com/office/drawing/2014/main" id="{8E1C019B-8674-B19D-B7E9-66404198C7E2}"/>
+              </a:ext>
+            </a:extLst>
+          </p:cNvPr>
+          <p:cNvSpPr txBox="1"/>
+          <p:nvPr/>
+        </p:nvSpPr>
+        <p:spPr>
+          <a:xfrm>
+            <a:off x="323528" y="1052736"/>
+            <a:ext cx="4698722" cy="584775"/>
+          </a:xfrm>
+          <a:prstGeom prst="rect">
+            <a:avLst/>
+          </a:prstGeom>
+          <a:noFill/>
+        </p:spPr>
+        <p:txBody>
+          <a:bodyPr wrap="none" rtlCol="0">
+            <a:spAutoFit/>
+          </a:bodyPr>
+          <a:lstStyle/>
+          <a:p>
+            <a:r>
+              <a:rPr lang="ja-JP" altLang="en-US" sz="3200">
+                <a:solidFill>
+                  <a:srgbClr val="011893"/>
+                </a:solidFill>
+              </a:rPr>
+              <a:t>ブランチによる作業分離</a:t>
+            </a:r>
+            <a:endParaRPr lang="en-US" sz="3200" dirty="0">
+              <a:solidFill>
+                <a:srgbClr val="011893"/>
+              </a:solidFill>
+            </a:endParaRPr>
+          </a:p>
+        </p:txBody>
+      </p:sp>
+      <p:sp>
+        <p:nvSpPr>
+          <p:cNvPr id="5" name="楕円 4">
+            <a:extLst>
+              <a:ext uri="{FF2B5EF4-FFF2-40B4-BE49-F238E27FC236}">
+                <a16:creationId xmlns:a16="http://schemas.microsoft.com/office/drawing/2014/main" id="{E091D037-CB44-3A94-5D0D-345C4226A87A}"/>
+              </a:ext>
+            </a:extLst>
+          </p:cNvPr>
+          <p:cNvSpPr/>
+          <p:nvPr/>
+        </p:nvSpPr>
+        <p:spPr>
+          <a:xfrm>
+            <a:off x="1902211" y="3258720"/>
+            <a:ext cx="432048" cy="432048"/>
+          </a:xfrm>
+          <a:prstGeom prst="ellipse">
+            <a:avLst/>
+          </a:prstGeom>
+          <a:solidFill>
+            <a:srgbClr val="011893"/>
+          </a:solidFill>
+          <a:ln>
+            <a:solidFill>
+              <a:schemeClr val="tx1"/>
+            </a:solidFill>
+          </a:ln>
+        </p:spPr>
+        <p:style>
+          <a:lnRef idx="2">
+            <a:schemeClr val="accent1">
+              <a:shade val="50000"/>
+            </a:schemeClr>
+          </a:lnRef>
+          <a:fillRef idx="1">
+            <a:schemeClr val="accent1"/>
+          </a:fillRef>
+          <a:effectRef idx="0">
+            <a:schemeClr val="accent1"/>
+          </a:effectRef>
+          <a:fontRef idx="minor">
+            <a:schemeClr val="lt1"/>
+          </a:fontRef>
+        </p:style>
+        <p:txBody>
+          <a:bodyPr rtlCol="0" anchor="ctr"/>
+          <a:lstStyle/>
+          <a:p>
+            <a:pPr algn="ctr"/>
+            <a:endParaRPr kumimoji="1" lang="ja-JP" altLang="en-US"/>
+          </a:p>
+        </p:txBody>
+      </p:sp>
+      <p:sp>
+        <p:nvSpPr>
+          <p:cNvPr id="6" name="テキスト ボックス 5">
+            <a:extLst>
+              <a:ext uri="{FF2B5EF4-FFF2-40B4-BE49-F238E27FC236}">
+                <a16:creationId xmlns:a16="http://schemas.microsoft.com/office/drawing/2014/main" id="{73687B20-5DF2-1902-2065-270B4A49AFDD}"/>
+              </a:ext>
+            </a:extLst>
+          </p:cNvPr>
+          <p:cNvSpPr txBox="1"/>
+          <p:nvPr/>
+        </p:nvSpPr>
+        <p:spPr>
+          <a:xfrm>
+            <a:off x="840928" y="3321436"/>
+            <a:ext cx="1008112" cy="369332"/>
+          </a:xfrm>
+          <a:prstGeom prst="rect">
+            <a:avLst/>
+          </a:prstGeom>
+          <a:noFill/>
+        </p:spPr>
+        <p:txBody>
+          <a:bodyPr wrap="square">
+            <a:spAutoFit/>
+          </a:bodyPr>
+          <a:lstStyle/>
+          <a:p>
+            <a:r>
+              <a:rPr lang="en-US"/>
+              <a:t>main</a:t>
+            </a:r>
+          </a:p>
+        </p:txBody>
+      </p:sp>
+      <p:sp>
+        <p:nvSpPr>
+          <p:cNvPr id="7" name="楕円 4">
+            <a:extLst>
+              <a:ext uri="{FF2B5EF4-FFF2-40B4-BE49-F238E27FC236}">
+                <a16:creationId xmlns:a16="http://schemas.microsoft.com/office/drawing/2014/main" id="{87856BB0-8DFF-67CF-0891-70A4B428933A}"/>
+              </a:ext>
+            </a:extLst>
+          </p:cNvPr>
+          <p:cNvSpPr/>
+          <p:nvPr/>
+        </p:nvSpPr>
+        <p:spPr>
+          <a:xfrm>
+            <a:off x="4133778" y="4134798"/>
+            <a:ext cx="432048" cy="432048"/>
+          </a:xfrm>
+          <a:prstGeom prst="ellipse">
+            <a:avLst/>
+          </a:prstGeom>
+          <a:solidFill>
+            <a:srgbClr val="92D050"/>
+          </a:solidFill>
+          <a:ln>
+            <a:solidFill>
+              <a:schemeClr val="tx1"/>
+            </a:solidFill>
+          </a:ln>
+        </p:spPr>
+        <p:style>
+          <a:lnRef idx="2">
+            <a:schemeClr val="accent1">
+              <a:shade val="50000"/>
+            </a:schemeClr>
+          </a:lnRef>
+          <a:fillRef idx="1">
+            <a:schemeClr val="accent1"/>
+          </a:fillRef>
+          <a:effectRef idx="0">
+            <a:schemeClr val="accent1"/>
+          </a:effectRef>
+          <a:fontRef idx="minor">
+            <a:schemeClr val="lt1"/>
+          </a:fontRef>
+        </p:style>
+        <p:txBody>
+          <a:bodyPr rtlCol="0" anchor="ctr"/>
+          <a:lstStyle/>
+          <a:p>
+            <a:pPr algn="ctr"/>
+            <a:endParaRPr kumimoji="1" lang="ja-JP" altLang="en-US"/>
+          </a:p>
+        </p:txBody>
+      </p:sp>
+      <p:cxnSp>
+        <p:nvCxnSpPr>
+          <p:cNvPr id="8" name="直線コネクタ 7">
+            <a:extLst>
+              <a:ext uri="{FF2B5EF4-FFF2-40B4-BE49-F238E27FC236}">
+                <a16:creationId xmlns:a16="http://schemas.microsoft.com/office/drawing/2014/main" id="{9AAEADCA-0119-2C4E-48E9-3142C364798E}"/>
+              </a:ext>
+            </a:extLst>
+          </p:cNvPr>
+          <p:cNvCxnSpPr>
+            <a:cxnSpLocks/>
+            <a:stCxn id="5" idx="5"/>
+            <a:endCxn id="7" idx="1"/>
+          </p:cNvCxnSpPr>
+          <p:nvPr/>
+        </p:nvCxnSpPr>
+        <p:spPr>
+          <a:xfrm>
+            <a:off x="2270987" y="3627496"/>
+            <a:ext cx="1926063" cy="570574"/>
+          </a:xfrm>
+          <a:prstGeom prst="line">
+            <a:avLst/>
+          </a:prstGeom>
+          <a:ln w="57150">
+            <a:solidFill>
+              <a:schemeClr val="tx1"/>
+            </a:solidFill>
+            <a:headEnd type="none" w="med" len="med"/>
+            <a:tailEnd type="none" w="med" len="med"/>
+          </a:ln>
+        </p:spPr>
+        <p:style>
+          <a:lnRef idx="1">
+            <a:schemeClr val="accent1"/>
+          </a:lnRef>
+          <a:fillRef idx="0">
+            <a:schemeClr val="accent1"/>
+          </a:fillRef>
+          <a:effectRef idx="0">
+            <a:schemeClr val="accent1"/>
+          </a:effectRef>
+          <a:fontRef idx="minor">
+            <a:schemeClr val="tx1"/>
+          </a:fontRef>
+        </p:style>
+      </p:cxnSp>
+      <p:sp>
+        <p:nvSpPr>
+          <p:cNvPr id="12" name="テキスト ボックス 11">
+            <a:extLst>
+              <a:ext uri="{FF2B5EF4-FFF2-40B4-BE49-F238E27FC236}">
+                <a16:creationId xmlns:a16="http://schemas.microsoft.com/office/drawing/2014/main" id="{3C53D56C-4E01-649E-5BB0-6E535445ACED}"/>
+              </a:ext>
+            </a:extLst>
+          </p:cNvPr>
+          <p:cNvSpPr txBox="1"/>
+          <p:nvPr/>
+        </p:nvSpPr>
+        <p:spPr>
+          <a:xfrm>
+            <a:off x="755576" y="4134798"/>
+            <a:ext cx="1008112" cy="369332"/>
+          </a:xfrm>
+          <a:prstGeom prst="rect">
+            <a:avLst/>
+          </a:prstGeom>
+          <a:noFill/>
+        </p:spPr>
+        <p:txBody>
+          <a:bodyPr wrap="square">
+            <a:spAutoFit/>
+          </a:bodyPr>
+          <a:lstStyle/>
+          <a:p>
+            <a:r>
+              <a:rPr lang="en-US" dirty="0"/>
+              <a:t>feature</a:t>
+            </a:r>
+          </a:p>
+        </p:txBody>
+      </p:sp>
+      <p:sp>
+        <p:nvSpPr>
+          <p:cNvPr id="13" name="楕円 4">
+            <a:extLst>
+              <a:ext uri="{FF2B5EF4-FFF2-40B4-BE49-F238E27FC236}">
+                <a16:creationId xmlns:a16="http://schemas.microsoft.com/office/drawing/2014/main" id="{F729403F-5C13-6EA8-C5D0-13A1F3535153}"/>
+              </a:ext>
+            </a:extLst>
+          </p:cNvPr>
+          <p:cNvSpPr/>
+          <p:nvPr/>
+        </p:nvSpPr>
+        <p:spPr>
+          <a:xfrm>
+            <a:off x="4138536" y="3265201"/>
+            <a:ext cx="432048" cy="432048"/>
+          </a:xfrm>
+          <a:prstGeom prst="ellipse">
+            <a:avLst/>
+          </a:prstGeom>
+          <a:solidFill>
+            <a:srgbClr val="011893"/>
+          </a:solidFill>
+          <a:ln>
+            <a:solidFill>
+              <a:schemeClr val="tx1"/>
+            </a:solidFill>
+          </a:ln>
+        </p:spPr>
+        <p:style>
+          <a:lnRef idx="2">
+            <a:schemeClr val="accent1">
+              <a:shade val="50000"/>
+            </a:schemeClr>
+          </a:lnRef>
+          <a:fillRef idx="1">
+            <a:schemeClr val="accent1"/>
+          </a:fillRef>
+          <a:effectRef idx="0">
+            <a:schemeClr val="accent1"/>
+          </a:effectRef>
+          <a:fontRef idx="minor">
+            <a:schemeClr val="lt1"/>
+          </a:fontRef>
+        </p:style>
+        <p:txBody>
+          <a:bodyPr rtlCol="0" anchor="ctr"/>
+          <a:lstStyle/>
+          <a:p>
+            <a:pPr algn="ctr"/>
+            <a:endParaRPr kumimoji="1" lang="ja-JP" altLang="en-US"/>
+          </a:p>
+        </p:txBody>
+      </p:sp>
+      <p:cxnSp>
+        <p:nvCxnSpPr>
+          <p:cNvPr id="14" name="直線コネクタ 13">
+            <a:extLst>
+              <a:ext uri="{FF2B5EF4-FFF2-40B4-BE49-F238E27FC236}">
+                <a16:creationId xmlns:a16="http://schemas.microsoft.com/office/drawing/2014/main" id="{895FFB87-77F7-2461-F1AF-0A94D3258215}"/>
+              </a:ext>
+            </a:extLst>
+          </p:cNvPr>
+          <p:cNvCxnSpPr>
+            <a:cxnSpLocks/>
+            <a:stCxn id="5" idx="6"/>
+            <a:endCxn id="13" idx="2"/>
+          </p:cNvCxnSpPr>
+          <p:nvPr/>
+        </p:nvCxnSpPr>
+        <p:spPr>
+          <a:xfrm>
+            <a:off x="2334259" y="3474744"/>
+            <a:ext cx="1804277" cy="6481"/>
+          </a:xfrm>
+          <a:prstGeom prst="line">
+            <a:avLst/>
+          </a:prstGeom>
+          <a:ln w="57150">
+            <a:solidFill>
+              <a:schemeClr val="tx1"/>
+            </a:solidFill>
+            <a:headEnd type="none" w="med" len="med"/>
+            <a:tailEnd type="none" w="med" len="med"/>
+          </a:ln>
+        </p:spPr>
+        <p:style>
+          <a:lnRef idx="1">
+            <a:schemeClr val="accent1"/>
+          </a:lnRef>
+          <a:fillRef idx="0">
+            <a:schemeClr val="accent1"/>
+          </a:fillRef>
+          <a:effectRef idx="0">
+            <a:schemeClr val="accent1"/>
+          </a:effectRef>
+          <a:fontRef idx="minor">
+            <a:schemeClr val="tx1"/>
+          </a:fontRef>
+        </p:style>
+      </p:cxnSp>
+      <p:cxnSp>
+        <p:nvCxnSpPr>
+          <p:cNvPr id="17" name="直線コネクタ 16">
+            <a:extLst>
+              <a:ext uri="{FF2B5EF4-FFF2-40B4-BE49-F238E27FC236}">
+                <a16:creationId xmlns:a16="http://schemas.microsoft.com/office/drawing/2014/main" id="{93BDB4B8-DF87-9201-2B80-B08D0B7C44EB}"/>
+              </a:ext>
+            </a:extLst>
+          </p:cNvPr>
+          <p:cNvCxnSpPr>
+            <a:cxnSpLocks/>
+            <a:stCxn id="7" idx="7"/>
+            <a:endCxn id="21" idx="3"/>
+          </p:cNvCxnSpPr>
+          <p:nvPr/>
+        </p:nvCxnSpPr>
+        <p:spPr>
+          <a:xfrm flipV="1">
+            <a:off x="4502554" y="3637393"/>
+            <a:ext cx="1751889" cy="560677"/>
+          </a:xfrm>
+          <a:prstGeom prst="line">
+            <a:avLst/>
+          </a:prstGeom>
+          <a:ln w="57150">
+            <a:solidFill>
+              <a:schemeClr val="tx1"/>
+            </a:solidFill>
+            <a:headEnd type="none" w="med" len="med"/>
+            <a:tailEnd type="none" w="med" len="med"/>
+          </a:ln>
+        </p:spPr>
+        <p:style>
+          <a:lnRef idx="1">
+            <a:schemeClr val="accent1"/>
+          </a:lnRef>
+          <a:fillRef idx="0">
+            <a:schemeClr val="accent1"/>
+          </a:fillRef>
+          <a:effectRef idx="0">
+            <a:schemeClr val="accent1"/>
+          </a:effectRef>
+          <a:fontRef idx="minor">
+            <a:schemeClr val="tx1"/>
+          </a:fontRef>
+        </p:style>
+      </p:cxnSp>
+      <p:sp>
+        <p:nvSpPr>
+          <p:cNvPr id="21" name="楕円 4">
+            <a:extLst>
+              <a:ext uri="{FF2B5EF4-FFF2-40B4-BE49-F238E27FC236}">
+                <a16:creationId xmlns:a16="http://schemas.microsoft.com/office/drawing/2014/main" id="{EB0C4457-0E26-25CB-12A6-9C36D2A2F25C}"/>
+              </a:ext>
+            </a:extLst>
+          </p:cNvPr>
+          <p:cNvSpPr/>
+          <p:nvPr/>
+        </p:nvSpPr>
+        <p:spPr>
+          <a:xfrm>
+            <a:off x="6191171" y="3268617"/>
+            <a:ext cx="432048" cy="432048"/>
+          </a:xfrm>
+          <a:prstGeom prst="ellipse">
+            <a:avLst/>
+          </a:prstGeom>
+          <a:solidFill>
+            <a:srgbClr val="011893"/>
+          </a:solidFill>
+          <a:ln>
+            <a:solidFill>
+              <a:schemeClr val="tx1"/>
+            </a:solidFill>
+          </a:ln>
+        </p:spPr>
+        <p:style>
+          <a:lnRef idx="2">
+            <a:schemeClr val="accent1">
+              <a:shade val="50000"/>
+            </a:schemeClr>
+          </a:lnRef>
+          <a:fillRef idx="1">
+            <a:schemeClr val="accent1"/>
+          </a:fillRef>
+          <a:effectRef idx="0">
+            <a:schemeClr val="accent1"/>
+          </a:effectRef>
+          <a:fontRef idx="minor">
+            <a:schemeClr val="lt1"/>
+          </a:fontRef>
+        </p:style>
+        <p:txBody>
+          <a:bodyPr rtlCol="0" anchor="ctr"/>
+          <a:lstStyle/>
+          <a:p>
+            <a:pPr algn="ctr"/>
+            <a:endParaRPr kumimoji="1" lang="ja-JP" altLang="en-US"/>
+          </a:p>
+        </p:txBody>
+      </p:sp>
+      <p:cxnSp>
+        <p:nvCxnSpPr>
+          <p:cNvPr id="23" name="直線コネクタ 22">
+            <a:extLst>
+              <a:ext uri="{FF2B5EF4-FFF2-40B4-BE49-F238E27FC236}">
+                <a16:creationId xmlns:a16="http://schemas.microsoft.com/office/drawing/2014/main" id="{830CA090-F3DC-7FE6-6CA0-784CF4D0A8B7}"/>
+              </a:ext>
+            </a:extLst>
+          </p:cNvPr>
+          <p:cNvCxnSpPr>
+            <a:cxnSpLocks/>
+            <a:stCxn id="13" idx="6"/>
+            <a:endCxn id="21" idx="2"/>
+          </p:cNvCxnSpPr>
+          <p:nvPr/>
+        </p:nvCxnSpPr>
+        <p:spPr>
+          <a:xfrm>
+            <a:off x="4570584" y="3481225"/>
+            <a:ext cx="1620587" cy="3416"/>
+          </a:xfrm>
+          <a:prstGeom prst="line">
+            <a:avLst/>
+          </a:prstGeom>
+          <a:ln w="57150">
+            <a:solidFill>
+              <a:schemeClr val="tx1"/>
+            </a:solidFill>
+            <a:headEnd type="none" w="med" len="med"/>
+            <a:tailEnd type="none" w="med" len="med"/>
+          </a:ln>
+        </p:spPr>
+        <p:style>
+          <a:lnRef idx="1">
+            <a:schemeClr val="accent1"/>
+          </a:lnRef>
+          <a:fillRef idx="0">
+            <a:schemeClr val="accent1"/>
+          </a:fillRef>
+          <a:effectRef idx="0">
+            <a:schemeClr val="accent1"/>
+          </a:effectRef>
+          <a:fontRef idx="minor">
+            <a:schemeClr val="tx1"/>
+          </a:fontRef>
+        </p:style>
+      </p:cxnSp>
+      <p:sp>
+        <p:nvSpPr>
+          <p:cNvPr id="32" name="テキスト ボックス 31">
+            <a:extLst>
+              <a:ext uri="{FF2B5EF4-FFF2-40B4-BE49-F238E27FC236}">
+                <a16:creationId xmlns:a16="http://schemas.microsoft.com/office/drawing/2014/main" id="{9EDF98FE-4C20-EE7D-B31D-C036C99D9F78}"/>
+              </a:ext>
+            </a:extLst>
+          </p:cNvPr>
+          <p:cNvSpPr txBox="1"/>
+          <p:nvPr/>
+        </p:nvSpPr>
+        <p:spPr>
+          <a:xfrm>
+            <a:off x="594850" y="1647719"/>
+            <a:ext cx="5262979" cy="923330"/>
+          </a:xfrm>
+          <a:prstGeom prst="rect">
+            <a:avLst/>
+          </a:prstGeom>
+          <a:noFill/>
+        </p:spPr>
+        <p:txBody>
+          <a:bodyPr wrap="none" rtlCol="0">
+            <a:spAutoFit/>
+          </a:bodyPr>
+          <a:lstStyle/>
+          <a:p>
+            <a:r>
+              <a:rPr kumimoji="1" lang="ja-JP" altLang="en-US"/>
+              <a:t>コードに新しい機能を追加中にバグが見つかった</a:t>
+            </a:r>
+            <a:endParaRPr kumimoji="1" lang="en-US" altLang="ja-JP" dirty="0"/>
+          </a:p>
+          <a:p>
+            <a:r>
               <a:rPr lang="ja-JP" altLang="en-US"/>
-              <a:t>まとめ</a:t>
-            </a:r>
-            <a:endParaRPr lang="en-US"/>
+              <a:t>新しい機能追加とバグ修正を同時にやりたくない</a:t>
+            </a:r>
+            <a:endParaRPr lang="en-US" altLang="ja-JP" dirty="0"/>
+          </a:p>
+          <a:p>
+            <a:r>
+              <a:rPr kumimoji="1" lang="ja-JP" altLang="en-US"/>
+              <a:t>→</a:t>
+            </a:r>
+            <a:r>
+              <a:rPr kumimoji="1" lang="en-US" altLang="ja-JP" dirty="0"/>
+              <a:t> </a:t>
+            </a:r>
+            <a:r>
+              <a:rPr kumimoji="1" lang="ja-JP" altLang="en-US">
+                <a:solidFill>
+                  <a:srgbClr val="FF0000"/>
+                </a:solidFill>
+              </a:rPr>
+              <a:t>ブランチによる作業分離</a:t>
+            </a:r>
+          </a:p>
+        </p:txBody>
+      </p:sp>
+      <p:sp>
+        <p:nvSpPr>
+          <p:cNvPr id="34" name="テキスト ボックス 33">
+            <a:extLst>
+              <a:ext uri="{FF2B5EF4-FFF2-40B4-BE49-F238E27FC236}">
+                <a16:creationId xmlns:a16="http://schemas.microsoft.com/office/drawing/2014/main" id="{345FEF0B-4D2D-E935-B46C-9233BB3E76CD}"/>
+              </a:ext>
+            </a:extLst>
+          </p:cNvPr>
+          <p:cNvSpPr txBox="1"/>
+          <p:nvPr/>
+        </p:nvSpPr>
+        <p:spPr>
+          <a:xfrm>
+            <a:off x="2544510" y="3774993"/>
+            <a:ext cx="1460656" cy="307777"/>
+          </a:xfrm>
+          <a:prstGeom prst="rect">
+            <a:avLst/>
+          </a:prstGeom>
+          <a:solidFill>
+            <a:schemeClr val="bg1"/>
+          </a:solidFill>
+          <a:ln>
+            <a:solidFill>
+              <a:schemeClr val="tx1"/>
+            </a:solidFill>
+          </a:ln>
+        </p:spPr>
+        <p:txBody>
+          <a:bodyPr wrap="none" rtlCol="0">
+            <a:spAutoFit/>
+          </a:bodyPr>
+          <a:lstStyle/>
+          <a:p>
+            <a:r>
+              <a:rPr kumimoji="1" lang="en-US" altLang="ja-JP" sz="1400" dirty="0"/>
+              <a:t>1. </a:t>
+            </a:r>
+            <a:r>
+              <a:rPr kumimoji="1" lang="ja-JP" altLang="en-US" sz="1400"/>
+              <a:t>機能追加開始</a:t>
+            </a:r>
+          </a:p>
+        </p:txBody>
+      </p:sp>
+      <p:sp>
+        <p:nvSpPr>
+          <p:cNvPr id="35" name="テキスト ボックス 34">
+            <a:extLst>
+              <a:ext uri="{FF2B5EF4-FFF2-40B4-BE49-F238E27FC236}">
+                <a16:creationId xmlns:a16="http://schemas.microsoft.com/office/drawing/2014/main" id="{A5008C87-FE0B-0582-F75D-464AA6687A27}"/>
+              </a:ext>
+            </a:extLst>
+          </p:cNvPr>
+          <p:cNvSpPr txBox="1"/>
+          <p:nvPr/>
+        </p:nvSpPr>
+        <p:spPr>
+          <a:xfrm>
+            <a:off x="3779912" y="2873199"/>
+            <a:ext cx="1101584" cy="307777"/>
+          </a:xfrm>
+          <a:prstGeom prst="rect">
+            <a:avLst/>
+          </a:prstGeom>
+          <a:solidFill>
+            <a:schemeClr val="bg1"/>
+          </a:solidFill>
+          <a:ln>
+            <a:solidFill>
+              <a:schemeClr val="tx1"/>
+            </a:solidFill>
+          </a:ln>
+        </p:spPr>
+        <p:txBody>
+          <a:bodyPr wrap="none" rtlCol="0">
+            <a:spAutoFit/>
+          </a:bodyPr>
+          <a:lstStyle/>
+          <a:p>
+            <a:r>
+              <a:rPr kumimoji="1" lang="en-US" altLang="ja-JP" sz="1400" dirty="0"/>
+              <a:t>2. </a:t>
+            </a:r>
+            <a:r>
+              <a:rPr kumimoji="1" lang="ja-JP" altLang="en-US" sz="1400"/>
+              <a:t>バグ修正</a:t>
+            </a:r>
+          </a:p>
+        </p:txBody>
+      </p:sp>
+      <p:sp>
+        <p:nvSpPr>
+          <p:cNvPr id="36" name="テキスト ボックス 35">
+            <a:extLst>
+              <a:ext uri="{FF2B5EF4-FFF2-40B4-BE49-F238E27FC236}">
+                <a16:creationId xmlns:a16="http://schemas.microsoft.com/office/drawing/2014/main" id="{EB724D2D-96CD-FE33-FB71-4F3A61AEA112}"/>
+              </a:ext>
+            </a:extLst>
+          </p:cNvPr>
+          <p:cNvSpPr txBox="1"/>
+          <p:nvPr/>
+        </p:nvSpPr>
+        <p:spPr>
+          <a:xfrm>
+            <a:off x="4737938" y="3774993"/>
+            <a:ext cx="1281120" cy="307777"/>
+          </a:xfrm>
+          <a:prstGeom prst="rect">
+            <a:avLst/>
+          </a:prstGeom>
+          <a:solidFill>
+            <a:schemeClr val="bg1"/>
+          </a:solidFill>
+          <a:ln>
+            <a:solidFill>
+              <a:schemeClr val="tx1"/>
+            </a:solidFill>
+          </a:ln>
+        </p:spPr>
+        <p:txBody>
+          <a:bodyPr wrap="none" rtlCol="0">
+            <a:spAutoFit/>
+          </a:bodyPr>
+          <a:lstStyle/>
+          <a:p>
+            <a:r>
+              <a:rPr kumimoji="1" lang="en-US" altLang="ja-JP" sz="1400" dirty="0"/>
+              <a:t>3. </a:t>
+            </a:r>
+            <a:r>
+              <a:rPr kumimoji="1" lang="ja-JP" altLang="en-US" sz="1400"/>
+              <a:t>機能マージ</a:t>
+            </a:r>
+          </a:p>
+        </p:txBody>
+      </p:sp>
+      <p:sp>
+        <p:nvSpPr>
+          <p:cNvPr id="37" name="テキスト ボックス 36">
+            <a:extLst>
+              <a:ext uri="{FF2B5EF4-FFF2-40B4-BE49-F238E27FC236}">
+                <a16:creationId xmlns:a16="http://schemas.microsoft.com/office/drawing/2014/main" id="{F2EAFC94-1561-4DE5-32C3-DF298CBB9CD4}"/>
+              </a:ext>
+            </a:extLst>
+          </p:cNvPr>
+          <p:cNvSpPr txBox="1"/>
+          <p:nvPr/>
+        </p:nvSpPr>
+        <p:spPr>
+          <a:xfrm>
+            <a:off x="1475656" y="4916661"/>
+            <a:ext cx="5147563" cy="923330"/>
+          </a:xfrm>
+          <a:prstGeom prst="rect">
+            <a:avLst/>
+          </a:prstGeom>
+          <a:noFill/>
+        </p:spPr>
+        <p:txBody>
+          <a:bodyPr wrap="none" rtlCol="0">
+            <a:spAutoFit/>
+          </a:bodyPr>
+          <a:lstStyle/>
+          <a:p>
+            <a:pPr marL="342900" indent="-342900">
+              <a:buFont typeface="+mj-lt"/>
+              <a:buAutoNum type="arabicPeriod"/>
+            </a:pPr>
+            <a:r>
+              <a:rPr lang="ja-JP" altLang="en-US"/>
+              <a:t>機能追加時に新しいブランチで作業</a:t>
+            </a:r>
+            <a:endParaRPr lang="en-US" altLang="ja-JP" dirty="0"/>
+          </a:p>
+          <a:p>
+            <a:pPr marL="342900" indent="-342900">
+              <a:buFont typeface="+mj-lt"/>
+              <a:buAutoNum type="arabicPeriod"/>
+            </a:pPr>
+            <a:r>
+              <a:rPr kumimoji="1" lang="ja-JP" altLang="en-US"/>
+              <a:t>バグ発見時、</a:t>
+            </a:r>
+            <a:r>
+              <a:rPr kumimoji="1" lang="en-US" altLang="ja-JP" dirty="0"/>
+              <a:t>main</a:t>
+            </a:r>
+            <a:r>
+              <a:rPr kumimoji="1" lang="ja-JP" altLang="en-US"/>
+              <a:t>に戻って修正</a:t>
+            </a:r>
+            <a:endParaRPr kumimoji="1" lang="en-US" altLang="ja-JP" dirty="0"/>
+          </a:p>
+          <a:p>
+            <a:pPr marL="342900" indent="-342900">
+              <a:buFont typeface="+mj-lt"/>
+              <a:buAutoNum type="arabicPeriod"/>
+            </a:pPr>
+            <a:r>
+              <a:rPr lang="ja-JP" altLang="en-US"/>
+              <a:t>バグ修正後にブランチに戻り、機能をマージ</a:t>
+            </a:r>
+            <a:endParaRPr kumimoji="1" lang="ja-JP" altLang="en-US"/>
+          </a:p>
+        </p:txBody>
+      </p:sp>
+      <p:sp>
+        <p:nvSpPr>
+          <p:cNvPr id="38" name="テキスト ボックス 37">
+            <a:extLst>
+              <a:ext uri="{FF2B5EF4-FFF2-40B4-BE49-F238E27FC236}">
+                <a16:creationId xmlns:a16="http://schemas.microsoft.com/office/drawing/2014/main" id="{5DAD63B5-0679-CD74-3979-136042728E9A}"/>
+              </a:ext>
+            </a:extLst>
+          </p:cNvPr>
+          <p:cNvSpPr txBox="1"/>
+          <p:nvPr/>
+        </p:nvSpPr>
+        <p:spPr>
+          <a:xfrm>
+            <a:off x="840928" y="6237312"/>
+            <a:ext cx="7007046" cy="523220"/>
+          </a:xfrm>
+          <a:prstGeom prst="rect">
+            <a:avLst/>
+          </a:prstGeom>
+          <a:noFill/>
+        </p:spPr>
+        <p:txBody>
+          <a:bodyPr wrap="none" rtlCol="0">
+            <a:spAutoFit/>
+          </a:bodyPr>
+          <a:lstStyle/>
+          <a:p>
+            <a:r>
+              <a:rPr kumimoji="1" lang="ja-JP" altLang="en-US" sz="2800"/>
+              <a:t>自分がいまどの作業をしているかが明確に</a:t>
+            </a:r>
+          </a:p>
+        </p:txBody>
+      </p:sp>
+    </p:spTree>
+    <p:extLst>
+      <p:ext uri="{BB962C8B-B14F-4D97-AF65-F5344CB8AC3E}">
+        <p14:creationId xmlns:p14="http://schemas.microsoft.com/office/powerpoint/2010/main" val="4199013435"/>
+      </p:ext>
+    </p:extLst>
+  </p:cSld>
+  <p:clrMapOvr>
+    <a:masterClrMapping/>
+  </p:clrMapOvr>
+</p:sld>
+</file>
+
+<file path=ppt/slides/slide6.xml><?xml version="1.0" encoding="utf-8"?>
+<p:sld xmlns:a="http://schemas.openxmlformats.org/drawingml/2006/main" xmlns:r="http://schemas.openxmlformats.org/officeDocument/2006/relationships" xmlns:p="http://schemas.openxmlformats.org/presentationml/2006/main">
+  <p:cSld>
+    <p:spTree>
+      <p:nvGrpSpPr>
+        <p:cNvPr id="1" name=""/>
+        <p:cNvGrpSpPr/>
+        <p:nvPr/>
+      </p:nvGrpSpPr>
+      <p:grpSpPr>
+        <a:xfrm>
+          <a:off x="0" y="0"/>
+          <a:ext cx="0" cy="0"/>
+          <a:chOff x="0" y="0"/>
+          <a:chExt cx="0" cy="0"/>
+        </a:xfrm>
+      </p:grpSpPr>
+      <p:sp>
+        <p:nvSpPr>
+          <p:cNvPr id="2" name="テキスト プレースホルダー 1">
+            <a:extLst>
+              <a:ext uri="{FF2B5EF4-FFF2-40B4-BE49-F238E27FC236}">
+                <a16:creationId xmlns:a16="http://schemas.microsoft.com/office/drawing/2014/main" id="{1ED543A0-297F-A75A-5AAC-DEA896CEE758}"/>
+              </a:ext>
+            </a:extLst>
+          </p:cNvPr>
+          <p:cNvSpPr>
+            <a:spLocks noGrp="1"/>
+          </p:cNvSpPr>
+          <p:nvPr>
+            <p:ph type="body" sz="quarter" idx="10"/>
+          </p:nvPr>
+        </p:nvSpPr>
+        <p:spPr/>
+        <p:txBody>
+          <a:bodyPr/>
+          <a:lstStyle/>
+          <a:p>
+            <a:r>
+              <a:rPr kumimoji="1" lang="ja-JP" altLang="en-US"/>
+              <a:t>コード開発</a:t>
+            </a:r>
           </a:p>
         </p:txBody>
       </p:sp>
@@ -2561,7 +8503,7 @@
           <p:cNvPr id="3" name="テキスト ボックス 2">
             <a:extLst>
               <a:ext uri="{FF2B5EF4-FFF2-40B4-BE49-F238E27FC236}">
-                <a16:creationId xmlns:a16="http://schemas.microsoft.com/office/drawing/2014/main" id="{371BC6D4-76BF-4671-8D7A-34B66018A0F9}"/>
+                <a16:creationId xmlns:a16="http://schemas.microsoft.com/office/drawing/2014/main" id="{59D5EA5C-5269-2ED3-B247-0312D4B594F0}"/>
               </a:ext>
             </a:extLst>
           </p:cNvPr>
@@ -2570,8 +8512,1259 @@
         </p:nvSpPr>
         <p:spPr>
           <a:xfrm>
-            <a:off x="107504" y="980728"/>
-            <a:ext cx="8856984" cy="1815882"/>
+            <a:off x="241103" y="1186085"/>
+            <a:ext cx="4288353" cy="584775"/>
+          </a:xfrm>
+          <a:prstGeom prst="rect">
+            <a:avLst/>
+          </a:prstGeom>
+          <a:noFill/>
+        </p:spPr>
+        <p:txBody>
+          <a:bodyPr wrap="none" rtlCol="0">
+            <a:spAutoFit/>
+          </a:bodyPr>
+          <a:lstStyle/>
+          <a:p>
+            <a:r>
+              <a:rPr lang="ja-JP" altLang="en-US" sz="3200">
+                <a:solidFill>
+                  <a:srgbClr val="011893"/>
+                </a:solidFill>
+              </a:rPr>
+              <a:t>歴史を使ったデバッグ</a:t>
+            </a:r>
+            <a:endParaRPr lang="en-US" sz="3200" dirty="0">
+              <a:solidFill>
+                <a:srgbClr val="011893"/>
+              </a:solidFill>
+            </a:endParaRPr>
+          </a:p>
+        </p:txBody>
+      </p:sp>
+      <p:sp>
+        <p:nvSpPr>
+          <p:cNvPr id="4" name="テキスト ボックス 3">
+            <a:extLst>
+              <a:ext uri="{FF2B5EF4-FFF2-40B4-BE49-F238E27FC236}">
+                <a16:creationId xmlns:a16="http://schemas.microsoft.com/office/drawing/2014/main" id="{60EB341D-F17B-5774-8D16-3687AC5EF515}"/>
+              </a:ext>
+            </a:extLst>
+          </p:cNvPr>
+          <p:cNvSpPr txBox="1"/>
+          <p:nvPr/>
+        </p:nvSpPr>
+        <p:spPr>
+          <a:xfrm>
+            <a:off x="633330" y="1941665"/>
+            <a:ext cx="5955476" cy="646331"/>
+          </a:xfrm>
+          <a:prstGeom prst="rect">
+            <a:avLst/>
+          </a:prstGeom>
+          <a:noFill/>
+        </p:spPr>
+        <p:txBody>
+          <a:bodyPr wrap="none" rtlCol="0">
+            <a:spAutoFit/>
+          </a:bodyPr>
+          <a:lstStyle/>
+          <a:p>
+            <a:r>
+              <a:rPr kumimoji="1" lang="ja-JP" altLang="en-US"/>
+              <a:t>バグ発見時、古いバージョンへの切り替えが非常に簡単</a:t>
+            </a:r>
+            <a:endParaRPr kumimoji="1" lang="en-US" altLang="ja-JP" dirty="0"/>
+          </a:p>
+          <a:p>
+            <a:r>
+              <a:rPr kumimoji="1" lang="ja-JP" altLang="en-US"/>
+              <a:t>二分探索によりバグの挿入箇所を特定</a:t>
+            </a:r>
+          </a:p>
+        </p:txBody>
+      </p:sp>
+      <p:sp>
+        <p:nvSpPr>
+          <p:cNvPr id="5" name="楕円 4">
+            <a:extLst>
+              <a:ext uri="{FF2B5EF4-FFF2-40B4-BE49-F238E27FC236}">
+                <a16:creationId xmlns:a16="http://schemas.microsoft.com/office/drawing/2014/main" id="{5E13204B-7C1E-0045-9558-F75CE047EFBD}"/>
+              </a:ext>
+            </a:extLst>
+          </p:cNvPr>
+          <p:cNvSpPr/>
+          <p:nvPr/>
+        </p:nvSpPr>
+        <p:spPr>
+          <a:xfrm>
+            <a:off x="1826960" y="3764009"/>
+            <a:ext cx="432048" cy="432048"/>
+          </a:xfrm>
+          <a:prstGeom prst="ellipse">
+            <a:avLst/>
+          </a:prstGeom>
+          <a:solidFill>
+            <a:srgbClr val="011893"/>
+          </a:solidFill>
+          <a:ln>
+            <a:solidFill>
+              <a:schemeClr val="tx1"/>
+            </a:solidFill>
+          </a:ln>
+        </p:spPr>
+        <p:style>
+          <a:lnRef idx="2">
+            <a:schemeClr val="accent1">
+              <a:shade val="50000"/>
+            </a:schemeClr>
+          </a:lnRef>
+          <a:fillRef idx="1">
+            <a:schemeClr val="accent1"/>
+          </a:fillRef>
+          <a:effectRef idx="0">
+            <a:schemeClr val="accent1"/>
+          </a:effectRef>
+          <a:fontRef idx="minor">
+            <a:schemeClr val="lt1"/>
+          </a:fontRef>
+        </p:style>
+        <p:txBody>
+          <a:bodyPr rtlCol="0" anchor="ctr"/>
+          <a:lstStyle/>
+          <a:p>
+            <a:pPr algn="ctr"/>
+            <a:endParaRPr kumimoji="1" lang="ja-JP" altLang="en-US"/>
+          </a:p>
+        </p:txBody>
+      </p:sp>
+      <p:sp>
+        <p:nvSpPr>
+          <p:cNvPr id="6" name="楕円 4">
+            <a:extLst>
+              <a:ext uri="{FF2B5EF4-FFF2-40B4-BE49-F238E27FC236}">
+                <a16:creationId xmlns:a16="http://schemas.microsoft.com/office/drawing/2014/main" id="{10396E47-A81A-32AB-A2DF-043D003FBF20}"/>
+              </a:ext>
+            </a:extLst>
+          </p:cNvPr>
+          <p:cNvSpPr/>
+          <p:nvPr/>
+        </p:nvSpPr>
+        <p:spPr>
+          <a:xfrm>
+            <a:off x="3267120" y="3764009"/>
+            <a:ext cx="432048" cy="432048"/>
+          </a:xfrm>
+          <a:prstGeom prst="ellipse">
+            <a:avLst/>
+          </a:prstGeom>
+          <a:solidFill>
+            <a:srgbClr val="011893"/>
+          </a:solidFill>
+          <a:ln>
+            <a:solidFill>
+              <a:schemeClr val="tx1"/>
+            </a:solidFill>
+          </a:ln>
+        </p:spPr>
+        <p:style>
+          <a:lnRef idx="2">
+            <a:schemeClr val="accent1">
+              <a:shade val="50000"/>
+            </a:schemeClr>
+          </a:lnRef>
+          <a:fillRef idx="1">
+            <a:schemeClr val="accent1"/>
+          </a:fillRef>
+          <a:effectRef idx="0">
+            <a:schemeClr val="accent1"/>
+          </a:effectRef>
+          <a:fontRef idx="minor">
+            <a:schemeClr val="lt1"/>
+          </a:fontRef>
+        </p:style>
+        <p:txBody>
+          <a:bodyPr rtlCol="0" anchor="ctr"/>
+          <a:lstStyle/>
+          <a:p>
+            <a:pPr algn="ctr"/>
+            <a:endParaRPr kumimoji="1" lang="ja-JP" altLang="en-US"/>
+          </a:p>
+        </p:txBody>
+      </p:sp>
+      <p:sp>
+        <p:nvSpPr>
+          <p:cNvPr id="7" name="楕円 4">
+            <a:extLst>
+              <a:ext uri="{FF2B5EF4-FFF2-40B4-BE49-F238E27FC236}">
+                <a16:creationId xmlns:a16="http://schemas.microsoft.com/office/drawing/2014/main" id="{BDD11890-773D-0534-BF5F-A44E300B91A5}"/>
+              </a:ext>
+            </a:extLst>
+          </p:cNvPr>
+          <p:cNvSpPr/>
+          <p:nvPr/>
+        </p:nvSpPr>
+        <p:spPr>
+          <a:xfrm>
+            <a:off x="4707280" y="3764009"/>
+            <a:ext cx="432048" cy="432048"/>
+          </a:xfrm>
+          <a:prstGeom prst="ellipse">
+            <a:avLst/>
+          </a:prstGeom>
+          <a:solidFill>
+            <a:srgbClr val="FF0000"/>
+          </a:solidFill>
+          <a:ln>
+            <a:solidFill>
+              <a:schemeClr val="tx1"/>
+            </a:solidFill>
+          </a:ln>
+        </p:spPr>
+        <p:style>
+          <a:lnRef idx="2">
+            <a:schemeClr val="accent1">
+              <a:shade val="50000"/>
+            </a:schemeClr>
+          </a:lnRef>
+          <a:fillRef idx="1">
+            <a:schemeClr val="accent1"/>
+          </a:fillRef>
+          <a:effectRef idx="0">
+            <a:schemeClr val="accent1"/>
+          </a:effectRef>
+          <a:fontRef idx="minor">
+            <a:schemeClr val="lt1"/>
+          </a:fontRef>
+        </p:style>
+        <p:txBody>
+          <a:bodyPr rtlCol="0" anchor="ctr"/>
+          <a:lstStyle/>
+          <a:p>
+            <a:pPr algn="ctr"/>
+            <a:endParaRPr kumimoji="1" lang="ja-JP" altLang="en-US"/>
+          </a:p>
+        </p:txBody>
+      </p:sp>
+      <p:sp>
+        <p:nvSpPr>
+          <p:cNvPr id="8" name="楕円 7">
+            <a:extLst>
+              <a:ext uri="{FF2B5EF4-FFF2-40B4-BE49-F238E27FC236}">
+                <a16:creationId xmlns:a16="http://schemas.microsoft.com/office/drawing/2014/main" id="{98513AB1-0307-5826-FEA7-E6951EA2C9E4}"/>
+              </a:ext>
+            </a:extLst>
+          </p:cNvPr>
+          <p:cNvSpPr/>
+          <p:nvPr/>
+        </p:nvSpPr>
+        <p:spPr>
+          <a:xfrm>
+            <a:off x="6147440" y="3764009"/>
+            <a:ext cx="432048" cy="432048"/>
+          </a:xfrm>
+          <a:prstGeom prst="ellipse">
+            <a:avLst/>
+          </a:prstGeom>
+          <a:solidFill>
+            <a:srgbClr val="FF0000"/>
+          </a:solidFill>
+          <a:ln>
+            <a:solidFill>
+              <a:schemeClr val="tx1"/>
+            </a:solidFill>
+          </a:ln>
+        </p:spPr>
+        <p:style>
+          <a:lnRef idx="2">
+            <a:schemeClr val="accent1">
+              <a:shade val="50000"/>
+            </a:schemeClr>
+          </a:lnRef>
+          <a:fillRef idx="1">
+            <a:schemeClr val="accent1"/>
+          </a:fillRef>
+          <a:effectRef idx="0">
+            <a:schemeClr val="accent1"/>
+          </a:effectRef>
+          <a:fontRef idx="minor">
+            <a:schemeClr val="lt1"/>
+          </a:fontRef>
+        </p:style>
+        <p:txBody>
+          <a:bodyPr rtlCol="0" anchor="ctr"/>
+          <a:lstStyle/>
+          <a:p>
+            <a:pPr algn="ctr"/>
+            <a:endParaRPr kumimoji="1" lang="ja-JP" altLang="en-US"/>
+          </a:p>
+        </p:txBody>
+      </p:sp>
+      <p:cxnSp>
+        <p:nvCxnSpPr>
+          <p:cNvPr id="9" name="直線コネクタ 8">
+            <a:extLst>
+              <a:ext uri="{FF2B5EF4-FFF2-40B4-BE49-F238E27FC236}">
+                <a16:creationId xmlns:a16="http://schemas.microsoft.com/office/drawing/2014/main" id="{6FB33F36-E104-E4C7-C522-4F8A28E3B687}"/>
+              </a:ext>
+            </a:extLst>
+          </p:cNvPr>
+          <p:cNvCxnSpPr>
+            <a:cxnSpLocks/>
+            <a:stCxn id="5" idx="6"/>
+            <a:endCxn id="6" idx="2"/>
+          </p:cNvCxnSpPr>
+          <p:nvPr/>
+        </p:nvCxnSpPr>
+        <p:spPr>
+          <a:xfrm>
+            <a:off x="2259008" y="3980033"/>
+            <a:ext cx="1008112" cy="0"/>
+          </a:xfrm>
+          <a:prstGeom prst="line">
+            <a:avLst/>
+          </a:prstGeom>
+          <a:ln w="57150">
+            <a:solidFill>
+              <a:schemeClr val="tx1"/>
+            </a:solidFill>
+            <a:headEnd type="none" w="med" len="med"/>
+            <a:tailEnd type="none" w="med" len="med"/>
+          </a:ln>
+        </p:spPr>
+        <p:style>
+          <a:lnRef idx="1">
+            <a:schemeClr val="accent1"/>
+          </a:lnRef>
+          <a:fillRef idx="0">
+            <a:schemeClr val="accent1"/>
+          </a:fillRef>
+          <a:effectRef idx="0">
+            <a:schemeClr val="accent1"/>
+          </a:effectRef>
+          <a:fontRef idx="minor">
+            <a:schemeClr val="tx1"/>
+          </a:fontRef>
+        </p:style>
+      </p:cxnSp>
+      <p:cxnSp>
+        <p:nvCxnSpPr>
+          <p:cNvPr id="10" name="直線コネクタ 9">
+            <a:extLst>
+              <a:ext uri="{FF2B5EF4-FFF2-40B4-BE49-F238E27FC236}">
+                <a16:creationId xmlns:a16="http://schemas.microsoft.com/office/drawing/2014/main" id="{5F18D32F-7824-8276-5396-D1E55FE57005}"/>
+              </a:ext>
+            </a:extLst>
+          </p:cNvPr>
+          <p:cNvCxnSpPr>
+            <a:cxnSpLocks/>
+          </p:cNvCxnSpPr>
+          <p:nvPr/>
+        </p:nvCxnSpPr>
+        <p:spPr>
+          <a:xfrm>
+            <a:off x="3699168" y="3980033"/>
+            <a:ext cx="1008112" cy="0"/>
+          </a:xfrm>
+          <a:prstGeom prst="line">
+            <a:avLst/>
+          </a:prstGeom>
+          <a:ln w="57150">
+            <a:solidFill>
+              <a:schemeClr val="tx1"/>
+            </a:solidFill>
+            <a:headEnd type="none" w="med" len="med"/>
+            <a:tailEnd type="none" w="med" len="med"/>
+          </a:ln>
+        </p:spPr>
+        <p:style>
+          <a:lnRef idx="1">
+            <a:schemeClr val="accent1"/>
+          </a:lnRef>
+          <a:fillRef idx="0">
+            <a:schemeClr val="accent1"/>
+          </a:fillRef>
+          <a:effectRef idx="0">
+            <a:schemeClr val="accent1"/>
+          </a:effectRef>
+          <a:fontRef idx="minor">
+            <a:schemeClr val="tx1"/>
+          </a:fontRef>
+        </p:style>
+      </p:cxnSp>
+      <p:cxnSp>
+        <p:nvCxnSpPr>
+          <p:cNvPr id="11" name="直線コネクタ 10">
+            <a:extLst>
+              <a:ext uri="{FF2B5EF4-FFF2-40B4-BE49-F238E27FC236}">
+                <a16:creationId xmlns:a16="http://schemas.microsoft.com/office/drawing/2014/main" id="{E3D680A3-2BC6-4C67-56C1-12B7E3316E22}"/>
+              </a:ext>
+            </a:extLst>
+          </p:cNvPr>
+          <p:cNvCxnSpPr>
+            <a:cxnSpLocks/>
+          </p:cNvCxnSpPr>
+          <p:nvPr/>
+        </p:nvCxnSpPr>
+        <p:spPr>
+          <a:xfrm>
+            <a:off x="5139328" y="3980033"/>
+            <a:ext cx="1008112" cy="0"/>
+          </a:xfrm>
+          <a:prstGeom prst="line">
+            <a:avLst/>
+          </a:prstGeom>
+          <a:ln w="57150">
+            <a:solidFill>
+              <a:schemeClr val="tx1"/>
+            </a:solidFill>
+            <a:headEnd type="none" w="med" len="med"/>
+            <a:tailEnd type="none" w="med" len="med"/>
+          </a:ln>
+        </p:spPr>
+        <p:style>
+          <a:lnRef idx="1">
+            <a:schemeClr val="accent1"/>
+          </a:lnRef>
+          <a:fillRef idx="0">
+            <a:schemeClr val="accent1"/>
+          </a:fillRef>
+          <a:effectRef idx="0">
+            <a:schemeClr val="accent1"/>
+          </a:effectRef>
+          <a:fontRef idx="minor">
+            <a:schemeClr val="tx1"/>
+          </a:fontRef>
+        </p:style>
+      </p:cxnSp>
+      <p:sp>
+        <p:nvSpPr>
+          <p:cNvPr id="12" name="爆発 1 11">
+            <a:extLst>
+              <a:ext uri="{FF2B5EF4-FFF2-40B4-BE49-F238E27FC236}">
+                <a16:creationId xmlns:a16="http://schemas.microsoft.com/office/drawing/2014/main" id="{1F3E0E89-296B-B8D3-0ED7-0BF1C79E3D4F}"/>
+              </a:ext>
+            </a:extLst>
+          </p:cNvPr>
+          <p:cNvSpPr/>
+          <p:nvPr/>
+        </p:nvSpPr>
+        <p:spPr>
+          <a:xfrm rot="20700000">
+            <a:off x="3963485" y="3774115"/>
+            <a:ext cx="447295" cy="419888"/>
+          </a:xfrm>
+          <a:prstGeom prst="irregularSeal1">
+            <a:avLst/>
+          </a:prstGeom>
+          <a:solidFill>
+            <a:srgbClr val="FF0000"/>
+          </a:solidFill>
+          <a:ln>
+            <a:solidFill>
+              <a:schemeClr val="tx1"/>
+            </a:solidFill>
+          </a:ln>
+        </p:spPr>
+        <p:style>
+          <a:lnRef idx="2">
+            <a:schemeClr val="accent1">
+              <a:shade val="50000"/>
+            </a:schemeClr>
+          </a:lnRef>
+          <a:fillRef idx="1">
+            <a:schemeClr val="accent1"/>
+          </a:fillRef>
+          <a:effectRef idx="0">
+            <a:schemeClr val="accent1"/>
+          </a:effectRef>
+          <a:fontRef idx="minor">
+            <a:schemeClr val="lt1"/>
+          </a:fontRef>
+        </p:style>
+        <p:txBody>
+          <a:bodyPr rtlCol="0" anchor="ctr"/>
+          <a:lstStyle/>
+          <a:p>
+            <a:pPr algn="ctr"/>
+            <a:endParaRPr kumimoji="1" lang="ja-JP" altLang="en-US"/>
+          </a:p>
+        </p:txBody>
+      </p:sp>
+      <p:sp>
+        <p:nvSpPr>
+          <p:cNvPr id="13" name="テキスト ボックス 12">
+            <a:extLst>
+              <a:ext uri="{FF2B5EF4-FFF2-40B4-BE49-F238E27FC236}">
+                <a16:creationId xmlns:a16="http://schemas.microsoft.com/office/drawing/2014/main" id="{5D0A6FE0-3093-E3A2-BDA7-8CACA14E6D39}"/>
+              </a:ext>
+            </a:extLst>
+          </p:cNvPr>
+          <p:cNvSpPr txBox="1"/>
+          <p:nvPr/>
+        </p:nvSpPr>
+        <p:spPr>
+          <a:xfrm>
+            <a:off x="4590554" y="4293652"/>
+            <a:ext cx="2492990" cy="369332"/>
+          </a:xfrm>
+          <a:prstGeom prst="rect">
+            <a:avLst/>
+          </a:prstGeom>
+          <a:noFill/>
+        </p:spPr>
+        <p:txBody>
+          <a:bodyPr wrap="none" rtlCol="0">
+            <a:spAutoFit/>
+          </a:bodyPr>
+          <a:lstStyle/>
+          <a:p>
+            <a:r>
+              <a:rPr kumimoji="1" lang="ja-JP" altLang="en-US"/>
+              <a:t>バグってるバージョン</a:t>
+            </a:r>
+          </a:p>
+        </p:txBody>
+      </p:sp>
+      <p:sp>
+        <p:nvSpPr>
+          <p:cNvPr id="14" name="テキスト ボックス 13">
+            <a:extLst>
+              <a:ext uri="{FF2B5EF4-FFF2-40B4-BE49-F238E27FC236}">
+                <a16:creationId xmlns:a16="http://schemas.microsoft.com/office/drawing/2014/main" id="{F9478B87-9117-CDA9-BB9C-DB83271CF1AE}"/>
+              </a:ext>
+            </a:extLst>
+          </p:cNvPr>
+          <p:cNvSpPr txBox="1"/>
+          <p:nvPr/>
+        </p:nvSpPr>
+        <p:spPr>
+          <a:xfrm>
+            <a:off x="1547664" y="4270005"/>
+            <a:ext cx="2031325" cy="369332"/>
+          </a:xfrm>
+          <a:prstGeom prst="rect">
+            <a:avLst/>
+          </a:prstGeom>
+          <a:noFill/>
+        </p:spPr>
+        <p:txBody>
+          <a:bodyPr wrap="none" rtlCol="0">
+            <a:spAutoFit/>
+          </a:bodyPr>
+          <a:lstStyle/>
+          <a:p>
+            <a:r>
+              <a:rPr kumimoji="1" lang="ja-JP" altLang="en-US"/>
+              <a:t>正常なバージョン</a:t>
+            </a:r>
+          </a:p>
+        </p:txBody>
+      </p:sp>
+      <p:cxnSp>
+        <p:nvCxnSpPr>
+          <p:cNvPr id="15" name="カギ線コネクタ 14">
+            <a:extLst>
+              <a:ext uri="{FF2B5EF4-FFF2-40B4-BE49-F238E27FC236}">
+                <a16:creationId xmlns:a16="http://schemas.microsoft.com/office/drawing/2014/main" id="{15F97BF3-EFEA-7D7D-7829-4CF43178F7A1}"/>
+              </a:ext>
+            </a:extLst>
+          </p:cNvPr>
+          <p:cNvCxnSpPr>
+            <a:cxnSpLocks/>
+            <a:stCxn id="6" idx="0"/>
+            <a:endCxn id="7" idx="0"/>
+          </p:cNvCxnSpPr>
+          <p:nvPr/>
+        </p:nvCxnSpPr>
+        <p:spPr>
+          <a:xfrm rot="5400000" flipH="1" flipV="1">
+            <a:off x="4203224" y="3043929"/>
+            <a:ext cx="12700" cy="1440160"/>
+          </a:xfrm>
+          <a:prstGeom prst="bentConnector3">
+            <a:avLst>
+              <a:gd name="adj1" fmla="val 1669087"/>
+            </a:avLst>
+          </a:prstGeom>
+          <a:ln>
+            <a:solidFill>
+              <a:schemeClr val="tx1"/>
+            </a:solidFill>
+            <a:headEnd type="triangle"/>
+            <a:tailEnd type="triangle"/>
+          </a:ln>
+        </p:spPr>
+        <p:style>
+          <a:lnRef idx="1">
+            <a:schemeClr val="accent1"/>
+          </a:lnRef>
+          <a:fillRef idx="0">
+            <a:schemeClr val="accent1"/>
+          </a:fillRef>
+          <a:effectRef idx="0">
+            <a:schemeClr val="accent1"/>
+          </a:effectRef>
+          <a:fontRef idx="minor">
+            <a:schemeClr val="tx1"/>
+          </a:fontRef>
+        </p:style>
+      </p:cxnSp>
+      <p:sp>
+        <p:nvSpPr>
+          <p:cNvPr id="16" name="テキスト ボックス 15">
+            <a:extLst>
+              <a:ext uri="{FF2B5EF4-FFF2-40B4-BE49-F238E27FC236}">
+                <a16:creationId xmlns:a16="http://schemas.microsoft.com/office/drawing/2014/main" id="{85E2E618-8700-985F-7655-34DC50821823}"/>
+              </a:ext>
+            </a:extLst>
+          </p:cNvPr>
+          <p:cNvSpPr txBox="1"/>
+          <p:nvPr/>
+        </p:nvSpPr>
+        <p:spPr>
+          <a:xfrm>
+            <a:off x="3521204" y="3255787"/>
+            <a:ext cx="1338828" cy="369332"/>
+          </a:xfrm>
+          <a:prstGeom prst="rect">
+            <a:avLst/>
+          </a:prstGeom>
+          <a:noFill/>
+        </p:spPr>
+        <p:txBody>
+          <a:bodyPr wrap="none" rtlCol="0">
+            <a:spAutoFit/>
+          </a:bodyPr>
+          <a:lstStyle/>
+          <a:p>
+            <a:r>
+              <a:rPr kumimoji="1" lang="ja-JP" altLang="en-US"/>
+              <a:t>バグの範囲</a:t>
+            </a:r>
+          </a:p>
+        </p:txBody>
+      </p:sp>
+      <p:sp>
+        <p:nvSpPr>
+          <p:cNvPr id="18" name="テキスト ボックス 17">
+            <a:extLst>
+              <a:ext uri="{FF2B5EF4-FFF2-40B4-BE49-F238E27FC236}">
+                <a16:creationId xmlns:a16="http://schemas.microsoft.com/office/drawing/2014/main" id="{361DA33F-FAA5-EF4F-76D2-459933B7E356}"/>
+              </a:ext>
+            </a:extLst>
+          </p:cNvPr>
+          <p:cNvSpPr txBox="1"/>
+          <p:nvPr/>
+        </p:nvSpPr>
+        <p:spPr>
+          <a:xfrm>
+            <a:off x="633330" y="5877272"/>
+            <a:ext cx="7056756" cy="461665"/>
+          </a:xfrm>
+          <a:prstGeom prst="rect">
+            <a:avLst/>
+          </a:prstGeom>
+          <a:noFill/>
+        </p:spPr>
+        <p:txBody>
+          <a:bodyPr wrap="square">
+            <a:spAutoFit/>
+          </a:bodyPr>
+          <a:lstStyle/>
+          <a:p>
+            <a:r>
+              <a:rPr lang="ja-JP" altLang="en-US" sz="2400"/>
+              <a:t>容疑者の範囲は「コミットの頻度」により決まる</a:t>
+            </a:r>
+            <a:endParaRPr kumimoji="1" lang="ja-JP" altLang="en-US" sz="2400"/>
+          </a:p>
+        </p:txBody>
+      </p:sp>
+    </p:spTree>
+    <p:extLst>
+      <p:ext uri="{BB962C8B-B14F-4D97-AF65-F5344CB8AC3E}">
+        <p14:creationId xmlns:p14="http://schemas.microsoft.com/office/powerpoint/2010/main" val="3989032509"/>
+      </p:ext>
+    </p:extLst>
+  </p:cSld>
+  <p:clrMapOvr>
+    <a:masterClrMapping/>
+  </p:clrMapOvr>
+</p:sld>
+</file>
+
+<file path=ppt/slides/slide7.xml><?xml version="1.0" encoding="utf-8"?>
+<p:sld xmlns:a="http://schemas.openxmlformats.org/drawingml/2006/main" xmlns:r="http://schemas.openxmlformats.org/officeDocument/2006/relationships" xmlns:p="http://schemas.openxmlformats.org/presentationml/2006/main">
+  <p:cSld>
+    <p:spTree>
+      <p:nvGrpSpPr>
+        <p:cNvPr id="1" name=""/>
+        <p:cNvGrpSpPr/>
+        <p:nvPr/>
+      </p:nvGrpSpPr>
+      <p:grpSpPr>
+        <a:xfrm>
+          <a:off x="0" y="0"/>
+          <a:ext cx="0" cy="0"/>
+          <a:chOff x="0" y="0"/>
+          <a:chExt cx="0" cy="0"/>
+        </a:xfrm>
+      </p:grpSpPr>
+      <p:sp>
+        <p:nvSpPr>
+          <p:cNvPr id="2" name="テキスト プレースホルダー 1">
+            <a:extLst>
+              <a:ext uri="{FF2B5EF4-FFF2-40B4-BE49-F238E27FC236}">
+                <a16:creationId xmlns:a16="http://schemas.microsoft.com/office/drawing/2014/main" id="{8AC63E10-018D-F74F-2EC1-D1110BBD40DD}"/>
+              </a:ext>
+            </a:extLst>
+          </p:cNvPr>
+          <p:cNvSpPr>
+            <a:spLocks noGrp="1"/>
+          </p:cNvSpPr>
+          <p:nvPr>
+            <p:ph type="body" sz="quarter" idx="10"/>
+          </p:nvPr>
+        </p:nvSpPr>
+        <p:spPr/>
+        <p:txBody>
+          <a:bodyPr/>
+          <a:lstStyle/>
+          <a:p>
+            <a:r>
+              <a:rPr kumimoji="1" lang="ja-JP" altLang="en-US"/>
+              <a:t>コード開発</a:t>
+            </a:r>
+          </a:p>
+        </p:txBody>
+      </p:sp>
+      <p:pic>
+        <p:nvPicPr>
+          <p:cNvPr id="3" name="図 2">
+            <a:extLst>
+              <a:ext uri="{FF2B5EF4-FFF2-40B4-BE49-F238E27FC236}">
+                <a16:creationId xmlns:a16="http://schemas.microsoft.com/office/drawing/2014/main" id="{63AF7CFB-0665-9A43-2C75-010D83945B39}"/>
+              </a:ext>
+            </a:extLst>
+          </p:cNvPr>
+          <p:cNvPicPr>
+            <a:picLocks noChangeAspect="1"/>
+          </p:cNvPicPr>
+          <p:nvPr/>
+        </p:nvPicPr>
+        <p:blipFill>
+          <a:blip r:embed="rId2">
+            <a:extLst>
+              <a:ext uri="{28A0092B-C50C-407E-A947-70E740481C1C}">
+                <a14:useLocalDpi xmlns:a14="http://schemas.microsoft.com/office/drawing/2010/main" val="0"/>
+              </a:ext>
+            </a:extLst>
+          </a:blip>
+          <a:stretch>
+            <a:fillRect/>
+          </a:stretch>
+        </p:blipFill>
+        <p:spPr>
+          <a:xfrm>
+            <a:off x="3833952" y="1482852"/>
+            <a:ext cx="738048" cy="738048"/>
+          </a:xfrm>
+          <a:prstGeom prst="rect">
+            <a:avLst/>
+          </a:prstGeom>
+        </p:spPr>
+      </p:pic>
+      <p:pic>
+        <p:nvPicPr>
+          <p:cNvPr id="4" name="図 3">
+            <a:extLst>
+              <a:ext uri="{FF2B5EF4-FFF2-40B4-BE49-F238E27FC236}">
+                <a16:creationId xmlns:a16="http://schemas.microsoft.com/office/drawing/2014/main" id="{9277B0F3-C55F-398F-5964-702B8675985F}"/>
+              </a:ext>
+            </a:extLst>
+          </p:cNvPr>
+          <p:cNvPicPr>
+            <a:picLocks noChangeAspect="1"/>
+          </p:cNvPicPr>
+          <p:nvPr/>
+        </p:nvPicPr>
+        <p:blipFill>
+          <a:blip r:embed="rId3" cstate="print">
+            <a:extLst>
+              <a:ext uri="{28A0092B-C50C-407E-A947-70E740481C1C}">
+                <a14:useLocalDpi xmlns:a14="http://schemas.microsoft.com/office/drawing/2010/main" val="0"/>
+              </a:ext>
+            </a:extLst>
+          </a:blip>
+          <a:stretch>
+            <a:fillRect/>
+          </a:stretch>
+        </p:blipFill>
+        <p:spPr>
+          <a:xfrm>
+            <a:off x="3473912" y="906788"/>
+            <a:ext cx="1368152" cy="560942"/>
+          </a:xfrm>
+          <a:prstGeom prst="rect">
+            <a:avLst/>
+          </a:prstGeom>
+        </p:spPr>
+      </p:pic>
+      <p:pic>
+        <p:nvPicPr>
+          <p:cNvPr id="5" name="Picture 2" descr="会社で働く人のイラスト（男性）">
+            <a:extLst>
+              <a:ext uri="{FF2B5EF4-FFF2-40B4-BE49-F238E27FC236}">
+                <a16:creationId xmlns:a16="http://schemas.microsoft.com/office/drawing/2014/main" id="{6DBE4B78-1902-D628-50BC-43378A01F038}"/>
+              </a:ext>
+            </a:extLst>
+          </p:cNvPr>
+          <p:cNvPicPr>
+            <a:picLocks noChangeAspect="1" noChangeArrowheads="1"/>
+          </p:cNvPicPr>
+          <p:nvPr/>
+        </p:nvPicPr>
+        <p:blipFill>
+          <a:blip r:embed="rId4" cstate="print">
+            <a:extLst>
+              <a:ext uri="{28A0092B-C50C-407E-A947-70E740481C1C}">
+                <a14:useLocalDpi xmlns:a14="http://schemas.microsoft.com/office/drawing/2010/main" val="0"/>
+              </a:ext>
+            </a:extLst>
+          </a:blip>
+          <a:srcRect/>
+          <a:stretch>
+            <a:fillRect/>
+          </a:stretch>
+        </p:blipFill>
+        <p:spPr bwMode="auto">
+          <a:xfrm>
+            <a:off x="611560" y="3356992"/>
+            <a:ext cx="975544" cy="975544"/>
+          </a:xfrm>
+          <a:prstGeom prst="rect">
+            <a:avLst/>
+          </a:prstGeom>
+          <a:noFill/>
+          <a:extLst>
+            <a:ext uri="{909E8E84-426E-40DD-AFC4-6F175D3DCCD1}">
+              <a14:hiddenFill xmlns:a14="http://schemas.microsoft.com/office/drawing/2010/main">
+                <a:solidFill>
+                  <a:srgbClr val="FFFFFF"/>
+                </a:solidFill>
+              </a14:hiddenFill>
+            </a:ext>
+          </a:extLst>
+        </p:spPr>
+      </p:pic>
+      <p:sp>
+        <p:nvSpPr>
+          <p:cNvPr id="6" name="テキスト ボックス 5">
+            <a:extLst>
+              <a:ext uri="{FF2B5EF4-FFF2-40B4-BE49-F238E27FC236}">
+                <a16:creationId xmlns:a16="http://schemas.microsoft.com/office/drawing/2014/main" id="{BE8ADDBF-4F6D-0A8A-7F9F-A211DC722AB9}"/>
+              </a:ext>
+            </a:extLst>
+          </p:cNvPr>
+          <p:cNvSpPr txBox="1"/>
+          <p:nvPr/>
+        </p:nvSpPr>
+        <p:spPr>
+          <a:xfrm>
+            <a:off x="539552" y="2996952"/>
+            <a:ext cx="1107996" cy="369332"/>
+          </a:xfrm>
+          <a:prstGeom prst="rect">
+            <a:avLst/>
+          </a:prstGeom>
+          <a:noFill/>
+        </p:spPr>
+        <p:txBody>
+          <a:bodyPr wrap="none" rtlCol="0">
+            <a:spAutoFit/>
+          </a:bodyPr>
+          <a:lstStyle/>
+          <a:p>
+            <a:r>
+              <a:rPr kumimoji="1" lang="ja-JP" altLang="en-US"/>
+              <a:t>ローカル</a:t>
+            </a:r>
+          </a:p>
+        </p:txBody>
+      </p:sp>
+      <p:pic>
+        <p:nvPicPr>
+          <p:cNvPr id="7" name="Picture 4" descr="スーパーコンピューターのイラスト（赤）">
+            <a:extLst>
+              <a:ext uri="{FF2B5EF4-FFF2-40B4-BE49-F238E27FC236}">
+                <a16:creationId xmlns:a16="http://schemas.microsoft.com/office/drawing/2014/main" id="{E612E988-3C76-0D5C-7B9F-4A691767466F}"/>
+              </a:ext>
+            </a:extLst>
+          </p:cNvPr>
+          <p:cNvPicPr>
+            <a:picLocks noChangeAspect="1" noChangeArrowheads="1"/>
+          </p:cNvPicPr>
+          <p:nvPr/>
+        </p:nvPicPr>
+        <p:blipFill>
+          <a:blip r:embed="rId5" cstate="print">
+            <a:extLst>
+              <a:ext uri="{28A0092B-C50C-407E-A947-70E740481C1C}">
+                <a14:useLocalDpi xmlns:a14="http://schemas.microsoft.com/office/drawing/2010/main" val="0"/>
+              </a:ext>
+            </a:extLst>
+          </a:blip>
+          <a:srcRect/>
+          <a:stretch>
+            <a:fillRect/>
+          </a:stretch>
+        </p:blipFill>
+        <p:spPr bwMode="auto">
+          <a:xfrm>
+            <a:off x="6876256" y="3180408"/>
+            <a:ext cx="1152128" cy="1152128"/>
+          </a:xfrm>
+          <a:prstGeom prst="rect">
+            <a:avLst/>
+          </a:prstGeom>
+          <a:noFill/>
+          <a:extLst>
+            <a:ext uri="{909E8E84-426E-40DD-AFC4-6F175D3DCCD1}">
+              <a14:hiddenFill xmlns:a14="http://schemas.microsoft.com/office/drawing/2010/main">
+                <a:solidFill>
+                  <a:srgbClr val="FFFFFF"/>
+                </a:solidFill>
+              </a14:hiddenFill>
+            </a:ext>
+          </a:extLst>
+        </p:spPr>
+      </p:pic>
+      <p:pic>
+        <p:nvPicPr>
+          <p:cNvPr id="1026" name="Picture 2" descr="サーバーのイラスト（1台）">
+            <a:extLst>
+              <a:ext uri="{FF2B5EF4-FFF2-40B4-BE49-F238E27FC236}">
+                <a16:creationId xmlns:a16="http://schemas.microsoft.com/office/drawing/2014/main" id="{842B232E-1246-B186-26DB-72653F593C29}"/>
+              </a:ext>
+            </a:extLst>
+          </p:cNvPr>
+          <p:cNvPicPr>
+            <a:picLocks noChangeAspect="1" noChangeArrowheads="1"/>
+          </p:cNvPicPr>
+          <p:nvPr/>
+        </p:nvPicPr>
+        <p:blipFill>
+          <a:blip r:embed="rId6">
+            <a:extLst>
+              <a:ext uri="{28A0092B-C50C-407E-A947-70E740481C1C}">
+                <a14:useLocalDpi xmlns:a14="http://schemas.microsoft.com/office/drawing/2010/main" val="0"/>
+              </a:ext>
+            </a:extLst>
+          </a:blip>
+          <a:srcRect/>
+          <a:stretch>
+            <a:fillRect/>
+          </a:stretch>
+        </p:blipFill>
+        <p:spPr bwMode="auto">
+          <a:xfrm>
+            <a:off x="3750539" y="3296583"/>
+            <a:ext cx="901607" cy="1066991"/>
+          </a:xfrm>
+          <a:prstGeom prst="rect">
+            <a:avLst/>
+          </a:prstGeom>
+          <a:noFill/>
+          <a:extLst>
+            <a:ext uri="{909E8E84-426E-40DD-AFC4-6F175D3DCCD1}">
+              <a14:hiddenFill xmlns:a14="http://schemas.microsoft.com/office/drawing/2010/main">
+                <a:solidFill>
+                  <a:srgbClr val="FFFFFF"/>
+                </a:solidFill>
+              </a14:hiddenFill>
+            </a:ext>
+          </a:extLst>
+        </p:spPr>
+      </p:pic>
+      <p:cxnSp>
+        <p:nvCxnSpPr>
+          <p:cNvPr id="9" name="直線矢印コネクタ 8">
+            <a:extLst>
+              <a:ext uri="{FF2B5EF4-FFF2-40B4-BE49-F238E27FC236}">
+                <a16:creationId xmlns:a16="http://schemas.microsoft.com/office/drawing/2014/main" id="{2650198F-6AF6-EA95-38D5-9CBE567045B0}"/>
+              </a:ext>
+            </a:extLst>
+          </p:cNvPr>
+          <p:cNvCxnSpPr>
+            <a:stCxn id="6" idx="3"/>
+          </p:cNvCxnSpPr>
+          <p:nvPr/>
+        </p:nvCxnSpPr>
+        <p:spPr>
+          <a:xfrm flipV="1">
+            <a:off x="1647548" y="1988840"/>
+            <a:ext cx="1916340" cy="1192778"/>
+          </a:xfrm>
+          <a:prstGeom prst="straightConnector1">
+            <a:avLst/>
+          </a:prstGeom>
+          <a:ln>
+            <a:solidFill>
+              <a:schemeClr val="tx1"/>
+            </a:solidFill>
+            <a:headEnd type="none" w="med" len="med"/>
+            <a:tailEnd type="triangle"/>
+          </a:ln>
+        </p:spPr>
+        <p:style>
+          <a:lnRef idx="1">
+            <a:schemeClr val="accent1"/>
+          </a:lnRef>
+          <a:fillRef idx="0">
+            <a:schemeClr val="accent1"/>
+          </a:fillRef>
+          <a:effectRef idx="0">
+            <a:schemeClr val="accent1"/>
+          </a:effectRef>
+          <a:fontRef idx="minor">
+            <a:schemeClr val="tx1"/>
+          </a:fontRef>
+        </p:style>
+      </p:cxnSp>
+      <p:cxnSp>
+        <p:nvCxnSpPr>
+          <p:cNvPr id="11" name="直線矢印コネクタ 10">
+            <a:extLst>
+              <a:ext uri="{FF2B5EF4-FFF2-40B4-BE49-F238E27FC236}">
+                <a16:creationId xmlns:a16="http://schemas.microsoft.com/office/drawing/2014/main" id="{980F8372-8C2A-E1A9-03EF-14396664F4C7}"/>
+              </a:ext>
+            </a:extLst>
+          </p:cNvPr>
+          <p:cNvCxnSpPr>
+            <a:cxnSpLocks/>
+            <a:stCxn id="3" idx="2"/>
+            <a:endCxn id="16" idx="0"/>
+          </p:cNvCxnSpPr>
+          <p:nvPr/>
+        </p:nvCxnSpPr>
+        <p:spPr>
+          <a:xfrm flipH="1">
+            <a:off x="4202975" y="2220900"/>
+            <a:ext cx="1" cy="694752"/>
+          </a:xfrm>
+          <a:prstGeom prst="straightConnector1">
+            <a:avLst/>
+          </a:prstGeom>
+          <a:ln>
+            <a:solidFill>
+              <a:schemeClr val="tx1"/>
+            </a:solidFill>
+            <a:headEnd type="none" w="med" len="med"/>
+            <a:tailEnd type="triangle"/>
+          </a:ln>
+        </p:spPr>
+        <p:style>
+          <a:lnRef idx="1">
+            <a:schemeClr val="accent1"/>
+          </a:lnRef>
+          <a:fillRef idx="0">
+            <a:schemeClr val="accent1"/>
+          </a:fillRef>
+          <a:effectRef idx="0">
+            <a:schemeClr val="accent1"/>
+          </a:effectRef>
+          <a:fontRef idx="minor">
+            <a:schemeClr val="tx1"/>
+          </a:fontRef>
+        </p:style>
+      </p:cxnSp>
+      <p:cxnSp>
+        <p:nvCxnSpPr>
+          <p:cNvPr id="13" name="直線矢印コネクタ 12">
+            <a:extLst>
+              <a:ext uri="{FF2B5EF4-FFF2-40B4-BE49-F238E27FC236}">
+                <a16:creationId xmlns:a16="http://schemas.microsoft.com/office/drawing/2014/main" id="{7C975F71-BA8D-D0F1-781F-A4278C97910F}"/>
+              </a:ext>
+            </a:extLst>
+          </p:cNvPr>
+          <p:cNvCxnSpPr>
+            <a:cxnSpLocks/>
+            <a:endCxn id="20" idx="1"/>
+          </p:cNvCxnSpPr>
+          <p:nvPr/>
+        </p:nvCxnSpPr>
+        <p:spPr>
+          <a:xfrm>
+            <a:off x="4572000" y="1988840"/>
+            <a:ext cx="2348388" cy="895454"/>
+          </a:xfrm>
+          <a:prstGeom prst="straightConnector1">
+            <a:avLst/>
+          </a:prstGeom>
+          <a:ln>
+            <a:solidFill>
+              <a:schemeClr val="tx1"/>
+            </a:solidFill>
+            <a:headEnd type="none" w="med" len="med"/>
+            <a:tailEnd type="triangle"/>
+          </a:ln>
+        </p:spPr>
+        <p:style>
+          <a:lnRef idx="1">
+            <a:schemeClr val="accent1"/>
+          </a:lnRef>
+          <a:fillRef idx="0">
+            <a:schemeClr val="accent1"/>
+          </a:fillRef>
+          <a:effectRef idx="0">
+            <a:schemeClr val="accent1"/>
+          </a:effectRef>
+          <a:fontRef idx="minor">
+            <a:schemeClr val="tx1"/>
+          </a:fontRef>
+        </p:style>
+      </p:cxnSp>
+      <p:sp>
+        <p:nvSpPr>
+          <p:cNvPr id="16" name="テキスト ボックス 15">
+            <a:extLst>
+              <a:ext uri="{FF2B5EF4-FFF2-40B4-BE49-F238E27FC236}">
+                <a16:creationId xmlns:a16="http://schemas.microsoft.com/office/drawing/2014/main" id="{C2EAB2BF-7130-0C64-AF63-BE110D2B607F}"/>
+              </a:ext>
+            </a:extLst>
+          </p:cNvPr>
+          <p:cNvSpPr txBox="1"/>
+          <p:nvPr/>
+        </p:nvSpPr>
+        <p:spPr>
+          <a:xfrm>
+            <a:off x="3648977" y="2915652"/>
+            <a:ext cx="1107996" cy="369332"/>
+          </a:xfrm>
+          <a:prstGeom prst="rect">
+            <a:avLst/>
+          </a:prstGeom>
+          <a:noFill/>
+        </p:spPr>
+        <p:txBody>
+          <a:bodyPr wrap="none" rtlCol="0">
+            <a:spAutoFit/>
+          </a:bodyPr>
+          <a:lstStyle/>
+          <a:p>
+            <a:r>
+              <a:rPr kumimoji="1" lang="ja-JP" altLang="en-US"/>
+              <a:t>クラスタ</a:t>
+            </a:r>
+          </a:p>
+        </p:txBody>
+      </p:sp>
+      <p:sp>
+        <p:nvSpPr>
+          <p:cNvPr id="20" name="テキスト ボックス 19">
+            <a:extLst>
+              <a:ext uri="{FF2B5EF4-FFF2-40B4-BE49-F238E27FC236}">
+                <a16:creationId xmlns:a16="http://schemas.microsoft.com/office/drawing/2014/main" id="{B0D97388-7C76-0560-4C1D-C78B992345A0}"/>
+              </a:ext>
+            </a:extLst>
+          </p:cNvPr>
+          <p:cNvSpPr txBox="1"/>
+          <p:nvPr/>
+        </p:nvSpPr>
+        <p:spPr>
+          <a:xfrm>
+            <a:off x="6920388" y="2699628"/>
+            <a:ext cx="1107996" cy="369332"/>
+          </a:xfrm>
+          <a:prstGeom prst="rect">
+            <a:avLst/>
+          </a:prstGeom>
+          <a:noFill/>
+        </p:spPr>
+        <p:txBody>
+          <a:bodyPr wrap="none" rtlCol="0">
+            <a:spAutoFit/>
+          </a:bodyPr>
+          <a:lstStyle/>
+          <a:p>
+            <a:r>
+              <a:rPr kumimoji="1" lang="ja-JP" altLang="en-US"/>
+              <a:t>スパコン</a:t>
+            </a:r>
+          </a:p>
+        </p:txBody>
+      </p:sp>
+      <p:sp>
+        <p:nvSpPr>
+          <p:cNvPr id="22" name="テキスト ボックス 21">
+            <a:extLst>
+              <a:ext uri="{FF2B5EF4-FFF2-40B4-BE49-F238E27FC236}">
+                <a16:creationId xmlns:a16="http://schemas.microsoft.com/office/drawing/2014/main" id="{889FD145-155B-2365-4E0D-4C7ABBE27CFD}"/>
+              </a:ext>
+            </a:extLst>
+          </p:cNvPr>
+          <p:cNvSpPr txBox="1"/>
+          <p:nvPr/>
+        </p:nvSpPr>
+        <p:spPr>
+          <a:xfrm>
+            <a:off x="311859" y="4501227"/>
+            <a:ext cx="8520281" cy="646331"/>
+          </a:xfrm>
+          <a:prstGeom prst="rect">
+            <a:avLst/>
+          </a:prstGeom>
+          <a:noFill/>
+        </p:spPr>
+        <p:txBody>
+          <a:bodyPr wrap="none" rtlCol="0">
+            <a:spAutoFit/>
+          </a:bodyPr>
+          <a:lstStyle/>
+          <a:p>
+            <a:r>
+              <a:rPr kumimoji="1" lang="ja-JP" altLang="en-US"/>
+              <a:t>原則として、コードはローカルで開発、</a:t>
+            </a:r>
+            <a:r>
+              <a:rPr kumimoji="1" lang="en-US" altLang="ja-JP" dirty="0"/>
+              <a:t>GitHub</a:t>
+            </a:r>
+            <a:r>
+              <a:rPr kumimoji="1" lang="ja-JP" altLang="en-US"/>
+              <a:t>を経由してクラスタやスパコンへ</a:t>
+            </a:r>
+            <a:endParaRPr kumimoji="1" lang="en-US" altLang="ja-JP" dirty="0"/>
+          </a:p>
+          <a:p>
+            <a:r>
+              <a:rPr kumimoji="1" lang="ja-JP" altLang="en-US">
+                <a:solidFill>
+                  <a:srgbClr val="FF0000"/>
+                </a:solidFill>
+              </a:rPr>
+              <a:t>ローカルとクラスタやスパコンで異なるバージョンの共存を防ぐ</a:t>
+            </a:r>
+          </a:p>
+        </p:txBody>
+      </p:sp>
+      <p:sp>
+        <p:nvSpPr>
+          <p:cNvPr id="23" name="テキスト ボックス 22">
+            <a:extLst>
+              <a:ext uri="{FF2B5EF4-FFF2-40B4-BE49-F238E27FC236}">
+                <a16:creationId xmlns:a16="http://schemas.microsoft.com/office/drawing/2014/main" id="{30CA77C7-132F-B08F-24BB-D335ADA8359F}"/>
+              </a:ext>
+            </a:extLst>
+          </p:cNvPr>
+          <p:cNvSpPr txBox="1"/>
+          <p:nvPr/>
+        </p:nvSpPr>
+        <p:spPr>
+          <a:xfrm>
+            <a:off x="311859" y="5389025"/>
+            <a:ext cx="7560840" cy="707886"/>
           </a:xfrm>
           <a:prstGeom prst="rect">
             <a:avLst/>
@@ -2584,41 +9777,1609 @@
           </a:bodyPr>
           <a:lstStyle/>
           <a:p>
-            <a:pPr marL="342900" indent="-342900">
+            <a:r>
+              <a:rPr lang="ja-JP" altLang="en-US" sz="2000"/>
+              <a:t>実行サイトに依存するコード</a:t>
+            </a:r>
+            <a:r>
+              <a:rPr lang="en-US" altLang="ja-JP" sz="2000" dirty="0"/>
+              <a:t>(SIMD</a:t>
+            </a:r>
+            <a:r>
+              <a:rPr lang="ja-JP" altLang="en-US" sz="2000"/>
+              <a:t>とか</a:t>
+            </a:r>
+            <a:r>
+              <a:rPr lang="en-US" altLang="ja-JP" sz="2000" dirty="0"/>
+              <a:t>)</a:t>
+            </a:r>
+            <a:r>
+              <a:rPr lang="ja-JP" altLang="en-US" sz="2000"/>
+              <a:t>の差異は、</a:t>
+            </a:r>
+            <a:r>
+              <a:rPr kumimoji="1" lang="en-US" altLang="ja-JP" sz="2000" dirty="0"/>
+              <a:t>Makefile</a:t>
+            </a:r>
+            <a:r>
+              <a:rPr kumimoji="1" lang="ja-JP" altLang="en-US" sz="2000"/>
+              <a:t>などのビルドシステムなどで吸収する</a:t>
+            </a:r>
+          </a:p>
+        </p:txBody>
+      </p:sp>
+    </p:spTree>
+    <p:extLst>
+      <p:ext uri="{BB962C8B-B14F-4D97-AF65-F5344CB8AC3E}">
+        <p14:creationId xmlns:p14="http://schemas.microsoft.com/office/powerpoint/2010/main" val="488755092"/>
+      </p:ext>
+    </p:extLst>
+  </p:cSld>
+  <p:clrMapOvr>
+    <a:masterClrMapping/>
+  </p:clrMapOvr>
+</p:sld>
+</file>
+
+<file path=ppt/slides/slide8.xml><?xml version="1.0" encoding="utf-8"?>
+<p:sld xmlns:a="http://schemas.openxmlformats.org/drawingml/2006/main" xmlns:r="http://schemas.openxmlformats.org/officeDocument/2006/relationships" xmlns:p="http://schemas.openxmlformats.org/presentationml/2006/main">
+  <p:cSld>
+    <p:spTree>
+      <p:nvGrpSpPr>
+        <p:cNvPr id="1" name=""/>
+        <p:cNvGrpSpPr/>
+        <p:nvPr/>
+      </p:nvGrpSpPr>
+      <p:grpSpPr>
+        <a:xfrm>
+          <a:off x="0" y="0"/>
+          <a:ext cx="0" cy="0"/>
+          <a:chOff x="0" y="0"/>
+          <a:chExt cx="0" cy="0"/>
+        </a:xfrm>
+      </p:grpSpPr>
+      <p:sp>
+        <p:nvSpPr>
+          <p:cNvPr id="2" name="テキスト プレースホルダー 1">
+            <a:extLst>
+              <a:ext uri="{FF2B5EF4-FFF2-40B4-BE49-F238E27FC236}">
+                <a16:creationId xmlns:a16="http://schemas.microsoft.com/office/drawing/2014/main" id="{BFD0756C-E979-168E-80AC-59639D715E42}"/>
+              </a:ext>
+            </a:extLst>
+          </p:cNvPr>
+          <p:cNvSpPr>
+            <a:spLocks noGrp="1"/>
+          </p:cNvSpPr>
+          <p:nvPr>
+            <p:ph type="body" sz="quarter" idx="10"/>
+          </p:nvPr>
+        </p:nvSpPr>
+        <p:spPr/>
+        <p:txBody>
+          <a:bodyPr/>
+          <a:lstStyle/>
+          <a:p>
+            <a:r>
+              <a:rPr kumimoji="1" lang="ja-JP" altLang="en-US"/>
+              <a:t>ストレージサービスとの違い</a:t>
+            </a:r>
+          </a:p>
+        </p:txBody>
+      </p:sp>
+      <p:sp>
+        <p:nvSpPr>
+          <p:cNvPr id="4" name="テキスト ボックス 3">
+            <a:extLst>
+              <a:ext uri="{FF2B5EF4-FFF2-40B4-BE49-F238E27FC236}">
+                <a16:creationId xmlns:a16="http://schemas.microsoft.com/office/drawing/2014/main" id="{160D251D-8249-A0A9-C2F2-70152B0F19EA}"/>
+              </a:ext>
+            </a:extLst>
+          </p:cNvPr>
+          <p:cNvSpPr txBox="1"/>
+          <p:nvPr/>
+        </p:nvSpPr>
+        <p:spPr>
+          <a:xfrm>
+            <a:off x="323528" y="1176546"/>
+            <a:ext cx="7789312" cy="1754326"/>
+          </a:xfrm>
+          <a:prstGeom prst="rect">
+            <a:avLst/>
+          </a:prstGeom>
+          <a:noFill/>
+        </p:spPr>
+        <p:txBody>
+          <a:bodyPr wrap="none" rtlCol="0">
+            <a:spAutoFit/>
+          </a:bodyPr>
+          <a:lstStyle/>
+          <a:p>
+            <a:r>
+              <a:rPr kumimoji="1" lang="en-US" altLang="ja-JP" dirty="0"/>
+              <a:t>Google</a:t>
+            </a:r>
+            <a:r>
+              <a:rPr kumimoji="1" lang="ja-JP" altLang="en-US"/>
+              <a:t>ドライブや</a:t>
+            </a:r>
+            <a:r>
+              <a:rPr kumimoji="1" lang="en-US" altLang="ja-JP" dirty="0"/>
+              <a:t>Box</a:t>
+            </a:r>
+            <a:r>
+              <a:rPr kumimoji="1" lang="ja-JP" altLang="en-US"/>
+              <a:t>など、オンラインのファイル保存サービスの利用</a:t>
+            </a:r>
+            <a:endParaRPr kumimoji="1" lang="en-US" altLang="ja-JP" dirty="0"/>
+          </a:p>
+          <a:p>
+            <a:pPr marL="285750" indent="-285750">
               <a:buFont typeface="Arial" panose="020B0604020202020204" pitchFamily="34" charset="0"/>
               <a:buChar char="•"/>
             </a:pPr>
             <a:r>
-              <a:rPr lang="ja-JP" altLang="en-US" sz="2800"/>
-              <a:t>計算物理における</a:t>
-            </a:r>
-            <a:r>
-              <a:rPr lang="en-US" altLang="ja-JP" sz="2800"/>
-              <a:t>Git/GitHub</a:t>
-            </a:r>
-            <a:r>
-              <a:rPr lang="ja-JP" altLang="en-US" sz="2800"/>
-              <a:t>の用途は主にコード開発と論文執筆</a:t>
-            </a:r>
-            <a:endParaRPr lang="en-US" altLang="ja-JP" sz="2800"/>
-          </a:p>
-          <a:p>
-            <a:pPr marL="342900" indent="-342900">
+              <a:rPr kumimoji="1" lang="ja-JP" altLang="en-US"/>
+              <a:t>バージョン管理や履歴からの復元機能</a:t>
+            </a:r>
+            <a:endParaRPr kumimoji="1" lang="en-US" altLang="ja-JP" dirty="0"/>
+          </a:p>
+          <a:p>
+            <a:pPr marL="285750" indent="-285750">
               <a:buFont typeface="Arial" panose="020B0604020202020204" pitchFamily="34" charset="0"/>
               <a:buChar char="•"/>
             </a:pPr>
             <a:r>
-              <a:rPr lang="ja-JP" altLang="en-US" sz="2800"/>
-              <a:t>リモートリポジトリを使うことで、自動的にバックアップされる</a:t>
-            </a:r>
-            <a:endParaRPr lang="en-US" altLang="ja-JP" sz="2800"/>
+              <a:rPr lang="ja-JP" altLang="en-US"/>
+              <a:t>バックアップとしての機能は充実</a:t>
+            </a:r>
+            <a:endParaRPr lang="en-US" altLang="ja-JP" dirty="0"/>
+          </a:p>
+          <a:p>
+            <a:pPr marL="285750" indent="-285750">
+              <a:buFont typeface="Arial" panose="020B0604020202020204" pitchFamily="34" charset="0"/>
+              <a:buChar char="•"/>
+            </a:pPr>
+            <a:r>
+              <a:rPr kumimoji="1" lang="ja-JP" altLang="en-US">
+                <a:solidFill>
+                  <a:srgbClr val="FF0000"/>
+                </a:solidFill>
+              </a:rPr>
+              <a:t>管理対象ファイルの除外ができない</a:t>
+            </a:r>
+            <a:r>
+              <a:rPr kumimoji="1" lang="en-US" altLang="ja-JP" dirty="0">
+                <a:solidFill>
+                  <a:srgbClr val="FF0000"/>
+                </a:solidFill>
+              </a:rPr>
+              <a:t> or </a:t>
+            </a:r>
+            <a:r>
+              <a:rPr kumimoji="1" lang="ja-JP" altLang="en-US">
+                <a:solidFill>
+                  <a:srgbClr val="FF0000"/>
+                </a:solidFill>
+              </a:rPr>
+              <a:t>面倒であることが多い</a:t>
+            </a:r>
+            <a:endParaRPr lang="en-US" altLang="ja-JP" dirty="0">
+              <a:solidFill>
+                <a:srgbClr val="FF0000"/>
+              </a:solidFill>
+            </a:endParaRPr>
+          </a:p>
+          <a:p>
+            <a:pPr marL="285750" indent="-285750">
+              <a:buFont typeface="Arial" panose="020B0604020202020204" pitchFamily="34" charset="0"/>
+              <a:buChar char="•"/>
+            </a:pPr>
+            <a:r>
+              <a:rPr kumimoji="1" lang="ja-JP" altLang="en-US">
+                <a:solidFill>
+                  <a:srgbClr val="FF0000"/>
+                </a:solidFill>
+              </a:rPr>
+              <a:t>バックアップのタイミングの指定ができない</a:t>
+            </a:r>
+            <a:r>
+              <a:rPr kumimoji="1" lang="en-US" altLang="ja-JP" dirty="0">
+                <a:solidFill>
+                  <a:srgbClr val="FF0000"/>
+                </a:solidFill>
+              </a:rPr>
+              <a:t> or </a:t>
+            </a:r>
+            <a:r>
+              <a:rPr kumimoji="1" lang="ja-JP" altLang="en-US">
+                <a:solidFill>
+                  <a:srgbClr val="FF0000"/>
+                </a:solidFill>
+              </a:rPr>
+              <a:t>面倒</a:t>
+            </a:r>
+            <a:endParaRPr kumimoji="1" lang="en-US" altLang="ja-JP" dirty="0">
+              <a:solidFill>
+                <a:srgbClr val="FF0000"/>
+              </a:solidFill>
+            </a:endParaRPr>
+          </a:p>
+          <a:p>
+            <a:pPr marL="285750" indent="-285750">
+              <a:buFont typeface="Arial" panose="020B0604020202020204" pitchFamily="34" charset="0"/>
+              <a:buChar char="•"/>
+            </a:pPr>
+            <a:r>
+              <a:rPr kumimoji="1" lang="en-US" altLang="ja-JP" dirty="0"/>
+              <a:t>(</a:t>
+            </a:r>
+            <a:r>
+              <a:rPr kumimoji="1" lang="ja-JP" altLang="en-US"/>
+              <a:t>個人的な意見だが</a:t>
+            </a:r>
+            <a:r>
+              <a:rPr kumimoji="1" lang="en-US" altLang="ja-JP" dirty="0"/>
+              <a:t>)</a:t>
+            </a:r>
+            <a:r>
+              <a:rPr kumimoji="1" lang="ja-JP" altLang="en-US"/>
+              <a:t>操作ミスがわりと起きる</a:t>
+            </a:r>
+            <a:endParaRPr kumimoji="1" lang="en-US" altLang="ja-JP" dirty="0"/>
+          </a:p>
+        </p:txBody>
+      </p:sp>
+      <p:pic>
+        <p:nvPicPr>
+          <p:cNvPr id="5" name="図 4">
+            <a:extLst>
+              <a:ext uri="{FF2B5EF4-FFF2-40B4-BE49-F238E27FC236}">
+                <a16:creationId xmlns:a16="http://schemas.microsoft.com/office/drawing/2014/main" id="{3D6A5836-EF3D-7B26-96DF-B9ED952EB848}"/>
+              </a:ext>
+            </a:extLst>
+          </p:cNvPr>
+          <p:cNvPicPr>
+            <a:picLocks noChangeAspect="1"/>
+          </p:cNvPicPr>
+          <p:nvPr/>
+        </p:nvPicPr>
+        <p:blipFill>
+          <a:blip r:embed="rId2">
+            <a:extLst>
+              <a:ext uri="{28A0092B-C50C-407E-A947-70E740481C1C}">
+                <a14:useLocalDpi xmlns:a14="http://schemas.microsoft.com/office/drawing/2010/main" val="0"/>
+              </a:ext>
+            </a:extLst>
+          </a:blip>
+          <a:stretch>
+            <a:fillRect/>
+          </a:stretch>
+        </p:blipFill>
+        <p:spPr>
+          <a:xfrm>
+            <a:off x="3422524" y="4073030"/>
+            <a:ext cx="738048" cy="738048"/>
+          </a:xfrm>
+          <a:prstGeom prst="rect">
+            <a:avLst/>
+          </a:prstGeom>
+        </p:spPr>
+      </p:pic>
+      <p:pic>
+        <p:nvPicPr>
+          <p:cNvPr id="6" name="図 5">
+            <a:extLst>
+              <a:ext uri="{FF2B5EF4-FFF2-40B4-BE49-F238E27FC236}">
+                <a16:creationId xmlns:a16="http://schemas.microsoft.com/office/drawing/2014/main" id="{41378FB3-E304-79C3-3A59-81097F71F7F5}"/>
+              </a:ext>
+            </a:extLst>
+          </p:cNvPr>
+          <p:cNvPicPr>
+            <a:picLocks noChangeAspect="1"/>
+          </p:cNvPicPr>
+          <p:nvPr/>
+        </p:nvPicPr>
+        <p:blipFill>
+          <a:blip r:embed="rId3" cstate="print">
+            <a:extLst>
+              <a:ext uri="{28A0092B-C50C-407E-A947-70E740481C1C}">
+                <a14:useLocalDpi xmlns:a14="http://schemas.microsoft.com/office/drawing/2010/main" val="0"/>
+              </a:ext>
+            </a:extLst>
+          </a:blip>
+          <a:stretch>
+            <a:fillRect/>
+          </a:stretch>
+        </p:blipFill>
+        <p:spPr>
+          <a:xfrm>
+            <a:off x="3126690" y="3450873"/>
+            <a:ext cx="1368152" cy="560942"/>
+          </a:xfrm>
+          <a:prstGeom prst="rect">
+            <a:avLst/>
+          </a:prstGeom>
+        </p:spPr>
+      </p:pic>
+      <p:pic>
+        <p:nvPicPr>
+          <p:cNvPr id="7" name="Picture 2" descr="会社で働く人のイラスト（男性）">
+            <a:extLst>
+              <a:ext uri="{FF2B5EF4-FFF2-40B4-BE49-F238E27FC236}">
+                <a16:creationId xmlns:a16="http://schemas.microsoft.com/office/drawing/2014/main" id="{35519A7F-A8AF-667A-6E8F-64C3A23F61C0}"/>
+              </a:ext>
+            </a:extLst>
+          </p:cNvPr>
+          <p:cNvPicPr>
+            <a:picLocks noChangeAspect="1" noChangeArrowheads="1"/>
+          </p:cNvPicPr>
+          <p:nvPr/>
+        </p:nvPicPr>
+        <p:blipFill>
+          <a:blip r:embed="rId4" cstate="print">
+            <a:extLst>
+              <a:ext uri="{28A0092B-C50C-407E-A947-70E740481C1C}">
+                <a14:useLocalDpi xmlns:a14="http://schemas.microsoft.com/office/drawing/2010/main" val="0"/>
+              </a:ext>
+            </a:extLst>
+          </a:blip>
+          <a:srcRect/>
+          <a:stretch>
+            <a:fillRect/>
+          </a:stretch>
+        </p:blipFill>
+        <p:spPr bwMode="auto">
+          <a:xfrm>
+            <a:off x="931524" y="3964162"/>
+            <a:ext cx="975544" cy="975544"/>
+          </a:xfrm>
+          <a:prstGeom prst="rect">
+            <a:avLst/>
+          </a:prstGeom>
+          <a:noFill/>
+          <a:extLst>
+            <a:ext uri="{909E8E84-426E-40DD-AFC4-6F175D3DCCD1}">
+              <a14:hiddenFill xmlns:a14="http://schemas.microsoft.com/office/drawing/2010/main">
+                <a:solidFill>
+                  <a:srgbClr val="FFFFFF"/>
+                </a:solidFill>
+              </a14:hiddenFill>
+            </a:ext>
+          </a:extLst>
+        </p:spPr>
+      </p:pic>
+      <p:sp>
+        <p:nvSpPr>
+          <p:cNvPr id="8" name="テキスト ボックス 7">
+            <a:extLst>
+              <a:ext uri="{FF2B5EF4-FFF2-40B4-BE49-F238E27FC236}">
+                <a16:creationId xmlns:a16="http://schemas.microsoft.com/office/drawing/2014/main" id="{AB4C8AE3-764F-C480-39C2-3CE619B0217A}"/>
+              </a:ext>
+            </a:extLst>
+          </p:cNvPr>
+          <p:cNvSpPr txBox="1"/>
+          <p:nvPr/>
+        </p:nvSpPr>
+        <p:spPr>
+          <a:xfrm>
+            <a:off x="859516" y="3604122"/>
+            <a:ext cx="1107996" cy="369332"/>
+          </a:xfrm>
+          <a:prstGeom prst="rect">
+            <a:avLst/>
+          </a:prstGeom>
+          <a:noFill/>
+        </p:spPr>
+        <p:txBody>
+          <a:bodyPr wrap="none" rtlCol="0">
+            <a:spAutoFit/>
+          </a:bodyPr>
+          <a:lstStyle/>
+          <a:p>
+            <a:r>
+              <a:rPr kumimoji="1" lang="ja-JP" altLang="en-US"/>
+              <a:t>ローカル</a:t>
+            </a:r>
+          </a:p>
+        </p:txBody>
+      </p:sp>
+      <p:pic>
+        <p:nvPicPr>
+          <p:cNvPr id="9" name="Picture 4" descr="スーパーコンピューターのイラスト（赤）">
+            <a:extLst>
+              <a:ext uri="{FF2B5EF4-FFF2-40B4-BE49-F238E27FC236}">
+                <a16:creationId xmlns:a16="http://schemas.microsoft.com/office/drawing/2014/main" id="{4055B9E4-6B69-AC6C-DA87-D5B2B957A579}"/>
+              </a:ext>
+            </a:extLst>
+          </p:cNvPr>
+          <p:cNvPicPr>
+            <a:picLocks noChangeAspect="1" noChangeArrowheads="1"/>
+          </p:cNvPicPr>
+          <p:nvPr/>
+        </p:nvPicPr>
+        <p:blipFill>
+          <a:blip r:embed="rId5" cstate="print">
+            <a:extLst>
+              <a:ext uri="{28A0092B-C50C-407E-A947-70E740481C1C}">
+                <a14:useLocalDpi xmlns:a14="http://schemas.microsoft.com/office/drawing/2010/main" val="0"/>
+              </a:ext>
+            </a:extLst>
+          </a:blip>
+          <a:srcRect/>
+          <a:stretch>
+            <a:fillRect/>
+          </a:stretch>
+        </p:blipFill>
+        <p:spPr bwMode="auto">
+          <a:xfrm>
+            <a:off x="5873938" y="3886828"/>
+            <a:ext cx="1152128" cy="1152128"/>
+          </a:xfrm>
+          <a:prstGeom prst="rect">
+            <a:avLst/>
+          </a:prstGeom>
+          <a:noFill/>
+          <a:extLst>
+            <a:ext uri="{909E8E84-426E-40DD-AFC4-6F175D3DCCD1}">
+              <a14:hiddenFill xmlns:a14="http://schemas.microsoft.com/office/drawing/2010/main">
+                <a:solidFill>
+                  <a:srgbClr val="FFFFFF"/>
+                </a:solidFill>
+              </a14:hiddenFill>
+            </a:ext>
+          </a:extLst>
+        </p:spPr>
+      </p:pic>
+      <p:sp>
+        <p:nvSpPr>
+          <p:cNvPr id="10" name="テキスト ボックス 9">
+            <a:extLst>
+              <a:ext uri="{FF2B5EF4-FFF2-40B4-BE49-F238E27FC236}">
+                <a16:creationId xmlns:a16="http://schemas.microsoft.com/office/drawing/2014/main" id="{A907E7ED-2D2F-912D-ABCB-AF60A119678F}"/>
+              </a:ext>
+            </a:extLst>
+          </p:cNvPr>
+          <p:cNvSpPr txBox="1"/>
+          <p:nvPr/>
+        </p:nvSpPr>
+        <p:spPr>
+          <a:xfrm>
+            <a:off x="5918070" y="3480485"/>
+            <a:ext cx="1107996" cy="369332"/>
+          </a:xfrm>
+          <a:prstGeom prst="rect">
+            <a:avLst/>
+          </a:prstGeom>
+          <a:noFill/>
+        </p:spPr>
+        <p:txBody>
+          <a:bodyPr wrap="none" rtlCol="0">
+            <a:spAutoFit/>
+          </a:bodyPr>
+          <a:lstStyle/>
+          <a:p>
+            <a:r>
+              <a:rPr kumimoji="1" lang="ja-JP" altLang="en-US"/>
+              <a:t>スパコン</a:t>
+            </a:r>
+          </a:p>
+        </p:txBody>
+      </p:sp>
+      <p:pic>
+        <p:nvPicPr>
+          <p:cNvPr id="2050" name="Picture 2" descr="ファイルアイコン（テキスト）">
+            <a:extLst>
+              <a:ext uri="{FF2B5EF4-FFF2-40B4-BE49-F238E27FC236}">
+                <a16:creationId xmlns:a16="http://schemas.microsoft.com/office/drawing/2014/main" id="{7E99B452-DF6C-4C1B-B728-A0C58E1F4A99}"/>
+              </a:ext>
+            </a:extLst>
+          </p:cNvPr>
+          <p:cNvPicPr>
+            <a:picLocks noChangeAspect="1" noChangeArrowheads="1"/>
+          </p:cNvPicPr>
+          <p:nvPr/>
+        </p:nvPicPr>
+        <p:blipFill>
+          <a:blip r:embed="rId6">
+            <a:extLst>
+              <a:ext uri="{28A0092B-C50C-407E-A947-70E740481C1C}">
+                <a14:useLocalDpi xmlns:a14="http://schemas.microsoft.com/office/drawing/2010/main" val="0"/>
+              </a:ext>
+            </a:extLst>
+          </a:blip>
+          <a:srcRect/>
+          <a:stretch>
+            <a:fillRect/>
+          </a:stretch>
+        </p:blipFill>
+        <p:spPr bwMode="auto">
+          <a:xfrm>
+            <a:off x="1074310" y="5014149"/>
+            <a:ext cx="668160" cy="775928"/>
+          </a:xfrm>
+          <a:prstGeom prst="rect">
+            <a:avLst/>
+          </a:prstGeom>
+          <a:noFill/>
+          <a:extLst>
+            <a:ext uri="{909E8E84-426E-40DD-AFC4-6F175D3DCCD1}">
+              <a14:hiddenFill xmlns:a14="http://schemas.microsoft.com/office/drawing/2010/main">
+                <a:solidFill>
+                  <a:srgbClr val="FFFFFF"/>
+                </a:solidFill>
+              </a14:hiddenFill>
+            </a:ext>
+          </a:extLst>
+        </p:spPr>
+      </p:pic>
+      <p:pic>
+        <p:nvPicPr>
+          <p:cNvPr id="11" name="Picture 2" descr="ファイルアイコン（テキスト）">
+            <a:extLst>
+              <a:ext uri="{FF2B5EF4-FFF2-40B4-BE49-F238E27FC236}">
+                <a16:creationId xmlns:a16="http://schemas.microsoft.com/office/drawing/2014/main" id="{44497A58-5545-8C6F-D917-6B892BC9458C}"/>
+              </a:ext>
+            </a:extLst>
+          </p:cNvPr>
+          <p:cNvPicPr>
+            <a:picLocks noChangeAspect="1" noChangeArrowheads="1"/>
+          </p:cNvPicPr>
+          <p:nvPr/>
+        </p:nvPicPr>
+        <p:blipFill>
+          <a:blip r:embed="rId6">
+            <a:extLst>
+              <a:ext uri="{28A0092B-C50C-407E-A947-70E740481C1C}">
+                <a14:useLocalDpi xmlns:a14="http://schemas.microsoft.com/office/drawing/2010/main" val="0"/>
+              </a:ext>
+            </a:extLst>
+          </a:blip>
+          <a:srcRect/>
+          <a:stretch>
+            <a:fillRect/>
+          </a:stretch>
+        </p:blipFill>
+        <p:spPr bwMode="auto">
+          <a:xfrm>
+            <a:off x="5302830" y="5014149"/>
+            <a:ext cx="668160" cy="775928"/>
+          </a:xfrm>
+          <a:prstGeom prst="rect">
+            <a:avLst/>
+          </a:prstGeom>
+          <a:noFill/>
+          <a:extLst>
+            <a:ext uri="{909E8E84-426E-40DD-AFC4-6F175D3DCCD1}">
+              <a14:hiddenFill xmlns:a14="http://schemas.microsoft.com/office/drawing/2010/main">
+                <a:solidFill>
+                  <a:srgbClr val="FFFFFF"/>
+                </a:solidFill>
+              </a14:hiddenFill>
+            </a:ext>
+          </a:extLst>
+        </p:spPr>
+      </p:pic>
+      <p:pic>
+        <p:nvPicPr>
+          <p:cNvPr id="2052" name="Picture 4" descr="古雑誌のイラスト（ゴミ）">
+            <a:extLst>
+              <a:ext uri="{FF2B5EF4-FFF2-40B4-BE49-F238E27FC236}">
+                <a16:creationId xmlns:a16="http://schemas.microsoft.com/office/drawing/2014/main" id="{4EE1D72C-CBE7-D63A-BB8A-49A312AC2052}"/>
+              </a:ext>
+            </a:extLst>
+          </p:cNvPr>
+          <p:cNvPicPr>
+            <a:picLocks noChangeAspect="1" noChangeArrowheads="1"/>
+          </p:cNvPicPr>
+          <p:nvPr/>
+        </p:nvPicPr>
+        <p:blipFill>
+          <a:blip r:embed="rId7">
+            <a:extLst>
+              <a:ext uri="{28A0092B-C50C-407E-A947-70E740481C1C}">
+                <a14:useLocalDpi xmlns:a14="http://schemas.microsoft.com/office/drawing/2010/main" val="0"/>
+              </a:ext>
+            </a:extLst>
+          </a:blip>
+          <a:srcRect/>
+          <a:stretch>
+            <a:fillRect/>
+          </a:stretch>
+        </p:blipFill>
+        <p:spPr bwMode="auto">
+          <a:xfrm>
+            <a:off x="6472068" y="4982837"/>
+            <a:ext cx="891871" cy="775928"/>
+          </a:xfrm>
+          <a:prstGeom prst="rect">
+            <a:avLst/>
+          </a:prstGeom>
+          <a:noFill/>
+          <a:extLst>
+            <a:ext uri="{909E8E84-426E-40DD-AFC4-6F175D3DCCD1}">
+              <a14:hiddenFill xmlns:a14="http://schemas.microsoft.com/office/drawing/2010/main">
+                <a:solidFill>
+                  <a:srgbClr val="FFFFFF"/>
+                </a:solidFill>
+              </a14:hiddenFill>
+            </a:ext>
+          </a:extLst>
+        </p:spPr>
+      </p:pic>
+      <p:sp>
+        <p:nvSpPr>
+          <p:cNvPr id="12" name="テキスト ボックス 11">
+            <a:extLst>
+              <a:ext uri="{FF2B5EF4-FFF2-40B4-BE49-F238E27FC236}">
+                <a16:creationId xmlns:a16="http://schemas.microsoft.com/office/drawing/2014/main" id="{192E8744-20E4-D18F-4F30-A5CCB0B6C69C}"/>
+              </a:ext>
+            </a:extLst>
+          </p:cNvPr>
+          <p:cNvSpPr txBox="1"/>
+          <p:nvPr/>
+        </p:nvSpPr>
+        <p:spPr>
+          <a:xfrm>
+            <a:off x="969808" y="5790077"/>
+            <a:ext cx="877163" cy="369332"/>
+          </a:xfrm>
+          <a:prstGeom prst="rect">
+            <a:avLst/>
+          </a:prstGeom>
+          <a:noFill/>
+        </p:spPr>
+        <p:txBody>
+          <a:bodyPr wrap="none" rtlCol="0">
+            <a:spAutoFit/>
+          </a:bodyPr>
+          <a:lstStyle/>
+          <a:p>
+            <a:r>
+              <a:rPr kumimoji="1" lang="ja-JP" altLang="en-US"/>
+              <a:t>コード</a:t>
+            </a:r>
+          </a:p>
+        </p:txBody>
+      </p:sp>
+      <p:sp>
+        <p:nvSpPr>
+          <p:cNvPr id="13" name="右矢印 12">
+            <a:extLst>
+              <a:ext uri="{FF2B5EF4-FFF2-40B4-BE49-F238E27FC236}">
+                <a16:creationId xmlns:a16="http://schemas.microsoft.com/office/drawing/2014/main" id="{2BD1B465-837C-1A73-9455-22604651AA04}"/>
+              </a:ext>
+            </a:extLst>
+          </p:cNvPr>
+          <p:cNvSpPr/>
+          <p:nvPr/>
+        </p:nvSpPr>
+        <p:spPr>
+          <a:xfrm>
+            <a:off x="5976114" y="5275319"/>
+            <a:ext cx="398724" cy="362832"/>
+          </a:xfrm>
+          <a:prstGeom prst="rightArrow">
+            <a:avLst/>
+          </a:prstGeom>
+          <a:solidFill>
+            <a:srgbClr val="FF0000"/>
+          </a:solidFill>
+          <a:ln>
+            <a:solidFill>
+              <a:schemeClr val="tx1"/>
+            </a:solidFill>
+          </a:ln>
+        </p:spPr>
+        <p:style>
+          <a:lnRef idx="2">
+            <a:schemeClr val="accent1">
+              <a:shade val="50000"/>
+            </a:schemeClr>
+          </a:lnRef>
+          <a:fillRef idx="1">
+            <a:schemeClr val="accent1"/>
+          </a:fillRef>
+          <a:effectRef idx="0">
+            <a:schemeClr val="accent1"/>
+          </a:effectRef>
+          <a:fontRef idx="minor">
+            <a:schemeClr val="lt1"/>
+          </a:fontRef>
+        </p:style>
+        <p:txBody>
+          <a:bodyPr rtlCol="0" anchor="ctr"/>
+          <a:lstStyle/>
+          <a:p>
+            <a:pPr algn="ctr"/>
+            <a:endParaRPr kumimoji="1" lang="ja-JP" altLang="en-US"/>
+          </a:p>
+        </p:txBody>
+      </p:sp>
+      <p:sp>
+        <p:nvSpPr>
+          <p:cNvPr id="14" name="テキスト ボックス 13">
+            <a:extLst>
+              <a:ext uri="{FF2B5EF4-FFF2-40B4-BE49-F238E27FC236}">
+                <a16:creationId xmlns:a16="http://schemas.microsoft.com/office/drawing/2014/main" id="{447405E0-3525-27D1-3DE2-0DF1B31E0DD0}"/>
+              </a:ext>
+            </a:extLst>
+          </p:cNvPr>
+          <p:cNvSpPr txBox="1"/>
+          <p:nvPr/>
+        </p:nvSpPr>
+        <p:spPr>
+          <a:xfrm>
+            <a:off x="5198328" y="5790077"/>
+            <a:ext cx="877163" cy="369332"/>
+          </a:xfrm>
+          <a:prstGeom prst="rect">
+            <a:avLst/>
+          </a:prstGeom>
+          <a:noFill/>
+        </p:spPr>
+        <p:txBody>
+          <a:bodyPr wrap="none" rtlCol="0">
+            <a:spAutoFit/>
+          </a:bodyPr>
+          <a:lstStyle/>
+          <a:p>
+            <a:r>
+              <a:rPr kumimoji="1" lang="ja-JP" altLang="en-US"/>
+              <a:t>コード</a:t>
+            </a:r>
+          </a:p>
+        </p:txBody>
+      </p:sp>
+      <p:sp>
+        <p:nvSpPr>
+          <p:cNvPr id="15" name="テキスト ボックス 14">
+            <a:extLst>
+              <a:ext uri="{FF2B5EF4-FFF2-40B4-BE49-F238E27FC236}">
+                <a16:creationId xmlns:a16="http://schemas.microsoft.com/office/drawing/2014/main" id="{5D778F4E-0E8D-BF27-29B5-966B0AE51F04}"/>
+              </a:ext>
+            </a:extLst>
+          </p:cNvPr>
+          <p:cNvSpPr txBox="1"/>
+          <p:nvPr/>
+        </p:nvSpPr>
+        <p:spPr>
+          <a:xfrm>
+            <a:off x="6440521" y="5773385"/>
+            <a:ext cx="877163" cy="369332"/>
+          </a:xfrm>
+          <a:prstGeom prst="rect">
+            <a:avLst/>
+          </a:prstGeom>
+          <a:noFill/>
+        </p:spPr>
+        <p:txBody>
+          <a:bodyPr wrap="none" rtlCol="0">
+            <a:spAutoFit/>
+          </a:bodyPr>
+          <a:lstStyle/>
+          <a:p>
+            <a:r>
+              <a:rPr kumimoji="1" lang="ja-JP" altLang="en-US"/>
+              <a:t>データ</a:t>
+            </a:r>
+          </a:p>
+        </p:txBody>
+      </p:sp>
+      <p:cxnSp>
+        <p:nvCxnSpPr>
+          <p:cNvPr id="16" name="直線矢印コネクタ 15">
+            <a:extLst>
+              <a:ext uri="{FF2B5EF4-FFF2-40B4-BE49-F238E27FC236}">
+                <a16:creationId xmlns:a16="http://schemas.microsoft.com/office/drawing/2014/main" id="{4C2873C2-585C-7C81-2580-6E51B2AD701F}"/>
+              </a:ext>
+            </a:extLst>
+          </p:cNvPr>
+          <p:cNvCxnSpPr>
+            <a:cxnSpLocks/>
+            <a:stCxn id="7" idx="3"/>
+            <a:endCxn id="5" idx="1"/>
+          </p:cNvCxnSpPr>
+          <p:nvPr/>
+        </p:nvCxnSpPr>
+        <p:spPr>
+          <a:xfrm flipV="1">
+            <a:off x="1907068" y="4442054"/>
+            <a:ext cx="1515456" cy="9880"/>
+          </a:xfrm>
+          <a:prstGeom prst="straightConnector1">
+            <a:avLst/>
+          </a:prstGeom>
+          <a:ln>
+            <a:solidFill>
+              <a:schemeClr val="tx1"/>
+            </a:solidFill>
+            <a:headEnd type="none" w="med" len="med"/>
+            <a:tailEnd type="triangle"/>
+          </a:ln>
+        </p:spPr>
+        <p:style>
+          <a:lnRef idx="1">
+            <a:schemeClr val="accent1"/>
+          </a:lnRef>
+          <a:fillRef idx="0">
+            <a:schemeClr val="accent1"/>
+          </a:fillRef>
+          <a:effectRef idx="0">
+            <a:schemeClr val="accent1"/>
+          </a:effectRef>
+          <a:fontRef idx="minor">
+            <a:schemeClr val="tx1"/>
+          </a:fontRef>
+        </p:style>
+      </p:cxnSp>
+      <p:cxnSp>
+        <p:nvCxnSpPr>
+          <p:cNvPr id="21" name="直線矢印コネクタ 20">
+            <a:extLst>
+              <a:ext uri="{FF2B5EF4-FFF2-40B4-BE49-F238E27FC236}">
+                <a16:creationId xmlns:a16="http://schemas.microsoft.com/office/drawing/2014/main" id="{BA0DEDE1-3330-638C-3ED0-BACC70519376}"/>
+              </a:ext>
+            </a:extLst>
+          </p:cNvPr>
+          <p:cNvCxnSpPr>
+            <a:cxnSpLocks/>
+            <a:stCxn id="5" idx="3"/>
+            <a:endCxn id="9" idx="1"/>
+          </p:cNvCxnSpPr>
+          <p:nvPr/>
+        </p:nvCxnSpPr>
+        <p:spPr>
+          <a:xfrm>
+            <a:off x="4160572" y="4442054"/>
+            <a:ext cx="1713366" cy="20838"/>
+          </a:xfrm>
+          <a:prstGeom prst="straightConnector1">
+            <a:avLst/>
+          </a:prstGeom>
+          <a:ln>
+            <a:solidFill>
+              <a:schemeClr val="tx1"/>
+            </a:solidFill>
+            <a:headEnd type="none" w="med" len="med"/>
+            <a:tailEnd type="triangle"/>
+          </a:ln>
+        </p:spPr>
+        <p:style>
+          <a:lnRef idx="1">
+            <a:schemeClr val="accent1"/>
+          </a:lnRef>
+          <a:fillRef idx="0">
+            <a:schemeClr val="accent1"/>
+          </a:fillRef>
+          <a:effectRef idx="0">
+            <a:schemeClr val="accent1"/>
+          </a:effectRef>
+          <a:fontRef idx="minor">
+            <a:schemeClr val="tx1"/>
+          </a:fontRef>
+        </p:style>
+      </p:cxnSp>
+      <p:sp>
+        <p:nvSpPr>
+          <p:cNvPr id="25" name="テキスト ボックス 24">
+            <a:extLst>
+              <a:ext uri="{FF2B5EF4-FFF2-40B4-BE49-F238E27FC236}">
+                <a16:creationId xmlns:a16="http://schemas.microsoft.com/office/drawing/2014/main" id="{95E59AD4-41FB-2192-A6F4-BE5CD8F9CF96}"/>
+              </a:ext>
+            </a:extLst>
+          </p:cNvPr>
+          <p:cNvSpPr txBox="1"/>
+          <p:nvPr/>
+        </p:nvSpPr>
+        <p:spPr>
+          <a:xfrm>
+            <a:off x="611560" y="6350027"/>
+            <a:ext cx="7173759" cy="369332"/>
+          </a:xfrm>
+          <a:prstGeom prst="rect">
+            <a:avLst/>
+          </a:prstGeom>
+          <a:noFill/>
+        </p:spPr>
+        <p:txBody>
+          <a:bodyPr wrap="none" rtlCol="0">
+            <a:spAutoFit/>
+          </a:bodyPr>
+          <a:lstStyle/>
+          <a:p>
+            <a:r>
+              <a:rPr kumimoji="1" lang="en-US" altLang="ja-JP" dirty="0"/>
+              <a:t>Git</a:t>
+            </a:r>
+            <a:r>
+              <a:rPr kumimoji="1" lang="ja-JP" altLang="en-US"/>
+              <a:t>では原則として「コードから生成できるファイル」は管理しない</a:t>
+            </a:r>
+          </a:p>
+        </p:txBody>
+      </p:sp>
+      <p:sp>
+        <p:nvSpPr>
+          <p:cNvPr id="26" name="角丸四角形 25">
+            <a:extLst>
+              <a:ext uri="{FF2B5EF4-FFF2-40B4-BE49-F238E27FC236}">
+                <a16:creationId xmlns:a16="http://schemas.microsoft.com/office/drawing/2014/main" id="{9B3AF0D7-46FF-B65B-9281-E88DBC3341FF}"/>
+              </a:ext>
+            </a:extLst>
+          </p:cNvPr>
+          <p:cNvSpPr/>
+          <p:nvPr/>
+        </p:nvSpPr>
+        <p:spPr>
+          <a:xfrm>
+            <a:off x="6374838" y="4982837"/>
+            <a:ext cx="1152128" cy="1189140"/>
+          </a:xfrm>
+          <a:prstGeom prst="roundRect">
+            <a:avLst/>
+          </a:prstGeom>
+          <a:noFill/>
+          <a:ln w="28575">
+            <a:solidFill>
+              <a:schemeClr val="tx1"/>
+            </a:solidFill>
+            <a:prstDash val="dash"/>
+          </a:ln>
+        </p:spPr>
+        <p:style>
+          <a:lnRef idx="2">
+            <a:schemeClr val="accent1">
+              <a:shade val="50000"/>
+            </a:schemeClr>
+          </a:lnRef>
+          <a:fillRef idx="1">
+            <a:schemeClr val="accent1"/>
+          </a:fillRef>
+          <a:effectRef idx="0">
+            <a:schemeClr val="accent1"/>
+          </a:effectRef>
+          <a:fontRef idx="minor">
+            <a:schemeClr val="lt1"/>
+          </a:fontRef>
+        </p:style>
+        <p:txBody>
+          <a:bodyPr rtlCol="0" anchor="ctr"/>
+          <a:lstStyle/>
+          <a:p>
+            <a:pPr algn="ctr"/>
+            <a:endParaRPr kumimoji="1" lang="ja-JP" altLang="en-US"/>
+          </a:p>
+        </p:txBody>
+      </p:sp>
+      <p:sp>
+        <p:nvSpPr>
+          <p:cNvPr id="30" name="テキスト ボックス 29">
+            <a:extLst>
+              <a:ext uri="{FF2B5EF4-FFF2-40B4-BE49-F238E27FC236}">
+                <a16:creationId xmlns:a16="http://schemas.microsoft.com/office/drawing/2014/main" id="{F526035A-07EA-9C24-E567-04B2D6086331}"/>
+              </a:ext>
+            </a:extLst>
+          </p:cNvPr>
+          <p:cNvSpPr txBox="1"/>
+          <p:nvPr/>
+        </p:nvSpPr>
+        <p:spPr>
+          <a:xfrm>
+            <a:off x="7513709" y="4632574"/>
+            <a:ext cx="1338828" cy="646331"/>
+          </a:xfrm>
+          <a:prstGeom prst="rect">
+            <a:avLst/>
+          </a:prstGeom>
+          <a:noFill/>
+        </p:spPr>
+        <p:txBody>
+          <a:bodyPr wrap="none" rtlCol="0">
+            <a:spAutoFit/>
+          </a:bodyPr>
+          <a:lstStyle/>
+          <a:p>
+            <a:r>
+              <a:rPr kumimoji="1" lang="en-US" altLang="ja-JP" dirty="0"/>
+              <a:t>Git</a:t>
+            </a:r>
+            <a:r>
+              <a:rPr kumimoji="1" lang="ja-JP" altLang="en-US"/>
+              <a:t>の</a:t>
+            </a:r>
+            <a:endParaRPr kumimoji="1" lang="en-US" altLang="ja-JP" dirty="0"/>
+          </a:p>
+          <a:p>
+            <a:r>
+              <a:rPr lang="ja-JP" altLang="en-US"/>
+              <a:t>管理対象外</a:t>
+            </a:r>
+            <a:endParaRPr kumimoji="1" lang="ja-JP" altLang="en-US"/>
           </a:p>
         </p:txBody>
       </p:sp>
     </p:spTree>
     <p:extLst>
       <p:ext uri="{BB962C8B-B14F-4D97-AF65-F5344CB8AC3E}">
-        <p14:creationId xmlns:p14="http://schemas.microsoft.com/office/powerpoint/2010/main" val="708715004"/>
+        <p14:creationId xmlns:p14="http://schemas.microsoft.com/office/powerpoint/2010/main" val="3711571428"/>
+      </p:ext>
+    </p:extLst>
+  </p:cSld>
+  <p:clrMapOvr>
+    <a:masterClrMapping/>
+  </p:clrMapOvr>
+</p:sld>
+</file>
+
+<file path=ppt/slides/slide9.xml><?xml version="1.0" encoding="utf-8"?>
+<p:sld xmlns:a="http://schemas.openxmlformats.org/drawingml/2006/main" xmlns:r="http://schemas.openxmlformats.org/officeDocument/2006/relationships" xmlns:p="http://schemas.openxmlformats.org/presentationml/2006/main">
+  <p:cSld>
+    <p:spTree>
+      <p:nvGrpSpPr>
+        <p:cNvPr id="1" name=""/>
+        <p:cNvGrpSpPr/>
+        <p:nvPr/>
+      </p:nvGrpSpPr>
+      <p:grpSpPr>
+        <a:xfrm>
+          <a:off x="0" y="0"/>
+          <a:ext cx="0" cy="0"/>
+          <a:chOff x="0" y="0"/>
+          <a:chExt cx="0" cy="0"/>
+        </a:xfrm>
+      </p:grpSpPr>
+      <p:sp>
+        <p:nvSpPr>
+          <p:cNvPr id="2" name="テキスト プレースホルダー 1">
+            <a:extLst>
+              <a:ext uri="{FF2B5EF4-FFF2-40B4-BE49-F238E27FC236}">
+                <a16:creationId xmlns:a16="http://schemas.microsoft.com/office/drawing/2014/main" id="{B7B4462B-D97C-EAA3-4C40-B44D6BE0241D}"/>
+              </a:ext>
+            </a:extLst>
+          </p:cNvPr>
+          <p:cNvSpPr>
+            <a:spLocks noGrp="1"/>
+          </p:cNvSpPr>
+          <p:nvPr>
+            <p:ph type="body" sz="quarter" idx="10"/>
+          </p:nvPr>
+        </p:nvSpPr>
+        <p:spPr/>
+        <p:txBody>
+          <a:bodyPr/>
+          <a:lstStyle/>
+          <a:p>
+            <a:r>
+              <a:rPr kumimoji="1" lang="ja-JP" altLang="en-US"/>
+              <a:t>論文執筆</a:t>
+            </a:r>
+          </a:p>
+        </p:txBody>
+      </p:sp>
+      <p:sp>
+        <p:nvSpPr>
+          <p:cNvPr id="3" name="テキスト ボックス 2">
+            <a:extLst>
+              <a:ext uri="{FF2B5EF4-FFF2-40B4-BE49-F238E27FC236}">
+                <a16:creationId xmlns:a16="http://schemas.microsoft.com/office/drawing/2014/main" id="{D8CB9795-A1DD-2E3E-3DE2-E08335022055}"/>
+              </a:ext>
+            </a:extLst>
+          </p:cNvPr>
+          <p:cNvSpPr txBox="1"/>
+          <p:nvPr/>
+        </p:nvSpPr>
+        <p:spPr>
+          <a:xfrm>
+            <a:off x="1043608" y="1703081"/>
+            <a:ext cx="5570756" cy="523220"/>
+          </a:xfrm>
+          <a:prstGeom prst="rect">
+            <a:avLst/>
+          </a:prstGeom>
+          <a:noFill/>
+        </p:spPr>
+        <p:txBody>
+          <a:bodyPr wrap="none" rtlCol="0">
+            <a:spAutoFit/>
+          </a:bodyPr>
+          <a:lstStyle/>
+          <a:p>
+            <a:r>
+              <a:rPr kumimoji="1" lang="ja-JP" altLang="en-US" sz="2800"/>
+              <a:t>ローカルで執筆、リモートに保存</a:t>
+            </a:r>
+          </a:p>
+        </p:txBody>
+      </p:sp>
+      <p:sp>
+        <p:nvSpPr>
+          <p:cNvPr id="4" name="テキスト ボックス 3">
+            <a:extLst>
+              <a:ext uri="{FF2B5EF4-FFF2-40B4-BE49-F238E27FC236}">
+                <a16:creationId xmlns:a16="http://schemas.microsoft.com/office/drawing/2014/main" id="{7D04A739-5E74-8CDF-3AB3-DD144F0B1EC3}"/>
+              </a:ext>
+            </a:extLst>
+          </p:cNvPr>
+          <p:cNvSpPr txBox="1"/>
+          <p:nvPr/>
+        </p:nvSpPr>
+        <p:spPr>
+          <a:xfrm>
+            <a:off x="179512" y="1118306"/>
+            <a:ext cx="2646878" cy="584775"/>
+          </a:xfrm>
+          <a:prstGeom prst="rect">
+            <a:avLst/>
+          </a:prstGeom>
+          <a:noFill/>
+        </p:spPr>
+        <p:txBody>
+          <a:bodyPr wrap="none" rtlCol="0">
+            <a:spAutoFit/>
+          </a:bodyPr>
+          <a:lstStyle/>
+          <a:p>
+            <a:r>
+              <a:rPr lang="ja-JP" altLang="en-US" sz="3200">
+                <a:solidFill>
+                  <a:srgbClr val="011893"/>
+                </a:solidFill>
+              </a:rPr>
+              <a:t>バックアップ</a:t>
+            </a:r>
+            <a:endParaRPr lang="en-US" sz="3200" dirty="0">
+              <a:solidFill>
+                <a:srgbClr val="011893"/>
+              </a:solidFill>
+            </a:endParaRPr>
+          </a:p>
+        </p:txBody>
+      </p:sp>
+      <p:pic>
+        <p:nvPicPr>
+          <p:cNvPr id="6" name="図 5">
+            <a:extLst>
+              <a:ext uri="{FF2B5EF4-FFF2-40B4-BE49-F238E27FC236}">
+                <a16:creationId xmlns:a16="http://schemas.microsoft.com/office/drawing/2014/main" id="{3E8125B8-9B5A-00C3-2035-B111DAD24F85}"/>
+              </a:ext>
+            </a:extLst>
+          </p:cNvPr>
+          <p:cNvPicPr>
+            <a:picLocks noChangeAspect="1"/>
+          </p:cNvPicPr>
+          <p:nvPr/>
+        </p:nvPicPr>
+        <p:blipFill>
+          <a:blip r:embed="rId2">
+            <a:extLst>
+              <a:ext uri="{28A0092B-C50C-407E-A947-70E740481C1C}">
+                <a14:useLocalDpi xmlns:a14="http://schemas.microsoft.com/office/drawing/2010/main" val="0"/>
+              </a:ext>
+            </a:extLst>
+          </a:blip>
+          <a:stretch>
+            <a:fillRect/>
+          </a:stretch>
+        </p:blipFill>
+        <p:spPr>
+          <a:xfrm>
+            <a:off x="5876316" y="2985187"/>
+            <a:ext cx="738048" cy="738048"/>
+          </a:xfrm>
+          <a:prstGeom prst="rect">
+            <a:avLst/>
+          </a:prstGeom>
+        </p:spPr>
+      </p:pic>
+      <p:pic>
+        <p:nvPicPr>
+          <p:cNvPr id="7" name="図 6">
+            <a:extLst>
+              <a:ext uri="{FF2B5EF4-FFF2-40B4-BE49-F238E27FC236}">
+                <a16:creationId xmlns:a16="http://schemas.microsoft.com/office/drawing/2014/main" id="{BD06D05B-8848-0670-FCA2-A62C80CB47FE}"/>
+              </a:ext>
+            </a:extLst>
+          </p:cNvPr>
+          <p:cNvPicPr>
+            <a:picLocks noChangeAspect="1"/>
+          </p:cNvPicPr>
+          <p:nvPr/>
+        </p:nvPicPr>
+        <p:blipFill>
+          <a:blip r:embed="rId3" cstate="print">
+            <a:extLst>
+              <a:ext uri="{28A0092B-C50C-407E-A947-70E740481C1C}">
+                <a14:useLocalDpi xmlns:a14="http://schemas.microsoft.com/office/drawing/2010/main" val="0"/>
+              </a:ext>
+            </a:extLst>
+          </a:blip>
+          <a:stretch>
+            <a:fillRect/>
+          </a:stretch>
+        </p:blipFill>
+        <p:spPr>
+          <a:xfrm>
+            <a:off x="5516276" y="2481131"/>
+            <a:ext cx="1368152" cy="560942"/>
+          </a:xfrm>
+          <a:prstGeom prst="rect">
+            <a:avLst/>
+          </a:prstGeom>
+        </p:spPr>
+      </p:pic>
+      <p:sp>
+        <p:nvSpPr>
+          <p:cNvPr id="8" name="円柱 7">
+            <a:extLst>
+              <a:ext uri="{FF2B5EF4-FFF2-40B4-BE49-F238E27FC236}">
+                <a16:creationId xmlns:a16="http://schemas.microsoft.com/office/drawing/2014/main" id="{3BE08246-854A-7C9B-09F1-6EA7ADDCCF70}"/>
+              </a:ext>
+            </a:extLst>
+          </p:cNvPr>
+          <p:cNvSpPr/>
+          <p:nvPr/>
+        </p:nvSpPr>
+        <p:spPr>
+          <a:xfrm>
+            <a:off x="1966544" y="4248838"/>
+            <a:ext cx="648072" cy="754178"/>
+          </a:xfrm>
+          <a:prstGeom prst="can">
+            <a:avLst/>
+          </a:prstGeom>
+          <a:noFill/>
+          <a:ln>
+            <a:solidFill>
+              <a:schemeClr val="tx1"/>
+            </a:solidFill>
+          </a:ln>
+        </p:spPr>
+        <p:style>
+          <a:lnRef idx="2">
+            <a:schemeClr val="accent1">
+              <a:shade val="50000"/>
+            </a:schemeClr>
+          </a:lnRef>
+          <a:fillRef idx="1">
+            <a:schemeClr val="accent1"/>
+          </a:fillRef>
+          <a:effectRef idx="0">
+            <a:schemeClr val="accent1"/>
+          </a:effectRef>
+          <a:fontRef idx="minor">
+            <a:schemeClr val="lt1"/>
+          </a:fontRef>
+        </p:style>
+        <p:txBody>
+          <a:bodyPr rtlCol="0" anchor="ctr"/>
+          <a:lstStyle/>
+          <a:p>
+            <a:pPr algn="ctr"/>
+            <a:endParaRPr kumimoji="1" lang="ja-JP" altLang="en-US"/>
+          </a:p>
+        </p:txBody>
+      </p:sp>
+      <p:cxnSp>
+        <p:nvCxnSpPr>
+          <p:cNvPr id="9" name="直線矢印コネクタ 8">
+            <a:extLst>
+              <a:ext uri="{FF2B5EF4-FFF2-40B4-BE49-F238E27FC236}">
+                <a16:creationId xmlns:a16="http://schemas.microsoft.com/office/drawing/2014/main" id="{5B88320F-0599-757F-C5DE-42210A37E76B}"/>
+              </a:ext>
+            </a:extLst>
+          </p:cNvPr>
+          <p:cNvCxnSpPr>
+            <a:cxnSpLocks/>
+            <a:endCxn id="8" idx="1"/>
+          </p:cNvCxnSpPr>
+          <p:nvPr/>
+        </p:nvCxnSpPr>
+        <p:spPr>
+          <a:xfrm flipH="1">
+            <a:off x="2290580" y="3727605"/>
+            <a:ext cx="1" cy="521233"/>
+          </a:xfrm>
+          <a:prstGeom prst="straightConnector1">
+            <a:avLst/>
+          </a:prstGeom>
+          <a:ln>
+            <a:solidFill>
+              <a:schemeClr val="tx1"/>
+            </a:solidFill>
+            <a:headEnd type="none" w="med" len="med"/>
+            <a:tailEnd type="triangle"/>
+          </a:ln>
+        </p:spPr>
+        <p:style>
+          <a:lnRef idx="1">
+            <a:schemeClr val="accent1"/>
+          </a:lnRef>
+          <a:fillRef idx="0">
+            <a:schemeClr val="accent1"/>
+          </a:fillRef>
+          <a:effectRef idx="0">
+            <a:schemeClr val="accent1"/>
+          </a:effectRef>
+          <a:fontRef idx="minor">
+            <a:schemeClr val="tx1"/>
+          </a:fontRef>
+        </p:style>
+      </p:cxnSp>
+      <p:sp>
+        <p:nvSpPr>
+          <p:cNvPr id="10" name="テキスト ボックス 9">
+            <a:extLst>
+              <a:ext uri="{FF2B5EF4-FFF2-40B4-BE49-F238E27FC236}">
+                <a16:creationId xmlns:a16="http://schemas.microsoft.com/office/drawing/2014/main" id="{3E0FAB5F-B041-4B25-3CAE-67AD6B8C01CD}"/>
+              </a:ext>
+            </a:extLst>
+          </p:cNvPr>
+          <p:cNvSpPr txBox="1"/>
+          <p:nvPr/>
+        </p:nvSpPr>
+        <p:spPr>
+          <a:xfrm>
+            <a:off x="2328962" y="3782682"/>
+            <a:ext cx="1107996" cy="369332"/>
+          </a:xfrm>
+          <a:prstGeom prst="rect">
+            <a:avLst/>
+          </a:prstGeom>
+          <a:noFill/>
+        </p:spPr>
+        <p:txBody>
+          <a:bodyPr wrap="none" rtlCol="0">
+            <a:spAutoFit/>
+          </a:bodyPr>
+          <a:lstStyle/>
+          <a:p>
+            <a:r>
+              <a:rPr kumimoji="1" lang="ja-JP" altLang="en-US"/>
+              <a:t>コミット</a:t>
+            </a:r>
+          </a:p>
+        </p:txBody>
+      </p:sp>
+      <p:cxnSp>
+        <p:nvCxnSpPr>
+          <p:cNvPr id="11" name="直線矢印コネクタ 10">
+            <a:extLst>
+              <a:ext uri="{FF2B5EF4-FFF2-40B4-BE49-F238E27FC236}">
+                <a16:creationId xmlns:a16="http://schemas.microsoft.com/office/drawing/2014/main" id="{E6F9786F-22E1-9F93-985F-2D0CD02EAA41}"/>
+              </a:ext>
+            </a:extLst>
+          </p:cNvPr>
+          <p:cNvCxnSpPr/>
+          <p:nvPr/>
+        </p:nvCxnSpPr>
+        <p:spPr>
+          <a:xfrm>
+            <a:off x="2715666" y="3110261"/>
+            <a:ext cx="2800610" cy="580"/>
+          </a:xfrm>
+          <a:prstGeom prst="straightConnector1">
+            <a:avLst/>
+          </a:prstGeom>
+          <a:ln>
+            <a:solidFill>
+              <a:schemeClr val="tx1"/>
+            </a:solidFill>
+            <a:headEnd type="none" w="med" len="med"/>
+            <a:tailEnd type="triangle"/>
+          </a:ln>
+        </p:spPr>
+        <p:style>
+          <a:lnRef idx="1">
+            <a:schemeClr val="accent1"/>
+          </a:lnRef>
+          <a:fillRef idx="0">
+            <a:schemeClr val="accent1"/>
+          </a:fillRef>
+          <a:effectRef idx="0">
+            <a:schemeClr val="accent1"/>
+          </a:effectRef>
+          <a:fontRef idx="minor">
+            <a:schemeClr val="tx1"/>
+          </a:fontRef>
+        </p:style>
+      </p:cxnSp>
+      <p:sp>
+        <p:nvSpPr>
+          <p:cNvPr id="12" name="テキスト ボックス 11">
+            <a:extLst>
+              <a:ext uri="{FF2B5EF4-FFF2-40B4-BE49-F238E27FC236}">
+                <a16:creationId xmlns:a16="http://schemas.microsoft.com/office/drawing/2014/main" id="{75E21973-4404-6879-C659-DF0BA8019B7F}"/>
+              </a:ext>
+            </a:extLst>
+          </p:cNvPr>
+          <p:cNvSpPr txBox="1"/>
+          <p:nvPr/>
+        </p:nvSpPr>
+        <p:spPr>
+          <a:xfrm>
+            <a:off x="3553340" y="2576936"/>
+            <a:ext cx="1107996" cy="369332"/>
+          </a:xfrm>
+          <a:prstGeom prst="rect">
+            <a:avLst/>
+          </a:prstGeom>
+          <a:noFill/>
+        </p:spPr>
+        <p:txBody>
+          <a:bodyPr wrap="none" rtlCol="0">
+            <a:spAutoFit/>
+          </a:bodyPr>
+          <a:lstStyle/>
+          <a:p>
+            <a:r>
+              <a:rPr kumimoji="1" lang="ja-JP" altLang="en-US"/>
+              <a:t>プッシュ</a:t>
+            </a:r>
+          </a:p>
+        </p:txBody>
+      </p:sp>
+      <p:pic>
+        <p:nvPicPr>
+          <p:cNvPr id="3074" name="Picture 2" descr="紙に何かを書く人のイラスト（男性）">
+            <a:extLst>
+              <a:ext uri="{FF2B5EF4-FFF2-40B4-BE49-F238E27FC236}">
+                <a16:creationId xmlns:a16="http://schemas.microsoft.com/office/drawing/2014/main" id="{57328F86-E6BB-CF51-937D-14068979183A}"/>
+              </a:ext>
+            </a:extLst>
+          </p:cNvPr>
+          <p:cNvPicPr>
+            <a:picLocks noChangeAspect="1" noChangeArrowheads="1"/>
+          </p:cNvPicPr>
+          <p:nvPr/>
+        </p:nvPicPr>
+        <p:blipFill>
+          <a:blip r:embed="rId4">
+            <a:extLst>
+              <a:ext uri="{28A0092B-C50C-407E-A947-70E740481C1C}">
+                <a14:useLocalDpi xmlns:a14="http://schemas.microsoft.com/office/drawing/2010/main" val="0"/>
+              </a:ext>
+            </a:extLst>
+          </a:blip>
+          <a:srcRect/>
+          <a:stretch>
+            <a:fillRect/>
+          </a:stretch>
+        </p:blipFill>
+        <p:spPr bwMode="auto">
+          <a:xfrm>
+            <a:off x="1910783" y="2638289"/>
+            <a:ext cx="787617" cy="1040904"/>
+          </a:xfrm>
+          <a:prstGeom prst="rect">
+            <a:avLst/>
+          </a:prstGeom>
+          <a:noFill/>
+          <a:extLst>
+            <a:ext uri="{909E8E84-426E-40DD-AFC4-6F175D3DCCD1}">
+              <a14:hiddenFill xmlns:a14="http://schemas.microsoft.com/office/drawing/2010/main">
+                <a:solidFill>
+                  <a:srgbClr val="FFFFFF"/>
+                </a:solidFill>
+              </a14:hiddenFill>
+            </a:ext>
+          </a:extLst>
+        </p:spPr>
+      </p:pic>
+      <p:sp>
+        <p:nvSpPr>
+          <p:cNvPr id="13" name="テキスト ボックス 12">
+            <a:extLst>
+              <a:ext uri="{FF2B5EF4-FFF2-40B4-BE49-F238E27FC236}">
+                <a16:creationId xmlns:a16="http://schemas.microsoft.com/office/drawing/2014/main" id="{EA336686-F63C-4548-F0ED-62C22673BA73}"/>
+              </a:ext>
+            </a:extLst>
+          </p:cNvPr>
+          <p:cNvSpPr txBox="1"/>
+          <p:nvPr/>
+        </p:nvSpPr>
+        <p:spPr>
+          <a:xfrm>
+            <a:off x="107504" y="5373216"/>
+            <a:ext cx="8725466" cy="369332"/>
+          </a:xfrm>
+          <a:prstGeom prst="rect">
+            <a:avLst/>
+          </a:prstGeom>
+          <a:noFill/>
+        </p:spPr>
+        <p:txBody>
+          <a:bodyPr wrap="none" rtlCol="0">
+            <a:spAutoFit/>
+          </a:bodyPr>
+          <a:lstStyle/>
+          <a:p>
+            <a:r>
+              <a:rPr lang="ja-JP" altLang="en-US"/>
+              <a:t>投稿論文もそうだが、特に卒論、修論、博論のリモートバックアップは絶対に必要</a:t>
+            </a:r>
+            <a:endParaRPr kumimoji="1" lang="ja-JP" altLang="en-US"/>
+          </a:p>
+        </p:txBody>
+      </p:sp>
+      <p:sp>
+        <p:nvSpPr>
+          <p:cNvPr id="14" name="テキスト ボックス 13">
+            <a:extLst>
+              <a:ext uri="{FF2B5EF4-FFF2-40B4-BE49-F238E27FC236}">
+                <a16:creationId xmlns:a16="http://schemas.microsoft.com/office/drawing/2014/main" id="{71A6A898-7BC6-547F-34E1-66243791B9B7}"/>
+              </a:ext>
+            </a:extLst>
+          </p:cNvPr>
+          <p:cNvSpPr txBox="1"/>
+          <p:nvPr/>
+        </p:nvSpPr>
+        <p:spPr>
+          <a:xfrm>
+            <a:off x="480876" y="6331814"/>
+            <a:ext cx="2044149" cy="369332"/>
+          </a:xfrm>
+          <a:prstGeom prst="rect">
+            <a:avLst/>
+          </a:prstGeom>
+          <a:noFill/>
+        </p:spPr>
+        <p:txBody>
+          <a:bodyPr wrap="none" rtlCol="0">
+            <a:spAutoFit/>
+          </a:bodyPr>
+          <a:lstStyle/>
+          <a:p>
+            <a:r>
+              <a:rPr kumimoji="1" lang="en-US" altLang="ja-JP" dirty="0"/>
+              <a:t>※ Overleaf</a:t>
+            </a:r>
+            <a:r>
+              <a:rPr kumimoji="1" lang="ja-JP" altLang="en-US"/>
+              <a:t>でも可</a:t>
+            </a:r>
+          </a:p>
+        </p:txBody>
+      </p:sp>
+      <p:sp>
+        <p:nvSpPr>
+          <p:cNvPr id="15" name="テキスト ボックス 14">
+            <a:extLst>
+              <a:ext uri="{FF2B5EF4-FFF2-40B4-BE49-F238E27FC236}">
+                <a16:creationId xmlns:a16="http://schemas.microsoft.com/office/drawing/2014/main" id="{EB186312-274A-8324-BA72-BAD59349C912}"/>
+              </a:ext>
+            </a:extLst>
+          </p:cNvPr>
+          <p:cNvSpPr txBox="1"/>
+          <p:nvPr/>
+        </p:nvSpPr>
+        <p:spPr>
+          <a:xfrm>
+            <a:off x="6892806" y="2564904"/>
+            <a:ext cx="415498" cy="369332"/>
+          </a:xfrm>
+          <a:prstGeom prst="rect">
+            <a:avLst/>
+          </a:prstGeom>
+          <a:noFill/>
+        </p:spPr>
+        <p:txBody>
+          <a:bodyPr wrap="none" rtlCol="0">
+            <a:spAutoFit/>
+          </a:bodyPr>
+          <a:lstStyle/>
+          <a:p>
+            <a:r>
+              <a:rPr kumimoji="1" lang="en-US" altLang="ja-JP" dirty="0"/>
+              <a:t>※</a:t>
+            </a:r>
+            <a:endParaRPr kumimoji="1" lang="ja-JP" altLang="en-US"/>
+          </a:p>
+        </p:txBody>
+      </p:sp>
+    </p:spTree>
+    <p:extLst>
+      <p:ext uri="{BB962C8B-B14F-4D97-AF65-F5344CB8AC3E}">
+        <p14:creationId xmlns:p14="http://schemas.microsoft.com/office/powerpoint/2010/main" val="3406155346"/>
       </p:ext>
     </p:extLst>
   </p:cSld>

--- a/01-lecture-git-basic/slides/01-c-compphys.pptx
+++ b/01-lecture-git-basic/slides/01-c-compphys.pptx
@@ -1358,6 +1358,99 @@
           </a:p>
         </p:txBody>
       </p:sp>
+      <p:sp>
+        <p:nvSpPr>
+          <p:cNvPr id="7" name="吹き出し: 角を丸めた四角形 6">
+            <a:extLst>
+              <a:ext uri="{FF2B5EF4-FFF2-40B4-BE49-F238E27FC236}">
+                <a16:creationId xmlns:a16="http://schemas.microsoft.com/office/drawing/2014/main" id="{E4DFEBA6-8B2C-81B0-2C9A-75D802FFA152}"/>
+              </a:ext>
+            </a:extLst>
+          </p:cNvPr>
+          <p:cNvSpPr/>
+          <p:nvPr/>
+        </p:nvSpPr>
+        <p:spPr>
+          <a:xfrm>
+            <a:off x="7380312" y="2080012"/>
+            <a:ext cx="1080120" cy="504056"/>
+          </a:xfrm>
+          <a:prstGeom prst="wedgeRoundRectCallout">
+            <a:avLst>
+              <a:gd name="adj1" fmla="val -914"/>
+              <a:gd name="adj2" fmla="val -105247"/>
+              <a:gd name="adj3" fmla="val 16667"/>
+            </a:avLst>
+          </a:prstGeom>
+          <a:solidFill>
+            <a:schemeClr val="bg1"/>
+          </a:solidFill>
+          <a:ln>
+            <a:solidFill>
+              <a:schemeClr val="tx1"/>
+            </a:solidFill>
+          </a:ln>
+        </p:spPr>
+        <p:style>
+          <a:lnRef idx="2">
+            <a:schemeClr val="accent1">
+              <a:shade val="50000"/>
+            </a:schemeClr>
+          </a:lnRef>
+          <a:fillRef idx="1">
+            <a:schemeClr val="accent1"/>
+          </a:fillRef>
+          <a:effectRef idx="0">
+            <a:schemeClr val="accent1"/>
+          </a:effectRef>
+          <a:fontRef idx="minor">
+            <a:schemeClr val="lt1"/>
+          </a:fontRef>
+        </p:style>
+        <p:txBody>
+          <a:bodyPr rtlCol="0" anchor="ctr"/>
+          <a:lstStyle/>
+          <a:p>
+            <a:pPr algn="ctr"/>
+            <a:endParaRPr kumimoji="1" lang="ja-JP" altLang="en-US"/>
+          </a:p>
+        </p:txBody>
+      </p:sp>
+      <p:sp>
+        <p:nvSpPr>
+          <p:cNvPr id="8" name="テキスト ボックス 7">
+            <a:extLst>
+              <a:ext uri="{FF2B5EF4-FFF2-40B4-BE49-F238E27FC236}">
+                <a16:creationId xmlns:a16="http://schemas.microsoft.com/office/drawing/2014/main" id="{F07A554A-7646-DECB-D79E-B9ED8668E24B}"/>
+              </a:ext>
+            </a:extLst>
+          </p:cNvPr>
+          <p:cNvSpPr txBox="1"/>
+          <p:nvPr/>
+        </p:nvSpPr>
+        <p:spPr>
+          <a:xfrm>
+            <a:off x="7485613" y="2060848"/>
+            <a:ext cx="902811" cy="523220"/>
+          </a:xfrm>
+          <a:prstGeom prst="rect">
+            <a:avLst/>
+          </a:prstGeom>
+          <a:noFill/>
+        </p:spPr>
+        <p:txBody>
+          <a:bodyPr wrap="none" rtlCol="0">
+            <a:spAutoFit/>
+          </a:bodyPr>
+          <a:lstStyle/>
+          <a:p>
+            <a:r>
+              <a:rPr kumimoji="1" lang="ja-JP" altLang="en-US" sz="2800"/>
+              <a:t>の例</a:t>
+            </a:r>
+          </a:p>
+        </p:txBody>
+      </p:sp>
     </p:spTree>
     <p:extLst>
       <p:ext uri="{BB962C8B-B14F-4D97-AF65-F5344CB8AC3E}">
@@ -1503,7 +1596,7 @@
           <p:nvPr/>
         </p:nvPicPr>
         <p:blipFill>
-          <a:blip r:embed="rId4">
+          <a:blip r:embed="rId4" cstate="print">
             <a:extLst>
               <a:ext uri="{28A0092B-C50C-407E-A947-70E740481C1C}">
                 <a14:useLocalDpi xmlns:a14="http://schemas.microsoft.com/office/drawing/2010/main" val="0"/>
@@ -1550,7 +1643,7 @@
           <p:nvPr/>
         </p:nvPicPr>
         <p:blipFill>
-          <a:blip r:embed="rId5">
+          <a:blip r:embed="rId5" cstate="print">
             <a:extLst>
               <a:ext uri="{28A0092B-C50C-407E-A947-70E740481C1C}">
                 <a14:useLocalDpi xmlns:a14="http://schemas.microsoft.com/office/drawing/2010/main" val="0"/>
@@ -4132,9 +4225,18 @@
           <a:p>
             <a:r>
               <a:rPr kumimoji="1" lang="en-US" altLang="ja-JP">
+                <a:solidFill>
+                  <a:srgbClr val="FF0000"/>
+                </a:solidFill>
                 <a:latin typeface="Consolas" panose="020B0609020204030204" pitchFamily="49" charset="0"/>
               </a:rPr>
-              <a:t>pressure.dat</a:t>
+              <a:t>pressure</a:t>
+            </a:r>
+            <a:r>
+              <a:rPr kumimoji="1" lang="en-US" altLang="ja-JP">
+                <a:latin typeface="Consolas" panose="020B0609020204030204" pitchFamily="49" charset="0"/>
+              </a:rPr>
+              <a:t>.dat</a:t>
             </a:r>
             <a:endParaRPr kumimoji="1" lang="ja-JP" altLang="en-US">
               <a:latin typeface="Consolas" panose="020B0609020204030204" pitchFamily="49" charset="0"/>
@@ -4282,7 +4384,22 @@
               <a:rPr lang="ja-JP" altLang="en-US">
                 <a:latin typeface="Consolas" panose="020B0609020204030204" pitchFamily="49" charset="0"/>
               </a:rPr>
-              <a:t>p "pressure.dat" pt 6 t "Data"</a:t>
+              <a:t>p "</a:t>
+            </a:r>
+            <a:r>
+              <a:rPr lang="ja-JP" altLang="en-US">
+                <a:solidFill>
+                  <a:srgbClr val="FF0000"/>
+                </a:solidFill>
+                <a:latin typeface="Consolas" panose="020B0609020204030204" pitchFamily="49" charset="0"/>
+              </a:rPr>
+              <a:t>pressure</a:t>
+            </a:r>
+            <a:r>
+              <a:rPr lang="ja-JP" altLang="en-US">
+                <a:latin typeface="Consolas" panose="020B0609020204030204" pitchFamily="49" charset="0"/>
+              </a:rPr>
+              <a:t>.dat" pt 6 t "Data"</a:t>
             </a:r>
           </a:p>
         </p:txBody>
@@ -4317,9 +4434,18 @@
           <a:p>
             <a:r>
               <a:rPr kumimoji="1" lang="en-US" altLang="ja-JP">
+                <a:solidFill>
+                  <a:srgbClr val="FF0000"/>
+                </a:solidFill>
                 <a:latin typeface="Consolas" panose="020B0609020204030204" pitchFamily="49" charset="0"/>
               </a:rPr>
-              <a:t>pressure.plt</a:t>
+              <a:t>pressure</a:t>
+            </a:r>
+            <a:r>
+              <a:rPr kumimoji="1" lang="en-US" altLang="ja-JP">
+                <a:latin typeface="Consolas" panose="020B0609020204030204" pitchFamily="49" charset="0"/>
+              </a:rPr>
+              <a:t>.plt</a:t>
             </a:r>
             <a:endParaRPr kumimoji="1" lang="ja-JP" altLang="en-US">
               <a:latin typeface="Consolas" panose="020B0609020204030204" pitchFamily="49" charset="0"/>
@@ -4545,19 +4671,37 @@
           <a:p>
             <a:r>
               <a:rPr lang="en-US" altLang="ja-JP" dirty="0">
+                <a:solidFill>
+                  <a:srgbClr val="FF0000"/>
+                </a:solidFill>
                 <a:latin typeface="Consolas" panose="020B0609020204030204" pitchFamily="49" charset="0"/>
               </a:rPr>
-              <a:t>hoge.pdf</a:t>
+              <a:t>hoge</a:t>
+            </a:r>
+            <a:r>
+              <a:rPr lang="en-US" altLang="ja-JP" dirty="0">
+                <a:latin typeface="Consolas" panose="020B0609020204030204" pitchFamily="49" charset="0"/>
+              </a:rPr>
+              <a:t>.pdf</a:t>
             </a:r>
             <a:r>
               <a:rPr lang="ja-JP" altLang="en-US" dirty="0"/>
               <a:t>を作りたければ</a:t>
+            </a:r>
+            <a:r>
+              <a:rPr lang="en-US" altLang="ja-JP" dirty="0" err="1">
+                <a:solidFill>
+                  <a:srgbClr val="FF0000"/>
+                </a:solidFill>
+                <a:latin typeface="Consolas" panose="020B0609020204030204" pitchFamily="49" charset="0"/>
+              </a:rPr>
+              <a:t>hoge</a:t>
             </a:r>
             <a:r>
               <a:rPr lang="en-US" altLang="ja-JP" dirty="0" err="1">
                 <a:latin typeface="Consolas" panose="020B0609020204030204" pitchFamily="49" charset="0"/>
               </a:rPr>
-              <a:t>hoge.plt</a:t>
+              <a:t>.plt</a:t>
             </a:r>
             <a:r>
               <a:rPr lang="ja-JP" altLang="en-US" dirty="0">
@@ -4570,9 +4714,18 @@
           <a:p>
             <a:r>
               <a:rPr lang="en-US" altLang="ja-JP" dirty="0">
+                <a:solidFill>
+                  <a:srgbClr val="FF0000"/>
+                </a:solidFill>
                 <a:latin typeface="Consolas" panose="020B0609020204030204" pitchFamily="49" charset="0"/>
               </a:rPr>
-              <a:t>hoge.py</a:t>
+              <a:t>hoge</a:t>
+            </a:r>
+            <a:r>
+              <a:rPr lang="en-US" altLang="ja-JP" dirty="0">
+                <a:latin typeface="Consolas" panose="020B0609020204030204" pitchFamily="49" charset="0"/>
+              </a:rPr>
+              <a:t>.py</a:t>
             </a:r>
             <a:r>
               <a:rPr lang="ja-JP" altLang="en-US" dirty="0"/>
@@ -4818,19 +4971,37 @@
           <a:p>
             <a:r>
               <a:rPr kumimoji="1" lang="en-US" altLang="ja-JP" sz="2400">
+                <a:solidFill>
+                  <a:srgbClr val="FF0000"/>
+                </a:solidFill>
                 <a:latin typeface="Consolas" panose="020B0609020204030204" pitchFamily="49" charset="0"/>
               </a:rPr>
-              <a:t>pressure.dat</a:t>
-            </a:r>
-            <a:r>
-              <a:rPr kumimoji="1" lang="ja-JP" altLang="en-US" sz="2400"/>
-              <a:t>と</a:t>
+              <a:t>pressure</a:t>
             </a:r>
             <a:r>
               <a:rPr kumimoji="1" lang="en-US" altLang="ja-JP" sz="2400">
                 <a:latin typeface="Consolas" panose="020B0609020204030204" pitchFamily="49" charset="0"/>
               </a:rPr>
-              <a:t>temperature.dat</a:t>
+              <a:t>.dat</a:t>
+            </a:r>
+            <a:r>
+              <a:rPr kumimoji="1" lang="ja-JP" altLang="en-US" sz="2400"/>
+              <a:t>と</a:t>
+            </a:r>
+            <a:r>
+              <a:rPr kumimoji="1" lang="en-US" altLang="ja-JP" sz="2400">
+                <a:solidFill>
+                  <a:srgbClr val="011893"/>
+                </a:solidFill>
+                <a:latin typeface="Consolas" panose="020B0609020204030204" pitchFamily="49" charset="0"/>
+              </a:rPr>
+              <a:t>temperature</a:t>
+            </a:r>
+            <a:r>
+              <a:rPr kumimoji="1" lang="en-US" altLang="ja-JP" sz="2400">
+                <a:latin typeface="Consolas" panose="020B0609020204030204" pitchFamily="49" charset="0"/>
+              </a:rPr>
+              <a:t>.dat</a:t>
             </a:r>
             <a:r>
               <a:rPr kumimoji="1" lang="ja-JP" altLang="en-US" sz="2400"/>
@@ -4839,21 +5010,39 @@
             <a:endParaRPr kumimoji="1" lang="en-US" altLang="ja-JP" sz="2400"/>
           </a:p>
           <a:p>
+            <a:r>
+              <a:rPr lang="en-US" altLang="ja-JP" sz="2400">
+                <a:solidFill>
+                  <a:srgbClr val="FF0000"/>
+                </a:solidFill>
+                <a:latin typeface="Consolas" panose="020B0609020204030204" pitchFamily="49" charset="0"/>
+              </a:rPr>
+              <a:t>pressure</a:t>
+            </a:r>
             <a:r>
               <a:rPr lang="en-US" altLang="ja-JP" sz="2400">
                 <a:latin typeface="Consolas" panose="020B0609020204030204" pitchFamily="49" charset="0"/>
               </a:rPr>
-              <a:t>pressure.plt</a:t>
+              <a:t>.plt</a:t>
             </a:r>
             <a:r>
               <a:rPr lang="ja-JP" altLang="en-US" sz="2400"/>
               <a:t>と</a:t>
+            </a:r>
+            <a:r>
+              <a:rPr lang="en-US" altLang="ja-JP" sz="2400">
+                <a:solidFill>
+                  <a:srgbClr val="011893"/>
+                </a:solidFill>
+                <a:latin typeface="Consolas" panose="020B0609020204030204" pitchFamily="49" charset="0"/>
+              </a:rPr>
+              <a:t>temperature</a:t>
             </a:r>
             <a:r>
               <a:rPr lang="en-US" altLang="ja-JP" sz="2400">
                 <a:latin typeface="Consolas" panose="020B0609020204030204" pitchFamily="49" charset="0"/>
               </a:rPr>
-              <a:t>temperature.plt</a:t>
+              <a:t>.plt</a:t>
             </a:r>
             <a:r>
               <a:rPr lang="ja-JP" altLang="en-US" sz="2400"/>
@@ -4862,21 +5051,39 @@
             <a:endParaRPr lang="en-US" altLang="ja-JP" sz="2400"/>
           </a:p>
           <a:p>
+            <a:r>
+              <a:rPr kumimoji="1" lang="en-US" altLang="ja-JP" sz="2400">
+                <a:solidFill>
+                  <a:srgbClr val="FF0000"/>
+                </a:solidFill>
+                <a:latin typeface="Consolas" panose="020B0609020204030204" pitchFamily="49" charset="0"/>
+              </a:rPr>
+              <a:t>pressure</a:t>
+            </a:r>
             <a:r>
               <a:rPr kumimoji="1" lang="en-US" altLang="ja-JP" sz="2400">
                 <a:latin typeface="Consolas" panose="020B0609020204030204" pitchFamily="49" charset="0"/>
               </a:rPr>
-              <a:t>pressure.pdf</a:t>
+              <a:t>.pdf</a:t>
             </a:r>
             <a:r>
               <a:rPr kumimoji="1" lang="ja-JP" altLang="en-US" sz="2400"/>
               <a:t>と</a:t>
+            </a:r>
+            <a:r>
+              <a:rPr lang="en-US" altLang="ja-JP" sz="2400">
+                <a:solidFill>
+                  <a:srgbClr val="011893"/>
+                </a:solidFill>
+                <a:latin typeface="Consolas" panose="020B0609020204030204" pitchFamily="49" charset="0"/>
+              </a:rPr>
+              <a:t>temperature</a:t>
             </a:r>
             <a:r>
               <a:rPr lang="en-US" altLang="ja-JP" sz="2400">
                 <a:latin typeface="Consolas" panose="020B0609020204030204" pitchFamily="49" charset="0"/>
               </a:rPr>
-              <a:t>temperature.pdf</a:t>
+              <a:t>.pdf</a:t>
             </a:r>
             <a:r>
               <a:rPr lang="ja-JP" altLang="en-US" sz="2400"/>
@@ -4944,7 +5151,7 @@
         </p:nvSpPr>
         <p:spPr>
           <a:xfrm>
-            <a:off x="1187624" y="6309320"/>
+            <a:off x="827584" y="6237312"/>
             <a:ext cx="7430239" cy="369332"/>
           </a:xfrm>
           <a:prstGeom prst="rect">
@@ -5247,14 +5454,13 @@
           <a:lstStyle/>
           <a:p>
             <a:r>
-              <a:rPr lang="en-US" altLang="ja-JP" sz="2000" b="0" i="0" dirty="0">
+              <a:rPr lang="en-US" altLang="ja-JP" sz="2000">
                 <a:solidFill>
                   <a:srgbClr val="404040"/>
                 </a:solidFill>
-                <a:effectLst/>
                 <a:latin typeface="Lato" panose="020F0502020204030203" pitchFamily="34" charset="0"/>
               </a:rPr>
-              <a:t>The data that support the findings of this study are available upon reasonable request.</a:t>
+              <a:t>The data supporting the findings of this study are available upon reasonable request.</a:t>
             </a:r>
             <a:endParaRPr lang="ja-JP" altLang="en-US" sz="2000"/>
           </a:p>
@@ -5275,7 +5481,7 @@
           <p:nvPr/>
         </p:nvPicPr>
         <p:blipFill>
-          <a:blip r:embed="rId2">
+          <a:blip r:embed="rId2" cstate="print">
             <a:extLst>
               <a:ext uri="{28A0092B-C50C-407E-A947-70E740481C1C}">
                 <a14:useLocalDpi xmlns:a14="http://schemas.microsoft.com/office/drawing/2010/main" val="0"/>
@@ -5663,7 +5869,7 @@
             </a:r>
             <a:r>
               <a:rPr lang="ja-JP" altLang="en-US" sz="2400"/>
-              <a:t>で置くと、スマホで見られない</a:t>
+              <a:t>で置くとスマホでは見づらい</a:t>
             </a:r>
             <a:endParaRPr kumimoji="1" lang="ja-JP" altLang="en-US" sz="2400"/>
           </a:p>
@@ -6108,8 +6314,8 @@
         </p:nvSpPr>
         <p:spPr>
           <a:xfrm>
-            <a:off x="178112" y="5900587"/>
-            <a:ext cx="5936240" cy="646331"/>
+            <a:off x="133119" y="5951021"/>
+            <a:ext cx="6167073" cy="646331"/>
           </a:xfrm>
           <a:prstGeom prst="rect">
             <a:avLst/>
@@ -6139,12 +6345,12 @@
               <a:t>多分</a:t>
             </a:r>
             <a:r>
-              <a:rPr kumimoji="1" lang="en-US" altLang="ja-JP" dirty="0"/>
+              <a:rPr kumimoji="1" lang="en-US" altLang="ja-JP"/>
               <a:t>)</a:t>
             </a:r>
             <a:r>
               <a:rPr kumimoji="1" lang="ja-JP" altLang="en-US"/>
-              <a:t>消えない。消える前にフォーク可能。</a:t>
+              <a:t>消えないし、消える前にフォーク可能。</a:t>
             </a:r>
             <a:endParaRPr kumimoji="1" lang="en-US" altLang="ja-JP" dirty="0"/>
           </a:p>
@@ -6159,8 +6365,21 @@
                   <a:srgbClr val="FF0000"/>
                 </a:solidFill>
               </a:rPr>
-              <a:t>レスポンシブにすればスマホでも閲覧可能</a:t>
-            </a:r>
+              <a:t>レスポンシブにすればスマホでも</a:t>
+            </a:r>
+            <a:r>
+              <a:rPr lang="ja-JP" altLang="en-US">
+                <a:solidFill>
+                  <a:srgbClr val="FF0000"/>
+                </a:solidFill>
+              </a:rPr>
+              <a:t>見やすい</a:t>
+            </a:r>
+            <a:endParaRPr kumimoji="1" lang="ja-JP" altLang="en-US">
+              <a:solidFill>
+                <a:srgbClr val="FF0000"/>
+              </a:solidFill>
+            </a:endParaRPr>
           </a:p>
         </p:txBody>
       </p:sp>
@@ -9455,7 +9674,7 @@
           <p:nvPr/>
         </p:nvPicPr>
         <p:blipFill>
-          <a:blip r:embed="rId6">
+          <a:blip r:embed="rId6" cstate="print">
             <a:extLst>
               <a:ext uri="{28A0092B-C50C-407E-A947-70E740481C1C}">
                 <a14:useLocalDpi xmlns:a14="http://schemas.microsoft.com/office/drawing/2010/main" val="0"/>
@@ -10374,7 +10593,7 @@
           <p:nvPr/>
         </p:nvPicPr>
         <p:blipFill>
-          <a:blip r:embed="rId7">
+          <a:blip r:embed="rId7" cstate="print">
             <a:extLst>
               <a:ext uri="{28A0092B-C50C-407E-A947-70E740481C1C}">
                 <a14:useLocalDpi xmlns:a14="http://schemas.microsoft.com/office/drawing/2010/main" val="0"/>
@@ -11233,7 +11452,7 @@
           <p:nvPr/>
         </p:nvPicPr>
         <p:blipFill>
-          <a:blip r:embed="rId4">
+          <a:blip r:embed="rId4" cstate="print">
             <a:extLst>
               <a:ext uri="{28A0092B-C50C-407E-A947-70E740481C1C}">
                 <a14:useLocalDpi xmlns:a14="http://schemas.microsoft.com/office/drawing/2010/main" val="0"/>
@@ -11279,8 +11498,8 @@
         </p:nvSpPr>
         <p:spPr>
           <a:xfrm>
-            <a:off x="107504" y="5373216"/>
-            <a:ext cx="8725466" cy="369332"/>
+            <a:off x="107504" y="5333146"/>
+            <a:ext cx="8905002" cy="400110"/>
           </a:xfrm>
           <a:prstGeom prst="rect">
             <a:avLst/>
@@ -11294,10 +11513,10 @@
           <a:lstStyle/>
           <a:p>
             <a:r>
-              <a:rPr lang="ja-JP" altLang="en-US"/>
-              <a:t>投稿論文もそうだが、特に卒論、修論、博論のリモートバックアップは絶対に必要</a:t>
-            </a:r>
-            <a:endParaRPr kumimoji="1" lang="ja-JP" altLang="en-US"/>
+              <a:rPr lang="ja-JP" altLang="en-US" sz="2000"/>
+              <a:t>投稿論文もそうだが、特に卒論、修論、博論のリモートバックアップは必須</a:t>
+            </a:r>
+            <a:endParaRPr kumimoji="1" lang="ja-JP" altLang="en-US" sz="2000"/>
           </a:p>
         </p:txBody>
       </p:sp>
@@ -11316,7 +11535,7 @@
         <p:spPr>
           <a:xfrm>
             <a:off x="480876" y="6331814"/>
-            <a:ext cx="2044149" cy="369332"/>
+            <a:ext cx="4583306" cy="369332"/>
           </a:xfrm>
           <a:prstGeom prst="rect">
             <a:avLst/>
@@ -11335,7 +11554,7 @@
             </a:r>
             <a:r>
               <a:rPr kumimoji="1" lang="ja-JP" altLang="en-US"/>
-              <a:t>でも可</a:t>
+              <a:t>でも可。とにかくリモートに。</a:t>
             </a:r>
           </a:p>
         </p:txBody>
